--- a/presentations/aurora-hotel/MOST_Bukhtarminskaya_akimat.pptx
+++ b/presentations/aurora-hotel/MOST_Bukhtarminskaya_akimat.pptx
@@ -21,9 +21,10 @@
     <p:sldId id="269" r:id="rId15"/>
     <p:sldId id="270" r:id="rId16"/>
     <p:sldId id="271" r:id="rId17"/>
+    <p:sldId id="272" r:id="rId18"/>
   </p:sldIdLst>
   <p:notesMasterIdLst>
-    <p:notesMasterId r:id="rId18"/>
+    <p:notesMasterId r:id="rId19"/>
   </p:notesMasterIdLst>
   <p:sldSz cx="12192000" cy="6858000"/>
   <p:notesSz cx="6858000" cy="12192000"/>
@@ -606,8 +607,7 @@
           <a:p>
             <a:r>
               <a:rPr lang="en-US" dirty="0"/>
-              <a:t>4 446,9 м² — из ТЭП. 4446,9/17140,22 = 25,9 % ≈ 26 %.
-Набор общественных функций — предложение бюро; окончательный состав за заказчиком и оператором.</a:t>
+              <a:t>Главный аргумент для градсовета: сознательный отказ от высотности. При 1,4 га можно было поставить башню — вместо этого пять этажей и раскрытие видов.</a:t>
             </a:r>
             <a:endParaRPr lang="en-US" dirty="0"/>
           </a:p>
@@ -695,8 +695,8 @@
           <a:p>
             <a:r>
               <a:rPr lang="en-US" dirty="0"/>
-              <a:t>ВАЖНО: 260–300 номеров — оценка бюро, а не утверждённая цифра. Так и формулировать.
-База: 12 693,32 м² × 0,65 ≈ 8 250 м² полезной площади; ÷ 28–32 м² на номер. 12 693,32 / 17 140,22 = 74,1 %; 12 693,32 / 4 этажа = 3 173,3 м².</a:t>
+              <a:t>4 446,9 м² — из ТЭП. 4446,9/17140,22 = 25,9 % ≈ 26 %.
+Набор общественных функций — предложение бюро; окончательный состав за заказчиком и оператором.</a:t>
             </a:r>
             <a:endParaRPr lang="en-US" dirty="0"/>
           </a:p>
@@ -784,8 +784,8 @@
           <a:p>
             <a:r>
               <a:rPr lang="en-US" dirty="0"/>
-              <a:t>9 058,89 м² = 14 000 − 4 941,11. Это территория вне пятна застройки, включая проезды.
-Отдельную долю озеленения не называть — баланс территории даётся на стадии ЭП.</a:t>
+              <a:t>ВАЖНО: 260–300 номеров — оценка бюро, а не утверждённая цифра. Так и формулировать.
+База: 12 693,32 м² × 0,65 ≈ 8 250 м² полезной площади; ÷ 28–32 м² на номер. 12 693,32 / 17 140,22 = 74,1 %; 12 693,32 / 4 этажа = 3 173,3 м².</a:t>
             </a:r>
             <a:endParaRPr lang="en-US" dirty="0"/>
           </a:p>
@@ -873,8 +873,8 @@
           <a:p>
             <a:r>
               <a:rPr lang="en-US" dirty="0"/>
-              <a:t>ОСТОРОЖНО: на генплане парковочные места не размечены — видна только рампа въезда с запада. Не утверждать наличие подземного паркинга, пока это не подтверждено заказчиком.
-Число машино-мест вписать до показа — это первый вопрос акимата.</a:t>
+              <a:t>9 058,89 м² = 14 000 − 4 941,11. Это территория вне пятна застройки, включая проезды.
+Отдельную долю озеленения не называть — баланс территории даётся на стадии ЭП.</a:t>
             </a:r>
             <a:endParaRPr lang="en-US" dirty="0"/>
           </a:p>
@@ -962,8 +962,8 @@
           <a:p>
             <a:r>
               <a:rPr lang="en-US" dirty="0"/>
-              <a:t>Левая колонка — только то, что читается с генплана, ничего не приписано.
-Правая — честный перечень открытых вопросов. Для градсовета это сильнее, чем заявление о полном соответствии всем нормам.</a:t>
+              <a:t>ОСТОРОЖНО: на генплане парковочные места не размечены — видна только рампа въезда с запада. Не утверждать наличие подземного паркинга, пока это не подтверждено заказчиком.
+Число машино-мест вписать до показа — это первый вопрос акимата.</a:t>
             </a:r>
             <a:endParaRPr lang="en-US" dirty="0"/>
           </a:p>
@@ -1051,8 +1051,8 @@
           <a:p>
             <a:r>
               <a:rPr lang="en-US" dirty="0"/>
-              <a:t>ВНИМАНИЕ: 160–210 рабочих мест — расчёт от отраслевого ориентира 0,6–0,7 сотрудника на номер для гостиниц 4 звезды, применённого к оценке 260–300 номеров. Это оценка, не факт.
-Четыре поля справа обязательно заполнить данными заказчика до показа.</a:t>
+              <a:t>Левая колонка — только то, что читается с генплана, ничего не приписано.
+Правая — честный перечень открытых вопросов. Для градсовета это сильнее, чем заявление о полном соответствии всем нормам.</a:t>
             </a:r>
             <a:endParaRPr lang="en-US" dirty="0"/>
           </a:p>
@@ -1140,8 +1140,8 @@
           <a:p>
             <a:r>
               <a:rPr lang="en-US" dirty="0"/>
-              <a:t>Контактный лист. QR ведёт на most-a.com.
-Устно на этом слайде — три запроса к акимату: одобрить архитектурно-градостроительную концепцию, выдать АПЗ для перехода к эскизному проекту, определить технические условия на подключение к инженерным сетям.</a:t>
+              <a:t>ВНИМАНИЕ: 160–210 рабочих мест — расчёт от отраслевого ориентира 0,6–0,7 сотрудника на номер для гостиниц 4 звезды, применённого к оценке 260–300 номеров. Это оценка, не факт.
+Четыре поля справа обязательно заполнить данными заказчика до показа.</a:t>
             </a:r>
             <a:endParaRPr lang="en-US" dirty="0"/>
           </a:p>
@@ -1165,6 +1165,95 @@
             <a:fld id="{F7021451-1387-4CA6-816F-3879F97B5CBC}" type="slidenum">
               <a:rPr lang="en-US"/>
               <a:t>16</a:t>
+            </a:fld>
+            <a:endParaRPr lang="en-US"/>
+          </a:p>
+        </p:txBody>
+      </p:sp>
+    </p:spTree>
+    <p:extLst>
+      <p:ext uri="{BB962C8B-B14F-4D97-AF65-F5344CB8AC3E}">
+        <p14:creationId xmlns:p14="http://schemas.microsoft.com/office/powerpoint/2010/main" val="1024086991"/>
+      </p:ext>
+    </p:extLst>
+  </p:cSld>
+  <p:clrMapOvr>
+    <a:masterClrMapping/>
+  </p:clrMapOvr>
+</p:notes>
+</file>
+
+<file path=ppt/notesSlides/notesSlide17.xml><?xml version="1.0" encoding="utf-8"?>
+<p:notes xmlns:a="http://schemas.openxmlformats.org/drawingml/2006/main" xmlns:r="http://schemas.openxmlformats.org/officeDocument/2006/relationships" xmlns:p="http://schemas.openxmlformats.org/presentationml/2006/main">
+  <p:cSld>
+    <p:spTree>
+      <p:nvGrpSpPr>
+        <p:cNvPr id="1" name=""/>
+        <p:cNvGrpSpPr/>
+        <p:nvPr/>
+      </p:nvGrpSpPr>
+      <p:grpSpPr>
+        <a:xfrm>
+          <a:off x="0" y="0"/>
+          <a:ext cx="0" cy="0"/>
+          <a:chOff x="0" y="0"/>
+          <a:chExt cx="0" cy="0"/>
+        </a:xfrm>
+      </p:grpSpPr>
+      <p:sp>
+        <p:nvSpPr>
+          <p:cNvPr id="2" name="Slide Image Placeholder 1"/>
+          <p:cNvSpPr>
+            <a:spLocks noGrp="1" noRot="1" noChangeAspect="1"/>
+          </p:cNvSpPr>
+          <p:nvPr>
+            <p:ph type="sldImg"/>
+          </p:nvPr>
+        </p:nvSpPr>
+        <p:spPr/>
+      </p:sp>
+      <p:sp>
+        <p:nvSpPr>
+          <p:cNvPr id="3" name="Notes Placeholder 2"/>
+          <p:cNvSpPr>
+            <a:spLocks noGrp="1"/>
+          </p:cNvSpPr>
+          <p:nvPr>
+            <p:ph type="body" idx="1"/>
+          </p:nvPr>
+        </p:nvSpPr>
+        <p:spPr/>
+        <p:txBody>
+          <a:bodyPr/>
+          <a:lstStyle/>
+          <a:p>
+            <a:r>
+              <a:rPr lang="en-US" dirty="0"/>
+              <a:t>Контактный лист. QR ведёт на most-a.com.
+Устно на этом слайде — три запроса к акимату: одобрить архитектурно-градостроительную концепцию, выдать АПЗ для перехода к эскизному проекту, определить технические условия на подключение к инженерным сетям.</a:t>
+            </a:r>
+            <a:endParaRPr lang="en-US" dirty="0"/>
+          </a:p>
+        </p:txBody>
+      </p:sp>
+      <p:sp>
+        <p:nvSpPr>
+          <p:cNvPr id="4" name="Slide Number Placeholder 3"/>
+          <p:cNvSpPr>
+            <a:spLocks noGrp="1"/>
+          </p:cNvSpPr>
+          <p:nvPr>
+            <p:ph type="sldNum" sz="quarter" idx="10"/>
+          </p:nvPr>
+        </p:nvSpPr>
+        <p:spPr/>
+        <p:txBody>
+          <a:bodyPr/>
+          <a:lstStyle/>
+          <a:p>
+            <a:fld id="{F7021451-1387-4CA6-816F-3879F97B5CBC}" type="slidenum">
+              <a:rPr lang="en-US"/>
+              <a:t>17</a:t>
             </a:fld>
             <a:endParaRPr lang="en-US"/>
           </a:p>
@@ -1848,7 +1937,8 @@
           <a:p>
             <a:r>
               <a:rPr lang="en-US" dirty="0"/>
-              <a:t>Главный аргумент для градсовета: сознательный отказ от высотности. При 1,4 га можно было поставить башню — вместо этого пять этажей и раскрытие видов.</a:t>
+              <a:t>Ключевой слайд архитектурного блока: форма не произвольная, она выведена из силуэта хребта, который виден с участка.
+Отсюда же следует отказ от высотности — здание держит горизонталь панорамы.</a:t>
             </a:r>
             <a:endParaRPr lang="en-US" dirty="0"/>
           </a:p>
@@ -2784,7 +2874,7 @@
                 <a:ea typeface="Arial" pitchFamily="34" charset="-122"/>
                 <a:cs typeface="Arial" pitchFamily="34" charset="-120"/>
               </a:rPr>
-              <a:t>ФУНКЦИЯ</a:t>
+              <a:t>АРХИТЕКТУРА</a:t>
             </a:r>
             <a:endParaRPr lang="en-US" sz="950" dirty="0"/>
           </a:p>
@@ -2823,7 +2913,7 @@
                 <a:ea typeface="Arial" pitchFamily="34" charset="-122"/>
                 <a:cs typeface="Arial" pitchFamily="34" charset="-120"/>
               </a:rPr>
-              <a:t>Функциональное зонирование</a:t>
+              <a:t>Объёмно-пространственное решение</a:t>
             </a:r>
             <a:endParaRPr lang="en-US" sz="900" dirty="0"/>
           </a:p>
@@ -2862,7 +2952,7 @@
                 <a:ea typeface="Arial" pitchFamily="34" charset="-122"/>
                 <a:cs typeface="Arial" pitchFamily="34" charset="-120"/>
               </a:rPr>
-              <a:t>ПЕРВЫЙ ЭТАЖ</a:t>
+              <a:t>КОНЦЕПЦИЯ</a:t>
             </a:r>
             <a:endParaRPr lang="en-US" sz="950" dirty="0"/>
           </a:p>
@@ -2901,7 +2991,7 @@
                 <a:ea typeface="Arial" pitchFamily="34" charset="-122"/>
                 <a:cs typeface="Arial" pitchFamily="34" charset="-120"/>
               </a:rPr>
-              <a:t>ПЕРВЫЙ ЭТАЖ — ОБЩЕСТВЕННЫЙ</a:t>
+              <a:t>ГОРИЗОНТАЛЬ ВМЕСТО ВЫСОТЫ</a:t>
             </a:r>
             <a:endParaRPr lang="en-US" sz="1300" dirty="0"/>
           </a:p>
@@ -2916,7 +3006,7 @@
         <p:spPr>
           <a:xfrm>
             <a:off x="502920" y="1325880"/>
-            <a:ext cx="3794760" cy="1097280"/>
+            <a:ext cx="3794760" cy="2011680"/>
           </a:xfrm>
           <a:prstGeom prst="rect">
             <a:avLst/>
@@ -2943,7 +3033,7 @@
                 <a:ea typeface="Arial" pitchFamily="34" charset="-122"/>
                 <a:cs typeface="Arial" pitchFamily="34" charset="-120"/>
               </a:rPr>
-              <a:t>4 446,9 м² первого этажа — четверть всей площади комплекса — отданы функциям, которыми пользуются не только постояльцы.</a:t>
+              <a:t>Объём набран горизонтальными лентами перекрытий с плавными скруглениями. Пять этажей вместо башни: комплекс не спорит с панорамой гор и не перекрывает виды соседней застройки. Ленты балконов и террас озеленены по всей длине — зелень становится частью фасада, а не только партера.</a:t>
             </a:r>
             <a:endParaRPr lang="en-US" sz="1050" dirty="0"/>
           </a:p>
@@ -2957,7 +3047,7 @@
         </p:nvSpPr>
         <p:spPr>
           <a:xfrm>
-            <a:off x="502920" y="2514600"/>
+            <a:off x="502920" y="2651760"/>
             <a:ext cx="3794760" cy="7315"/>
           </a:xfrm>
           <a:prstGeom prst="rect">
@@ -2982,8 +3072,8 @@
         </p:nvSpPr>
         <p:spPr>
           <a:xfrm>
-            <a:off x="502920" y="2697480"/>
-            <a:ext cx="3794760" cy="2743200"/>
+            <a:off x="502920" y="2834640"/>
+            <a:ext cx="3794760" cy="2377440"/>
           </a:xfrm>
           <a:prstGeom prst="rect">
             <a:avLst/>
@@ -3033,7 +3123,7 @@
                 <a:ea typeface="Arial" pitchFamily="34" charset="-122"/>
                 <a:cs typeface="Arial" pitchFamily="34" charset="-120"/>
               </a:rPr>
-              <a:t>Лобби и стойка приёма: круговой подъезд, зона высадки, вестибюль двойной высоты.</a:t>
+              <a:t>Сомасштабность: 5 этажей — в габаритах окружающей застройки, без доминанты.</a:t>
             </a:r>
             <a:endParaRPr lang="en-US" sz="1050" dirty="0"/>
           </a:p>
@@ -3076,7 +3166,7 @@
                 <a:ea typeface="Arial" pitchFamily="34" charset="-122"/>
                 <a:cs typeface="Arial" pitchFamily="34" charset="-120"/>
               </a:rPr>
-              <a:t>Рестораны и кафе — работают на город, а не только на гостей гостиницы.</a:t>
+              <a:t>Озеленённые террасы на каждом ярусе балконов по всей длине фасада.</a:t>
             </a:r>
             <a:endParaRPr lang="en-US" sz="1050" dirty="0"/>
           </a:p>
@@ -3119,7 +3209,7 @@
                 <a:ea typeface="Arial" pitchFamily="34" charset="-122"/>
                 <a:cs typeface="Arial" pitchFamily="34" charset="-120"/>
               </a:rPr>
-              <a:t>Конференц-зона для деловых мероприятий и городских событий.</a:t>
+              <a:t>Раскрытие на горы: номера и общественные террасы ориентированы на панораму.</a:t>
             </a:r>
             <a:endParaRPr lang="en-US" sz="1050" dirty="0"/>
           </a:p>
@@ -3162,7 +3252,7 @@
                 <a:ea typeface="Arial" pitchFamily="34" charset="-122"/>
                 <a:cs typeface="Arial" pitchFamily="34" charset="-120"/>
               </a:rPr>
-              <a:t>Оздоровительный блок: СПА и фитнес. Состав уточняется на стадии эскизного проекта.</a:t>
+              <a:t>Входная группа выделена высоким портиком с круговым подъездом.</a:t>
             </a:r>
             <a:endParaRPr lang="en-US" sz="1050" dirty="0"/>
           </a:p>
@@ -3170,7 +3260,7 @@
       </p:sp>
       <p:pic>
         <p:nvPicPr>
-          <p:cNvPr id="9" name="Image 0" descr="/tmp/claude-0/-home-user-most/9fc1ec31-3c64-5a82-aadb-ddb23fff6e53/scratchpad/assets/lobby.jpg">    </p:cNvPr>
+          <p:cNvPr id="9" name="Image 0" descr="/tmp/claude-0/-home-user-most/9fc1ec31-3c64-5a82-aadb-ddb23fff6e53/scratchpad/assets/facade.jpg">    </p:cNvPr>
           <p:cNvPicPr>
             <a:picLocks noChangeAspect="1"/>
           </p:cNvPicPr>
@@ -3201,7 +3291,7 @@
         <p:spPr>
           <a:xfrm>
             <a:off x="4709160" y="5257800"/>
-            <a:ext cx="3291840" cy="402336"/>
+            <a:ext cx="2194560" cy="402336"/>
           </a:xfrm>
           <a:prstGeom prst="rect">
             <a:avLst/>
@@ -3225,7 +3315,7 @@
                 <a:ea typeface="Arial" pitchFamily="34" charset="-122"/>
                 <a:cs typeface="Arial" pitchFamily="34" charset="-120"/>
               </a:rPr>
-              <a:t>4 446,9</a:t>
+              <a:t>5</a:t>
             </a:r>
             <a:pPr indent="0" marL="0">
               <a:buNone/>
@@ -3239,7 +3329,7 @@
                 <a:ea typeface="Arial" pitchFamily="34" charset="-122"/>
                 <a:cs typeface="Arial" pitchFamily="34" charset="-120"/>
               </a:rPr>
-              <a:t> м²</a:t>
+              <a:t> этажей</a:t>
             </a:r>
             <a:endParaRPr lang="en-US" sz="2600" dirty="0"/>
           </a:p>
@@ -3254,7 +3344,7 @@
         <p:spPr>
           <a:xfrm>
             <a:off x="4709160" y="5678424"/>
-            <a:ext cx="3291840" cy="384048"/>
+            <a:ext cx="2194560" cy="384048"/>
           </a:xfrm>
           <a:prstGeom prst="rect">
             <a:avLst/>
@@ -3281,7 +3371,7 @@
                 <a:ea typeface="Arial" pitchFamily="34" charset="-122"/>
                 <a:cs typeface="Arial" pitchFamily="34" charset="-120"/>
               </a:rPr>
-              <a:t>ПЛОЩАДЬ ПЕРВОГО ЭТАЖА</a:t>
+              <a:t>ЭТАЖНОСТЬ ОБОИХ КОРПУСОВ</a:t>
             </a:r>
             <a:endParaRPr lang="en-US" sz="800" dirty="0"/>
           </a:p>
@@ -3295,8 +3385,8 @@
         </p:nvSpPr>
         <p:spPr>
           <a:xfrm>
-            <a:off x="8183880" y="5257800"/>
-            <a:ext cx="3383280" cy="402336"/>
+            <a:off x="7086600" y="5257800"/>
+            <a:ext cx="4480560" cy="402336"/>
           </a:xfrm>
           <a:prstGeom prst="rect">
             <a:avLst/>
@@ -3320,7 +3410,7 @@
                 <a:ea typeface="Arial" pitchFamily="34" charset="-122"/>
                 <a:cs typeface="Arial" pitchFamily="34" charset="-120"/>
               </a:rPr>
-              <a:t>26</a:t>
+              <a:t>17 140,22</a:t>
             </a:r>
             <a:pPr indent="0" marL="0">
               <a:buNone/>
@@ -3334,7 +3424,7 @@
                 <a:ea typeface="Arial" pitchFamily="34" charset="-122"/>
                 <a:cs typeface="Arial" pitchFamily="34" charset="-120"/>
               </a:rPr>
-              <a:t> %</a:t>
+              <a:t> м²</a:t>
             </a:r>
             <a:endParaRPr lang="en-US" sz="2600" dirty="0"/>
           </a:p>
@@ -3348,8 +3438,8 @@
         </p:nvSpPr>
         <p:spPr>
           <a:xfrm>
-            <a:off x="8183880" y="5678424"/>
-            <a:ext cx="3383280" cy="384048"/>
+            <a:off x="7086600" y="5678424"/>
+            <a:ext cx="4480560" cy="384048"/>
           </a:xfrm>
           <a:prstGeom prst="rect">
             <a:avLst/>
@@ -3376,7 +3466,7 @@
                 <a:ea typeface="Arial" pitchFamily="34" charset="-122"/>
                 <a:cs typeface="Arial" pitchFamily="34" charset="-120"/>
               </a:rPr>
-              <a:t>ДОЛЯ ПЕРВОГО ЭТАЖА В ОБЩЕЙ ПЛОЩАДИ</a:t>
+              <a:t>ОБЩАЯ ПЛОЩАДЬ ЗДАНИЯ</a:t>
             </a:r>
             <a:endParaRPr lang="en-US" sz="800" dirty="0"/>
           </a:p>
@@ -3510,7 +3600,7 @@
                 <a:ea typeface="Arial" pitchFamily="34" charset="-122"/>
                 <a:cs typeface="Arial" pitchFamily="34" charset="-120"/>
               </a:rPr>
-              <a:t>НОМЕРНОЙ ФОНД</a:t>
+              <a:t>ФУНКЦИЯ</a:t>
             </a:r>
             <a:endParaRPr lang="en-US" sz="950" dirty="0"/>
           </a:p>
@@ -3549,7 +3639,7 @@
                 <a:ea typeface="Arial" pitchFamily="34" charset="-122"/>
                 <a:cs typeface="Arial" pitchFamily="34" charset="-120"/>
               </a:rPr>
-              <a:t>Этажи со 2-го по 5-й</a:t>
+              <a:t>Функциональное зонирование</a:t>
             </a:r>
             <a:endParaRPr lang="en-US" sz="900" dirty="0"/>
           </a:p>
@@ -3588,7 +3678,7 @@
                 <a:ea typeface="Arial" pitchFamily="34" charset="-122"/>
                 <a:cs typeface="Arial" pitchFamily="34" charset="-120"/>
               </a:rPr>
-              <a:t>ЁМКОСТЬ</a:t>
+              <a:t>ПЕРВЫЙ ЭТАЖ</a:t>
             </a:r>
             <a:endParaRPr lang="en-US" sz="950" dirty="0"/>
           </a:p>
@@ -3627,7 +3717,7 @@
                 <a:ea typeface="Arial" pitchFamily="34" charset="-122"/>
                 <a:cs typeface="Arial" pitchFamily="34" charset="-120"/>
               </a:rPr>
-              <a:t>НОМЕРНОЙ ФОНД</a:t>
+              <a:t>ПЕРВЫЙ ЭТАЖ — ОБЩЕСТВЕННЫЙ</a:t>
             </a:r>
             <a:endParaRPr lang="en-US" sz="1300" dirty="0"/>
           </a:p>
@@ -3642,7 +3732,7 @@
         <p:spPr>
           <a:xfrm>
             <a:off x="502920" y="1325880"/>
-            <a:ext cx="3794760" cy="914400"/>
+            <a:ext cx="3794760" cy="1097280"/>
           </a:xfrm>
           <a:prstGeom prst="rect">
             <a:avLst/>
@@ -3669,7 +3759,7 @@
                 <a:ea typeface="Arial" pitchFamily="34" charset="-122"/>
                 <a:cs typeface="Arial" pitchFamily="34" charset="-120"/>
               </a:rPr>
-              <a:t>Этажи со 2-го по 5-й полностью отданы номерам: 12 693,32 м², или 74,1 % общей площади здания.</a:t>
+              <a:t>4 446,9 м² первого этажа — четверть всей площади комплекса — отданы функциям, которыми пользуются не только постояльцы.</a:t>
             </a:r>
             <a:endParaRPr lang="en-US" sz="1050" dirty="0"/>
           </a:p>
@@ -3683,7 +3773,7 @@
         </p:nvSpPr>
         <p:spPr>
           <a:xfrm>
-            <a:off x="502920" y="2377440"/>
+            <a:off x="502920" y="2514600"/>
             <a:ext cx="3794760" cy="7315"/>
           </a:xfrm>
           <a:prstGeom prst="rect">
@@ -3708,38 +3798,30 @@
         </p:nvSpPr>
         <p:spPr>
           <a:xfrm>
-            <a:off x="502920" y="2560320"/>
-            <a:ext cx="3794760" cy="402336"/>
-          </a:xfrm>
-          <a:prstGeom prst="rect">
-            <a:avLst/>
-          </a:prstGeom>
-          <a:noFill/>
-          <a:ln/>
-        </p:spPr>
-        <p:txBody>
-          <a:bodyPr wrap="square" lIns="0" tIns="0" rIns="0" bIns="0" rtlCol="0" anchor="ctr"/>
-          <a:lstStyle/>
-          <a:p>
-            <a:pPr indent="0" marL="0">
-              <a:buNone/>
-            </a:pPr>
-            <a:r>
-              <a:rPr lang="en-US" sz="2600" b="1" dirty="0">
-                <a:solidFill>
-                  <a:srgbClr val="111111"/>
-                </a:solidFill>
-                <a:latin typeface="Arial" pitchFamily="34" charset="0"/>
-                <a:ea typeface="Arial" pitchFamily="34" charset="-122"/>
-                <a:cs typeface="Arial" pitchFamily="34" charset="-120"/>
-              </a:rPr>
-              <a:t>12 693,32</a:t>
-            </a:r>
-            <a:pPr indent="0" marL="0">
-              <a:buNone/>
-            </a:pPr>
-            <a:r>
-              <a:rPr lang="en-US" sz="1100" b="1" dirty="0">
+            <a:off x="502920" y="2697480"/>
+            <a:ext cx="3794760" cy="2743200"/>
+          </a:xfrm>
+          <a:prstGeom prst="rect">
+            <a:avLst/>
+          </a:prstGeom>
+          <a:noFill/>
+          <a:ln/>
+        </p:spPr>
+        <p:txBody>
+          <a:bodyPr wrap="square" lIns="0" tIns="0" rIns="0" bIns="0" rtlCol="0" anchor="t"/>
+          <a:lstStyle/>
+          <a:p>
+            <a:pPr indent="0" marL="0">
+              <a:lnSpc>
+                <a:spcPts val="1500"/>
+              </a:lnSpc>
+              <a:spcAft>
+                <a:spcPts val="900"/>
+              </a:spcAft>
+              <a:buNone/>
+            </a:pPr>
+            <a:r>
+              <a:rPr lang="en-US" sz="1050" dirty="0">
                 <a:solidFill>
                   <a:srgbClr val="FF4D23"/>
                 </a:solidFill>
@@ -3747,94 +3829,42 @@
                 <a:ea typeface="Arial" pitchFamily="34" charset="-122"/>
                 <a:cs typeface="Arial" pitchFamily="34" charset="-120"/>
               </a:rPr>
-              <a:t> м²</a:t>
-            </a:r>
-            <a:endParaRPr lang="en-US" sz="2600" dirty="0"/>
-          </a:p>
-        </p:txBody>
-      </p:sp>
-      <p:sp>
-        <p:nvSpPr>
-          <p:cNvPr id="9" name="Text 7"/>
-          <p:cNvSpPr txBox="1"/>
-          <p:nvPr/>
-        </p:nvSpPr>
-        <p:spPr>
-          <a:xfrm>
-            <a:off x="502920" y="2980944"/>
-            <a:ext cx="3794760" cy="384048"/>
-          </a:xfrm>
-          <a:prstGeom prst="rect">
-            <a:avLst/>
-          </a:prstGeom>
-          <a:noFill/>
-          <a:ln/>
-        </p:spPr>
-        <p:txBody>
-          <a:bodyPr wrap="square" lIns="0" tIns="0" rIns="0" bIns="0" rtlCol="0" anchor="t"/>
-          <a:lstStyle/>
-          <a:p>
+              <a:t>– </a:t>
+            </a:r>
             <a:pPr indent="0" marL="0">
               <a:lnSpc>
-                <a:spcPts val="1100"/>
+                <a:spcPts val="1500"/>
               </a:lnSpc>
-              <a:buNone/>
-            </a:pPr>
-            <a:r>
-              <a:rPr lang="en-US" sz="800" spc="30" kern="0" dirty="0">
-                <a:solidFill>
-                  <a:srgbClr val="8A8A8A"/>
-                </a:solidFill>
-                <a:latin typeface="Arial" pitchFamily="34" charset="0"/>
-                <a:ea typeface="Arial" pitchFamily="34" charset="-122"/>
-                <a:cs typeface="Arial" pitchFamily="34" charset="-120"/>
-              </a:rPr>
-              <a:t>ПЛОЩАДЬ НОМЕРНОГО ФОНДА</a:t>
-            </a:r>
-            <a:endParaRPr lang="en-US" sz="800" dirty="0"/>
-          </a:p>
-        </p:txBody>
-      </p:sp>
-      <p:sp>
-        <p:nvSpPr>
-          <p:cNvPr id="10" name="Text 8"/>
-          <p:cNvSpPr txBox="1"/>
-          <p:nvPr/>
-        </p:nvSpPr>
-        <p:spPr>
-          <a:xfrm>
-            <a:off x="502920" y="3566160"/>
-            <a:ext cx="3794760" cy="402336"/>
-          </a:xfrm>
-          <a:prstGeom prst="rect">
-            <a:avLst/>
-          </a:prstGeom>
-          <a:noFill/>
-          <a:ln/>
-        </p:spPr>
-        <p:txBody>
-          <a:bodyPr wrap="square" lIns="0" tIns="0" rIns="0" bIns="0" rtlCol="0" anchor="ctr"/>
-          <a:lstStyle/>
-          <a:p>
-            <a:pPr indent="0" marL="0">
-              <a:buNone/>
-            </a:pPr>
-            <a:r>
-              <a:rPr lang="en-US" sz="2600" b="1" dirty="0">
-                <a:solidFill>
-                  <a:srgbClr val="111111"/>
-                </a:solidFill>
-                <a:latin typeface="Arial" pitchFamily="34" charset="0"/>
-                <a:ea typeface="Arial" pitchFamily="34" charset="-122"/>
-                <a:cs typeface="Arial" pitchFamily="34" charset="-120"/>
-              </a:rPr>
-              <a:t>≈ 3 173</a:t>
-            </a:r>
-            <a:pPr indent="0" marL="0">
-              <a:buNone/>
-            </a:pPr>
-            <a:r>
-              <a:rPr lang="en-US" sz="1100" b="1" dirty="0">
+              <a:spcAft>
+                <a:spcPts val="900"/>
+              </a:spcAft>
+              <a:buNone/>
+            </a:pPr>
+            <a:r>
+              <a:rPr lang="en-US" sz="1050" dirty="0">
+                <a:solidFill>
+                  <a:srgbClr val="333333"/>
+                </a:solidFill>
+                <a:latin typeface="Arial" pitchFamily="34" charset="0"/>
+                <a:ea typeface="Arial" pitchFamily="34" charset="-122"/>
+                <a:cs typeface="Arial" pitchFamily="34" charset="-120"/>
+              </a:rPr>
+              <a:t>Лобби и стойка приёма: круговой подъезд, зона высадки, вестибюль двойной высоты.</a:t>
+            </a:r>
+            <a:endParaRPr lang="en-US" sz="1050" dirty="0"/>
+          </a:p>
+          <a:p>
+            <a:pPr indent="0" marL="0">
+              <a:lnSpc>
+                <a:spcPts val="1500"/>
+              </a:lnSpc>
+              <a:spcAft>
+                <a:spcPts val="900"/>
+              </a:spcAft>
+              <a:buNone/>
+            </a:pPr>
+            <a:r>
+              <a:rPr lang="en-US" sz="1050" dirty="0">
                 <a:solidFill>
                   <a:srgbClr val="FF4D23"/>
                 </a:solidFill>
@@ -3842,105 +3872,42 @@
                 <a:ea typeface="Arial" pitchFamily="34" charset="-122"/>
                 <a:cs typeface="Arial" pitchFamily="34" charset="-120"/>
               </a:rPr>
-              <a:t> м²</a:t>
-            </a:r>
-            <a:endParaRPr lang="en-US" sz="2600" dirty="0"/>
-          </a:p>
-        </p:txBody>
-      </p:sp>
-      <p:sp>
-        <p:nvSpPr>
-          <p:cNvPr id="11" name="Text 9"/>
-          <p:cNvSpPr txBox="1"/>
-          <p:nvPr/>
-        </p:nvSpPr>
-        <p:spPr>
-          <a:xfrm>
-            <a:off x="502920" y="3986784"/>
-            <a:ext cx="3794760" cy="384048"/>
-          </a:xfrm>
-          <a:prstGeom prst="rect">
-            <a:avLst/>
-          </a:prstGeom>
-          <a:noFill/>
-          <a:ln/>
-        </p:spPr>
-        <p:txBody>
-          <a:bodyPr wrap="square" lIns="0" tIns="0" rIns="0" bIns="0" rtlCol="0" anchor="t"/>
-          <a:lstStyle/>
-          <a:p>
+              <a:t>– </a:t>
+            </a:r>
             <a:pPr indent="0" marL="0">
               <a:lnSpc>
-                <a:spcPts val="1100"/>
+                <a:spcPts val="1500"/>
               </a:lnSpc>
-              <a:buNone/>
-            </a:pPr>
-            <a:r>
-              <a:rPr lang="en-US" sz="800" spc="30" kern="0" dirty="0">
-                <a:solidFill>
-                  <a:srgbClr val="8A8A8A"/>
-                </a:solidFill>
-                <a:latin typeface="Arial" pitchFamily="34" charset="0"/>
-                <a:ea typeface="Arial" pitchFamily="34" charset="-122"/>
-                <a:cs typeface="Arial" pitchFamily="34" charset="-120"/>
-              </a:rPr>
-              <a:t>СРЕДНЯЯ ПЛОЩАДЬ ЭТАЖА НОМЕРНОГО КОРПУСА</a:t>
-            </a:r>
-            <a:endParaRPr lang="en-US" sz="800" dirty="0"/>
-          </a:p>
-        </p:txBody>
-      </p:sp>
-      <p:sp>
-        <p:nvSpPr>
-          <p:cNvPr id="12" name="Shape 10"/>
-          <p:cNvSpPr/>
-          <p:nvPr/>
-        </p:nvSpPr>
-        <p:spPr>
-          <a:xfrm>
-            <a:off x="502920" y="4572000"/>
-            <a:ext cx="3794760" cy="7315"/>
-          </a:xfrm>
-          <a:prstGeom prst="rect">
-            <a:avLst/>
-          </a:prstGeom>
-          <a:solidFill>
-            <a:srgbClr val="DCDCDC"/>
-          </a:solidFill>
-          <a:ln w="12700">
-            <a:solidFill>
-              <a:srgbClr val="DCDCDC"/>
-            </a:solidFill>
-            <a:prstDash val="solid"/>
-          </a:ln>
-        </p:spPr>
-      </p:sp>
-      <p:sp>
-        <p:nvSpPr>
-          <p:cNvPr id="13" name="Text 11"/>
-          <p:cNvSpPr txBox="1"/>
-          <p:nvPr/>
-        </p:nvSpPr>
-        <p:spPr>
-          <a:xfrm>
-            <a:off x="502920" y="4700016"/>
-            <a:ext cx="3794760" cy="201168"/>
-          </a:xfrm>
-          <a:prstGeom prst="rect">
-            <a:avLst/>
-          </a:prstGeom>
-          <a:noFill/>
-          <a:ln/>
-        </p:spPr>
-        <p:txBody>
-          <a:bodyPr wrap="square" lIns="0" tIns="0" rIns="0" bIns="0" rtlCol="0" anchor="ctr"/>
-          <a:lstStyle/>
-          <a:p>
-            <a:pPr indent="0" marL="0">
-              <a:buNone/>
-            </a:pPr>
-            <a:r>
-              <a:rPr lang="en-US" sz="850" spc="30" kern="0" dirty="0">
+              <a:spcAft>
+                <a:spcPts val="900"/>
+              </a:spcAft>
+              <a:buNone/>
+            </a:pPr>
+            <a:r>
+              <a:rPr lang="en-US" sz="1050" dirty="0">
+                <a:solidFill>
+                  <a:srgbClr val="333333"/>
+                </a:solidFill>
+                <a:latin typeface="Arial" pitchFamily="34" charset="0"/>
+                <a:ea typeface="Arial" pitchFamily="34" charset="-122"/>
+                <a:cs typeface="Arial" pitchFamily="34" charset="-120"/>
+              </a:rPr>
+              <a:t>Рестораны и кафе — работают на город, а не только на гостей гостиницы.</a:t>
+            </a:r>
+            <a:endParaRPr lang="en-US" sz="1050" dirty="0"/>
+          </a:p>
+          <a:p>
+            <a:pPr indent="0" marL="0">
+              <a:lnSpc>
+                <a:spcPts val="1500"/>
+              </a:lnSpc>
+              <a:spcAft>
+                <a:spcPts val="900"/>
+              </a:spcAft>
+              <a:buNone/>
+            </a:pPr>
+            <a:r>
+              <a:rPr lang="en-US" sz="1050" dirty="0">
                 <a:solidFill>
                   <a:srgbClr val="FF4D23"/>
                 </a:solidFill>
@@ -3948,38 +3915,42 @@
                 <a:ea typeface="Arial" pitchFamily="34" charset="-122"/>
                 <a:cs typeface="Arial" pitchFamily="34" charset="-120"/>
               </a:rPr>
-              <a:t>ЁМКОСТЬ — ПРЕДВАРИТЕЛЬНАЯ ОЦЕНКА</a:t>
-            </a:r>
-            <a:endParaRPr lang="en-US" sz="850" dirty="0"/>
-          </a:p>
-        </p:txBody>
-      </p:sp>
-      <p:sp>
-        <p:nvSpPr>
-          <p:cNvPr id="14" name="Text 12"/>
-          <p:cNvSpPr txBox="1"/>
-          <p:nvPr/>
-        </p:nvSpPr>
-        <p:spPr>
-          <a:xfrm>
-            <a:off x="502920" y="4956048"/>
-            <a:ext cx="3794760" cy="402336"/>
-          </a:xfrm>
-          <a:prstGeom prst="rect">
-            <a:avLst/>
-          </a:prstGeom>
-          <a:noFill/>
-          <a:ln/>
-        </p:spPr>
-        <p:txBody>
-          <a:bodyPr wrap="square" lIns="0" tIns="0" rIns="0" bIns="0" rtlCol="0" anchor="ctr"/>
-          <a:lstStyle/>
-          <a:p>
-            <a:pPr indent="0" marL="0">
-              <a:buNone/>
-            </a:pPr>
-            <a:r>
-              <a:rPr lang="en-US" sz="2600" b="1" dirty="0">
+              <a:t>– </a:t>
+            </a:r>
+            <a:pPr indent="0" marL="0">
+              <a:lnSpc>
+                <a:spcPts val="1500"/>
+              </a:lnSpc>
+              <a:spcAft>
+                <a:spcPts val="900"/>
+              </a:spcAft>
+              <a:buNone/>
+            </a:pPr>
+            <a:r>
+              <a:rPr lang="en-US" sz="1050" dirty="0">
+                <a:solidFill>
+                  <a:srgbClr val="333333"/>
+                </a:solidFill>
+                <a:latin typeface="Arial" pitchFamily="34" charset="0"/>
+                <a:ea typeface="Arial" pitchFamily="34" charset="-122"/>
+                <a:cs typeface="Arial" pitchFamily="34" charset="-120"/>
+              </a:rPr>
+              <a:t>Конференц-зона для деловых мероприятий и городских событий.</a:t>
+            </a:r>
+            <a:endParaRPr lang="en-US" sz="1050" dirty="0"/>
+          </a:p>
+          <a:p>
+            <a:pPr indent="0" marL="0">
+              <a:lnSpc>
+                <a:spcPts val="1500"/>
+              </a:lnSpc>
+              <a:spcAft>
+                <a:spcPts val="900"/>
+              </a:spcAft>
+              <a:buNone/>
+            </a:pPr>
+            <a:r>
+              <a:rPr lang="en-US" sz="1050" dirty="0">
                 <a:solidFill>
                   <a:srgbClr val="FF4D23"/>
                 </a:solidFill>
@@ -3987,71 +3958,35 @@
                 <a:ea typeface="Arial" pitchFamily="34" charset="-122"/>
                 <a:cs typeface="Arial" pitchFamily="34" charset="-120"/>
               </a:rPr>
-              <a:t>260 – 300</a:t>
-            </a:r>
-            <a:pPr indent="0" marL="0">
-              <a:buNone/>
-            </a:pPr>
-            <a:r>
-              <a:rPr lang="en-US" sz="1100" b="1" dirty="0">
-                <a:solidFill>
-                  <a:srgbClr val="111111"/>
-                </a:solidFill>
-                <a:latin typeface="Arial" pitchFamily="34" charset="0"/>
-                <a:ea typeface="Arial" pitchFamily="34" charset="-122"/>
-                <a:cs typeface="Arial" pitchFamily="34" charset="-120"/>
-              </a:rPr>
-              <a:t>  номеров</a:t>
-            </a:r>
-            <a:endParaRPr lang="en-US" sz="2600" dirty="0"/>
-          </a:p>
-        </p:txBody>
-      </p:sp>
-      <p:sp>
-        <p:nvSpPr>
-          <p:cNvPr id="15" name="Text 13"/>
-          <p:cNvSpPr txBox="1"/>
-          <p:nvPr/>
-        </p:nvSpPr>
-        <p:spPr>
-          <a:xfrm>
-            <a:off x="502920" y="5413248"/>
-            <a:ext cx="3794760" cy="822960"/>
-          </a:xfrm>
-          <a:prstGeom prst="rect">
-            <a:avLst/>
-          </a:prstGeom>
-          <a:noFill/>
-          <a:ln/>
-        </p:spPr>
-        <p:txBody>
-          <a:bodyPr wrap="square" lIns="0" tIns="0" rIns="0" bIns="0" rtlCol="0" anchor="t"/>
-          <a:lstStyle/>
-          <a:p>
+              <a:t>– </a:t>
+            </a:r>
             <a:pPr indent="0" marL="0">
               <a:lnSpc>
-                <a:spcPts val="1200"/>
+                <a:spcPts val="1500"/>
               </a:lnSpc>
-              <a:buNone/>
-            </a:pPr>
-            <a:r>
-              <a:rPr lang="en-US" sz="900" dirty="0">
-                <a:solidFill>
-                  <a:srgbClr val="8A8A8A"/>
-                </a:solidFill>
-                <a:latin typeface="Arial" pitchFamily="34" charset="0"/>
-                <a:ea typeface="Arial" pitchFamily="34" charset="-122"/>
-                <a:cs typeface="Arial" pitchFamily="34" charset="-120"/>
-              </a:rPr>
-              <a:t>Расчёт от 12 693,32 м² при полезной площади этажа около 65 % и номере 28–32 м². Точная ёмкость определяется планировками на стадии эскизного проекта.</a:t>
-            </a:r>
-            <a:endParaRPr lang="en-US" sz="900" dirty="0"/>
+              <a:spcAft>
+                <a:spcPts val="900"/>
+              </a:spcAft>
+              <a:buNone/>
+            </a:pPr>
+            <a:r>
+              <a:rPr lang="en-US" sz="1050" dirty="0">
+                <a:solidFill>
+                  <a:srgbClr val="333333"/>
+                </a:solidFill>
+                <a:latin typeface="Arial" pitchFamily="34" charset="0"/>
+                <a:ea typeface="Arial" pitchFamily="34" charset="-122"/>
+                <a:cs typeface="Arial" pitchFamily="34" charset="-120"/>
+              </a:rPr>
+              <a:t>Оздоровительный блок: СПА и фитнес. Состав уточняется на стадии эскизного проекта.</a:t>
+            </a:r>
+            <a:endParaRPr lang="en-US" sz="1050" dirty="0"/>
           </a:p>
         </p:txBody>
       </p:sp>
       <p:pic>
         <p:nvPicPr>
-          <p:cNvPr id="16" name="Image 0" descr="/tmp/claude-0/-home-user-most/9fc1ec31-3c64-5a82-aadb-ddb23fff6e53/scratchpad/assets/room.jpg">    </p:cNvPr>
+          <p:cNvPr id="9" name="Image 0" descr="/tmp/claude-0/-home-user-most/9fc1ec31-3c64-5a82-aadb-ddb23fff6e53/scratchpad/assets/lobby.jpg">    </p:cNvPr>
           <p:cNvPicPr>
             <a:picLocks noChangeAspect="1"/>
           </p:cNvPicPr>
@@ -4066,7 +4001,7 @@
         <p:spPr>
           <a:xfrm>
             <a:off x="4709160" y="960120"/>
-            <a:ext cx="6949440" cy="4636008"/>
+            <a:ext cx="6949440" cy="3913632"/>
           </a:xfrm>
           <a:prstGeom prst="rect">
             <a:avLst/>
@@ -4075,14 +4010,14 @@
       </p:pic>
       <p:sp>
         <p:nvSpPr>
-          <p:cNvPr id="17" name="Text 14"/>
-          <p:cNvSpPr txBox="1"/>
-          <p:nvPr/>
-        </p:nvSpPr>
-        <p:spPr>
-          <a:xfrm>
-            <a:off x="4709160" y="5669280"/>
-            <a:ext cx="6949440" cy="219456"/>
+          <p:cNvPr id="10" name="Text 7"/>
+          <p:cNvSpPr txBox="1"/>
+          <p:nvPr/>
+        </p:nvSpPr>
+        <p:spPr>
+          <a:xfrm>
+            <a:off x="4709160" y="5257800"/>
+            <a:ext cx="3291840" cy="402336"/>
           </a:xfrm>
           <a:prstGeom prst="rect">
             <a:avLst/>
@@ -4098,7 +4033,63 @@
               <a:buNone/>
             </a:pPr>
             <a:r>
-              <a:rPr lang="en-US" sz="800" dirty="0">
+              <a:rPr lang="en-US" sz="2600" b="1" dirty="0">
+                <a:solidFill>
+                  <a:srgbClr val="111111"/>
+                </a:solidFill>
+                <a:latin typeface="Arial" pitchFamily="34" charset="0"/>
+                <a:ea typeface="Arial" pitchFamily="34" charset="-122"/>
+                <a:cs typeface="Arial" pitchFamily="34" charset="-120"/>
+              </a:rPr>
+              <a:t>4 446,9</a:t>
+            </a:r>
+            <a:pPr indent="0" marL="0">
+              <a:buNone/>
+            </a:pPr>
+            <a:r>
+              <a:rPr lang="en-US" sz="1100" b="1" dirty="0">
+                <a:solidFill>
+                  <a:srgbClr val="FF4D23"/>
+                </a:solidFill>
+                <a:latin typeface="Arial" pitchFamily="34" charset="0"/>
+                <a:ea typeface="Arial" pitchFamily="34" charset="-122"/>
+                <a:cs typeface="Arial" pitchFamily="34" charset="-120"/>
+              </a:rPr>
+              <a:t> м²</a:t>
+            </a:r>
+            <a:endParaRPr lang="en-US" sz="2600" dirty="0"/>
+          </a:p>
+        </p:txBody>
+      </p:sp>
+      <p:sp>
+        <p:nvSpPr>
+          <p:cNvPr id="11" name="Text 8"/>
+          <p:cNvSpPr txBox="1"/>
+          <p:nvPr/>
+        </p:nvSpPr>
+        <p:spPr>
+          <a:xfrm>
+            <a:off x="4709160" y="5678424"/>
+            <a:ext cx="3291840" cy="384048"/>
+          </a:xfrm>
+          <a:prstGeom prst="rect">
+            <a:avLst/>
+          </a:prstGeom>
+          <a:noFill/>
+          <a:ln/>
+        </p:spPr>
+        <p:txBody>
+          <a:bodyPr wrap="square" lIns="0" tIns="0" rIns="0" bIns="0" rtlCol="0" anchor="t"/>
+          <a:lstStyle/>
+          <a:p>
+            <a:pPr indent="0" marL="0">
+              <a:lnSpc>
+                <a:spcPts val="1100"/>
+              </a:lnSpc>
+              <a:buNone/>
+            </a:pPr>
+            <a:r>
+              <a:rPr lang="en-US" sz="800" spc="30" kern="0" dirty="0">
                 <a:solidFill>
                   <a:srgbClr val="8A8A8A"/>
                 </a:solidFill>
@@ -4106,7 +4097,102 @@
                 <a:ea typeface="Arial" pitchFamily="34" charset="-122"/>
                 <a:cs typeface="Arial" pitchFamily="34" charset="-120"/>
               </a:rPr>
-              <a:t>Типовой номер: балкон на озеленённой ленте фасада, раскрытие на город и хребет.</a:t>
+              <a:t>ПЛОЩАДЬ ПЕРВОГО ЭТАЖА</a:t>
+            </a:r>
+            <a:endParaRPr lang="en-US" sz="800" dirty="0"/>
+          </a:p>
+        </p:txBody>
+      </p:sp>
+      <p:sp>
+        <p:nvSpPr>
+          <p:cNvPr id="12" name="Text 9"/>
+          <p:cNvSpPr txBox="1"/>
+          <p:nvPr/>
+        </p:nvSpPr>
+        <p:spPr>
+          <a:xfrm>
+            <a:off x="8183880" y="5257800"/>
+            <a:ext cx="3383280" cy="402336"/>
+          </a:xfrm>
+          <a:prstGeom prst="rect">
+            <a:avLst/>
+          </a:prstGeom>
+          <a:noFill/>
+          <a:ln/>
+        </p:spPr>
+        <p:txBody>
+          <a:bodyPr wrap="square" lIns="0" tIns="0" rIns="0" bIns="0" rtlCol="0" anchor="ctr"/>
+          <a:lstStyle/>
+          <a:p>
+            <a:pPr indent="0" marL="0">
+              <a:buNone/>
+            </a:pPr>
+            <a:r>
+              <a:rPr lang="en-US" sz="2600" b="1" dirty="0">
+                <a:solidFill>
+                  <a:srgbClr val="111111"/>
+                </a:solidFill>
+                <a:latin typeface="Arial" pitchFamily="34" charset="0"/>
+                <a:ea typeface="Arial" pitchFamily="34" charset="-122"/>
+                <a:cs typeface="Arial" pitchFamily="34" charset="-120"/>
+              </a:rPr>
+              <a:t>26</a:t>
+            </a:r>
+            <a:pPr indent="0" marL="0">
+              <a:buNone/>
+            </a:pPr>
+            <a:r>
+              <a:rPr lang="en-US" sz="1100" b="1" dirty="0">
+                <a:solidFill>
+                  <a:srgbClr val="FF4D23"/>
+                </a:solidFill>
+                <a:latin typeface="Arial" pitchFamily="34" charset="0"/>
+                <a:ea typeface="Arial" pitchFamily="34" charset="-122"/>
+                <a:cs typeface="Arial" pitchFamily="34" charset="-120"/>
+              </a:rPr>
+              <a:t> %</a:t>
+            </a:r>
+            <a:endParaRPr lang="en-US" sz="2600" dirty="0"/>
+          </a:p>
+        </p:txBody>
+      </p:sp>
+      <p:sp>
+        <p:nvSpPr>
+          <p:cNvPr id="13" name="Text 10"/>
+          <p:cNvSpPr txBox="1"/>
+          <p:nvPr/>
+        </p:nvSpPr>
+        <p:spPr>
+          <a:xfrm>
+            <a:off x="8183880" y="5678424"/>
+            <a:ext cx="3383280" cy="384048"/>
+          </a:xfrm>
+          <a:prstGeom prst="rect">
+            <a:avLst/>
+          </a:prstGeom>
+          <a:noFill/>
+          <a:ln/>
+        </p:spPr>
+        <p:txBody>
+          <a:bodyPr wrap="square" lIns="0" tIns="0" rIns="0" bIns="0" rtlCol="0" anchor="t"/>
+          <a:lstStyle/>
+          <a:p>
+            <a:pPr indent="0" marL="0">
+              <a:lnSpc>
+                <a:spcPts val="1100"/>
+              </a:lnSpc>
+              <a:buNone/>
+            </a:pPr>
+            <a:r>
+              <a:rPr lang="en-US" sz="800" spc="30" kern="0" dirty="0">
+                <a:solidFill>
+                  <a:srgbClr val="8A8A8A"/>
+                </a:solidFill>
+                <a:latin typeface="Arial" pitchFamily="34" charset="0"/>
+                <a:ea typeface="Arial" pitchFamily="34" charset="-122"/>
+                <a:cs typeface="Arial" pitchFamily="34" charset="-120"/>
+              </a:rPr>
+              <a:t>ДОЛЯ ПЕРВОГО ЭТАЖА В ОБЩЕЙ ПЛОЩАДИ</a:t>
             </a:r>
             <a:endParaRPr lang="en-US" sz="800" dirty="0"/>
           </a:p>
@@ -4114,7 +4200,7 @@
       </p:sp>
       <p:pic>
         <p:nvPicPr>
-          <p:cNvPr id="18" name="Image 1" descr="/tmp/claude-0/-home-user-most/9fc1ec31-3c64-5a82-aadb-ddb23fff6e53/scratchpad/assets/logo_most.png">    </p:cNvPr>
+          <p:cNvPr id="14" name="Image 1" descr="/tmp/claude-0/-home-user-most/9fc1ec31-3c64-5a82-aadb-ddb23fff6e53/scratchpad/assets/logo_most.png">    </p:cNvPr>
           <p:cNvPicPr>
             <a:picLocks noChangeAspect="1"/>
           </p:cNvPicPr>
@@ -4138,7 +4224,7 @@
       </p:pic>
       <p:sp>
         <p:nvSpPr>
-          <p:cNvPr id="19" name="Text 15"/>
+          <p:cNvPr id="15" name="Text 11"/>
           <p:cNvSpPr txBox="1"/>
           <p:nvPr/>
         </p:nvSpPr>
@@ -4240,7 +4326,7 @@
                 <a:ea typeface="Arial" pitchFamily="34" charset="-122"/>
                 <a:cs typeface="Arial" pitchFamily="34" charset="-120"/>
               </a:rPr>
-              <a:t>БЛАГОУСТРОЙСТВО</a:t>
+              <a:t>НОМЕРНОЙ ФОНД</a:t>
             </a:r>
             <a:endParaRPr lang="en-US" sz="950" dirty="0"/>
           </a:p>
@@ -4279,7 +4365,7 @@
                 <a:ea typeface="Arial" pitchFamily="34" charset="-122"/>
                 <a:cs typeface="Arial" pitchFamily="34" charset="-120"/>
               </a:rPr>
-              <a:t>Озеленение и открытые пространства</a:t>
+              <a:t>Этажи со 2-го по 5-й</a:t>
             </a:r>
             <a:endParaRPr lang="en-US" sz="900" dirty="0"/>
           </a:p>
@@ -4318,7 +4404,7 @@
                 <a:ea typeface="Arial" pitchFamily="34" charset="-122"/>
                 <a:cs typeface="Arial" pitchFamily="34" charset="-120"/>
               </a:rPr>
-              <a:t>ФРАГМЕНТ ГЕНПЛАНА</a:t>
+              <a:t>ЁМКОСТЬ</a:t>
             </a:r>
             <a:endParaRPr lang="en-US" sz="950" dirty="0"/>
           </a:p>
@@ -4357,7 +4443,7 @@
                 <a:ea typeface="Arial" pitchFamily="34" charset="-122"/>
                 <a:cs typeface="Arial" pitchFamily="34" charset="-120"/>
               </a:rPr>
-              <a:t>ДВЕ ТРЕТИ УЧАСТКА ОТКРЫТЫ</a:t>
+              <a:t>НОМЕРНОЙ ФОНД</a:t>
             </a:r>
             <a:endParaRPr lang="en-US" sz="1300" dirty="0"/>
           </a:p>
@@ -4399,7 +4485,7 @@
                 <a:ea typeface="Arial" pitchFamily="34" charset="-122"/>
                 <a:cs typeface="Arial" pitchFamily="34" charset="-120"/>
               </a:rPr>
-              <a:t>Вне пятна застройки остаётся 9 058,89 м² — 64,7 % участка. Это площадь под проезды, площадки и озеленение.</a:t>
+              <a:t>Этажи со 2-го по 5-й полностью отданы номерам: 12 693,32 м², или 74,1 % общей площади здания.</a:t>
             </a:r>
             <a:endParaRPr lang="en-US" sz="1050" dirty="0"/>
           </a:p>
@@ -4463,7 +4549,7 @@
                 <a:ea typeface="Arial" pitchFamily="34" charset="-122"/>
                 <a:cs typeface="Arial" pitchFamily="34" charset="-120"/>
               </a:rPr>
-              <a:t>9 058,89</a:t>
+              <a:t>12 693,32</a:t>
             </a:r>
             <a:pPr indent="0" marL="0">
               <a:buNone/>
@@ -4519,7 +4605,7 @@
                 <a:ea typeface="Arial" pitchFamily="34" charset="-122"/>
                 <a:cs typeface="Arial" pitchFamily="34" charset="-120"/>
               </a:rPr>
-              <a:t>ТЕРРИТОРИЯ ВНЕ ПЯТНА ЗАСТРОЙКИ — 64,7 %</a:t>
+              <a:t>ПЛОЩАДЬ НОМЕРНОГО ФОНДА</a:t>
             </a:r>
             <a:endParaRPr lang="en-US" sz="800" dirty="0"/>
           </a:p>
@@ -4527,13 +4613,108 @@
       </p:sp>
       <p:sp>
         <p:nvSpPr>
-          <p:cNvPr id="10" name="Shape 8"/>
+          <p:cNvPr id="10" name="Text 8"/>
+          <p:cNvSpPr txBox="1"/>
+          <p:nvPr/>
+        </p:nvSpPr>
+        <p:spPr>
+          <a:xfrm>
+            <a:off x="502920" y="3566160"/>
+            <a:ext cx="3794760" cy="402336"/>
+          </a:xfrm>
+          <a:prstGeom prst="rect">
+            <a:avLst/>
+          </a:prstGeom>
+          <a:noFill/>
+          <a:ln/>
+        </p:spPr>
+        <p:txBody>
+          <a:bodyPr wrap="square" lIns="0" tIns="0" rIns="0" bIns="0" rtlCol="0" anchor="ctr"/>
+          <a:lstStyle/>
+          <a:p>
+            <a:pPr indent="0" marL="0">
+              <a:buNone/>
+            </a:pPr>
+            <a:r>
+              <a:rPr lang="en-US" sz="2600" b="1" dirty="0">
+                <a:solidFill>
+                  <a:srgbClr val="111111"/>
+                </a:solidFill>
+                <a:latin typeface="Arial" pitchFamily="34" charset="0"/>
+                <a:ea typeface="Arial" pitchFamily="34" charset="-122"/>
+                <a:cs typeface="Arial" pitchFamily="34" charset="-120"/>
+              </a:rPr>
+              <a:t>≈ 3 173</a:t>
+            </a:r>
+            <a:pPr indent="0" marL="0">
+              <a:buNone/>
+            </a:pPr>
+            <a:r>
+              <a:rPr lang="en-US" sz="1100" b="1" dirty="0">
+                <a:solidFill>
+                  <a:srgbClr val="FF4D23"/>
+                </a:solidFill>
+                <a:latin typeface="Arial" pitchFamily="34" charset="0"/>
+                <a:ea typeface="Arial" pitchFamily="34" charset="-122"/>
+                <a:cs typeface="Arial" pitchFamily="34" charset="-120"/>
+              </a:rPr>
+              <a:t> м²</a:t>
+            </a:r>
+            <a:endParaRPr lang="en-US" sz="2600" dirty="0"/>
+          </a:p>
+        </p:txBody>
+      </p:sp>
+      <p:sp>
+        <p:nvSpPr>
+          <p:cNvPr id="11" name="Text 9"/>
+          <p:cNvSpPr txBox="1"/>
+          <p:nvPr/>
+        </p:nvSpPr>
+        <p:spPr>
+          <a:xfrm>
+            <a:off x="502920" y="3986784"/>
+            <a:ext cx="3794760" cy="384048"/>
+          </a:xfrm>
+          <a:prstGeom prst="rect">
+            <a:avLst/>
+          </a:prstGeom>
+          <a:noFill/>
+          <a:ln/>
+        </p:spPr>
+        <p:txBody>
+          <a:bodyPr wrap="square" lIns="0" tIns="0" rIns="0" bIns="0" rtlCol="0" anchor="t"/>
+          <a:lstStyle/>
+          <a:p>
+            <a:pPr indent="0" marL="0">
+              <a:lnSpc>
+                <a:spcPts val="1100"/>
+              </a:lnSpc>
+              <a:buNone/>
+            </a:pPr>
+            <a:r>
+              <a:rPr lang="en-US" sz="800" spc="30" kern="0" dirty="0">
+                <a:solidFill>
+                  <a:srgbClr val="8A8A8A"/>
+                </a:solidFill>
+                <a:latin typeface="Arial" pitchFamily="34" charset="0"/>
+                <a:ea typeface="Arial" pitchFamily="34" charset="-122"/>
+                <a:cs typeface="Arial" pitchFamily="34" charset="-120"/>
+              </a:rPr>
+              <a:t>СРЕДНЯЯ ПЛОЩАДЬ ЭТАЖА НОМЕРНОГО КОРПУСА</a:t>
+            </a:r>
+            <a:endParaRPr lang="en-US" sz="800" dirty="0"/>
+          </a:p>
+        </p:txBody>
+      </p:sp>
+      <p:sp>
+        <p:nvSpPr>
+          <p:cNvPr id="12" name="Shape 10"/>
           <p:cNvSpPr/>
           <p:nvPr/>
         </p:nvSpPr>
         <p:spPr>
           <a:xfrm>
-            <a:off x="502920" y="3566160"/>
+            <a:off x="502920" y="4572000"/>
             <a:ext cx="3794760" cy="7315"/>
           </a:xfrm>
           <a:prstGeom prst="rect">
@@ -4552,14 +4733,106 @@
       </p:sp>
       <p:sp>
         <p:nvSpPr>
-          <p:cNvPr id="11" name="Text 9"/>
-          <p:cNvSpPr txBox="1"/>
-          <p:nvPr/>
-        </p:nvSpPr>
-        <p:spPr>
-          <a:xfrm>
-            <a:off x="502920" y="3749040"/>
-            <a:ext cx="3794760" cy="2377440"/>
+          <p:cNvPr id="13" name="Text 11"/>
+          <p:cNvSpPr txBox="1"/>
+          <p:nvPr/>
+        </p:nvSpPr>
+        <p:spPr>
+          <a:xfrm>
+            <a:off x="502920" y="4700016"/>
+            <a:ext cx="3794760" cy="201168"/>
+          </a:xfrm>
+          <a:prstGeom prst="rect">
+            <a:avLst/>
+          </a:prstGeom>
+          <a:noFill/>
+          <a:ln/>
+        </p:spPr>
+        <p:txBody>
+          <a:bodyPr wrap="square" lIns="0" tIns="0" rIns="0" bIns="0" rtlCol="0" anchor="ctr"/>
+          <a:lstStyle/>
+          <a:p>
+            <a:pPr indent="0" marL="0">
+              <a:buNone/>
+            </a:pPr>
+            <a:r>
+              <a:rPr lang="en-US" sz="850" spc="30" kern="0" dirty="0">
+                <a:solidFill>
+                  <a:srgbClr val="FF4D23"/>
+                </a:solidFill>
+                <a:latin typeface="Arial" pitchFamily="34" charset="0"/>
+                <a:ea typeface="Arial" pitchFamily="34" charset="-122"/>
+                <a:cs typeface="Arial" pitchFamily="34" charset="-120"/>
+              </a:rPr>
+              <a:t>ЁМКОСТЬ — ПРЕДВАРИТЕЛЬНАЯ ОЦЕНКА</a:t>
+            </a:r>
+            <a:endParaRPr lang="en-US" sz="850" dirty="0"/>
+          </a:p>
+        </p:txBody>
+      </p:sp>
+      <p:sp>
+        <p:nvSpPr>
+          <p:cNvPr id="14" name="Text 12"/>
+          <p:cNvSpPr txBox="1"/>
+          <p:nvPr/>
+        </p:nvSpPr>
+        <p:spPr>
+          <a:xfrm>
+            <a:off x="502920" y="4956048"/>
+            <a:ext cx="3794760" cy="402336"/>
+          </a:xfrm>
+          <a:prstGeom prst="rect">
+            <a:avLst/>
+          </a:prstGeom>
+          <a:noFill/>
+          <a:ln/>
+        </p:spPr>
+        <p:txBody>
+          <a:bodyPr wrap="square" lIns="0" tIns="0" rIns="0" bIns="0" rtlCol="0" anchor="ctr"/>
+          <a:lstStyle/>
+          <a:p>
+            <a:pPr indent="0" marL="0">
+              <a:buNone/>
+            </a:pPr>
+            <a:r>
+              <a:rPr lang="en-US" sz="2600" b="1" dirty="0">
+                <a:solidFill>
+                  <a:srgbClr val="FF4D23"/>
+                </a:solidFill>
+                <a:latin typeface="Arial" pitchFamily="34" charset="0"/>
+                <a:ea typeface="Arial" pitchFamily="34" charset="-122"/>
+                <a:cs typeface="Arial" pitchFamily="34" charset="-120"/>
+              </a:rPr>
+              <a:t>260 – 300</a:t>
+            </a:r>
+            <a:pPr indent="0" marL="0">
+              <a:buNone/>
+            </a:pPr>
+            <a:r>
+              <a:rPr lang="en-US" sz="1100" b="1" dirty="0">
+                <a:solidFill>
+                  <a:srgbClr val="111111"/>
+                </a:solidFill>
+                <a:latin typeface="Arial" pitchFamily="34" charset="0"/>
+                <a:ea typeface="Arial" pitchFamily="34" charset="-122"/>
+                <a:cs typeface="Arial" pitchFamily="34" charset="-120"/>
+              </a:rPr>
+              <a:t>  номеров</a:t>
+            </a:r>
+            <a:endParaRPr lang="en-US" sz="2600" dirty="0"/>
+          </a:p>
+        </p:txBody>
+      </p:sp>
+      <p:sp>
+        <p:nvSpPr>
+          <p:cNvPr id="15" name="Text 13"/>
+          <p:cNvSpPr txBox="1"/>
+          <p:nvPr/>
+        </p:nvSpPr>
+        <p:spPr>
+          <a:xfrm>
+            <a:off x="502920" y="5413248"/>
+            <a:ext cx="3794760" cy="822960"/>
           </a:xfrm>
           <a:prstGeom prst="rect">
             <a:avLst/>
@@ -4573,137 +4846,28 @@
           <a:p>
             <a:pPr indent="0" marL="0">
               <a:lnSpc>
-                <a:spcPts val="1500"/>
+                <a:spcPts val="1200"/>
               </a:lnSpc>
-              <a:spcAft>
-                <a:spcPts val="900"/>
-              </a:spcAft>
-              <a:buNone/>
-            </a:pPr>
-            <a:r>
-              <a:rPr lang="en-US" sz="1050" dirty="0">
-                <a:solidFill>
-                  <a:srgbClr val="FF4D23"/>
-                </a:solidFill>
-                <a:latin typeface="Arial" pitchFamily="34" charset="0"/>
-                <a:ea typeface="Arial" pitchFamily="34" charset="-122"/>
-                <a:cs typeface="Arial" pitchFamily="34" charset="-120"/>
-              </a:rPr>
-              <a:t>– </a:t>
-            </a:r>
-            <a:pPr indent="0" marL="0">
-              <a:lnSpc>
-                <a:spcPts val="1500"/>
-              </a:lnSpc>
-              <a:spcAft>
-                <a:spcPts val="900"/>
-              </a:spcAft>
-              <a:buNone/>
-            </a:pPr>
-            <a:r>
-              <a:rPr lang="en-US" sz="1050" dirty="0">
-                <a:solidFill>
-                  <a:srgbClr val="333333"/>
-                </a:solidFill>
-                <a:latin typeface="Arial" pitchFamily="34" charset="0"/>
-                <a:ea typeface="Arial" pitchFamily="34" charset="-122"/>
-                <a:cs typeface="Arial" pitchFamily="34" charset="-120"/>
-              </a:rPr>
-              <a:t>Рядовая посадка деревьев по всему периметру: зелёная полоса отделяет застройку от границ участка и улицы.</a:t>
-            </a:r>
-            <a:endParaRPr lang="en-US" sz="1050" dirty="0"/>
-          </a:p>
-          <a:p>
-            <a:pPr indent="0" marL="0">
-              <a:lnSpc>
-                <a:spcPts val="1500"/>
-              </a:lnSpc>
-              <a:spcAft>
-                <a:spcPts val="900"/>
-              </a:spcAft>
-              <a:buNone/>
-            </a:pPr>
-            <a:r>
-              <a:rPr lang="en-US" sz="1050" dirty="0">
-                <a:solidFill>
-                  <a:srgbClr val="FF4D23"/>
-                </a:solidFill>
-                <a:latin typeface="Arial" pitchFamily="34" charset="0"/>
-                <a:ea typeface="Arial" pitchFamily="34" charset="-122"/>
-                <a:cs typeface="Arial" pitchFamily="34" charset="-120"/>
-              </a:rPr>
-              <a:t>– </a:t>
-            </a:r>
-            <a:pPr indent="0" marL="0">
-              <a:lnSpc>
-                <a:spcPts val="1500"/>
-              </a:lnSpc>
-              <a:spcAft>
-                <a:spcPts val="900"/>
-              </a:spcAft>
-              <a:buNone/>
-            </a:pPr>
-            <a:r>
-              <a:rPr lang="en-US" sz="1050" dirty="0">
-                <a:solidFill>
-                  <a:srgbClr val="333333"/>
-                </a:solidFill>
-                <a:latin typeface="Arial" pitchFamily="34" charset="0"/>
-                <a:ea typeface="Arial" pitchFamily="34" charset="-122"/>
-                <a:cs typeface="Arial" pitchFamily="34" charset="-120"/>
-              </a:rPr>
-              <a:t>Внутренний двор между корпусами — защищённое от улицы пространство отдыха.</a:t>
-            </a:r>
-            <a:endParaRPr lang="en-US" sz="1050" dirty="0"/>
-          </a:p>
-          <a:p>
-            <a:pPr indent="0" marL="0">
-              <a:lnSpc>
-                <a:spcPts val="1500"/>
-              </a:lnSpc>
-              <a:spcAft>
-                <a:spcPts val="900"/>
-              </a:spcAft>
-              <a:buNone/>
-            </a:pPr>
-            <a:r>
-              <a:rPr lang="en-US" sz="1050" dirty="0">
-                <a:solidFill>
-                  <a:srgbClr val="FF4D23"/>
-                </a:solidFill>
-                <a:latin typeface="Arial" pitchFamily="34" charset="0"/>
-                <a:ea typeface="Arial" pitchFamily="34" charset="-122"/>
-                <a:cs typeface="Arial" pitchFamily="34" charset="-120"/>
-              </a:rPr>
-              <a:t>– </a:t>
-            </a:r>
-            <a:pPr indent="0" marL="0">
-              <a:lnSpc>
-                <a:spcPts val="1500"/>
-              </a:lnSpc>
-              <a:spcAft>
-                <a:spcPts val="900"/>
-              </a:spcAft>
-              <a:buNone/>
-            </a:pPr>
-            <a:r>
-              <a:rPr lang="en-US" sz="1050" dirty="0">
-                <a:solidFill>
-                  <a:srgbClr val="333333"/>
-                </a:solidFill>
-                <a:latin typeface="Arial" pitchFamily="34" charset="0"/>
-                <a:ea typeface="Arial" pitchFamily="34" charset="-122"/>
-                <a:cs typeface="Arial" pitchFamily="34" charset="-120"/>
-              </a:rPr>
-              <a:t>Озеленение на террасах продолжает партер вверх по фасаду.</a:t>
-            </a:r>
-            <a:endParaRPr lang="en-US" sz="1050" dirty="0"/>
+              <a:buNone/>
+            </a:pPr>
+            <a:r>
+              <a:rPr lang="en-US" sz="900" dirty="0">
+                <a:solidFill>
+                  <a:srgbClr val="8A8A8A"/>
+                </a:solidFill>
+                <a:latin typeface="Arial" pitchFamily="34" charset="0"/>
+                <a:ea typeface="Arial" pitchFamily="34" charset="-122"/>
+                <a:cs typeface="Arial" pitchFamily="34" charset="-120"/>
+              </a:rPr>
+              <a:t>Расчёт от 12 693,32 м² при полезной площади этажа около 65 % и номере 28–32 м². Точная ёмкость определяется планировками на стадии эскизного проекта.</a:t>
+            </a:r>
+            <a:endParaRPr lang="en-US" sz="900" dirty="0"/>
           </a:p>
         </p:txBody>
       </p:sp>
       <p:pic>
         <p:nvPicPr>
-          <p:cNvPr id="12" name="Image 0" descr="/tmp/claude-0/-home-user-most/9fc1ec31-3c64-5a82-aadb-ddb23fff6e53/scratchpad/assets/green.jpg">    </p:cNvPr>
+          <p:cNvPr id="16" name="Image 0" descr="/tmp/claude-0/-home-user-most/9fc1ec31-3c64-5a82-aadb-ddb23fff6e53/scratchpad/assets/room.jpg">    </p:cNvPr>
           <p:cNvPicPr>
             <a:picLocks noChangeAspect="1"/>
           </p:cNvPicPr>
@@ -4727,7 +4891,7 @@
       </p:pic>
       <p:sp>
         <p:nvSpPr>
-          <p:cNvPr id="13" name="Text 10"/>
+          <p:cNvPr id="17" name="Text 14"/>
           <p:cNvSpPr txBox="1"/>
           <p:nvPr/>
         </p:nvSpPr>
@@ -4758,7 +4922,7 @@
                 <a:ea typeface="Arial" pitchFamily="34" charset="-122"/>
                 <a:cs typeface="Arial" pitchFamily="34" charset="-120"/>
               </a:rPr>
-              <a:t>Фрагмент генплана: полоса озеленения между проездом и границей участка.</a:t>
+              <a:t>Типовой номер: балкон на озеленённой ленте фасада, раскрытие на город и хребет.</a:t>
             </a:r>
             <a:endParaRPr lang="en-US" sz="800" dirty="0"/>
           </a:p>
@@ -4766,7 +4930,7 @@
       </p:sp>
       <p:pic>
         <p:nvPicPr>
-          <p:cNvPr id="14" name="Image 1" descr="/tmp/claude-0/-home-user-most/9fc1ec31-3c64-5a82-aadb-ddb23fff6e53/scratchpad/assets/logo_most.png">    </p:cNvPr>
+          <p:cNvPr id="18" name="Image 1" descr="/tmp/claude-0/-home-user-most/9fc1ec31-3c64-5a82-aadb-ddb23fff6e53/scratchpad/assets/logo_most.png">    </p:cNvPr>
           <p:cNvPicPr>
             <a:picLocks noChangeAspect="1"/>
           </p:cNvPicPr>
@@ -4790,7 +4954,7 @@
       </p:pic>
       <p:sp>
         <p:nvSpPr>
-          <p:cNvPr id="15" name="Text 11"/>
+          <p:cNvPr id="19" name="Text 15"/>
           <p:cNvSpPr txBox="1"/>
           <p:nvPr/>
         </p:nvSpPr>
@@ -4892,7 +5056,7 @@
                 <a:ea typeface="Arial" pitchFamily="34" charset="-122"/>
                 <a:cs typeface="Arial" pitchFamily="34" charset="-120"/>
               </a:rPr>
-              <a:t>ТРАНСПОРТ</a:t>
+              <a:t>БЛАГОУСТРОЙСТВО</a:t>
             </a:r>
             <a:endParaRPr lang="en-US" sz="950" dirty="0"/>
           </a:p>
@@ -4931,7 +5095,7 @@
                 <a:ea typeface="Arial" pitchFamily="34" charset="-122"/>
                 <a:cs typeface="Arial" pitchFamily="34" charset="-120"/>
               </a:rPr>
-              <a:t>Въезды, проезды и хранение автомобилей</a:t>
+              <a:t>Озеленение и открытые пространства</a:t>
             </a:r>
             <a:endParaRPr lang="en-US" sz="900" dirty="0"/>
           </a:p>
@@ -4970,7 +5134,7 @@
                 <a:ea typeface="Arial" pitchFamily="34" charset="-122"/>
                 <a:cs typeface="Arial" pitchFamily="34" charset="-120"/>
               </a:rPr>
-              <a:t>УЗЕЛ ВЪЕЗДА</a:t>
+              <a:t>ФРАГМЕНТ ГЕНПЛАНА</a:t>
             </a:r>
             <a:endParaRPr lang="en-US" sz="950" dirty="0"/>
           </a:p>
@@ -5009,7 +5173,7 @@
                 <a:ea typeface="Arial" pitchFamily="34" charset="-122"/>
                 <a:cs typeface="Arial" pitchFamily="34" charset="-120"/>
               </a:rPr>
-              <a:t>ОБСЛУЖИВАНИЕ УЧАСТКА</a:t>
+              <a:t>ДВЕ ТРЕТИ УЧАСТКА ОТКРЫТЫ</a:t>
             </a:r>
             <a:endParaRPr lang="en-US" sz="1300" dirty="0"/>
           </a:p>
@@ -5023,8 +5187,8 @@
         </p:nvSpPr>
         <p:spPr>
           <a:xfrm>
-            <a:off x="502920" y="1371600"/>
-            <a:ext cx="3794760" cy="2743200"/>
+            <a:off x="502920" y="1325880"/>
+            <a:ext cx="3794760" cy="914400"/>
           </a:xfrm>
           <a:prstGeom prst="rect">
             <a:avLst/>
@@ -5040,127 +5204,18 @@
               <a:lnSpc>
                 <a:spcPts val="1500"/>
               </a:lnSpc>
-              <a:spcAft>
-                <a:spcPts val="900"/>
-              </a:spcAft>
               <a:buNone/>
             </a:pPr>
             <a:r>
               <a:rPr lang="en-US" sz="1050" dirty="0">
                 <a:solidFill>
-                  <a:srgbClr val="FF4D23"/>
-                </a:solidFill>
-                <a:latin typeface="Arial" pitchFamily="34" charset="0"/>
-                <a:ea typeface="Arial" pitchFamily="34" charset="-122"/>
-                <a:cs typeface="Arial" pitchFamily="34" charset="-120"/>
-              </a:rPr>
-              <a:t>– </a:t>
-            </a:r>
-            <a:pPr indent="0" marL="0">
-              <a:lnSpc>
-                <a:spcPts val="1500"/>
-              </a:lnSpc>
-              <a:spcAft>
-                <a:spcPts val="900"/>
-              </a:spcAft>
-              <a:buNone/>
-            </a:pPr>
-            <a:r>
-              <a:rPr lang="en-US" sz="1050" dirty="0">
-                <a:solidFill>
                   <a:srgbClr val="333333"/>
                 </a:solidFill>
                 <a:latin typeface="Arial" pitchFamily="34" charset="0"/>
                 <a:ea typeface="Arial" pitchFamily="34" charset="-122"/>
                 <a:cs typeface="Arial" pitchFamily="34" charset="-120"/>
               </a:rPr>
-              <a:t>Единый узел въезда в западной части участка, со стороны внутриквартального проезда, а не напрямую с ул. Бухтарминской — уличный поток не разрывается.</a:t>
-            </a:r>
-            <a:endParaRPr lang="en-US" sz="1050" dirty="0"/>
-          </a:p>
-          <a:p>
-            <a:pPr indent="0" marL="0">
-              <a:lnSpc>
-                <a:spcPts val="1500"/>
-              </a:lnSpc>
-              <a:spcAft>
-                <a:spcPts val="900"/>
-              </a:spcAft>
-              <a:buNone/>
-            </a:pPr>
-            <a:r>
-              <a:rPr lang="en-US" sz="1050" dirty="0">
-                <a:solidFill>
-                  <a:srgbClr val="FF4D23"/>
-                </a:solidFill>
-                <a:latin typeface="Arial" pitchFamily="34" charset="0"/>
-                <a:ea typeface="Arial" pitchFamily="34" charset="-122"/>
-                <a:cs typeface="Arial" pitchFamily="34" charset="-120"/>
-              </a:rPr>
-              <a:t>– </a:t>
-            </a:r>
-            <a:pPr indent="0" marL="0">
-              <a:lnSpc>
-                <a:spcPts val="1500"/>
-              </a:lnSpc>
-              <a:spcAft>
-                <a:spcPts val="900"/>
-              </a:spcAft>
-              <a:buNone/>
-            </a:pPr>
-            <a:r>
-              <a:rPr lang="en-US" sz="1050" dirty="0">
-                <a:solidFill>
-                  <a:srgbClr val="333333"/>
-                </a:solidFill>
-                <a:latin typeface="Arial" pitchFamily="34" charset="0"/>
-                <a:ea typeface="Arial" pitchFamily="34" charset="-122"/>
-                <a:cs typeface="Arial" pitchFamily="34" charset="-120"/>
-              </a:rPr>
-              <a:t>Кольцевой проезд вокруг застройки: подъезд ко всем входам, разгрузка и проезд пожарной техники.</a:t>
-            </a:r>
-            <a:endParaRPr lang="en-US" sz="1050" dirty="0"/>
-          </a:p>
-          <a:p>
-            <a:pPr indent="0" marL="0">
-              <a:lnSpc>
-                <a:spcPts val="1500"/>
-              </a:lnSpc>
-              <a:spcAft>
-                <a:spcPts val="900"/>
-              </a:spcAft>
-              <a:buNone/>
-            </a:pPr>
-            <a:r>
-              <a:rPr lang="en-US" sz="1050" dirty="0">
-                <a:solidFill>
-                  <a:srgbClr val="FF4D23"/>
-                </a:solidFill>
-                <a:latin typeface="Arial" pitchFamily="34" charset="0"/>
-                <a:ea typeface="Arial" pitchFamily="34" charset="-122"/>
-                <a:cs typeface="Arial" pitchFamily="34" charset="-120"/>
-              </a:rPr>
-              <a:t>– </a:t>
-            </a:r>
-            <a:pPr indent="0" marL="0">
-              <a:lnSpc>
-                <a:spcPts val="1500"/>
-              </a:lnSpc>
-              <a:spcAft>
-                <a:spcPts val="900"/>
-              </a:spcAft>
-              <a:buNone/>
-            </a:pPr>
-            <a:r>
-              <a:rPr lang="en-US" sz="1050" dirty="0">
-                <a:solidFill>
-                  <a:srgbClr val="333333"/>
-                </a:solidFill>
-                <a:latin typeface="Arial" pitchFamily="34" charset="0"/>
-                <a:ea typeface="Arial" pitchFamily="34" charset="-122"/>
-                <a:cs typeface="Arial" pitchFamily="34" charset="-120"/>
-              </a:rPr>
-              <a:t>Круговой подъезд к главному входу отделён от хозяйственного двора.</a:t>
+              <a:t>Вне пятна застройки остаётся 9 058,89 м² — 64,7 % участка. Это площадь под проезды, площадки и озеленение.</a:t>
             </a:r>
             <a:endParaRPr lang="en-US" sz="1050" dirty="0"/>
           </a:p>
@@ -5174,7 +5229,7 @@
         </p:nvSpPr>
         <p:spPr>
           <a:xfrm>
-            <a:off x="502920" y="4206240"/>
+            <a:off x="502920" y="2377440"/>
             <a:ext cx="3794760" cy="7315"/>
           </a:xfrm>
           <a:prstGeom prst="rect">
@@ -5199,8 +5254,8 @@
         </p:nvSpPr>
         <p:spPr>
           <a:xfrm>
-            <a:off x="502920" y="4334256"/>
-            <a:ext cx="3794760" cy="201168"/>
+            <a:off x="502920" y="2560320"/>
+            <a:ext cx="3794760" cy="402336"/>
           </a:xfrm>
           <a:prstGeom prst="rect">
             <a:avLst/>
@@ -5216,7 +5271,21 @@
               <a:buNone/>
             </a:pPr>
             <a:r>
-              <a:rPr lang="en-US" sz="850" spc="30" kern="0" dirty="0">
+              <a:rPr lang="en-US" sz="2600" b="1" dirty="0">
+                <a:solidFill>
+                  <a:srgbClr val="111111"/>
+                </a:solidFill>
+                <a:latin typeface="Arial" pitchFamily="34" charset="0"/>
+                <a:ea typeface="Arial" pitchFamily="34" charset="-122"/>
+                <a:cs typeface="Arial" pitchFamily="34" charset="-120"/>
+              </a:rPr>
+              <a:t>9 058,89</a:t>
+            </a:r>
+            <a:pPr indent="0" marL="0">
+              <a:buNone/>
+            </a:pPr>
+            <a:r>
+              <a:rPr lang="en-US" sz="1100" b="1" dirty="0">
                 <a:solidFill>
                   <a:srgbClr val="FF4D23"/>
                 </a:solidFill>
@@ -5224,9 +5293,9 @@
                 <a:ea typeface="Arial" pitchFamily="34" charset="-122"/>
                 <a:cs typeface="Arial" pitchFamily="34" charset="-120"/>
               </a:rPr>
-              <a:t>МАШИНО-МЕСТА</a:t>
-            </a:r>
-            <a:endParaRPr lang="en-US" sz="850" dirty="0"/>
+              <a:t> м²</a:t>
+            </a:r>
+            <a:endParaRPr lang="en-US" sz="2600" dirty="0"/>
           </a:p>
         </p:txBody>
       </p:sp>
@@ -5238,8 +5307,8 @@
         </p:nvSpPr>
         <p:spPr>
           <a:xfrm>
-            <a:off x="502920" y="4590288"/>
-            <a:ext cx="3794760" cy="777240"/>
+            <a:off x="502920" y="2980944"/>
+            <a:ext cx="3794760" cy="384048"/>
           </a:xfrm>
           <a:prstGeom prst="rect">
             <a:avLst/>
@@ -5253,22 +5322,22 @@
           <a:p>
             <a:pPr indent="0" marL="0">
               <a:lnSpc>
-                <a:spcPts val="1400"/>
+                <a:spcPts val="1100"/>
               </a:lnSpc>
               <a:buNone/>
             </a:pPr>
             <a:r>
-              <a:rPr lang="en-US" sz="1000" dirty="0">
-                <a:solidFill>
-                  <a:srgbClr val="333333"/>
-                </a:solidFill>
-                <a:latin typeface="Arial" pitchFamily="34" charset="0"/>
-                <a:ea typeface="Arial" pitchFamily="34" charset="-122"/>
-                <a:cs typeface="Arial" pitchFamily="34" charset="-120"/>
-              </a:rPr>
-              <a:t>Количество и тип парковки определяются расчётом по нормативу к утверждённой ёмкости номерного фонда на стадии эскизного проекта.</a:t>
-            </a:r>
-            <a:endParaRPr lang="en-US" sz="1000" dirty="0"/>
+              <a:rPr lang="en-US" sz="800" spc="30" kern="0" dirty="0">
+                <a:solidFill>
+                  <a:srgbClr val="8A8A8A"/>
+                </a:solidFill>
+                <a:latin typeface="Arial" pitchFamily="34" charset="0"/>
+                <a:ea typeface="Arial" pitchFamily="34" charset="-122"/>
+                <a:cs typeface="Arial" pitchFamily="34" charset="-120"/>
+              </a:rPr>
+              <a:t>ТЕРРИТОРИЯ ВНЕ ПЯТНА ЗАСТРОЙКИ — 64,7 %</a:t>
+            </a:r>
+            <a:endParaRPr lang="en-US" sz="800" dirty="0"/>
           </a:p>
         </p:txBody>
       </p:sp>
@@ -5280,20 +5349,18 @@
         </p:nvSpPr>
         <p:spPr>
           <a:xfrm>
-            <a:off x="502920" y="5440680"/>
-            <a:ext cx="2468880" cy="310896"/>
-          </a:xfrm>
-          <a:prstGeom prst="roundRect">
-            <a:avLst>
-              <a:gd name="adj" fmla="val 17647"/>
-            </a:avLst>
+            <a:off x="502920" y="3566160"/>
+            <a:ext cx="3794760" cy="7315"/>
+          </a:xfrm>
+          <a:prstGeom prst="rect">
+            <a:avLst/>
           </a:prstGeom>
           <a:solidFill>
-            <a:srgbClr val="FFFFFF"/>
+            <a:srgbClr val="DCDCDC"/>
           </a:solidFill>
-          <a:ln w="9525">
+          <a:ln w="12700">
             <a:solidFill>
-              <a:srgbClr val="FF4D23"/>
+              <a:srgbClr val="DCDCDC"/>
             </a:solidFill>
             <a:prstDash val="solid"/>
           </a:ln>
@@ -5307,24 +5374,30 @@
         </p:nvSpPr>
         <p:spPr>
           <a:xfrm>
-            <a:off x="502920" y="5440680"/>
-            <a:ext cx="2468880" cy="310896"/>
-          </a:xfrm>
-          <a:prstGeom prst="rect">
-            <a:avLst/>
-          </a:prstGeom>
-          <a:noFill/>
-          <a:ln/>
-        </p:spPr>
-        <p:txBody>
-          <a:bodyPr wrap="square" lIns="0" tIns="0" rIns="0" bIns="0" rtlCol="0" anchor="ctr"/>
-          <a:lstStyle/>
-          <a:p>
-            <a:pPr algn="ctr" indent="0" marL="0">
-              <a:buNone/>
-            </a:pPr>
-            <a:r>
-              <a:rPr lang="en-US" sz="900" i="1" dirty="0">
+            <a:off x="502920" y="3749040"/>
+            <a:ext cx="3794760" cy="2377440"/>
+          </a:xfrm>
+          <a:prstGeom prst="rect">
+            <a:avLst/>
+          </a:prstGeom>
+          <a:noFill/>
+          <a:ln/>
+        </p:spPr>
+        <p:txBody>
+          <a:bodyPr wrap="square" lIns="0" tIns="0" rIns="0" bIns="0" rtlCol="0" anchor="t"/>
+          <a:lstStyle/>
+          <a:p>
+            <a:pPr indent="0" marL="0">
+              <a:lnSpc>
+                <a:spcPts val="1500"/>
+              </a:lnSpc>
+              <a:spcAft>
+                <a:spcPts val="900"/>
+              </a:spcAft>
+              <a:buNone/>
+            </a:pPr>
+            <a:r>
+              <a:rPr lang="en-US" sz="1050" dirty="0">
                 <a:solidFill>
                   <a:srgbClr val="FF4D23"/>
                 </a:solidFill>
@@ -5332,15 +5405,121 @@
                 <a:ea typeface="Arial" pitchFamily="34" charset="-122"/>
                 <a:cs typeface="Arial" pitchFamily="34" charset="-120"/>
               </a:rPr>
-              <a:t>вписать: ____ машино-мест</a:t>
-            </a:r>
-            <a:endParaRPr lang="en-US" sz="900" dirty="0"/>
+              <a:t>– </a:t>
+            </a:r>
+            <a:pPr indent="0" marL="0">
+              <a:lnSpc>
+                <a:spcPts val="1500"/>
+              </a:lnSpc>
+              <a:spcAft>
+                <a:spcPts val="900"/>
+              </a:spcAft>
+              <a:buNone/>
+            </a:pPr>
+            <a:r>
+              <a:rPr lang="en-US" sz="1050" dirty="0">
+                <a:solidFill>
+                  <a:srgbClr val="333333"/>
+                </a:solidFill>
+                <a:latin typeface="Arial" pitchFamily="34" charset="0"/>
+                <a:ea typeface="Arial" pitchFamily="34" charset="-122"/>
+                <a:cs typeface="Arial" pitchFamily="34" charset="-120"/>
+              </a:rPr>
+              <a:t>Рядовая посадка деревьев по всему периметру: зелёная полоса отделяет застройку от границ участка и улицы.</a:t>
+            </a:r>
+            <a:endParaRPr lang="en-US" sz="1050" dirty="0"/>
+          </a:p>
+          <a:p>
+            <a:pPr indent="0" marL="0">
+              <a:lnSpc>
+                <a:spcPts val="1500"/>
+              </a:lnSpc>
+              <a:spcAft>
+                <a:spcPts val="900"/>
+              </a:spcAft>
+              <a:buNone/>
+            </a:pPr>
+            <a:r>
+              <a:rPr lang="en-US" sz="1050" dirty="0">
+                <a:solidFill>
+                  <a:srgbClr val="FF4D23"/>
+                </a:solidFill>
+                <a:latin typeface="Arial" pitchFamily="34" charset="0"/>
+                <a:ea typeface="Arial" pitchFamily="34" charset="-122"/>
+                <a:cs typeface="Arial" pitchFamily="34" charset="-120"/>
+              </a:rPr>
+              <a:t>– </a:t>
+            </a:r>
+            <a:pPr indent="0" marL="0">
+              <a:lnSpc>
+                <a:spcPts val="1500"/>
+              </a:lnSpc>
+              <a:spcAft>
+                <a:spcPts val="900"/>
+              </a:spcAft>
+              <a:buNone/>
+            </a:pPr>
+            <a:r>
+              <a:rPr lang="en-US" sz="1050" dirty="0">
+                <a:solidFill>
+                  <a:srgbClr val="333333"/>
+                </a:solidFill>
+                <a:latin typeface="Arial" pitchFamily="34" charset="0"/>
+                <a:ea typeface="Arial" pitchFamily="34" charset="-122"/>
+                <a:cs typeface="Arial" pitchFamily="34" charset="-120"/>
+              </a:rPr>
+              <a:t>Внутренний двор между корпусами — защищённое от улицы пространство отдыха.</a:t>
+            </a:r>
+            <a:endParaRPr lang="en-US" sz="1050" dirty="0"/>
+          </a:p>
+          <a:p>
+            <a:pPr indent="0" marL="0">
+              <a:lnSpc>
+                <a:spcPts val="1500"/>
+              </a:lnSpc>
+              <a:spcAft>
+                <a:spcPts val="900"/>
+              </a:spcAft>
+              <a:buNone/>
+            </a:pPr>
+            <a:r>
+              <a:rPr lang="en-US" sz="1050" dirty="0">
+                <a:solidFill>
+                  <a:srgbClr val="FF4D23"/>
+                </a:solidFill>
+                <a:latin typeface="Arial" pitchFamily="34" charset="0"/>
+                <a:ea typeface="Arial" pitchFamily="34" charset="-122"/>
+                <a:cs typeface="Arial" pitchFamily="34" charset="-120"/>
+              </a:rPr>
+              <a:t>– </a:t>
+            </a:r>
+            <a:pPr indent="0" marL="0">
+              <a:lnSpc>
+                <a:spcPts val="1500"/>
+              </a:lnSpc>
+              <a:spcAft>
+                <a:spcPts val="900"/>
+              </a:spcAft>
+              <a:buNone/>
+            </a:pPr>
+            <a:r>
+              <a:rPr lang="en-US" sz="1050" dirty="0">
+                <a:solidFill>
+                  <a:srgbClr val="333333"/>
+                </a:solidFill>
+                <a:latin typeface="Arial" pitchFamily="34" charset="0"/>
+                <a:ea typeface="Arial" pitchFamily="34" charset="-122"/>
+                <a:cs typeface="Arial" pitchFamily="34" charset="-120"/>
+              </a:rPr>
+              <a:t>Озеленение на террасах продолжает партер вверх по фасаду.</a:t>
+            </a:r>
+            <a:endParaRPr lang="en-US" sz="1050" dirty="0"/>
           </a:p>
         </p:txBody>
       </p:sp>
       <p:pic>
         <p:nvPicPr>
-          <p:cNvPr id="12" name="Image 0" descr="/tmp/claude-0/-home-user-most/9fc1ec31-3c64-5a82-aadb-ddb23fff6e53/scratchpad/assets/entrance.jpg">    </p:cNvPr>
+          <p:cNvPr id="12" name="Image 0" descr="/tmp/claude-0/-home-user-most/9fc1ec31-3c64-5a82-aadb-ddb23fff6e53/scratchpad/assets/green.jpg">    </p:cNvPr>
           <p:cNvPicPr>
             <a:picLocks noChangeAspect="1"/>
           </p:cNvPicPr>
@@ -5395,7 +5574,7 @@
                 <a:ea typeface="Arial" pitchFamily="34" charset="-122"/>
                 <a:cs typeface="Arial" pitchFamily="34" charset="-120"/>
               </a:rPr>
-              <a:t>Фрагмент генплана: узел въезда в западной части участка.</a:t>
+              <a:t>Фрагмент генплана: полоса озеленения между проездом и границей участка.</a:t>
             </a:r>
             <a:endParaRPr lang="en-US" sz="800" dirty="0"/>
           </a:p>
@@ -5529,7 +5708,7 @@
                 <a:ea typeface="Arial" pitchFamily="34" charset="-122"/>
                 <a:cs typeface="Arial" pitchFamily="34" charset="-120"/>
               </a:rPr>
-              <a:t>РЕГЛАМЕНТЫ</a:t>
+              <a:t>ТРАНСПОРТ</a:t>
             </a:r>
             <a:endParaRPr lang="en-US" sz="950" dirty="0"/>
           </a:p>
@@ -5568,7 +5747,7 @@
                 <a:ea typeface="Arial" pitchFamily="34" charset="-122"/>
                 <a:cs typeface="Arial" pitchFamily="34" charset="-120"/>
               </a:rPr>
-              <a:t>Статус проработки</a:t>
+              <a:t>Въезды, проезды и хранение автомобилей</a:t>
             </a:r>
             <a:endParaRPr lang="en-US" sz="900" dirty="0"/>
           </a:p>
@@ -5607,7 +5786,7 @@
                 <a:ea typeface="Arial" pitchFamily="34" charset="-122"/>
                 <a:cs typeface="Arial" pitchFamily="34" charset="-120"/>
               </a:rPr>
-              <a:t>НОРМЫ</a:t>
+              <a:t>УЗЕЛ ВЪЕЗДА</a:t>
             </a:r>
             <a:endParaRPr lang="en-US" sz="950" dirty="0"/>
           </a:p>
@@ -5621,8 +5800,8 @@
         </p:nvSpPr>
         <p:spPr>
           <a:xfrm>
-            <a:off x="502920" y="1051560"/>
-            <a:ext cx="5394960" cy="256032"/>
+            <a:off x="502920" y="960120"/>
+            <a:ext cx="3794760" cy="256032"/>
           </a:xfrm>
           <a:prstGeom prst="rect">
             <a:avLst/>
@@ -5638,7 +5817,7 @@
               <a:buNone/>
             </a:pPr>
             <a:r>
-              <a:rPr lang="en-US" sz="1200" b="1" spc="30" kern="0" dirty="0">
+              <a:rPr lang="en-US" sz="1300" b="1" spc="30" kern="0" dirty="0">
                 <a:solidFill>
                   <a:srgbClr val="FF4D23"/>
                 </a:solidFill>
@@ -5646,47 +5825,22 @@
                 <a:ea typeface="Arial" pitchFamily="34" charset="-122"/>
                 <a:cs typeface="Arial" pitchFamily="34" charset="-120"/>
               </a:rPr>
-              <a:t>ПОДТВЕРЖДЕНО ГЕНПЛАНОМ</a:t>
-            </a:r>
-            <a:endParaRPr lang="en-US" sz="1200" dirty="0"/>
-          </a:p>
-        </p:txBody>
-      </p:sp>
-      <p:sp>
-        <p:nvSpPr>
-          <p:cNvPr id="6" name="Shape 4"/>
-          <p:cNvSpPr/>
-          <p:nvPr/>
-        </p:nvSpPr>
-        <p:spPr>
-          <a:xfrm>
-            <a:off x="502920" y="1417320"/>
-            <a:ext cx="5394960" cy="7315"/>
-          </a:xfrm>
-          <a:prstGeom prst="rect">
-            <a:avLst/>
-          </a:prstGeom>
-          <a:solidFill>
-            <a:srgbClr val="111111"/>
-          </a:solidFill>
-          <a:ln w="12700">
-            <a:solidFill>
-              <a:srgbClr val="111111"/>
-            </a:solidFill>
-            <a:prstDash val="solid"/>
-          </a:ln>
-        </p:spPr>
-      </p:sp>
-      <p:sp>
-        <p:nvSpPr>
-          <p:cNvPr id="7" name="Text 5"/>
-          <p:cNvSpPr txBox="1"/>
-          <p:nvPr/>
-        </p:nvSpPr>
-        <p:spPr>
-          <a:xfrm>
-            <a:off x="502920" y="1627632"/>
-            <a:ext cx="5394960" cy="4206240"/>
+              <a:t>ОБСЛУЖИВАНИЕ УЧАСТКА</a:t>
+            </a:r>
+            <a:endParaRPr lang="en-US" sz="1300" dirty="0"/>
+          </a:p>
+        </p:txBody>
+      </p:sp>
+      <p:sp>
+        <p:nvSpPr>
+          <p:cNvPr id="6" name="Text 4"/>
+          <p:cNvSpPr txBox="1"/>
+          <p:nvPr/>
+        </p:nvSpPr>
+        <p:spPr>
+          <a:xfrm>
+            <a:off x="502920" y="1371600"/>
+            <a:ext cx="3794760" cy="2743200"/>
           </a:xfrm>
           <a:prstGeom prst="rect">
             <a:avLst/>
@@ -5703,7 +5857,7 @@
                 <a:spcPts val="1500"/>
               </a:lnSpc>
               <a:spcAft>
-                <a:spcPts val="1100"/>
+                <a:spcPts val="900"/>
               </a:spcAft>
               <a:buNone/>
             </a:pPr>
@@ -5723,7 +5877,7 @@
                 <a:spcPts val="1500"/>
               </a:lnSpc>
               <a:spcAft>
-                <a:spcPts val="1100"/>
+                <a:spcPts val="900"/>
               </a:spcAft>
               <a:buNone/>
             </a:pPr>
@@ -5736,7 +5890,7 @@
                 <a:ea typeface="Arial" pitchFamily="34" charset="-122"/>
                 <a:cs typeface="Arial" pitchFamily="34" charset="-120"/>
               </a:rPr>
-              <a:t>Отступы от границ участка: 6,00 м с запада и юга, 3,00 м с северо-востока, 17,49 м с востока — вынесены на чертёж.</a:t>
+              <a:t>Единый узел въезда в западной части участка, со стороны внутриквартального проезда, а не напрямую с ул. Бухтарминской — уличный поток не разрывается.</a:t>
             </a:r>
             <a:endParaRPr lang="en-US" sz="1050" dirty="0"/>
           </a:p>
@@ -5746,7 +5900,7 @@
                 <a:spcPts val="1500"/>
               </a:lnSpc>
               <a:spcAft>
-                <a:spcPts val="1100"/>
+                <a:spcPts val="900"/>
               </a:spcAft>
               <a:buNone/>
             </a:pPr>
@@ -5766,7 +5920,7 @@
                 <a:spcPts val="1500"/>
               </a:lnSpc>
               <a:spcAft>
-                <a:spcPts val="1100"/>
+                <a:spcPts val="900"/>
               </a:spcAft>
               <a:buNone/>
             </a:pPr>
@@ -5779,7 +5933,7 @@
                 <a:ea typeface="Arial" pitchFamily="34" charset="-122"/>
                 <a:cs typeface="Arial" pitchFamily="34" charset="-120"/>
               </a:rPr>
-              <a:t>Этажность: 5 этажей по обоим корпусам, без превышения высотных отметок соседней застройки.</a:t>
+              <a:t>Кольцевой проезд вокруг застройки: подъезд ко всем входам, разгрузка и проезд пожарной техники.</a:t>
             </a:r>
             <a:endParaRPr lang="en-US" sz="1050" dirty="0"/>
           </a:p>
@@ -5789,7 +5943,7 @@
                 <a:spcPts val="1500"/>
               </a:lnSpc>
               <a:spcAft>
-                <a:spcPts val="1100"/>
+                <a:spcPts val="900"/>
               </a:spcAft>
               <a:buNone/>
             </a:pPr>
@@ -5809,7 +5963,7 @@
                 <a:spcPts val="1500"/>
               </a:lnSpc>
               <a:spcAft>
-                <a:spcPts val="1100"/>
+                <a:spcPts val="900"/>
               </a:spcAft>
               <a:buNone/>
             </a:pPr>
@@ -5822,409 +5976,22 @@
                 <a:ea typeface="Arial" pitchFamily="34" charset="-122"/>
                 <a:cs typeface="Arial" pitchFamily="34" charset="-120"/>
               </a:rPr>
-              <a:t>Пожарный проезд: замкнутый кольцевой проезд вокруг пятна застройки.</a:t>
+              <a:t>Круговой подъезд к главному входу отделён от хозяйственного двора.</a:t>
             </a:r>
             <a:endParaRPr lang="en-US" sz="1050" dirty="0"/>
           </a:p>
-          <a:p>
-            <a:pPr indent="0" marL="0">
-              <a:lnSpc>
-                <a:spcPts val="1500"/>
-              </a:lnSpc>
-              <a:spcAft>
-                <a:spcPts val="1100"/>
-              </a:spcAft>
-              <a:buNone/>
-            </a:pPr>
-            <a:r>
-              <a:rPr lang="en-US" sz="1050" dirty="0">
-                <a:solidFill>
-                  <a:srgbClr val="FF4D23"/>
-                </a:solidFill>
-                <a:latin typeface="Arial" pitchFamily="34" charset="0"/>
-                <a:ea typeface="Arial" pitchFamily="34" charset="-122"/>
-                <a:cs typeface="Arial" pitchFamily="34" charset="-120"/>
-              </a:rPr>
-              <a:t>– </a:t>
-            </a:r>
-            <a:pPr indent="0" marL="0">
-              <a:lnSpc>
-                <a:spcPts val="1500"/>
-              </a:lnSpc>
-              <a:spcAft>
-                <a:spcPts val="1100"/>
-              </a:spcAft>
-              <a:buNone/>
-            </a:pPr>
-            <a:r>
-              <a:rPr lang="en-US" sz="1050" dirty="0">
-                <a:solidFill>
-                  <a:srgbClr val="333333"/>
-                </a:solidFill>
-                <a:latin typeface="Arial" pitchFamily="34" charset="0"/>
-                <a:ea typeface="Arial" pitchFamily="34" charset="-122"/>
-                <a:cs typeface="Arial" pitchFamily="34" charset="-120"/>
-              </a:rPr>
-              <a:t>Плотность застройки: 35,3 % участка, коэффициент использования территории 1,22.</a:t>
-            </a:r>
-            <a:endParaRPr lang="en-US" sz="1050" dirty="0"/>
-          </a:p>
-          <a:p>
-            <a:pPr indent="0" marL="0">
-              <a:lnSpc>
-                <a:spcPts val="1500"/>
-              </a:lnSpc>
-              <a:spcAft>
-                <a:spcPts val="1100"/>
-              </a:spcAft>
-              <a:buNone/>
-            </a:pPr>
-            <a:r>
-              <a:rPr lang="en-US" sz="1050" dirty="0">
-                <a:solidFill>
-                  <a:srgbClr val="FF4D23"/>
-                </a:solidFill>
-                <a:latin typeface="Arial" pitchFamily="34" charset="0"/>
-                <a:ea typeface="Arial" pitchFamily="34" charset="-122"/>
-                <a:cs typeface="Arial" pitchFamily="34" charset="-120"/>
-              </a:rPr>
-              <a:t>– </a:t>
-            </a:r>
-            <a:pPr indent="0" marL="0">
-              <a:lnSpc>
-                <a:spcPts val="1500"/>
-              </a:lnSpc>
-              <a:spcAft>
-                <a:spcPts val="1100"/>
-              </a:spcAft>
-              <a:buNone/>
-            </a:pPr>
-            <a:r>
-              <a:rPr lang="en-US" sz="1050" dirty="0">
-                <a:solidFill>
-                  <a:srgbClr val="333333"/>
-                </a:solidFill>
-                <a:latin typeface="Arial" pitchFamily="34" charset="0"/>
-                <a:ea typeface="Arial" pitchFamily="34" charset="-122"/>
-                <a:cs typeface="Arial" pitchFamily="34" charset="-120"/>
-              </a:rPr>
-              <a:t>Озеленение: рядовая посадка деревьев по всему периметру участка.</a:t>
-            </a:r>
-            <a:endParaRPr lang="en-US" sz="1050" dirty="0"/>
-          </a:p>
-        </p:txBody>
-      </p:sp>
-      <p:sp>
-        <p:nvSpPr>
-          <p:cNvPr id="8" name="Text 6"/>
-          <p:cNvSpPr txBox="1"/>
-          <p:nvPr/>
-        </p:nvSpPr>
-        <p:spPr>
-          <a:xfrm>
-            <a:off x="6766560" y="1051560"/>
-            <a:ext cx="5394960" cy="256032"/>
-          </a:xfrm>
-          <a:prstGeom prst="rect">
-            <a:avLst/>
-          </a:prstGeom>
-          <a:noFill/>
-          <a:ln/>
-        </p:spPr>
-        <p:txBody>
-          <a:bodyPr wrap="square" lIns="0" tIns="0" rIns="0" bIns="0" rtlCol="0" anchor="ctr"/>
-          <a:lstStyle/>
-          <a:p>
-            <a:pPr indent="0" marL="0">
-              <a:buNone/>
-            </a:pPr>
-            <a:r>
-              <a:rPr lang="en-US" sz="1200" b="1" spc="30" kern="0" dirty="0">
-                <a:solidFill>
-                  <a:srgbClr val="FF4D23"/>
-                </a:solidFill>
-                <a:latin typeface="Arial" pitchFamily="34" charset="0"/>
-                <a:ea typeface="Arial" pitchFamily="34" charset="-122"/>
-                <a:cs typeface="Arial" pitchFamily="34" charset="-120"/>
-              </a:rPr>
-              <a:t>УТОЧНЯЕТСЯ НА СТАДИИ ЭП И ПСД</a:t>
-            </a:r>
-            <a:endParaRPr lang="en-US" sz="1200" dirty="0"/>
-          </a:p>
-        </p:txBody>
-      </p:sp>
-      <p:sp>
-        <p:nvSpPr>
-          <p:cNvPr id="9" name="Shape 7"/>
+        </p:txBody>
+      </p:sp>
+      <p:sp>
+        <p:nvSpPr>
+          <p:cNvPr id="7" name="Shape 5"/>
           <p:cNvSpPr/>
           <p:nvPr/>
         </p:nvSpPr>
         <p:spPr>
           <a:xfrm>
-            <a:off x="6766560" y="1417320"/>
-            <a:ext cx="5394960" cy="7315"/>
-          </a:xfrm>
-          <a:prstGeom prst="rect">
-            <a:avLst/>
-          </a:prstGeom>
-          <a:solidFill>
-            <a:srgbClr val="111111"/>
-          </a:solidFill>
-          <a:ln w="12700">
-            <a:solidFill>
-              <a:srgbClr val="111111"/>
-            </a:solidFill>
-            <a:prstDash val="solid"/>
-          </a:ln>
-        </p:spPr>
-      </p:sp>
-      <p:sp>
-        <p:nvSpPr>
-          <p:cNvPr id="10" name="Text 8"/>
-          <p:cNvSpPr txBox="1"/>
-          <p:nvPr/>
-        </p:nvSpPr>
-        <p:spPr>
-          <a:xfrm>
-            <a:off x="6766560" y="1627632"/>
-            <a:ext cx="5394960" cy="4206240"/>
-          </a:xfrm>
-          <a:prstGeom prst="rect">
-            <a:avLst/>
-          </a:prstGeom>
-          <a:noFill/>
-          <a:ln/>
-        </p:spPr>
-        <p:txBody>
-          <a:bodyPr wrap="square" lIns="0" tIns="0" rIns="0" bIns="0" rtlCol="0" anchor="t"/>
-          <a:lstStyle/>
-          <a:p>
-            <a:pPr indent="0" marL="0">
-              <a:lnSpc>
-                <a:spcPts val="1500"/>
-              </a:lnSpc>
-              <a:spcAft>
-                <a:spcPts val="1100"/>
-              </a:spcAft>
-              <a:buNone/>
-            </a:pPr>
-            <a:r>
-              <a:rPr lang="en-US" sz="1050" dirty="0">
-                <a:solidFill>
-                  <a:srgbClr val="FF4D23"/>
-                </a:solidFill>
-                <a:latin typeface="Arial" pitchFamily="34" charset="0"/>
-                <a:ea typeface="Arial" pitchFamily="34" charset="-122"/>
-                <a:cs typeface="Arial" pitchFamily="34" charset="-120"/>
-              </a:rPr>
-              <a:t>– </a:t>
-            </a:r>
-            <a:pPr indent="0" marL="0">
-              <a:lnSpc>
-                <a:spcPts val="1500"/>
-              </a:lnSpc>
-              <a:spcAft>
-                <a:spcPts val="1100"/>
-              </a:spcAft>
-              <a:buNone/>
-            </a:pPr>
-            <a:r>
-              <a:rPr lang="en-US" sz="1050" dirty="0">
-                <a:solidFill>
-                  <a:srgbClr val="333333"/>
-                </a:solidFill>
-                <a:latin typeface="Arial" pitchFamily="34" charset="0"/>
-                <a:ea typeface="Arial" pitchFamily="34" charset="-122"/>
-                <a:cs typeface="Arial" pitchFamily="34" charset="-120"/>
-              </a:rPr>
-              <a:t>Расчёт машино-мест по нормативу для гостиниц, от утверждённой ёмкости номерного фонда.</a:t>
-            </a:r>
-            <a:endParaRPr lang="en-US" sz="1050" dirty="0"/>
-          </a:p>
-          <a:p>
-            <a:pPr indent="0" marL="0">
-              <a:lnSpc>
-                <a:spcPts val="1500"/>
-              </a:lnSpc>
-              <a:spcAft>
-                <a:spcPts val="1100"/>
-              </a:spcAft>
-              <a:buNone/>
-            </a:pPr>
-            <a:r>
-              <a:rPr lang="en-US" sz="1050" dirty="0">
-                <a:solidFill>
-                  <a:srgbClr val="FF4D23"/>
-                </a:solidFill>
-                <a:latin typeface="Arial" pitchFamily="34" charset="0"/>
-                <a:ea typeface="Arial" pitchFamily="34" charset="-122"/>
-                <a:cs typeface="Arial" pitchFamily="34" charset="-120"/>
-              </a:rPr>
-              <a:t>– </a:t>
-            </a:r>
-            <a:pPr indent="0" marL="0">
-              <a:lnSpc>
-                <a:spcPts val="1500"/>
-              </a:lnSpc>
-              <a:spcAft>
-                <a:spcPts val="1100"/>
-              </a:spcAft>
-              <a:buNone/>
-            </a:pPr>
-            <a:r>
-              <a:rPr lang="en-US" sz="1050" dirty="0">
-                <a:solidFill>
-                  <a:srgbClr val="333333"/>
-                </a:solidFill>
-                <a:latin typeface="Arial" pitchFamily="34" charset="0"/>
-                <a:ea typeface="Arial" pitchFamily="34" charset="-122"/>
-                <a:cs typeface="Arial" pitchFamily="34" charset="-120"/>
-              </a:rPr>
-              <a:t>Баланс территории раздельно: озеленение, покрытия, проезды, площадки.</a:t>
-            </a:r>
-            <a:endParaRPr lang="en-US" sz="1050" dirty="0"/>
-          </a:p>
-          <a:p>
-            <a:pPr indent="0" marL="0">
-              <a:lnSpc>
-                <a:spcPts val="1500"/>
-              </a:lnSpc>
-              <a:spcAft>
-                <a:spcPts val="1100"/>
-              </a:spcAft>
-              <a:buNone/>
-            </a:pPr>
-            <a:r>
-              <a:rPr lang="en-US" sz="1050" dirty="0">
-                <a:solidFill>
-                  <a:srgbClr val="FF4D23"/>
-                </a:solidFill>
-                <a:latin typeface="Arial" pitchFamily="34" charset="0"/>
-                <a:ea typeface="Arial" pitchFamily="34" charset="-122"/>
-                <a:cs typeface="Arial" pitchFamily="34" charset="-120"/>
-              </a:rPr>
-              <a:t>– </a:t>
-            </a:r>
-            <a:pPr indent="0" marL="0">
-              <a:lnSpc>
-                <a:spcPts val="1500"/>
-              </a:lnSpc>
-              <a:spcAft>
-                <a:spcPts val="1100"/>
-              </a:spcAft>
-              <a:buNone/>
-            </a:pPr>
-            <a:r>
-              <a:rPr lang="en-US" sz="1050" dirty="0">
-                <a:solidFill>
-                  <a:srgbClr val="333333"/>
-                </a:solidFill>
-                <a:latin typeface="Arial" pitchFamily="34" charset="0"/>
-                <a:ea typeface="Arial" pitchFamily="34" charset="-122"/>
-                <a:cs typeface="Arial" pitchFamily="34" charset="-120"/>
-              </a:rPr>
-              <a:t>Инженерное обеспечение: технические условия на воду, канализацию, тепло и электроснабжение.</a:t>
-            </a:r>
-            <a:endParaRPr lang="en-US" sz="1050" dirty="0"/>
-          </a:p>
-          <a:p>
-            <a:pPr indent="0" marL="0">
-              <a:lnSpc>
-                <a:spcPts val="1500"/>
-              </a:lnSpc>
-              <a:spcAft>
-                <a:spcPts val="1100"/>
-              </a:spcAft>
-              <a:buNone/>
-            </a:pPr>
-            <a:r>
-              <a:rPr lang="en-US" sz="1050" dirty="0">
-                <a:solidFill>
-                  <a:srgbClr val="FF4D23"/>
-                </a:solidFill>
-                <a:latin typeface="Arial" pitchFamily="34" charset="0"/>
-                <a:ea typeface="Arial" pitchFamily="34" charset="-122"/>
-                <a:cs typeface="Arial" pitchFamily="34" charset="-120"/>
-              </a:rPr>
-              <a:t>– </a:t>
-            </a:r>
-            <a:pPr indent="0" marL="0">
-              <a:lnSpc>
-                <a:spcPts val="1500"/>
-              </a:lnSpc>
-              <a:spcAft>
-                <a:spcPts val="1100"/>
-              </a:spcAft>
-              <a:buNone/>
-            </a:pPr>
-            <a:r>
-              <a:rPr lang="en-US" sz="1050" dirty="0">
-                <a:solidFill>
-                  <a:srgbClr val="333333"/>
-                </a:solidFill>
-                <a:latin typeface="Arial" pitchFamily="34" charset="0"/>
-                <a:ea typeface="Arial" pitchFamily="34" charset="-122"/>
-                <a:cs typeface="Arial" pitchFamily="34" charset="-120"/>
-              </a:rPr>
-              <a:t>Расчёты инсоляции и шума по отношению к смежным землепользованиям.</a:t>
-            </a:r>
-            <a:endParaRPr lang="en-US" sz="1050" dirty="0"/>
-          </a:p>
-          <a:p>
-            <a:pPr indent="0" marL="0">
-              <a:lnSpc>
-                <a:spcPts val="1500"/>
-              </a:lnSpc>
-              <a:spcAft>
-                <a:spcPts val="1100"/>
-              </a:spcAft>
-              <a:buNone/>
-            </a:pPr>
-            <a:r>
-              <a:rPr lang="en-US" sz="1050" dirty="0">
-                <a:solidFill>
-                  <a:srgbClr val="FF4D23"/>
-                </a:solidFill>
-                <a:latin typeface="Arial" pitchFamily="34" charset="0"/>
-                <a:ea typeface="Arial" pitchFamily="34" charset="-122"/>
-                <a:cs typeface="Arial" pitchFamily="34" charset="-120"/>
-              </a:rPr>
-              <a:t>– </a:t>
-            </a:r>
-            <a:pPr indent="0" marL="0">
-              <a:lnSpc>
-                <a:spcPts val="1500"/>
-              </a:lnSpc>
-              <a:spcAft>
-                <a:spcPts val="1100"/>
-              </a:spcAft>
-              <a:buNone/>
-            </a:pPr>
-            <a:r>
-              <a:rPr lang="en-US" sz="1050" dirty="0">
-                <a:solidFill>
-                  <a:srgbClr val="333333"/>
-                </a:solidFill>
-                <a:latin typeface="Arial" pitchFamily="34" charset="0"/>
-                <a:ea typeface="Arial" pitchFamily="34" charset="-122"/>
-                <a:cs typeface="Arial" pitchFamily="34" charset="-120"/>
-              </a:rPr>
-              <a:t>Планировочные решения этажей и итоговая ёмкость номерного фонда.</a:t>
-            </a:r>
-            <a:endParaRPr lang="en-US" sz="1050" dirty="0"/>
-          </a:p>
-        </p:txBody>
-      </p:sp>
-      <p:sp>
-        <p:nvSpPr>
-          <p:cNvPr id="11" name="Shape 9"/>
-          <p:cNvSpPr/>
-          <p:nvPr/>
-        </p:nvSpPr>
-        <p:spPr>
-          <a:xfrm>
-            <a:off x="502920" y="4892040"/>
-            <a:ext cx="11183112" cy="7315"/>
+            <a:off x="502920" y="4206240"/>
+            <a:ext cx="3794760" cy="7315"/>
           </a:xfrm>
           <a:prstGeom prst="rect">
             <a:avLst/>
@@ -6242,14 +6009,14 @@
       </p:sp>
       <p:sp>
         <p:nvSpPr>
-          <p:cNvPr id="12" name="Text 10"/>
-          <p:cNvSpPr txBox="1"/>
-          <p:nvPr/>
-        </p:nvSpPr>
-        <p:spPr>
-          <a:xfrm>
-            <a:off x="502920" y="5029200"/>
-            <a:ext cx="5486400" cy="201168"/>
+          <p:cNvPr id="8" name="Text 6"/>
+          <p:cNvSpPr txBox="1"/>
+          <p:nvPr/>
+        </p:nvSpPr>
+        <p:spPr>
+          <a:xfrm>
+            <a:off x="502920" y="4334256"/>
+            <a:ext cx="3794760" cy="201168"/>
           </a:xfrm>
           <a:prstGeom prst="rect">
             <a:avLst/>
@@ -6273,7 +6040,7 @@
                 <a:ea typeface="Arial" pitchFamily="34" charset="-122"/>
                 <a:cs typeface="Arial" pitchFamily="34" charset="-120"/>
               </a:rPr>
-              <a:t>ПОКАЗАТЕЛИ, ПРОВЕРЯЕМЫЕ ГРАДОСТРОИТЕЛЬНЫМ СОВЕТОМ</a:t>
+              <a:t>МАШИНО-МЕСТА</a:t>
             </a:r>
             <a:endParaRPr lang="en-US" sz="850" dirty="0"/>
           </a:p>
@@ -6281,14 +6048,83 @@
       </p:sp>
       <p:sp>
         <p:nvSpPr>
-          <p:cNvPr id="13" name="Text 11"/>
-          <p:cNvSpPr txBox="1"/>
-          <p:nvPr/>
-        </p:nvSpPr>
-        <p:spPr>
-          <a:xfrm>
-            <a:off x="502920" y="5349240"/>
-            <a:ext cx="2521458" cy="402336"/>
+          <p:cNvPr id="9" name="Text 7"/>
+          <p:cNvSpPr txBox="1"/>
+          <p:nvPr/>
+        </p:nvSpPr>
+        <p:spPr>
+          <a:xfrm>
+            <a:off x="502920" y="4590288"/>
+            <a:ext cx="3794760" cy="777240"/>
+          </a:xfrm>
+          <a:prstGeom prst="rect">
+            <a:avLst/>
+          </a:prstGeom>
+          <a:noFill/>
+          <a:ln/>
+        </p:spPr>
+        <p:txBody>
+          <a:bodyPr wrap="square" lIns="0" tIns="0" rIns="0" bIns="0" rtlCol="0" anchor="t"/>
+          <a:lstStyle/>
+          <a:p>
+            <a:pPr indent="0" marL="0">
+              <a:lnSpc>
+                <a:spcPts val="1400"/>
+              </a:lnSpc>
+              <a:buNone/>
+            </a:pPr>
+            <a:r>
+              <a:rPr lang="en-US" sz="1000" dirty="0">
+                <a:solidFill>
+                  <a:srgbClr val="333333"/>
+                </a:solidFill>
+                <a:latin typeface="Arial" pitchFamily="34" charset="0"/>
+                <a:ea typeface="Arial" pitchFamily="34" charset="-122"/>
+                <a:cs typeface="Arial" pitchFamily="34" charset="-120"/>
+              </a:rPr>
+              <a:t>Количество и тип парковки определяются расчётом по нормативу к утверждённой ёмкости номерного фонда на стадии эскизного проекта.</a:t>
+            </a:r>
+            <a:endParaRPr lang="en-US" sz="1000" dirty="0"/>
+          </a:p>
+        </p:txBody>
+      </p:sp>
+      <p:sp>
+        <p:nvSpPr>
+          <p:cNvPr id="10" name="Shape 8"/>
+          <p:cNvSpPr/>
+          <p:nvPr/>
+        </p:nvSpPr>
+        <p:spPr>
+          <a:xfrm>
+            <a:off x="502920" y="5440680"/>
+            <a:ext cx="2468880" cy="310896"/>
+          </a:xfrm>
+          <a:prstGeom prst="roundRect">
+            <a:avLst>
+              <a:gd name="adj" fmla="val 17647"/>
+            </a:avLst>
+          </a:prstGeom>
+          <a:solidFill>
+            <a:srgbClr val="FFFFFF"/>
+          </a:solidFill>
+          <a:ln w="9525">
+            <a:solidFill>
+              <a:srgbClr val="FF4D23"/>
+            </a:solidFill>
+            <a:prstDash val="solid"/>
+          </a:ln>
+        </p:spPr>
+      </p:sp>
+      <p:sp>
+        <p:nvSpPr>
+          <p:cNvPr id="11" name="Text 9"/>
+          <p:cNvSpPr txBox="1"/>
+          <p:nvPr/>
+        </p:nvSpPr>
+        <p:spPr>
+          <a:xfrm>
+            <a:off x="502920" y="5440680"/>
+            <a:ext cx="2468880" cy="310896"/>
           </a:xfrm>
           <a:prstGeom prst="rect">
             <a:avLst/>
@@ -6300,25 +6136,11 @@
           <a:bodyPr wrap="square" lIns="0" tIns="0" rIns="0" bIns="0" rtlCol="0" anchor="ctr"/>
           <a:lstStyle/>
           <a:p>
-            <a:pPr indent="0" marL="0">
-              <a:buNone/>
-            </a:pPr>
-            <a:r>
-              <a:rPr lang="en-US" sz="2200" b="1" dirty="0">
-                <a:solidFill>
-                  <a:srgbClr val="111111"/>
-                </a:solidFill>
-                <a:latin typeface="Arial" pitchFamily="34" charset="0"/>
-                <a:ea typeface="Arial" pitchFamily="34" charset="-122"/>
-                <a:cs typeface="Arial" pitchFamily="34" charset="-120"/>
-              </a:rPr>
-              <a:t>5</a:t>
-            </a:r>
-            <a:pPr indent="0" marL="0">
-              <a:buNone/>
-            </a:pPr>
-            <a:r>
-              <a:rPr lang="en-US" sz="1100" b="1" dirty="0">
+            <a:pPr algn="ctr" indent="0" marL="0">
+              <a:buNone/>
+            </a:pPr>
+            <a:r>
+              <a:rPr lang="en-US" sz="900" i="1" dirty="0">
                 <a:solidFill>
                   <a:srgbClr val="FF4D23"/>
                 </a:solidFill>
@@ -6326,331 +6148,15 @@
                 <a:ea typeface="Arial" pitchFamily="34" charset="-122"/>
                 <a:cs typeface="Arial" pitchFamily="34" charset="-120"/>
               </a:rPr>
-              <a:t> этажей</a:t>
-            </a:r>
-            <a:endParaRPr lang="en-US" sz="2200" dirty="0"/>
-          </a:p>
-        </p:txBody>
-      </p:sp>
-      <p:sp>
-        <p:nvSpPr>
-          <p:cNvPr id="14" name="Text 12"/>
-          <p:cNvSpPr txBox="1"/>
-          <p:nvPr/>
-        </p:nvSpPr>
-        <p:spPr>
-          <a:xfrm>
-            <a:off x="502920" y="5769864"/>
-            <a:ext cx="2521458" cy="384048"/>
-          </a:xfrm>
-          <a:prstGeom prst="rect">
-            <a:avLst/>
-          </a:prstGeom>
-          <a:noFill/>
-          <a:ln/>
-        </p:spPr>
-        <p:txBody>
-          <a:bodyPr wrap="square" lIns="0" tIns="0" rIns="0" bIns="0" rtlCol="0" anchor="t"/>
-          <a:lstStyle/>
-          <a:p>
-            <a:pPr indent="0" marL="0">
-              <a:lnSpc>
-                <a:spcPts val="1100"/>
-              </a:lnSpc>
-              <a:buNone/>
-            </a:pPr>
-            <a:r>
-              <a:rPr lang="en-US" sz="800" spc="30" kern="0" dirty="0">
-                <a:solidFill>
-                  <a:srgbClr val="8A8A8A"/>
-                </a:solidFill>
-                <a:latin typeface="Arial" pitchFamily="34" charset="0"/>
-                <a:ea typeface="Arial" pitchFamily="34" charset="-122"/>
-                <a:cs typeface="Arial" pitchFamily="34" charset="-120"/>
-              </a:rPr>
-              <a:t>ЭТАЖНОСТЬ ОБОИХ КОРПУСОВ</a:t>
-            </a:r>
-            <a:endParaRPr lang="en-US" sz="800" dirty="0"/>
-          </a:p>
-        </p:txBody>
-      </p:sp>
-      <p:sp>
-        <p:nvSpPr>
-          <p:cNvPr id="15" name="Text 13"/>
-          <p:cNvSpPr txBox="1"/>
-          <p:nvPr/>
-        </p:nvSpPr>
-        <p:spPr>
-          <a:xfrm>
-            <a:off x="3298698" y="5349240"/>
-            <a:ext cx="2521458" cy="402336"/>
-          </a:xfrm>
-          <a:prstGeom prst="rect">
-            <a:avLst/>
-          </a:prstGeom>
-          <a:noFill/>
-          <a:ln/>
-        </p:spPr>
-        <p:txBody>
-          <a:bodyPr wrap="square" lIns="0" tIns="0" rIns="0" bIns="0" rtlCol="0" anchor="ctr"/>
-          <a:lstStyle/>
-          <a:p>
-            <a:pPr indent="0" marL="0">
-              <a:buNone/>
-            </a:pPr>
-            <a:r>
-              <a:rPr lang="en-US" sz="2200" b="1" dirty="0">
-                <a:solidFill>
-                  <a:srgbClr val="111111"/>
-                </a:solidFill>
-                <a:latin typeface="Arial" pitchFamily="34" charset="0"/>
-                <a:ea typeface="Arial" pitchFamily="34" charset="-122"/>
-                <a:cs typeface="Arial" pitchFamily="34" charset="-120"/>
-              </a:rPr>
-              <a:t>35,3</a:t>
-            </a:r>
-            <a:pPr indent="0" marL="0">
-              <a:buNone/>
-            </a:pPr>
-            <a:r>
-              <a:rPr lang="en-US" sz="1100" b="1" dirty="0">
-                <a:solidFill>
-                  <a:srgbClr val="FF4D23"/>
-                </a:solidFill>
-                <a:latin typeface="Arial" pitchFamily="34" charset="0"/>
-                <a:ea typeface="Arial" pitchFamily="34" charset="-122"/>
-                <a:cs typeface="Arial" pitchFamily="34" charset="-120"/>
-              </a:rPr>
-              <a:t> %</a:t>
-            </a:r>
-            <a:endParaRPr lang="en-US" sz="2200" dirty="0"/>
-          </a:p>
-        </p:txBody>
-      </p:sp>
-      <p:sp>
-        <p:nvSpPr>
-          <p:cNvPr id="16" name="Text 14"/>
-          <p:cNvSpPr txBox="1"/>
-          <p:nvPr/>
-        </p:nvSpPr>
-        <p:spPr>
-          <a:xfrm>
-            <a:off x="3298698" y="5769864"/>
-            <a:ext cx="2521458" cy="384048"/>
-          </a:xfrm>
-          <a:prstGeom prst="rect">
-            <a:avLst/>
-          </a:prstGeom>
-          <a:noFill/>
-          <a:ln/>
-        </p:spPr>
-        <p:txBody>
-          <a:bodyPr wrap="square" lIns="0" tIns="0" rIns="0" bIns="0" rtlCol="0" anchor="t"/>
-          <a:lstStyle/>
-          <a:p>
-            <a:pPr indent="0" marL="0">
-              <a:lnSpc>
-                <a:spcPts val="1100"/>
-              </a:lnSpc>
-              <a:buNone/>
-            </a:pPr>
-            <a:r>
-              <a:rPr lang="en-US" sz="800" spc="30" kern="0" dirty="0">
-                <a:solidFill>
-                  <a:srgbClr val="8A8A8A"/>
-                </a:solidFill>
-                <a:latin typeface="Arial" pitchFamily="34" charset="0"/>
-                <a:ea typeface="Arial" pitchFamily="34" charset="-122"/>
-                <a:cs typeface="Arial" pitchFamily="34" charset="-120"/>
-              </a:rPr>
-              <a:t>КОЭФФИЦИЕНТ ЗАСТРОЙКИ</a:t>
-            </a:r>
-            <a:endParaRPr lang="en-US" sz="800" dirty="0"/>
-          </a:p>
-        </p:txBody>
-      </p:sp>
-      <p:sp>
-        <p:nvSpPr>
-          <p:cNvPr id="17" name="Text 15"/>
-          <p:cNvSpPr txBox="1"/>
-          <p:nvPr/>
-        </p:nvSpPr>
-        <p:spPr>
-          <a:xfrm>
-            <a:off x="6094476" y="5349240"/>
-            <a:ext cx="2521458" cy="402336"/>
-          </a:xfrm>
-          <a:prstGeom prst="rect">
-            <a:avLst/>
-          </a:prstGeom>
-          <a:noFill/>
-          <a:ln/>
-        </p:spPr>
-        <p:txBody>
-          <a:bodyPr wrap="square" lIns="0" tIns="0" rIns="0" bIns="0" rtlCol="0" anchor="ctr"/>
-          <a:lstStyle/>
-          <a:p>
-            <a:pPr indent="0" marL="0">
-              <a:buNone/>
-            </a:pPr>
-            <a:r>
-              <a:rPr lang="en-US" sz="2200" b="1" dirty="0">
-                <a:solidFill>
-                  <a:srgbClr val="111111"/>
-                </a:solidFill>
-                <a:latin typeface="Arial" pitchFamily="34" charset="0"/>
-                <a:ea typeface="Arial" pitchFamily="34" charset="-122"/>
-                <a:cs typeface="Arial" pitchFamily="34" charset="-120"/>
-              </a:rPr>
-              <a:t>1,22</a:t>
-            </a:r>
-            <a:pPr indent="0" marL="0">
-              <a:buNone/>
-            </a:pPr>
-            <a:endParaRPr lang="en-US" sz="2200" dirty="0"/>
-          </a:p>
-        </p:txBody>
-      </p:sp>
-      <p:sp>
-        <p:nvSpPr>
-          <p:cNvPr id="18" name="Text 16"/>
-          <p:cNvSpPr txBox="1"/>
-          <p:nvPr/>
-        </p:nvSpPr>
-        <p:spPr>
-          <a:xfrm>
-            <a:off x="6094476" y="5769864"/>
-            <a:ext cx="2521458" cy="384048"/>
-          </a:xfrm>
-          <a:prstGeom prst="rect">
-            <a:avLst/>
-          </a:prstGeom>
-          <a:noFill/>
-          <a:ln/>
-        </p:spPr>
-        <p:txBody>
-          <a:bodyPr wrap="square" lIns="0" tIns="0" rIns="0" bIns="0" rtlCol="0" anchor="t"/>
-          <a:lstStyle/>
-          <a:p>
-            <a:pPr indent="0" marL="0">
-              <a:lnSpc>
-                <a:spcPts val="1100"/>
-              </a:lnSpc>
-              <a:buNone/>
-            </a:pPr>
-            <a:r>
-              <a:rPr lang="en-US" sz="800" spc="30" kern="0" dirty="0">
-                <a:solidFill>
-                  <a:srgbClr val="8A8A8A"/>
-                </a:solidFill>
-                <a:latin typeface="Arial" pitchFamily="34" charset="0"/>
-                <a:ea typeface="Arial" pitchFamily="34" charset="-122"/>
-                <a:cs typeface="Arial" pitchFamily="34" charset="-120"/>
-              </a:rPr>
-              <a:t>КОЭФФИЦИЕНТ ИСПОЛЬЗОВАНИЯ ТЕРРИТОРИИ</a:t>
-            </a:r>
-            <a:endParaRPr lang="en-US" sz="800" dirty="0"/>
-          </a:p>
-        </p:txBody>
-      </p:sp>
-      <p:sp>
-        <p:nvSpPr>
-          <p:cNvPr id="19" name="Text 17"/>
-          <p:cNvSpPr txBox="1"/>
-          <p:nvPr/>
-        </p:nvSpPr>
-        <p:spPr>
-          <a:xfrm>
-            <a:off x="8890254" y="5349240"/>
-            <a:ext cx="2521458" cy="402336"/>
-          </a:xfrm>
-          <a:prstGeom prst="rect">
-            <a:avLst/>
-          </a:prstGeom>
-          <a:noFill/>
-          <a:ln/>
-        </p:spPr>
-        <p:txBody>
-          <a:bodyPr wrap="square" lIns="0" tIns="0" rIns="0" bIns="0" rtlCol="0" anchor="ctr"/>
-          <a:lstStyle/>
-          <a:p>
-            <a:pPr indent="0" marL="0">
-              <a:buNone/>
-            </a:pPr>
-            <a:r>
-              <a:rPr lang="en-US" sz="2200" b="1" dirty="0">
-                <a:solidFill>
-                  <a:srgbClr val="111111"/>
-                </a:solidFill>
-                <a:latin typeface="Arial" pitchFamily="34" charset="0"/>
-                <a:ea typeface="Arial" pitchFamily="34" charset="-122"/>
-                <a:cs typeface="Arial" pitchFamily="34" charset="-120"/>
-              </a:rPr>
-              <a:t>64,7</a:t>
-            </a:r>
-            <a:pPr indent="0" marL="0">
-              <a:buNone/>
-            </a:pPr>
-            <a:r>
-              <a:rPr lang="en-US" sz="1100" b="1" dirty="0">
-                <a:solidFill>
-                  <a:srgbClr val="FF4D23"/>
-                </a:solidFill>
-                <a:latin typeface="Arial" pitchFamily="34" charset="0"/>
-                <a:ea typeface="Arial" pitchFamily="34" charset="-122"/>
-                <a:cs typeface="Arial" pitchFamily="34" charset="-120"/>
-              </a:rPr>
-              <a:t> %</a:t>
-            </a:r>
-            <a:endParaRPr lang="en-US" sz="2200" dirty="0"/>
-          </a:p>
-        </p:txBody>
-      </p:sp>
-      <p:sp>
-        <p:nvSpPr>
-          <p:cNvPr id="20" name="Text 18"/>
-          <p:cNvSpPr txBox="1"/>
-          <p:nvPr/>
-        </p:nvSpPr>
-        <p:spPr>
-          <a:xfrm>
-            <a:off x="8890254" y="5769864"/>
-            <a:ext cx="2521458" cy="384048"/>
-          </a:xfrm>
-          <a:prstGeom prst="rect">
-            <a:avLst/>
-          </a:prstGeom>
-          <a:noFill/>
-          <a:ln/>
-        </p:spPr>
-        <p:txBody>
-          <a:bodyPr wrap="square" lIns="0" tIns="0" rIns="0" bIns="0" rtlCol="0" anchor="t"/>
-          <a:lstStyle/>
-          <a:p>
-            <a:pPr indent="0" marL="0">
-              <a:lnSpc>
-                <a:spcPts val="1100"/>
-              </a:lnSpc>
-              <a:buNone/>
-            </a:pPr>
-            <a:r>
-              <a:rPr lang="en-US" sz="800" spc="30" kern="0" dirty="0">
-                <a:solidFill>
-                  <a:srgbClr val="8A8A8A"/>
-                </a:solidFill>
-                <a:latin typeface="Arial" pitchFamily="34" charset="0"/>
-                <a:ea typeface="Arial" pitchFamily="34" charset="-122"/>
-                <a:cs typeface="Arial" pitchFamily="34" charset="-120"/>
-              </a:rPr>
-              <a:t>СВОБОДНО ОТ ЗАСТРОЙКИ</a:t>
-            </a:r>
-            <a:endParaRPr lang="en-US" sz="800" dirty="0"/>
+              <a:t>вписать: ____ машино-мест</a:t>
+            </a:r>
+            <a:endParaRPr lang="en-US" sz="900" dirty="0"/>
           </a:p>
         </p:txBody>
       </p:sp>
       <p:pic>
         <p:nvPicPr>
-          <p:cNvPr id="21" name="Image 0" descr="/tmp/claude-0/-home-user-most/9fc1ec31-3c64-5a82-aadb-ddb23fff6e53/scratchpad/assets/logo_most.png">    </p:cNvPr>
+          <p:cNvPr id="12" name="Image 0" descr="/tmp/claude-0/-home-user-most/9fc1ec31-3c64-5a82-aadb-ddb23fff6e53/scratchpad/assets/entrance.jpg">    </p:cNvPr>
           <p:cNvPicPr>
             <a:picLocks noChangeAspect="1"/>
           </p:cNvPicPr>
@@ -6664,6 +6170,69 @@
         </p:blipFill>
         <p:spPr>
           <a:xfrm>
+            <a:off x="4709160" y="960120"/>
+            <a:ext cx="6949440" cy="4636008"/>
+          </a:xfrm>
+          <a:prstGeom prst="rect">
+            <a:avLst/>
+          </a:prstGeom>
+        </p:spPr>
+      </p:pic>
+      <p:sp>
+        <p:nvSpPr>
+          <p:cNvPr id="13" name="Text 10"/>
+          <p:cNvSpPr txBox="1"/>
+          <p:nvPr/>
+        </p:nvSpPr>
+        <p:spPr>
+          <a:xfrm>
+            <a:off x="4709160" y="5669280"/>
+            <a:ext cx="6949440" cy="219456"/>
+          </a:xfrm>
+          <a:prstGeom prst="rect">
+            <a:avLst/>
+          </a:prstGeom>
+          <a:noFill/>
+          <a:ln/>
+        </p:spPr>
+        <p:txBody>
+          <a:bodyPr wrap="square" lIns="0" tIns="0" rIns="0" bIns="0" rtlCol="0" anchor="ctr"/>
+          <a:lstStyle/>
+          <a:p>
+            <a:pPr indent="0" marL="0">
+              <a:buNone/>
+            </a:pPr>
+            <a:r>
+              <a:rPr lang="en-US" sz="800" dirty="0">
+                <a:solidFill>
+                  <a:srgbClr val="8A8A8A"/>
+                </a:solidFill>
+                <a:latin typeface="Arial" pitchFamily="34" charset="0"/>
+                <a:ea typeface="Arial" pitchFamily="34" charset="-122"/>
+                <a:cs typeface="Arial" pitchFamily="34" charset="-120"/>
+              </a:rPr>
+              <a:t>Фрагмент генплана: узел въезда в западной части участка.</a:t>
+            </a:r>
+            <a:endParaRPr lang="en-US" sz="800" dirty="0"/>
+          </a:p>
+        </p:txBody>
+      </p:sp>
+      <p:pic>
+        <p:nvPicPr>
+          <p:cNvPr id="14" name="Image 1" descr="/tmp/claude-0/-home-user-most/9fc1ec31-3c64-5a82-aadb-ddb23fff6e53/scratchpad/assets/logo_most.png">    </p:cNvPr>
+          <p:cNvPicPr>
+            <a:picLocks noChangeAspect="1"/>
+          </p:cNvPicPr>
+          <p:nvPr/>
+        </p:nvPicPr>
+        <p:blipFill>
+          <a:blip r:embed="rId2"/>
+          <a:stretch>
+            <a:fillRect/>
+          </a:stretch>
+        </p:blipFill>
+        <p:spPr>
+          <a:xfrm>
             <a:off x="11356848" y="5925312"/>
             <a:ext cx="630936" cy="704088"/>
           </a:xfrm>
@@ -6674,7 +6243,7 @@
       </p:pic>
       <p:sp>
         <p:nvSpPr>
-          <p:cNvPr id="22" name="Text 19"/>
+          <p:cNvPr id="15" name="Text 11"/>
           <p:cNvSpPr txBox="1"/>
           <p:nvPr/>
         </p:nvSpPr>
@@ -6776,7 +6345,7 @@
                 <a:ea typeface="Arial" pitchFamily="34" charset="-122"/>
                 <a:cs typeface="Arial" pitchFamily="34" charset="-120"/>
               </a:rPr>
-              <a:t>ЭФФЕКТ</a:t>
+              <a:t>РЕГЛАМЕНТЫ</a:t>
             </a:r>
             <a:endParaRPr lang="en-US" sz="950" dirty="0"/>
           </a:p>
@@ -6815,7 +6384,7 @@
                 <a:ea typeface="Arial" pitchFamily="34" charset="-122"/>
                 <a:cs typeface="Arial" pitchFamily="34" charset="-120"/>
               </a:rPr>
-              <a:t>Социально-экономический эффект</a:t>
+              <a:t>Статус проработки</a:t>
             </a:r>
             <a:endParaRPr lang="en-US" sz="900" dirty="0"/>
           </a:p>
@@ -6854,7 +6423,7 @@
                 <a:ea typeface="Arial" pitchFamily="34" charset="-122"/>
                 <a:cs typeface="Arial" pitchFamily="34" charset="-120"/>
               </a:rPr>
-              <a:t>ДЛЯ ГОРОДА</a:t>
+              <a:t>НОРМЫ</a:t>
             </a:r>
             <a:endParaRPr lang="en-US" sz="950" dirty="0"/>
           </a:p>
@@ -6869,7 +6438,7 @@
         <p:spPr>
           <a:xfrm>
             <a:off x="502920" y="1051560"/>
-            <a:ext cx="3383280" cy="402336"/>
+            <a:ext cx="5394960" cy="256032"/>
           </a:xfrm>
           <a:prstGeom prst="rect">
             <a:avLst/>
@@ -6885,33 +6454,55 @@
               <a:buNone/>
             </a:pPr>
             <a:r>
-              <a:rPr lang="en-US" sz="2400" b="1" dirty="0">
-                <a:solidFill>
-                  <a:srgbClr val="111111"/>
-                </a:solidFill>
-                <a:latin typeface="Arial" pitchFamily="34" charset="0"/>
-                <a:ea typeface="Arial" pitchFamily="34" charset="-122"/>
-                <a:cs typeface="Arial" pitchFamily="34" charset="-120"/>
-              </a:rPr>
-              <a:t>260 – 300</a:t>
-            </a:r>
-            <a:pPr indent="0" marL="0">
-              <a:buNone/>
-            </a:pPr>
-            <a:endParaRPr lang="en-US" sz="2400" dirty="0"/>
-          </a:p>
-        </p:txBody>
-      </p:sp>
-      <p:sp>
-        <p:nvSpPr>
-          <p:cNvPr id="6" name="Text 4"/>
-          <p:cNvSpPr txBox="1"/>
-          <p:nvPr/>
-        </p:nvSpPr>
-        <p:spPr>
-          <a:xfrm>
-            <a:off x="502920" y="1472184"/>
-            <a:ext cx="3383280" cy="457200"/>
+              <a:rPr lang="en-US" sz="1200" b="1" spc="30" kern="0" dirty="0">
+                <a:solidFill>
+                  <a:srgbClr val="FF4D23"/>
+                </a:solidFill>
+                <a:latin typeface="Arial" pitchFamily="34" charset="0"/>
+                <a:ea typeface="Arial" pitchFamily="34" charset="-122"/>
+                <a:cs typeface="Arial" pitchFamily="34" charset="-120"/>
+              </a:rPr>
+              <a:t>ПОДТВЕРЖДЕНО ГЕНПЛАНОМ</a:t>
+            </a:r>
+            <a:endParaRPr lang="en-US" sz="1200" dirty="0"/>
+          </a:p>
+        </p:txBody>
+      </p:sp>
+      <p:sp>
+        <p:nvSpPr>
+          <p:cNvPr id="6" name="Shape 4"/>
+          <p:cNvSpPr/>
+          <p:nvPr/>
+        </p:nvSpPr>
+        <p:spPr>
+          <a:xfrm>
+            <a:off x="502920" y="1417320"/>
+            <a:ext cx="5394960" cy="7315"/>
+          </a:xfrm>
+          <a:prstGeom prst="rect">
+            <a:avLst/>
+          </a:prstGeom>
+          <a:solidFill>
+            <a:srgbClr val="111111"/>
+          </a:solidFill>
+          <a:ln w="12700">
+            <a:solidFill>
+              <a:srgbClr val="111111"/>
+            </a:solidFill>
+            <a:prstDash val="solid"/>
+          </a:ln>
+        </p:spPr>
+      </p:sp>
+      <p:sp>
+        <p:nvSpPr>
+          <p:cNvPr id="7" name="Text 5"/>
+          <p:cNvSpPr txBox="1"/>
+          <p:nvPr/>
+        </p:nvSpPr>
+        <p:spPr>
+          <a:xfrm>
+            <a:off x="502920" y="1627632"/>
+            <a:ext cx="5394960" cy="4206240"/>
           </a:xfrm>
           <a:prstGeom prst="rect">
             <a:avLst/>
@@ -6925,35 +6516,230 @@
           <a:p>
             <a:pPr indent="0" marL="0">
               <a:lnSpc>
+                <a:spcPts val="1500"/>
+              </a:lnSpc>
+              <a:spcAft>
                 <a:spcPts val="1100"/>
+              </a:spcAft>
+              <a:buNone/>
+            </a:pPr>
+            <a:r>
+              <a:rPr lang="en-US" sz="1050" dirty="0">
+                <a:solidFill>
+                  <a:srgbClr val="FF4D23"/>
+                </a:solidFill>
+                <a:latin typeface="Arial" pitchFamily="34" charset="0"/>
+                <a:ea typeface="Arial" pitchFamily="34" charset="-122"/>
+                <a:cs typeface="Arial" pitchFamily="34" charset="-120"/>
+              </a:rPr>
+              <a:t>– </a:t>
+            </a:r>
+            <a:pPr indent="0" marL="0">
+              <a:lnSpc>
+                <a:spcPts val="1500"/>
               </a:lnSpc>
-              <a:buNone/>
-            </a:pPr>
-            <a:r>
-              <a:rPr lang="en-US" sz="800" spc="30" kern="0" dirty="0">
-                <a:solidFill>
-                  <a:srgbClr val="8A8A8A"/>
-                </a:solidFill>
-                <a:latin typeface="Arial" pitchFamily="34" charset="0"/>
-                <a:ea typeface="Arial" pitchFamily="34" charset="-122"/>
-                <a:cs typeface="Arial" pitchFamily="34" charset="-120"/>
-              </a:rPr>
-              <a:t>НОМЕРОВ 4 ЗВЕЗДЫ К ФОНДУ АЛМАТЫ (ОЦЕНКА)</a:t>
-            </a:r>
-            <a:endParaRPr lang="en-US" sz="800" dirty="0"/>
-          </a:p>
-        </p:txBody>
-      </p:sp>
-      <p:sp>
-        <p:nvSpPr>
-          <p:cNvPr id="7" name="Text 5"/>
-          <p:cNvSpPr txBox="1"/>
-          <p:nvPr/>
-        </p:nvSpPr>
-        <p:spPr>
-          <a:xfrm>
-            <a:off x="4160520" y="1051560"/>
-            <a:ext cx="3383280" cy="402336"/>
+              <a:spcAft>
+                <a:spcPts val="1100"/>
+              </a:spcAft>
+              <a:buNone/>
+            </a:pPr>
+            <a:r>
+              <a:rPr lang="en-US" sz="1050" dirty="0">
+                <a:solidFill>
+                  <a:srgbClr val="333333"/>
+                </a:solidFill>
+                <a:latin typeface="Arial" pitchFamily="34" charset="0"/>
+                <a:ea typeface="Arial" pitchFamily="34" charset="-122"/>
+                <a:cs typeface="Arial" pitchFamily="34" charset="-120"/>
+              </a:rPr>
+              <a:t>Отступы от границ участка: 6,00 м с запада и юга, 3,00 м с северо-востока, 17,49 м с востока — вынесены на чертёж.</a:t>
+            </a:r>
+            <a:endParaRPr lang="en-US" sz="1050" dirty="0"/>
+          </a:p>
+          <a:p>
+            <a:pPr indent="0" marL="0">
+              <a:lnSpc>
+                <a:spcPts val="1500"/>
+              </a:lnSpc>
+              <a:spcAft>
+                <a:spcPts val="1100"/>
+              </a:spcAft>
+              <a:buNone/>
+            </a:pPr>
+            <a:r>
+              <a:rPr lang="en-US" sz="1050" dirty="0">
+                <a:solidFill>
+                  <a:srgbClr val="FF4D23"/>
+                </a:solidFill>
+                <a:latin typeface="Arial" pitchFamily="34" charset="0"/>
+                <a:ea typeface="Arial" pitchFamily="34" charset="-122"/>
+                <a:cs typeface="Arial" pitchFamily="34" charset="-120"/>
+              </a:rPr>
+              <a:t>– </a:t>
+            </a:r>
+            <a:pPr indent="0" marL="0">
+              <a:lnSpc>
+                <a:spcPts val="1500"/>
+              </a:lnSpc>
+              <a:spcAft>
+                <a:spcPts val="1100"/>
+              </a:spcAft>
+              <a:buNone/>
+            </a:pPr>
+            <a:r>
+              <a:rPr lang="en-US" sz="1050" dirty="0">
+                <a:solidFill>
+                  <a:srgbClr val="333333"/>
+                </a:solidFill>
+                <a:latin typeface="Arial" pitchFamily="34" charset="0"/>
+                <a:ea typeface="Arial" pitchFamily="34" charset="-122"/>
+                <a:cs typeface="Arial" pitchFamily="34" charset="-120"/>
+              </a:rPr>
+              <a:t>Этажность: 5 этажей по обоим корпусам, без превышения высотных отметок соседней застройки.</a:t>
+            </a:r>
+            <a:endParaRPr lang="en-US" sz="1050" dirty="0"/>
+          </a:p>
+          <a:p>
+            <a:pPr indent="0" marL="0">
+              <a:lnSpc>
+                <a:spcPts val="1500"/>
+              </a:lnSpc>
+              <a:spcAft>
+                <a:spcPts val="1100"/>
+              </a:spcAft>
+              <a:buNone/>
+            </a:pPr>
+            <a:r>
+              <a:rPr lang="en-US" sz="1050" dirty="0">
+                <a:solidFill>
+                  <a:srgbClr val="FF4D23"/>
+                </a:solidFill>
+                <a:latin typeface="Arial" pitchFamily="34" charset="0"/>
+                <a:ea typeface="Arial" pitchFamily="34" charset="-122"/>
+                <a:cs typeface="Arial" pitchFamily="34" charset="-120"/>
+              </a:rPr>
+              <a:t>– </a:t>
+            </a:r>
+            <a:pPr indent="0" marL="0">
+              <a:lnSpc>
+                <a:spcPts val="1500"/>
+              </a:lnSpc>
+              <a:spcAft>
+                <a:spcPts val="1100"/>
+              </a:spcAft>
+              <a:buNone/>
+            </a:pPr>
+            <a:r>
+              <a:rPr lang="en-US" sz="1050" dirty="0">
+                <a:solidFill>
+                  <a:srgbClr val="333333"/>
+                </a:solidFill>
+                <a:latin typeface="Arial" pitchFamily="34" charset="0"/>
+                <a:ea typeface="Arial" pitchFamily="34" charset="-122"/>
+                <a:cs typeface="Arial" pitchFamily="34" charset="-120"/>
+              </a:rPr>
+              <a:t>Пожарный проезд: замкнутый кольцевой проезд вокруг пятна застройки.</a:t>
+            </a:r>
+            <a:endParaRPr lang="en-US" sz="1050" dirty="0"/>
+          </a:p>
+          <a:p>
+            <a:pPr indent="0" marL="0">
+              <a:lnSpc>
+                <a:spcPts val="1500"/>
+              </a:lnSpc>
+              <a:spcAft>
+                <a:spcPts val="1100"/>
+              </a:spcAft>
+              <a:buNone/>
+            </a:pPr>
+            <a:r>
+              <a:rPr lang="en-US" sz="1050" dirty="0">
+                <a:solidFill>
+                  <a:srgbClr val="FF4D23"/>
+                </a:solidFill>
+                <a:latin typeface="Arial" pitchFamily="34" charset="0"/>
+                <a:ea typeface="Arial" pitchFamily="34" charset="-122"/>
+                <a:cs typeface="Arial" pitchFamily="34" charset="-120"/>
+              </a:rPr>
+              <a:t>– </a:t>
+            </a:r>
+            <a:pPr indent="0" marL="0">
+              <a:lnSpc>
+                <a:spcPts val="1500"/>
+              </a:lnSpc>
+              <a:spcAft>
+                <a:spcPts val="1100"/>
+              </a:spcAft>
+              <a:buNone/>
+            </a:pPr>
+            <a:r>
+              <a:rPr lang="en-US" sz="1050" dirty="0">
+                <a:solidFill>
+                  <a:srgbClr val="333333"/>
+                </a:solidFill>
+                <a:latin typeface="Arial" pitchFamily="34" charset="0"/>
+                <a:ea typeface="Arial" pitchFamily="34" charset="-122"/>
+                <a:cs typeface="Arial" pitchFamily="34" charset="-120"/>
+              </a:rPr>
+              <a:t>Плотность застройки: 35,3 % участка, коэффициент использования территории 1,22.</a:t>
+            </a:r>
+            <a:endParaRPr lang="en-US" sz="1050" dirty="0"/>
+          </a:p>
+          <a:p>
+            <a:pPr indent="0" marL="0">
+              <a:lnSpc>
+                <a:spcPts val="1500"/>
+              </a:lnSpc>
+              <a:spcAft>
+                <a:spcPts val="1100"/>
+              </a:spcAft>
+              <a:buNone/>
+            </a:pPr>
+            <a:r>
+              <a:rPr lang="en-US" sz="1050" dirty="0">
+                <a:solidFill>
+                  <a:srgbClr val="FF4D23"/>
+                </a:solidFill>
+                <a:latin typeface="Arial" pitchFamily="34" charset="0"/>
+                <a:ea typeface="Arial" pitchFamily="34" charset="-122"/>
+                <a:cs typeface="Arial" pitchFamily="34" charset="-120"/>
+              </a:rPr>
+              <a:t>– </a:t>
+            </a:r>
+            <a:pPr indent="0" marL="0">
+              <a:lnSpc>
+                <a:spcPts val="1500"/>
+              </a:lnSpc>
+              <a:spcAft>
+                <a:spcPts val="1100"/>
+              </a:spcAft>
+              <a:buNone/>
+            </a:pPr>
+            <a:r>
+              <a:rPr lang="en-US" sz="1050" dirty="0">
+                <a:solidFill>
+                  <a:srgbClr val="333333"/>
+                </a:solidFill>
+                <a:latin typeface="Arial" pitchFamily="34" charset="0"/>
+                <a:ea typeface="Arial" pitchFamily="34" charset="-122"/>
+                <a:cs typeface="Arial" pitchFamily="34" charset="-120"/>
+              </a:rPr>
+              <a:t>Озеленение: рядовая посадка деревьев по всему периметру участка.</a:t>
+            </a:r>
+            <a:endParaRPr lang="en-US" sz="1050" dirty="0"/>
+          </a:p>
+        </p:txBody>
+      </p:sp>
+      <p:sp>
+        <p:nvSpPr>
+          <p:cNvPr id="8" name="Text 6"/>
+          <p:cNvSpPr txBox="1"/>
+          <p:nvPr/>
+        </p:nvSpPr>
+        <p:spPr>
+          <a:xfrm>
+            <a:off x="6766560" y="1051560"/>
+            <a:ext cx="5394960" cy="256032"/>
           </a:xfrm>
           <a:prstGeom prst="rect">
             <a:avLst/>
@@ -6969,33 +6755,55 @@
               <a:buNone/>
             </a:pPr>
             <a:r>
-              <a:rPr lang="en-US" sz="2400" b="1" dirty="0">
-                <a:solidFill>
-                  <a:srgbClr val="111111"/>
-                </a:solidFill>
-                <a:latin typeface="Arial" pitchFamily="34" charset="0"/>
-                <a:ea typeface="Arial" pitchFamily="34" charset="-122"/>
-                <a:cs typeface="Arial" pitchFamily="34" charset="-120"/>
-              </a:rPr>
-              <a:t>160 – 210</a:t>
-            </a:r>
-            <a:pPr indent="0" marL="0">
-              <a:buNone/>
-            </a:pPr>
-            <a:endParaRPr lang="en-US" sz="2400" dirty="0"/>
-          </a:p>
-        </p:txBody>
-      </p:sp>
-      <p:sp>
-        <p:nvSpPr>
-          <p:cNvPr id="8" name="Text 6"/>
-          <p:cNvSpPr txBox="1"/>
-          <p:nvPr/>
-        </p:nvSpPr>
-        <p:spPr>
-          <a:xfrm>
-            <a:off x="4160520" y="1472184"/>
-            <a:ext cx="3383280" cy="457200"/>
+              <a:rPr lang="en-US" sz="1200" b="1" spc="30" kern="0" dirty="0">
+                <a:solidFill>
+                  <a:srgbClr val="FF4D23"/>
+                </a:solidFill>
+                <a:latin typeface="Arial" pitchFamily="34" charset="0"/>
+                <a:ea typeface="Arial" pitchFamily="34" charset="-122"/>
+                <a:cs typeface="Arial" pitchFamily="34" charset="-120"/>
+              </a:rPr>
+              <a:t>УТОЧНЯЕТСЯ НА СТАДИИ ЭП И ПСД</a:t>
+            </a:r>
+            <a:endParaRPr lang="en-US" sz="1200" dirty="0"/>
+          </a:p>
+        </p:txBody>
+      </p:sp>
+      <p:sp>
+        <p:nvSpPr>
+          <p:cNvPr id="9" name="Shape 7"/>
+          <p:cNvSpPr/>
+          <p:nvPr/>
+        </p:nvSpPr>
+        <p:spPr>
+          <a:xfrm>
+            <a:off x="6766560" y="1417320"/>
+            <a:ext cx="5394960" cy="7315"/>
+          </a:xfrm>
+          <a:prstGeom prst="rect">
+            <a:avLst/>
+          </a:prstGeom>
+          <a:solidFill>
+            <a:srgbClr val="111111"/>
+          </a:solidFill>
+          <a:ln w="12700">
+            <a:solidFill>
+              <a:srgbClr val="111111"/>
+            </a:solidFill>
+            <a:prstDash val="solid"/>
+          </a:ln>
+        </p:spPr>
+      </p:sp>
+      <p:sp>
+        <p:nvSpPr>
+          <p:cNvPr id="10" name="Text 8"/>
+          <p:cNvSpPr txBox="1"/>
+          <p:nvPr/>
+        </p:nvSpPr>
+        <p:spPr>
+          <a:xfrm>
+            <a:off x="6766560" y="1627632"/>
+            <a:ext cx="5394960" cy="4206240"/>
           </a:xfrm>
           <a:prstGeom prst="rect">
             <a:avLst/>
@@ -7009,65 +6817,58 @@
           <a:p>
             <a:pPr indent="0" marL="0">
               <a:lnSpc>
+                <a:spcPts val="1500"/>
+              </a:lnSpc>
+              <a:spcAft>
                 <a:spcPts val="1100"/>
+              </a:spcAft>
+              <a:buNone/>
+            </a:pPr>
+            <a:r>
+              <a:rPr lang="en-US" sz="1050" dirty="0">
+                <a:solidFill>
+                  <a:srgbClr val="FF4D23"/>
+                </a:solidFill>
+                <a:latin typeface="Arial" pitchFamily="34" charset="0"/>
+                <a:ea typeface="Arial" pitchFamily="34" charset="-122"/>
+                <a:cs typeface="Arial" pitchFamily="34" charset="-120"/>
+              </a:rPr>
+              <a:t>– </a:t>
+            </a:r>
+            <a:pPr indent="0" marL="0">
+              <a:lnSpc>
+                <a:spcPts val="1500"/>
               </a:lnSpc>
-              <a:buNone/>
-            </a:pPr>
-            <a:r>
-              <a:rPr lang="en-US" sz="800" spc="30" kern="0" dirty="0">
-                <a:solidFill>
-                  <a:srgbClr val="8A8A8A"/>
-                </a:solidFill>
-                <a:latin typeface="Arial" pitchFamily="34" charset="0"/>
-                <a:ea typeface="Arial" pitchFamily="34" charset="-122"/>
-                <a:cs typeface="Arial" pitchFamily="34" charset="-120"/>
-              </a:rPr>
-              <a:t>ПОСТОЯННЫХ РАБОЧИХ МЕСТ В ГОСТИНИЦЕ (ОЦЕНКА)</a:t>
-            </a:r>
-            <a:endParaRPr lang="en-US" sz="800" dirty="0"/>
-          </a:p>
-        </p:txBody>
-      </p:sp>
-      <p:sp>
-        <p:nvSpPr>
-          <p:cNvPr id="9" name="Text 7"/>
-          <p:cNvSpPr txBox="1"/>
-          <p:nvPr/>
-        </p:nvSpPr>
-        <p:spPr>
-          <a:xfrm>
-            <a:off x="7818120" y="1051560"/>
-            <a:ext cx="3383280" cy="402336"/>
-          </a:xfrm>
-          <a:prstGeom prst="rect">
-            <a:avLst/>
-          </a:prstGeom>
-          <a:noFill/>
-          <a:ln/>
-        </p:spPr>
-        <p:txBody>
-          <a:bodyPr wrap="square" lIns="0" tIns="0" rIns="0" bIns="0" rtlCol="0" anchor="ctr"/>
-          <a:lstStyle/>
-          <a:p>
-            <a:pPr indent="0" marL="0">
-              <a:buNone/>
-            </a:pPr>
-            <a:r>
-              <a:rPr lang="en-US" sz="2400" b="1" dirty="0">
-                <a:solidFill>
-                  <a:srgbClr val="111111"/>
-                </a:solidFill>
-                <a:latin typeface="Arial" pitchFamily="34" charset="0"/>
-                <a:ea typeface="Arial" pitchFamily="34" charset="-122"/>
-                <a:cs typeface="Arial" pitchFamily="34" charset="-120"/>
-              </a:rPr>
-              <a:t>17 140</a:t>
-            </a:r>
-            <a:pPr indent="0" marL="0">
-              <a:buNone/>
-            </a:pPr>
-            <a:r>
-              <a:rPr lang="en-US" sz="1100" b="1" dirty="0">
+              <a:spcAft>
+                <a:spcPts val="1100"/>
+              </a:spcAft>
+              <a:buNone/>
+            </a:pPr>
+            <a:r>
+              <a:rPr lang="en-US" sz="1050" dirty="0">
+                <a:solidFill>
+                  <a:srgbClr val="333333"/>
+                </a:solidFill>
+                <a:latin typeface="Arial" pitchFamily="34" charset="0"/>
+                <a:ea typeface="Arial" pitchFamily="34" charset="-122"/>
+                <a:cs typeface="Arial" pitchFamily="34" charset="-120"/>
+              </a:rPr>
+              <a:t>Расчёт машино-мест по нормативу для гостиниц, от утверждённой ёмкости номерного фонда.</a:t>
+            </a:r>
+            <a:endParaRPr lang="en-US" sz="1050" dirty="0"/>
+          </a:p>
+          <a:p>
+            <a:pPr indent="0" marL="0">
+              <a:lnSpc>
+                <a:spcPts val="1500"/>
+              </a:lnSpc>
+              <a:spcAft>
+                <a:spcPts val="1100"/>
+              </a:spcAft>
+              <a:buNone/>
+            </a:pPr>
+            <a:r>
+              <a:rPr lang="en-US" sz="1050" dirty="0">
                 <a:solidFill>
                   <a:srgbClr val="FF4D23"/>
                 </a:solidFill>
@@ -7075,51 +6876,158 @@
                 <a:ea typeface="Arial" pitchFamily="34" charset="-122"/>
                 <a:cs typeface="Arial" pitchFamily="34" charset="-120"/>
               </a:rPr>
-              <a:t> м²</a:t>
-            </a:r>
-            <a:endParaRPr lang="en-US" sz="2400" dirty="0"/>
-          </a:p>
-        </p:txBody>
-      </p:sp>
-      <p:sp>
-        <p:nvSpPr>
-          <p:cNvPr id="10" name="Text 8"/>
-          <p:cNvSpPr txBox="1"/>
-          <p:nvPr/>
-        </p:nvSpPr>
-        <p:spPr>
-          <a:xfrm>
-            <a:off x="7818120" y="1472184"/>
-            <a:ext cx="3383280" cy="457200"/>
-          </a:xfrm>
-          <a:prstGeom prst="rect">
-            <a:avLst/>
-          </a:prstGeom>
-          <a:noFill/>
-          <a:ln/>
-        </p:spPr>
-        <p:txBody>
-          <a:bodyPr wrap="square" lIns="0" tIns="0" rIns="0" bIns="0" rtlCol="0" anchor="t"/>
-          <a:lstStyle/>
-          <a:p>
+              <a:t>– </a:t>
+            </a:r>
             <a:pPr indent="0" marL="0">
               <a:lnSpc>
+                <a:spcPts val="1500"/>
+              </a:lnSpc>
+              <a:spcAft>
                 <a:spcPts val="1100"/>
+              </a:spcAft>
+              <a:buNone/>
+            </a:pPr>
+            <a:r>
+              <a:rPr lang="en-US" sz="1050" dirty="0">
+                <a:solidFill>
+                  <a:srgbClr val="333333"/>
+                </a:solidFill>
+                <a:latin typeface="Arial" pitchFamily="34" charset="0"/>
+                <a:ea typeface="Arial" pitchFamily="34" charset="-122"/>
+                <a:cs typeface="Arial" pitchFamily="34" charset="-120"/>
+              </a:rPr>
+              <a:t>Баланс территории раздельно: озеленение, покрытия, проезды, площадки.</a:t>
+            </a:r>
+            <a:endParaRPr lang="en-US" sz="1050" dirty="0"/>
+          </a:p>
+          <a:p>
+            <a:pPr indent="0" marL="0">
+              <a:lnSpc>
+                <a:spcPts val="1500"/>
               </a:lnSpc>
-              <a:buNone/>
-            </a:pPr>
-            <a:r>
-              <a:rPr lang="en-US" sz="800" spc="30" kern="0" dirty="0">
-                <a:solidFill>
-                  <a:srgbClr val="8A8A8A"/>
-                </a:solidFill>
-                <a:latin typeface="Arial" pitchFamily="34" charset="0"/>
-                <a:ea typeface="Arial" pitchFamily="34" charset="-122"/>
-                <a:cs typeface="Arial" pitchFamily="34" charset="-120"/>
-              </a:rPr>
-              <a:t>ВВОД НОВЫХ ПЛОЩАДЕЙ В НАЛОГООБЛАГАЕМУЮ БАЗУ</a:t>
-            </a:r>
-            <a:endParaRPr lang="en-US" sz="800" dirty="0"/>
+              <a:spcAft>
+                <a:spcPts val="1100"/>
+              </a:spcAft>
+              <a:buNone/>
+            </a:pPr>
+            <a:r>
+              <a:rPr lang="en-US" sz="1050" dirty="0">
+                <a:solidFill>
+                  <a:srgbClr val="FF4D23"/>
+                </a:solidFill>
+                <a:latin typeface="Arial" pitchFamily="34" charset="0"/>
+                <a:ea typeface="Arial" pitchFamily="34" charset="-122"/>
+                <a:cs typeface="Arial" pitchFamily="34" charset="-120"/>
+              </a:rPr>
+              <a:t>– </a:t>
+            </a:r>
+            <a:pPr indent="0" marL="0">
+              <a:lnSpc>
+                <a:spcPts val="1500"/>
+              </a:lnSpc>
+              <a:spcAft>
+                <a:spcPts val="1100"/>
+              </a:spcAft>
+              <a:buNone/>
+            </a:pPr>
+            <a:r>
+              <a:rPr lang="en-US" sz="1050" dirty="0">
+                <a:solidFill>
+                  <a:srgbClr val="333333"/>
+                </a:solidFill>
+                <a:latin typeface="Arial" pitchFamily="34" charset="0"/>
+                <a:ea typeface="Arial" pitchFamily="34" charset="-122"/>
+                <a:cs typeface="Arial" pitchFamily="34" charset="-120"/>
+              </a:rPr>
+              <a:t>Инженерное обеспечение: технические условия на воду, канализацию, тепло и электроснабжение.</a:t>
+            </a:r>
+            <a:endParaRPr lang="en-US" sz="1050" dirty="0"/>
+          </a:p>
+          <a:p>
+            <a:pPr indent="0" marL="0">
+              <a:lnSpc>
+                <a:spcPts val="1500"/>
+              </a:lnSpc>
+              <a:spcAft>
+                <a:spcPts val="1100"/>
+              </a:spcAft>
+              <a:buNone/>
+            </a:pPr>
+            <a:r>
+              <a:rPr lang="en-US" sz="1050" dirty="0">
+                <a:solidFill>
+                  <a:srgbClr val="FF4D23"/>
+                </a:solidFill>
+                <a:latin typeface="Arial" pitchFamily="34" charset="0"/>
+                <a:ea typeface="Arial" pitchFamily="34" charset="-122"/>
+                <a:cs typeface="Arial" pitchFamily="34" charset="-120"/>
+              </a:rPr>
+              <a:t>– </a:t>
+            </a:r>
+            <a:pPr indent="0" marL="0">
+              <a:lnSpc>
+                <a:spcPts val="1500"/>
+              </a:lnSpc>
+              <a:spcAft>
+                <a:spcPts val="1100"/>
+              </a:spcAft>
+              <a:buNone/>
+            </a:pPr>
+            <a:r>
+              <a:rPr lang="en-US" sz="1050" dirty="0">
+                <a:solidFill>
+                  <a:srgbClr val="333333"/>
+                </a:solidFill>
+                <a:latin typeface="Arial" pitchFamily="34" charset="0"/>
+                <a:ea typeface="Arial" pitchFamily="34" charset="-122"/>
+                <a:cs typeface="Arial" pitchFamily="34" charset="-120"/>
+              </a:rPr>
+              <a:t>Расчёты инсоляции и шума по отношению к смежным землепользованиям.</a:t>
+            </a:r>
+            <a:endParaRPr lang="en-US" sz="1050" dirty="0"/>
+          </a:p>
+          <a:p>
+            <a:pPr indent="0" marL="0">
+              <a:lnSpc>
+                <a:spcPts val="1500"/>
+              </a:lnSpc>
+              <a:spcAft>
+                <a:spcPts val="1100"/>
+              </a:spcAft>
+              <a:buNone/>
+            </a:pPr>
+            <a:r>
+              <a:rPr lang="en-US" sz="1050" dirty="0">
+                <a:solidFill>
+                  <a:srgbClr val="FF4D23"/>
+                </a:solidFill>
+                <a:latin typeface="Arial" pitchFamily="34" charset="0"/>
+                <a:ea typeface="Arial" pitchFamily="34" charset="-122"/>
+                <a:cs typeface="Arial" pitchFamily="34" charset="-120"/>
+              </a:rPr>
+              <a:t>– </a:t>
+            </a:r>
+            <a:pPr indent="0" marL="0">
+              <a:lnSpc>
+                <a:spcPts val="1500"/>
+              </a:lnSpc>
+              <a:spcAft>
+                <a:spcPts val="1100"/>
+              </a:spcAft>
+              <a:buNone/>
+            </a:pPr>
+            <a:r>
+              <a:rPr lang="en-US" sz="1050" dirty="0">
+                <a:solidFill>
+                  <a:srgbClr val="333333"/>
+                </a:solidFill>
+                <a:latin typeface="Arial" pitchFamily="34" charset="0"/>
+                <a:ea typeface="Arial" pitchFamily="34" charset="-122"/>
+                <a:cs typeface="Arial" pitchFamily="34" charset="-120"/>
+              </a:rPr>
+              <a:t>Планировочные решения этажей и итоговая ёмкость номерного фонда.</a:t>
+            </a:r>
+            <a:endParaRPr lang="en-US" sz="1050" dirty="0"/>
           </a:p>
         </p:txBody>
       </p:sp>
@@ -7131,7 +7039,7 @@
         </p:nvSpPr>
         <p:spPr>
           <a:xfrm>
-            <a:off x="502920" y="2286000"/>
+            <a:off x="502920" y="4892040"/>
             <a:ext cx="11183112" cy="7315"/>
           </a:xfrm>
           <a:prstGeom prst="rect">
@@ -7156,30 +7064,24 @@
         </p:nvSpPr>
         <p:spPr>
           <a:xfrm>
-            <a:off x="502920" y="2542032"/>
-            <a:ext cx="5577840" cy="3108960"/>
-          </a:xfrm>
-          <a:prstGeom prst="rect">
-            <a:avLst/>
-          </a:prstGeom>
-          <a:noFill/>
-          <a:ln/>
-        </p:spPr>
-        <p:txBody>
-          <a:bodyPr wrap="square" lIns="0" tIns="0" rIns="0" bIns="0" rtlCol="0" anchor="t"/>
-          <a:lstStyle/>
-          <a:p>
-            <a:pPr indent="0" marL="0">
-              <a:lnSpc>
-                <a:spcPts val="1600"/>
-              </a:lnSpc>
-              <a:spcAft>
-                <a:spcPts val="1300"/>
-              </a:spcAft>
-              <a:buNone/>
-            </a:pPr>
-            <a:r>
-              <a:rPr lang="en-US" sz="1100" dirty="0">
+            <a:off x="502920" y="5029200"/>
+            <a:ext cx="5486400" cy="201168"/>
+          </a:xfrm>
+          <a:prstGeom prst="rect">
+            <a:avLst/>
+          </a:prstGeom>
+          <a:noFill/>
+          <a:ln/>
+        </p:spPr>
+        <p:txBody>
+          <a:bodyPr wrap="square" lIns="0" tIns="0" rIns="0" bIns="0" rtlCol="0" anchor="ctr"/>
+          <a:lstStyle/>
+          <a:p>
+            <a:pPr indent="0" marL="0">
+              <a:buNone/>
+            </a:pPr>
+            <a:r>
+              <a:rPr lang="en-US" sz="850" spc="30" kern="0" dirty="0">
                 <a:solidFill>
                   <a:srgbClr val="FF4D23"/>
                 </a:solidFill>
@@ -7187,42 +7089,52 @@
                 <a:ea typeface="Arial" pitchFamily="34" charset="-122"/>
                 <a:cs typeface="Arial" pitchFamily="34" charset="-120"/>
               </a:rPr>
-              <a:t>– </a:t>
-            </a:r>
-            <a:pPr indent="0" marL="0">
-              <a:lnSpc>
-                <a:spcPts val="1600"/>
-              </a:lnSpc>
-              <a:spcAft>
-                <a:spcPts val="1300"/>
-              </a:spcAft>
-              <a:buNone/>
-            </a:pPr>
-            <a:r>
-              <a:rPr lang="en-US" sz="1100" dirty="0">
-                <a:solidFill>
-                  <a:srgbClr val="333333"/>
-                </a:solidFill>
-                <a:latin typeface="Arial" pitchFamily="34" charset="0"/>
-                <a:ea typeface="Arial" pitchFamily="34" charset="-122"/>
-                <a:cs typeface="Arial" pitchFamily="34" charset="-120"/>
-              </a:rPr>
-              <a:t>Загрузка ранее неиспользуемого участка: свободная территория в деловом окружении получает капитальную функцию без сноса и расселения.</a:t>
-            </a:r>
-            <a:endParaRPr lang="en-US" sz="1100" dirty="0"/>
-          </a:p>
-          <a:p>
-            <a:pPr indent="0" marL="0">
-              <a:lnSpc>
-                <a:spcPts val="1600"/>
-              </a:lnSpc>
-              <a:spcAft>
-                <a:spcPts val="1300"/>
-              </a:spcAft>
-              <a:buNone/>
-            </a:pPr>
-            <a:r>
-              <a:rPr lang="en-US" sz="1100" dirty="0">
+              <a:t>ПОКАЗАТЕЛИ, ПРОВЕРЯЕМЫЕ ГРАДОСТРОИТЕЛЬНЫМ СОВЕТОМ</a:t>
+            </a:r>
+            <a:endParaRPr lang="en-US" sz="850" dirty="0"/>
+          </a:p>
+        </p:txBody>
+      </p:sp>
+      <p:sp>
+        <p:nvSpPr>
+          <p:cNvPr id="13" name="Text 11"/>
+          <p:cNvSpPr txBox="1"/>
+          <p:nvPr/>
+        </p:nvSpPr>
+        <p:spPr>
+          <a:xfrm>
+            <a:off x="502920" y="5349240"/>
+            <a:ext cx="2521458" cy="402336"/>
+          </a:xfrm>
+          <a:prstGeom prst="rect">
+            <a:avLst/>
+          </a:prstGeom>
+          <a:noFill/>
+          <a:ln/>
+        </p:spPr>
+        <p:txBody>
+          <a:bodyPr wrap="square" lIns="0" tIns="0" rIns="0" bIns="0" rtlCol="0" anchor="ctr"/>
+          <a:lstStyle/>
+          <a:p>
+            <a:pPr indent="0" marL="0">
+              <a:buNone/>
+            </a:pPr>
+            <a:r>
+              <a:rPr lang="en-US" sz="2200" b="1" dirty="0">
+                <a:solidFill>
+                  <a:srgbClr val="111111"/>
+                </a:solidFill>
+                <a:latin typeface="Arial" pitchFamily="34" charset="0"/>
+                <a:ea typeface="Arial" pitchFamily="34" charset="-122"/>
+                <a:cs typeface="Arial" pitchFamily="34" charset="-120"/>
+              </a:rPr>
+              <a:t>5</a:t>
+            </a:r>
+            <a:pPr indent="0" marL="0">
+              <a:buNone/>
+            </a:pPr>
+            <a:r>
+              <a:rPr lang="en-US" sz="1100" b="1" dirty="0">
                 <a:solidFill>
                   <a:srgbClr val="FF4D23"/>
                 </a:solidFill>
@@ -7230,154 +7142,9 @@
                 <a:ea typeface="Arial" pitchFamily="34" charset="-122"/>
                 <a:cs typeface="Arial" pitchFamily="34" charset="-120"/>
               </a:rPr>
-              <a:t>– </a:t>
-            </a:r>
-            <a:pPr indent="0" marL="0">
-              <a:lnSpc>
-                <a:spcPts val="1600"/>
-              </a:lnSpc>
-              <a:spcAft>
-                <a:spcPts val="1300"/>
-              </a:spcAft>
-              <a:buNone/>
-            </a:pPr>
-            <a:r>
-              <a:rPr lang="en-US" sz="1100" dirty="0">
-                <a:solidFill>
-                  <a:srgbClr val="333333"/>
-                </a:solidFill>
-                <a:latin typeface="Arial" pitchFamily="34" charset="0"/>
-                <a:ea typeface="Arial" pitchFamily="34" charset="-122"/>
-                <a:cs typeface="Arial" pitchFamily="34" charset="-120"/>
-              </a:rPr>
-              <a:t>Круглогодичный турпоток: деловой сегмент зимой и осенью, горный и событийный туризм летом.</a:t>
-            </a:r>
-            <a:endParaRPr lang="en-US" sz="1100" dirty="0"/>
-          </a:p>
-          <a:p>
-            <a:pPr indent="0" marL="0">
-              <a:lnSpc>
-                <a:spcPts val="1600"/>
-              </a:lnSpc>
-              <a:spcAft>
-                <a:spcPts val="1300"/>
-              </a:spcAft>
-              <a:buNone/>
-            </a:pPr>
-            <a:r>
-              <a:rPr lang="en-US" sz="1100" dirty="0">
-                <a:solidFill>
-                  <a:srgbClr val="FF4D23"/>
-                </a:solidFill>
-                <a:latin typeface="Arial" pitchFamily="34" charset="0"/>
-                <a:ea typeface="Arial" pitchFamily="34" charset="-122"/>
-                <a:cs typeface="Arial" pitchFamily="34" charset="-120"/>
-              </a:rPr>
-              <a:t>– </a:t>
-            </a:r>
-            <a:pPr indent="0" marL="0">
-              <a:lnSpc>
-                <a:spcPts val="1600"/>
-              </a:lnSpc>
-              <a:spcAft>
-                <a:spcPts val="1300"/>
-              </a:spcAft>
-              <a:buNone/>
-            </a:pPr>
-            <a:r>
-              <a:rPr lang="en-US" sz="1100" dirty="0">
-                <a:solidFill>
-                  <a:srgbClr val="333333"/>
-                </a:solidFill>
-                <a:latin typeface="Arial" pitchFamily="34" charset="0"/>
-                <a:ea typeface="Arial" pitchFamily="34" charset="-122"/>
-                <a:cs typeface="Arial" pitchFamily="34" charset="-120"/>
-              </a:rPr>
-              <a:t>Общественные функции для района: рестораны и конференц-зона первого этажа работают на город, а не только на постояльцев.</a:t>
-            </a:r>
-            <a:endParaRPr lang="en-US" sz="1100" dirty="0"/>
-          </a:p>
-          <a:p>
-            <a:pPr indent="0" marL="0">
-              <a:lnSpc>
-                <a:spcPts val="1600"/>
-              </a:lnSpc>
-              <a:spcAft>
-                <a:spcPts val="1300"/>
-              </a:spcAft>
-              <a:buNone/>
-            </a:pPr>
-            <a:r>
-              <a:rPr lang="en-US" sz="1100" dirty="0">
-                <a:solidFill>
-                  <a:srgbClr val="FF4D23"/>
-                </a:solidFill>
-                <a:latin typeface="Arial" pitchFamily="34" charset="0"/>
-                <a:ea typeface="Arial" pitchFamily="34" charset="-122"/>
-                <a:cs typeface="Arial" pitchFamily="34" charset="-120"/>
-              </a:rPr>
-              <a:t>– </a:t>
-            </a:r>
-            <a:pPr indent="0" marL="0">
-              <a:lnSpc>
-                <a:spcPts val="1600"/>
-              </a:lnSpc>
-              <a:spcAft>
-                <a:spcPts val="1300"/>
-              </a:spcAft>
-              <a:buNone/>
-            </a:pPr>
-            <a:r>
-              <a:rPr lang="en-US" sz="1100" dirty="0">
-                <a:solidFill>
-                  <a:srgbClr val="333333"/>
-                </a:solidFill>
-                <a:latin typeface="Arial" pitchFamily="34" charset="0"/>
-                <a:ea typeface="Arial" pitchFamily="34" charset="-122"/>
-                <a:cs typeface="Arial" pitchFamily="34" charset="-120"/>
-              </a:rPr>
-              <a:t>4 446,9 м² общественного первого этажа — новая точка притяжения в квартале, доступная не только постояльцам.</a:t>
-            </a:r>
-            <a:endParaRPr lang="en-US" sz="1100" dirty="0"/>
-          </a:p>
-        </p:txBody>
-      </p:sp>
-      <p:sp>
-        <p:nvSpPr>
-          <p:cNvPr id="13" name="Text 11"/>
-          <p:cNvSpPr txBox="1"/>
-          <p:nvPr/>
-        </p:nvSpPr>
-        <p:spPr>
-          <a:xfrm>
-            <a:off x="6766560" y="2542032"/>
-            <a:ext cx="4858207" cy="201168"/>
-          </a:xfrm>
-          <a:prstGeom prst="rect">
-            <a:avLst/>
-          </a:prstGeom>
-          <a:noFill/>
-          <a:ln/>
-        </p:spPr>
-        <p:txBody>
-          <a:bodyPr wrap="square" lIns="0" tIns="0" rIns="0" bIns="0" rtlCol="0" anchor="ctr"/>
-          <a:lstStyle/>
-          <a:p>
-            <a:pPr indent="0" marL="0">
-              <a:buNone/>
-            </a:pPr>
-            <a:r>
-              <a:rPr lang="en-US" sz="850" spc="30" kern="0" dirty="0">
-                <a:solidFill>
-                  <a:srgbClr val="FF4D23"/>
-                </a:solidFill>
-                <a:latin typeface="Arial" pitchFamily="34" charset="0"/>
-                <a:ea typeface="Arial" pitchFamily="34" charset="-122"/>
-                <a:cs typeface="Arial" pitchFamily="34" charset="-120"/>
-              </a:rPr>
-              <a:t>ПОКАЗАТЕЛИ, КОТОРЫЕ ВНОСИТ ЗАКАЗЧИК</a:t>
-            </a:r>
-            <a:endParaRPr lang="en-US" sz="850" dirty="0"/>
+              <a:t> этажей</a:t>
+            </a:r>
+            <a:endParaRPr lang="en-US" sz="2200" dirty="0"/>
           </a:p>
         </p:txBody>
       </p:sp>
@@ -7389,523 +7156,8 @@
         </p:nvSpPr>
         <p:spPr>
           <a:xfrm>
-            <a:off x="6766560" y="2907792"/>
-            <a:ext cx="3012088" cy="274320"/>
-          </a:xfrm>
-          <a:prstGeom prst="rect">
-            <a:avLst/>
-          </a:prstGeom>
-          <a:noFill/>
-          <a:ln/>
-        </p:spPr>
-        <p:txBody>
-          <a:bodyPr wrap="square" lIns="0" tIns="0" rIns="0" bIns="0" rtlCol="0" anchor="ctr"/>
-          <a:lstStyle/>
-          <a:p>
-            <a:pPr indent="0" marL="0">
-              <a:buNone/>
-            </a:pPr>
-            <a:r>
-              <a:rPr lang="en-US" sz="1000" dirty="0">
-                <a:solidFill>
-                  <a:srgbClr val="333333"/>
-                </a:solidFill>
-                <a:latin typeface="Arial" pitchFamily="34" charset="0"/>
-                <a:ea typeface="Arial" pitchFamily="34" charset="-122"/>
-                <a:cs typeface="Arial" pitchFamily="34" charset="-120"/>
-              </a:rPr>
-              <a:t>Объём инвестиций, млрд ₸</a:t>
-            </a:r>
-            <a:endParaRPr lang="en-US" sz="1000" dirty="0"/>
-          </a:p>
-        </p:txBody>
-      </p:sp>
-      <p:sp>
-        <p:nvSpPr>
-          <p:cNvPr id="15" name="Text 13"/>
-          <p:cNvSpPr txBox="1"/>
-          <p:nvPr/>
-        </p:nvSpPr>
-        <p:spPr>
-          <a:xfrm>
-            <a:off x="9778648" y="2907792"/>
-            <a:ext cx="1846119" cy="274320"/>
-          </a:xfrm>
-          <a:prstGeom prst="rect">
-            <a:avLst/>
-          </a:prstGeom>
-          <a:noFill/>
-          <a:ln/>
-        </p:spPr>
-        <p:txBody>
-          <a:bodyPr wrap="square" lIns="0" tIns="0" rIns="0" bIns="0" rtlCol="0" anchor="ctr"/>
-          <a:lstStyle/>
-          <a:p>
-            <a:pPr algn="r" indent="0" marL="0">
-              <a:buNone/>
-            </a:pPr>
-            <a:r>
-              <a:rPr lang="en-US" sz="1000" dirty="0">
-                <a:solidFill>
-                  <a:srgbClr val="FF4D23"/>
-                </a:solidFill>
-                <a:latin typeface="Arial" pitchFamily="34" charset="0"/>
-                <a:ea typeface="Arial" pitchFamily="34" charset="-122"/>
-                <a:cs typeface="Arial" pitchFamily="34" charset="-120"/>
-              </a:rPr>
-              <a:t>____________</a:t>
-            </a:r>
-            <a:endParaRPr lang="en-US" sz="1000" dirty="0"/>
-          </a:p>
-        </p:txBody>
-      </p:sp>
-      <p:sp>
-        <p:nvSpPr>
-          <p:cNvPr id="16" name="Shape 14"/>
-          <p:cNvSpPr/>
-          <p:nvPr/>
-        </p:nvSpPr>
-        <p:spPr>
-          <a:xfrm>
-            <a:off x="6766560" y="3218688"/>
-            <a:ext cx="4858207" cy="7315"/>
-          </a:xfrm>
-          <a:prstGeom prst="rect">
-            <a:avLst/>
-          </a:prstGeom>
-          <a:solidFill>
-            <a:srgbClr val="DCDCDC"/>
-          </a:solidFill>
-          <a:ln w="12700">
-            <a:solidFill>
-              <a:srgbClr val="DCDCDC"/>
-            </a:solidFill>
-            <a:prstDash val="solid"/>
-          </a:ln>
-        </p:spPr>
-      </p:sp>
-      <p:sp>
-        <p:nvSpPr>
-          <p:cNvPr id="17" name="Text 15"/>
-          <p:cNvSpPr txBox="1"/>
-          <p:nvPr/>
-        </p:nvSpPr>
-        <p:spPr>
-          <a:xfrm>
-            <a:off x="6766560" y="3419856"/>
-            <a:ext cx="3012088" cy="274320"/>
-          </a:xfrm>
-          <a:prstGeom prst="rect">
-            <a:avLst/>
-          </a:prstGeom>
-          <a:noFill/>
-          <a:ln/>
-        </p:spPr>
-        <p:txBody>
-          <a:bodyPr wrap="square" lIns="0" tIns="0" rIns="0" bIns="0" rtlCol="0" anchor="ctr"/>
-          <a:lstStyle/>
-          <a:p>
-            <a:pPr indent="0" marL="0">
-              <a:buNone/>
-            </a:pPr>
-            <a:r>
-              <a:rPr lang="en-US" sz="1000" dirty="0">
-                <a:solidFill>
-                  <a:srgbClr val="333333"/>
-                </a:solidFill>
-                <a:latin typeface="Arial" pitchFamily="34" charset="0"/>
-                <a:ea typeface="Arial" pitchFamily="34" charset="-122"/>
-                <a:cs typeface="Arial" pitchFamily="34" charset="-120"/>
-              </a:rPr>
-              <a:t>Налоговые поступления в год</a:t>
-            </a:r>
-            <a:endParaRPr lang="en-US" sz="1000" dirty="0"/>
-          </a:p>
-        </p:txBody>
-      </p:sp>
-      <p:sp>
-        <p:nvSpPr>
-          <p:cNvPr id="18" name="Text 16"/>
-          <p:cNvSpPr txBox="1"/>
-          <p:nvPr/>
-        </p:nvSpPr>
-        <p:spPr>
-          <a:xfrm>
-            <a:off x="9778648" y="3419856"/>
-            <a:ext cx="1846119" cy="274320"/>
-          </a:xfrm>
-          <a:prstGeom prst="rect">
-            <a:avLst/>
-          </a:prstGeom>
-          <a:noFill/>
-          <a:ln/>
-        </p:spPr>
-        <p:txBody>
-          <a:bodyPr wrap="square" lIns="0" tIns="0" rIns="0" bIns="0" rtlCol="0" anchor="ctr"/>
-          <a:lstStyle/>
-          <a:p>
-            <a:pPr algn="r" indent="0" marL="0">
-              <a:buNone/>
-            </a:pPr>
-            <a:r>
-              <a:rPr lang="en-US" sz="1000" dirty="0">
-                <a:solidFill>
-                  <a:srgbClr val="FF4D23"/>
-                </a:solidFill>
-                <a:latin typeface="Arial" pitchFamily="34" charset="0"/>
-                <a:ea typeface="Arial" pitchFamily="34" charset="-122"/>
-                <a:cs typeface="Arial" pitchFamily="34" charset="-120"/>
-              </a:rPr>
-              <a:t>____________</a:t>
-            </a:r>
-            <a:endParaRPr lang="en-US" sz="1000" dirty="0"/>
-          </a:p>
-        </p:txBody>
-      </p:sp>
-      <p:sp>
-        <p:nvSpPr>
-          <p:cNvPr id="19" name="Shape 17"/>
-          <p:cNvSpPr/>
-          <p:nvPr/>
-        </p:nvSpPr>
-        <p:spPr>
-          <a:xfrm>
-            <a:off x="6766560" y="3730752"/>
-            <a:ext cx="4858207" cy="7315"/>
-          </a:xfrm>
-          <a:prstGeom prst="rect">
-            <a:avLst/>
-          </a:prstGeom>
-          <a:solidFill>
-            <a:srgbClr val="DCDCDC"/>
-          </a:solidFill>
-          <a:ln w="12700">
-            <a:solidFill>
-              <a:srgbClr val="DCDCDC"/>
-            </a:solidFill>
-            <a:prstDash val="solid"/>
-          </a:ln>
-        </p:spPr>
-      </p:sp>
-      <p:sp>
-        <p:nvSpPr>
-          <p:cNvPr id="20" name="Text 18"/>
-          <p:cNvSpPr txBox="1"/>
-          <p:nvPr/>
-        </p:nvSpPr>
-        <p:spPr>
-          <a:xfrm>
-            <a:off x="6766560" y="3931920"/>
-            <a:ext cx="3012088" cy="274320"/>
-          </a:xfrm>
-          <a:prstGeom prst="rect">
-            <a:avLst/>
-          </a:prstGeom>
-          <a:noFill/>
-          <a:ln/>
-        </p:spPr>
-        <p:txBody>
-          <a:bodyPr wrap="square" lIns="0" tIns="0" rIns="0" bIns="0" rtlCol="0" anchor="ctr"/>
-          <a:lstStyle/>
-          <a:p>
-            <a:pPr indent="0" marL="0">
-              <a:buNone/>
-            </a:pPr>
-            <a:r>
-              <a:rPr lang="en-US" sz="1000" dirty="0">
-                <a:solidFill>
-                  <a:srgbClr val="333333"/>
-                </a:solidFill>
-                <a:latin typeface="Arial" pitchFamily="34" charset="0"/>
-                <a:ea typeface="Arial" pitchFamily="34" charset="-122"/>
-                <a:cs typeface="Arial" pitchFamily="34" charset="-120"/>
-              </a:rPr>
-              <a:t>Рабочие места на период строительства</a:t>
-            </a:r>
-            <a:endParaRPr lang="en-US" sz="1000" dirty="0"/>
-          </a:p>
-        </p:txBody>
-      </p:sp>
-      <p:sp>
-        <p:nvSpPr>
-          <p:cNvPr id="21" name="Text 19"/>
-          <p:cNvSpPr txBox="1"/>
-          <p:nvPr/>
-        </p:nvSpPr>
-        <p:spPr>
-          <a:xfrm>
-            <a:off x="9778648" y="3931920"/>
-            <a:ext cx="1846119" cy="274320"/>
-          </a:xfrm>
-          <a:prstGeom prst="rect">
-            <a:avLst/>
-          </a:prstGeom>
-          <a:noFill/>
-          <a:ln/>
-        </p:spPr>
-        <p:txBody>
-          <a:bodyPr wrap="square" lIns="0" tIns="0" rIns="0" bIns="0" rtlCol="0" anchor="ctr"/>
-          <a:lstStyle/>
-          <a:p>
-            <a:pPr algn="r" indent="0" marL="0">
-              <a:buNone/>
-            </a:pPr>
-            <a:r>
-              <a:rPr lang="en-US" sz="1000" dirty="0">
-                <a:solidFill>
-                  <a:srgbClr val="FF4D23"/>
-                </a:solidFill>
-                <a:latin typeface="Arial" pitchFamily="34" charset="0"/>
-                <a:ea typeface="Arial" pitchFamily="34" charset="-122"/>
-                <a:cs typeface="Arial" pitchFamily="34" charset="-120"/>
-              </a:rPr>
-              <a:t>____________</a:t>
-            </a:r>
-            <a:endParaRPr lang="en-US" sz="1000" dirty="0"/>
-          </a:p>
-        </p:txBody>
-      </p:sp>
-      <p:sp>
-        <p:nvSpPr>
-          <p:cNvPr id="22" name="Shape 20"/>
-          <p:cNvSpPr/>
-          <p:nvPr/>
-        </p:nvSpPr>
-        <p:spPr>
-          <a:xfrm>
-            <a:off x="6766560" y="4242816"/>
-            <a:ext cx="4858207" cy="7315"/>
-          </a:xfrm>
-          <a:prstGeom prst="rect">
-            <a:avLst/>
-          </a:prstGeom>
-          <a:solidFill>
-            <a:srgbClr val="DCDCDC"/>
-          </a:solidFill>
-          <a:ln w="12700">
-            <a:solidFill>
-              <a:srgbClr val="DCDCDC"/>
-            </a:solidFill>
-            <a:prstDash val="solid"/>
-          </a:ln>
-        </p:spPr>
-      </p:sp>
-      <p:sp>
-        <p:nvSpPr>
-          <p:cNvPr id="23" name="Text 21"/>
-          <p:cNvSpPr txBox="1"/>
-          <p:nvPr/>
-        </p:nvSpPr>
-        <p:spPr>
-          <a:xfrm>
-            <a:off x="6766560" y="4443984"/>
-            <a:ext cx="3012088" cy="274320"/>
-          </a:xfrm>
-          <a:prstGeom prst="rect">
-            <a:avLst/>
-          </a:prstGeom>
-          <a:noFill/>
-          <a:ln/>
-        </p:spPr>
-        <p:txBody>
-          <a:bodyPr wrap="square" lIns="0" tIns="0" rIns="0" bIns="0" rtlCol="0" anchor="ctr"/>
-          <a:lstStyle/>
-          <a:p>
-            <a:pPr indent="0" marL="0">
-              <a:buNone/>
-            </a:pPr>
-            <a:r>
-              <a:rPr lang="en-US" sz="1000" dirty="0">
-                <a:solidFill>
-                  <a:srgbClr val="333333"/>
-                </a:solidFill>
-                <a:latin typeface="Arial" pitchFamily="34" charset="0"/>
-                <a:ea typeface="Arial" pitchFamily="34" charset="-122"/>
-                <a:cs typeface="Arial" pitchFamily="34" charset="-120"/>
-              </a:rPr>
-              <a:t>Гостиничный оператор</a:t>
-            </a:r>
-            <a:endParaRPr lang="en-US" sz="1000" dirty="0"/>
-          </a:p>
-        </p:txBody>
-      </p:sp>
-      <p:sp>
-        <p:nvSpPr>
-          <p:cNvPr id="24" name="Text 22"/>
-          <p:cNvSpPr txBox="1"/>
-          <p:nvPr/>
-        </p:nvSpPr>
-        <p:spPr>
-          <a:xfrm>
-            <a:off x="9778648" y="4443984"/>
-            <a:ext cx="1846119" cy="274320"/>
-          </a:xfrm>
-          <a:prstGeom prst="rect">
-            <a:avLst/>
-          </a:prstGeom>
-          <a:noFill/>
-          <a:ln/>
-        </p:spPr>
-        <p:txBody>
-          <a:bodyPr wrap="square" lIns="0" tIns="0" rIns="0" bIns="0" rtlCol="0" anchor="ctr"/>
-          <a:lstStyle/>
-          <a:p>
-            <a:pPr algn="r" indent="0" marL="0">
-              <a:buNone/>
-            </a:pPr>
-            <a:r>
-              <a:rPr lang="en-US" sz="1000" dirty="0">
-                <a:solidFill>
-                  <a:srgbClr val="FF4D23"/>
-                </a:solidFill>
-                <a:latin typeface="Arial" pitchFamily="34" charset="0"/>
-                <a:ea typeface="Arial" pitchFamily="34" charset="-122"/>
-                <a:cs typeface="Arial" pitchFamily="34" charset="-120"/>
-              </a:rPr>
-              <a:t>____________</a:t>
-            </a:r>
-            <a:endParaRPr lang="en-US" sz="1000" dirty="0"/>
-          </a:p>
-        </p:txBody>
-      </p:sp>
-      <p:sp>
-        <p:nvSpPr>
-          <p:cNvPr id="25" name="Shape 23"/>
-          <p:cNvSpPr/>
-          <p:nvPr/>
-        </p:nvSpPr>
-        <p:spPr>
-          <a:xfrm>
-            <a:off x="6766560" y="4754880"/>
-            <a:ext cx="4858207" cy="7315"/>
-          </a:xfrm>
-          <a:prstGeom prst="rect">
-            <a:avLst/>
-          </a:prstGeom>
-          <a:solidFill>
-            <a:srgbClr val="DCDCDC"/>
-          </a:solidFill>
-          <a:ln w="12700">
-            <a:solidFill>
-              <a:srgbClr val="DCDCDC"/>
-            </a:solidFill>
-            <a:prstDash val="solid"/>
-          </a:ln>
-        </p:spPr>
-      </p:sp>
-      <p:sp>
-        <p:nvSpPr>
-          <p:cNvPr id="26" name="Text 24"/>
-          <p:cNvSpPr txBox="1"/>
-          <p:nvPr/>
-        </p:nvSpPr>
-        <p:spPr>
-          <a:xfrm>
-            <a:off x="6766560" y="4956048"/>
-            <a:ext cx="3012088" cy="274320"/>
-          </a:xfrm>
-          <a:prstGeom prst="rect">
-            <a:avLst/>
-          </a:prstGeom>
-          <a:noFill/>
-          <a:ln/>
-        </p:spPr>
-        <p:txBody>
-          <a:bodyPr wrap="square" lIns="0" tIns="0" rIns="0" bIns="0" rtlCol="0" anchor="ctr"/>
-          <a:lstStyle/>
-          <a:p>
-            <a:pPr indent="0" marL="0">
-              <a:buNone/>
-            </a:pPr>
-            <a:r>
-              <a:rPr lang="en-US" sz="1000" dirty="0">
-                <a:solidFill>
-                  <a:srgbClr val="333333"/>
-                </a:solidFill>
-                <a:latin typeface="Arial" pitchFamily="34" charset="0"/>
-                <a:ea typeface="Arial" pitchFamily="34" charset="-122"/>
-                <a:cs typeface="Arial" pitchFamily="34" charset="-120"/>
-              </a:rPr>
-              <a:t>Планируемый срок ввода в эксплуатацию</a:t>
-            </a:r>
-            <a:endParaRPr lang="en-US" sz="1000" dirty="0"/>
-          </a:p>
-        </p:txBody>
-      </p:sp>
-      <p:sp>
-        <p:nvSpPr>
-          <p:cNvPr id="27" name="Text 25"/>
-          <p:cNvSpPr txBox="1"/>
-          <p:nvPr/>
-        </p:nvSpPr>
-        <p:spPr>
-          <a:xfrm>
-            <a:off x="9778648" y="4956048"/>
-            <a:ext cx="1846119" cy="274320"/>
-          </a:xfrm>
-          <a:prstGeom prst="rect">
-            <a:avLst/>
-          </a:prstGeom>
-          <a:noFill/>
-          <a:ln/>
-        </p:spPr>
-        <p:txBody>
-          <a:bodyPr wrap="square" lIns="0" tIns="0" rIns="0" bIns="0" rtlCol="0" anchor="ctr"/>
-          <a:lstStyle/>
-          <a:p>
-            <a:pPr algn="r" indent="0" marL="0">
-              <a:buNone/>
-            </a:pPr>
-            <a:r>
-              <a:rPr lang="en-US" sz="1000" dirty="0">
-                <a:solidFill>
-                  <a:srgbClr val="FF4D23"/>
-                </a:solidFill>
-                <a:latin typeface="Arial" pitchFamily="34" charset="0"/>
-                <a:ea typeface="Arial" pitchFamily="34" charset="-122"/>
-                <a:cs typeface="Arial" pitchFamily="34" charset="-120"/>
-              </a:rPr>
-              <a:t>____________</a:t>
-            </a:r>
-            <a:endParaRPr lang="en-US" sz="1000" dirty="0"/>
-          </a:p>
-        </p:txBody>
-      </p:sp>
-      <p:sp>
-        <p:nvSpPr>
-          <p:cNvPr id="28" name="Shape 26"/>
-          <p:cNvSpPr/>
-          <p:nvPr/>
-        </p:nvSpPr>
-        <p:spPr>
-          <a:xfrm>
-            <a:off x="6766560" y="5266944"/>
-            <a:ext cx="4858207" cy="7315"/>
-          </a:xfrm>
-          <a:prstGeom prst="rect">
-            <a:avLst/>
-          </a:prstGeom>
-          <a:solidFill>
-            <a:srgbClr val="DCDCDC"/>
-          </a:solidFill>
-          <a:ln w="12700">
-            <a:solidFill>
-              <a:srgbClr val="DCDCDC"/>
-            </a:solidFill>
-            <a:prstDash val="solid"/>
-          </a:ln>
-        </p:spPr>
-      </p:sp>
-      <p:sp>
-        <p:nvSpPr>
-          <p:cNvPr id="29" name="Text 27"/>
-          <p:cNvSpPr txBox="1"/>
-          <p:nvPr/>
-        </p:nvSpPr>
-        <p:spPr>
-          <a:xfrm>
-            <a:off x="502920" y="5897880"/>
-            <a:ext cx="11183112" cy="365760"/>
+            <a:off x="502920" y="5769864"/>
+            <a:ext cx="2521458" cy="384048"/>
           </a:xfrm>
           <a:prstGeom prst="rect">
             <a:avLst/>
@@ -7924,7 +7176,7 @@
               <a:buNone/>
             </a:pPr>
             <a:r>
-              <a:rPr lang="en-US" sz="850" i="1" dirty="0">
+              <a:rPr lang="en-US" sz="800" spc="30" kern="0" dirty="0">
                 <a:solidFill>
                   <a:srgbClr val="8A8A8A"/>
                 </a:solidFill>
@@ -7932,15 +7184,289 @@
                 <a:ea typeface="Arial" pitchFamily="34" charset="-122"/>
                 <a:cs typeface="Arial" pitchFamily="34" charset="-120"/>
               </a:rPr>
-              <a:t>Ёмкость номерного фонда и численность персонала указаны оценочно и подлежат уточнению после утверждения планировочных решений.</a:t>
-            </a:r>
-            <a:endParaRPr lang="en-US" sz="850" dirty="0"/>
+              <a:t>ЭТАЖНОСТЬ ОБОИХ КОРПУСОВ</a:t>
+            </a:r>
+            <a:endParaRPr lang="en-US" sz="800" dirty="0"/>
+          </a:p>
+        </p:txBody>
+      </p:sp>
+      <p:sp>
+        <p:nvSpPr>
+          <p:cNvPr id="15" name="Text 13"/>
+          <p:cNvSpPr txBox="1"/>
+          <p:nvPr/>
+        </p:nvSpPr>
+        <p:spPr>
+          <a:xfrm>
+            <a:off x="3298698" y="5349240"/>
+            <a:ext cx="2521458" cy="402336"/>
+          </a:xfrm>
+          <a:prstGeom prst="rect">
+            <a:avLst/>
+          </a:prstGeom>
+          <a:noFill/>
+          <a:ln/>
+        </p:spPr>
+        <p:txBody>
+          <a:bodyPr wrap="square" lIns="0" tIns="0" rIns="0" bIns="0" rtlCol="0" anchor="ctr"/>
+          <a:lstStyle/>
+          <a:p>
+            <a:pPr indent="0" marL="0">
+              <a:buNone/>
+            </a:pPr>
+            <a:r>
+              <a:rPr lang="en-US" sz="2200" b="1" dirty="0">
+                <a:solidFill>
+                  <a:srgbClr val="111111"/>
+                </a:solidFill>
+                <a:latin typeface="Arial" pitchFamily="34" charset="0"/>
+                <a:ea typeface="Arial" pitchFamily="34" charset="-122"/>
+                <a:cs typeface="Arial" pitchFamily="34" charset="-120"/>
+              </a:rPr>
+              <a:t>35,3</a:t>
+            </a:r>
+            <a:pPr indent="0" marL="0">
+              <a:buNone/>
+            </a:pPr>
+            <a:r>
+              <a:rPr lang="en-US" sz="1100" b="1" dirty="0">
+                <a:solidFill>
+                  <a:srgbClr val="FF4D23"/>
+                </a:solidFill>
+                <a:latin typeface="Arial" pitchFamily="34" charset="0"/>
+                <a:ea typeface="Arial" pitchFamily="34" charset="-122"/>
+                <a:cs typeface="Arial" pitchFamily="34" charset="-120"/>
+              </a:rPr>
+              <a:t> %</a:t>
+            </a:r>
+            <a:endParaRPr lang="en-US" sz="2200" dirty="0"/>
+          </a:p>
+        </p:txBody>
+      </p:sp>
+      <p:sp>
+        <p:nvSpPr>
+          <p:cNvPr id="16" name="Text 14"/>
+          <p:cNvSpPr txBox="1"/>
+          <p:nvPr/>
+        </p:nvSpPr>
+        <p:spPr>
+          <a:xfrm>
+            <a:off x="3298698" y="5769864"/>
+            <a:ext cx="2521458" cy="384048"/>
+          </a:xfrm>
+          <a:prstGeom prst="rect">
+            <a:avLst/>
+          </a:prstGeom>
+          <a:noFill/>
+          <a:ln/>
+        </p:spPr>
+        <p:txBody>
+          <a:bodyPr wrap="square" lIns="0" tIns="0" rIns="0" bIns="0" rtlCol="0" anchor="t"/>
+          <a:lstStyle/>
+          <a:p>
+            <a:pPr indent="0" marL="0">
+              <a:lnSpc>
+                <a:spcPts val="1100"/>
+              </a:lnSpc>
+              <a:buNone/>
+            </a:pPr>
+            <a:r>
+              <a:rPr lang="en-US" sz="800" spc="30" kern="0" dirty="0">
+                <a:solidFill>
+                  <a:srgbClr val="8A8A8A"/>
+                </a:solidFill>
+                <a:latin typeface="Arial" pitchFamily="34" charset="0"/>
+                <a:ea typeface="Arial" pitchFamily="34" charset="-122"/>
+                <a:cs typeface="Arial" pitchFamily="34" charset="-120"/>
+              </a:rPr>
+              <a:t>КОЭФФИЦИЕНТ ЗАСТРОЙКИ</a:t>
+            </a:r>
+            <a:endParaRPr lang="en-US" sz="800" dirty="0"/>
+          </a:p>
+        </p:txBody>
+      </p:sp>
+      <p:sp>
+        <p:nvSpPr>
+          <p:cNvPr id="17" name="Text 15"/>
+          <p:cNvSpPr txBox="1"/>
+          <p:nvPr/>
+        </p:nvSpPr>
+        <p:spPr>
+          <a:xfrm>
+            <a:off x="6094476" y="5349240"/>
+            <a:ext cx="2521458" cy="402336"/>
+          </a:xfrm>
+          <a:prstGeom prst="rect">
+            <a:avLst/>
+          </a:prstGeom>
+          <a:noFill/>
+          <a:ln/>
+        </p:spPr>
+        <p:txBody>
+          <a:bodyPr wrap="square" lIns="0" tIns="0" rIns="0" bIns="0" rtlCol="0" anchor="ctr"/>
+          <a:lstStyle/>
+          <a:p>
+            <a:pPr indent="0" marL="0">
+              <a:buNone/>
+            </a:pPr>
+            <a:r>
+              <a:rPr lang="en-US" sz="2200" b="1" dirty="0">
+                <a:solidFill>
+                  <a:srgbClr val="111111"/>
+                </a:solidFill>
+                <a:latin typeface="Arial" pitchFamily="34" charset="0"/>
+                <a:ea typeface="Arial" pitchFamily="34" charset="-122"/>
+                <a:cs typeface="Arial" pitchFamily="34" charset="-120"/>
+              </a:rPr>
+              <a:t>1,22</a:t>
+            </a:r>
+            <a:pPr indent="0" marL="0">
+              <a:buNone/>
+            </a:pPr>
+            <a:endParaRPr lang="en-US" sz="2200" dirty="0"/>
+          </a:p>
+        </p:txBody>
+      </p:sp>
+      <p:sp>
+        <p:nvSpPr>
+          <p:cNvPr id="18" name="Text 16"/>
+          <p:cNvSpPr txBox="1"/>
+          <p:nvPr/>
+        </p:nvSpPr>
+        <p:spPr>
+          <a:xfrm>
+            <a:off x="6094476" y="5769864"/>
+            <a:ext cx="2521458" cy="384048"/>
+          </a:xfrm>
+          <a:prstGeom prst="rect">
+            <a:avLst/>
+          </a:prstGeom>
+          <a:noFill/>
+          <a:ln/>
+        </p:spPr>
+        <p:txBody>
+          <a:bodyPr wrap="square" lIns="0" tIns="0" rIns="0" bIns="0" rtlCol="0" anchor="t"/>
+          <a:lstStyle/>
+          <a:p>
+            <a:pPr indent="0" marL="0">
+              <a:lnSpc>
+                <a:spcPts val="1100"/>
+              </a:lnSpc>
+              <a:buNone/>
+            </a:pPr>
+            <a:r>
+              <a:rPr lang="en-US" sz="800" spc="30" kern="0" dirty="0">
+                <a:solidFill>
+                  <a:srgbClr val="8A8A8A"/>
+                </a:solidFill>
+                <a:latin typeface="Arial" pitchFamily="34" charset="0"/>
+                <a:ea typeface="Arial" pitchFamily="34" charset="-122"/>
+                <a:cs typeface="Arial" pitchFamily="34" charset="-120"/>
+              </a:rPr>
+              <a:t>КОЭФФИЦИЕНТ ИСПОЛЬЗОВАНИЯ ТЕРРИТОРИИ</a:t>
+            </a:r>
+            <a:endParaRPr lang="en-US" sz="800" dirty="0"/>
+          </a:p>
+        </p:txBody>
+      </p:sp>
+      <p:sp>
+        <p:nvSpPr>
+          <p:cNvPr id="19" name="Text 17"/>
+          <p:cNvSpPr txBox="1"/>
+          <p:nvPr/>
+        </p:nvSpPr>
+        <p:spPr>
+          <a:xfrm>
+            <a:off x="8890254" y="5349240"/>
+            <a:ext cx="2521458" cy="402336"/>
+          </a:xfrm>
+          <a:prstGeom prst="rect">
+            <a:avLst/>
+          </a:prstGeom>
+          <a:noFill/>
+          <a:ln/>
+        </p:spPr>
+        <p:txBody>
+          <a:bodyPr wrap="square" lIns="0" tIns="0" rIns="0" bIns="0" rtlCol="0" anchor="ctr"/>
+          <a:lstStyle/>
+          <a:p>
+            <a:pPr indent="0" marL="0">
+              <a:buNone/>
+            </a:pPr>
+            <a:r>
+              <a:rPr lang="en-US" sz="2200" b="1" dirty="0">
+                <a:solidFill>
+                  <a:srgbClr val="111111"/>
+                </a:solidFill>
+                <a:latin typeface="Arial" pitchFamily="34" charset="0"/>
+                <a:ea typeface="Arial" pitchFamily="34" charset="-122"/>
+                <a:cs typeface="Arial" pitchFamily="34" charset="-120"/>
+              </a:rPr>
+              <a:t>64,7</a:t>
+            </a:r>
+            <a:pPr indent="0" marL="0">
+              <a:buNone/>
+            </a:pPr>
+            <a:r>
+              <a:rPr lang="en-US" sz="1100" b="1" dirty="0">
+                <a:solidFill>
+                  <a:srgbClr val="FF4D23"/>
+                </a:solidFill>
+                <a:latin typeface="Arial" pitchFamily="34" charset="0"/>
+                <a:ea typeface="Arial" pitchFamily="34" charset="-122"/>
+                <a:cs typeface="Arial" pitchFamily="34" charset="-120"/>
+              </a:rPr>
+              <a:t> %</a:t>
+            </a:r>
+            <a:endParaRPr lang="en-US" sz="2200" dirty="0"/>
+          </a:p>
+        </p:txBody>
+      </p:sp>
+      <p:sp>
+        <p:nvSpPr>
+          <p:cNvPr id="20" name="Text 18"/>
+          <p:cNvSpPr txBox="1"/>
+          <p:nvPr/>
+        </p:nvSpPr>
+        <p:spPr>
+          <a:xfrm>
+            <a:off x="8890254" y="5769864"/>
+            <a:ext cx="2521458" cy="384048"/>
+          </a:xfrm>
+          <a:prstGeom prst="rect">
+            <a:avLst/>
+          </a:prstGeom>
+          <a:noFill/>
+          <a:ln/>
+        </p:spPr>
+        <p:txBody>
+          <a:bodyPr wrap="square" lIns="0" tIns="0" rIns="0" bIns="0" rtlCol="0" anchor="t"/>
+          <a:lstStyle/>
+          <a:p>
+            <a:pPr indent="0" marL="0">
+              <a:lnSpc>
+                <a:spcPts val="1100"/>
+              </a:lnSpc>
+              <a:buNone/>
+            </a:pPr>
+            <a:r>
+              <a:rPr lang="en-US" sz="800" spc="30" kern="0" dirty="0">
+                <a:solidFill>
+                  <a:srgbClr val="8A8A8A"/>
+                </a:solidFill>
+                <a:latin typeface="Arial" pitchFamily="34" charset="0"/>
+                <a:ea typeface="Arial" pitchFamily="34" charset="-122"/>
+                <a:cs typeface="Arial" pitchFamily="34" charset="-120"/>
+              </a:rPr>
+              <a:t>СВОБОДНО ОТ ЗАСТРОЙКИ</a:t>
+            </a:r>
+            <a:endParaRPr lang="en-US" sz="800" dirty="0"/>
           </a:p>
         </p:txBody>
       </p:sp>
       <p:pic>
         <p:nvPicPr>
-          <p:cNvPr id="30" name="Image 0" descr="/tmp/claude-0/-home-user-most/9fc1ec31-3c64-5a82-aadb-ddb23fff6e53/scratchpad/assets/logo_most.png">    </p:cNvPr>
+          <p:cNvPr id="21" name="Image 0" descr="/tmp/claude-0/-home-user-most/9fc1ec31-3c64-5a82-aadb-ddb23fff6e53/scratchpad/assets/logo_most.png">    </p:cNvPr>
           <p:cNvPicPr>
             <a:picLocks noChangeAspect="1"/>
           </p:cNvPicPr>
@@ -7964,7 +7490,7 @@
       </p:pic>
       <p:sp>
         <p:nvSpPr>
-          <p:cNvPr id="31" name="Text 28"/>
+          <p:cNvPr id="22" name="Text 19"/>
           <p:cNvSpPr txBox="1"/>
           <p:nvPr/>
         </p:nvSpPr>
@@ -8012,6 +7538,1296 @@
 <file path=ppt/slides/slide16.xml><?xml version="1.0" encoding="utf-8"?>
 <p:sld xmlns:a="http://schemas.openxmlformats.org/drawingml/2006/main" xmlns:r="http://schemas.openxmlformats.org/officeDocument/2006/relationships" xmlns:p="http://schemas.openxmlformats.org/presentationml/2006/main">
   <p:cSld name="Slide 16">
+    <p:bg>
+      <p:bgPr>
+        <a:solidFill>
+          <a:srgbClr val="FFFFFF"/>
+        </a:solidFill>
+      </p:bgPr>
+    </p:bg>
+    <p:spTree>
+      <p:nvGrpSpPr>
+        <p:cNvPr id="1" name=""/>
+        <p:cNvGrpSpPr/>
+        <p:nvPr/>
+      </p:nvGrpSpPr>
+      <p:grpSpPr>
+        <a:xfrm>
+          <a:off x="0" y="0"/>
+          <a:ext cx="0" cy="0"/>
+          <a:chOff x="0" y="0"/>
+          <a:chExt cx="0" cy="0"/>
+        </a:xfrm>
+      </p:grpSpPr>
+      <p:sp>
+        <p:nvSpPr>
+          <p:cNvPr id="2" name="Text 0"/>
+          <p:cNvSpPr txBox="1"/>
+          <p:nvPr/>
+        </p:nvSpPr>
+        <p:spPr>
+          <a:xfrm>
+            <a:off x="219456" y="164592"/>
+            <a:ext cx="6400800" cy="219456"/>
+          </a:xfrm>
+          <a:prstGeom prst="rect">
+            <a:avLst/>
+          </a:prstGeom>
+          <a:noFill/>
+          <a:ln/>
+        </p:spPr>
+        <p:txBody>
+          <a:bodyPr wrap="square" lIns="0" tIns="0" rIns="0" bIns="0" rtlCol="0" anchor="ctr"/>
+          <a:lstStyle/>
+          <a:p>
+            <a:pPr indent="0" marL="0">
+              <a:buNone/>
+            </a:pPr>
+            <a:r>
+              <a:rPr lang="en-US" sz="950" b="1" spc="60" kern="0" dirty="0">
+                <a:solidFill>
+                  <a:srgbClr val="111111"/>
+                </a:solidFill>
+                <a:latin typeface="Arial" pitchFamily="34" charset="0"/>
+                <a:ea typeface="Arial" pitchFamily="34" charset="-122"/>
+                <a:cs typeface="Arial" pitchFamily="34" charset="-120"/>
+              </a:rPr>
+              <a:t>ЭФФЕКТ</a:t>
+            </a:r>
+            <a:endParaRPr lang="en-US" sz="950" dirty="0"/>
+          </a:p>
+        </p:txBody>
+      </p:sp>
+      <p:sp>
+        <p:nvSpPr>
+          <p:cNvPr id="3" name="Text 1"/>
+          <p:cNvSpPr txBox="1"/>
+          <p:nvPr/>
+        </p:nvSpPr>
+        <p:spPr>
+          <a:xfrm>
+            <a:off x="219456" y="374904"/>
+            <a:ext cx="6400800" cy="201168"/>
+          </a:xfrm>
+          <a:prstGeom prst="rect">
+            <a:avLst/>
+          </a:prstGeom>
+          <a:noFill/>
+          <a:ln/>
+        </p:spPr>
+        <p:txBody>
+          <a:bodyPr wrap="square" lIns="0" tIns="0" rIns="0" bIns="0" rtlCol="0" anchor="ctr"/>
+          <a:lstStyle/>
+          <a:p>
+            <a:pPr indent="0" marL="0">
+              <a:buNone/>
+            </a:pPr>
+            <a:r>
+              <a:rPr lang="en-US" sz="900" dirty="0">
+                <a:solidFill>
+                  <a:srgbClr val="111111"/>
+                </a:solidFill>
+                <a:latin typeface="Arial" pitchFamily="34" charset="0"/>
+                <a:ea typeface="Arial" pitchFamily="34" charset="-122"/>
+                <a:cs typeface="Arial" pitchFamily="34" charset="-120"/>
+              </a:rPr>
+              <a:t>Социально-экономический эффект</a:t>
+            </a:r>
+            <a:endParaRPr lang="en-US" sz="900" dirty="0"/>
+          </a:p>
+        </p:txBody>
+      </p:sp>
+      <p:sp>
+        <p:nvSpPr>
+          <p:cNvPr id="4" name="Text 2"/>
+          <p:cNvSpPr txBox="1"/>
+          <p:nvPr/>
+        </p:nvSpPr>
+        <p:spPr>
+          <a:xfrm>
+            <a:off x="5571439" y="164592"/>
+            <a:ext cx="6400800" cy="219456"/>
+          </a:xfrm>
+          <a:prstGeom prst="rect">
+            <a:avLst/>
+          </a:prstGeom>
+          <a:noFill/>
+          <a:ln/>
+        </p:spPr>
+        <p:txBody>
+          <a:bodyPr wrap="square" lIns="0" tIns="0" rIns="0" bIns="0" rtlCol="0" anchor="ctr"/>
+          <a:lstStyle/>
+          <a:p>
+            <a:pPr algn="r" indent="0" marL="0">
+              <a:buNone/>
+            </a:pPr>
+            <a:r>
+              <a:rPr lang="en-US" sz="950" spc="60" kern="0" dirty="0">
+                <a:solidFill>
+                  <a:srgbClr val="FF4D23"/>
+                </a:solidFill>
+                <a:latin typeface="Arial" pitchFamily="34" charset="0"/>
+                <a:ea typeface="Arial" pitchFamily="34" charset="-122"/>
+                <a:cs typeface="Arial" pitchFamily="34" charset="-120"/>
+              </a:rPr>
+              <a:t>ДЛЯ ГОРОДА</a:t>
+            </a:r>
+            <a:endParaRPr lang="en-US" sz="950" dirty="0"/>
+          </a:p>
+        </p:txBody>
+      </p:sp>
+      <p:sp>
+        <p:nvSpPr>
+          <p:cNvPr id="5" name="Text 3"/>
+          <p:cNvSpPr txBox="1"/>
+          <p:nvPr/>
+        </p:nvSpPr>
+        <p:spPr>
+          <a:xfrm>
+            <a:off x="502920" y="1051560"/>
+            <a:ext cx="3383280" cy="402336"/>
+          </a:xfrm>
+          <a:prstGeom prst="rect">
+            <a:avLst/>
+          </a:prstGeom>
+          <a:noFill/>
+          <a:ln/>
+        </p:spPr>
+        <p:txBody>
+          <a:bodyPr wrap="square" lIns="0" tIns="0" rIns="0" bIns="0" rtlCol="0" anchor="ctr"/>
+          <a:lstStyle/>
+          <a:p>
+            <a:pPr indent="0" marL="0">
+              <a:buNone/>
+            </a:pPr>
+            <a:r>
+              <a:rPr lang="en-US" sz="2400" b="1" dirty="0">
+                <a:solidFill>
+                  <a:srgbClr val="111111"/>
+                </a:solidFill>
+                <a:latin typeface="Arial" pitchFamily="34" charset="0"/>
+                <a:ea typeface="Arial" pitchFamily="34" charset="-122"/>
+                <a:cs typeface="Arial" pitchFamily="34" charset="-120"/>
+              </a:rPr>
+              <a:t>260 – 300</a:t>
+            </a:r>
+            <a:pPr indent="0" marL="0">
+              <a:buNone/>
+            </a:pPr>
+            <a:endParaRPr lang="en-US" sz="2400" dirty="0"/>
+          </a:p>
+        </p:txBody>
+      </p:sp>
+      <p:sp>
+        <p:nvSpPr>
+          <p:cNvPr id="6" name="Text 4"/>
+          <p:cNvSpPr txBox="1"/>
+          <p:nvPr/>
+        </p:nvSpPr>
+        <p:spPr>
+          <a:xfrm>
+            <a:off x="502920" y="1472184"/>
+            <a:ext cx="3383280" cy="457200"/>
+          </a:xfrm>
+          <a:prstGeom prst="rect">
+            <a:avLst/>
+          </a:prstGeom>
+          <a:noFill/>
+          <a:ln/>
+        </p:spPr>
+        <p:txBody>
+          <a:bodyPr wrap="square" lIns="0" tIns="0" rIns="0" bIns="0" rtlCol="0" anchor="t"/>
+          <a:lstStyle/>
+          <a:p>
+            <a:pPr indent="0" marL="0">
+              <a:lnSpc>
+                <a:spcPts val="1100"/>
+              </a:lnSpc>
+              <a:buNone/>
+            </a:pPr>
+            <a:r>
+              <a:rPr lang="en-US" sz="800" spc="30" kern="0" dirty="0">
+                <a:solidFill>
+                  <a:srgbClr val="8A8A8A"/>
+                </a:solidFill>
+                <a:latin typeface="Arial" pitchFamily="34" charset="0"/>
+                <a:ea typeface="Arial" pitchFamily="34" charset="-122"/>
+                <a:cs typeface="Arial" pitchFamily="34" charset="-120"/>
+              </a:rPr>
+              <a:t>НОМЕРОВ 4 ЗВЕЗДЫ К ФОНДУ АЛМАТЫ (ОЦЕНКА)</a:t>
+            </a:r>
+            <a:endParaRPr lang="en-US" sz="800" dirty="0"/>
+          </a:p>
+        </p:txBody>
+      </p:sp>
+      <p:sp>
+        <p:nvSpPr>
+          <p:cNvPr id="7" name="Text 5"/>
+          <p:cNvSpPr txBox="1"/>
+          <p:nvPr/>
+        </p:nvSpPr>
+        <p:spPr>
+          <a:xfrm>
+            <a:off x="4160520" y="1051560"/>
+            <a:ext cx="3383280" cy="402336"/>
+          </a:xfrm>
+          <a:prstGeom prst="rect">
+            <a:avLst/>
+          </a:prstGeom>
+          <a:noFill/>
+          <a:ln/>
+        </p:spPr>
+        <p:txBody>
+          <a:bodyPr wrap="square" lIns="0" tIns="0" rIns="0" bIns="0" rtlCol="0" anchor="ctr"/>
+          <a:lstStyle/>
+          <a:p>
+            <a:pPr indent="0" marL="0">
+              <a:buNone/>
+            </a:pPr>
+            <a:r>
+              <a:rPr lang="en-US" sz="2400" b="1" dirty="0">
+                <a:solidFill>
+                  <a:srgbClr val="111111"/>
+                </a:solidFill>
+                <a:latin typeface="Arial" pitchFamily="34" charset="0"/>
+                <a:ea typeface="Arial" pitchFamily="34" charset="-122"/>
+                <a:cs typeface="Arial" pitchFamily="34" charset="-120"/>
+              </a:rPr>
+              <a:t>160 – 210</a:t>
+            </a:r>
+            <a:pPr indent="0" marL="0">
+              <a:buNone/>
+            </a:pPr>
+            <a:endParaRPr lang="en-US" sz="2400" dirty="0"/>
+          </a:p>
+        </p:txBody>
+      </p:sp>
+      <p:sp>
+        <p:nvSpPr>
+          <p:cNvPr id="8" name="Text 6"/>
+          <p:cNvSpPr txBox="1"/>
+          <p:nvPr/>
+        </p:nvSpPr>
+        <p:spPr>
+          <a:xfrm>
+            <a:off x="4160520" y="1472184"/>
+            <a:ext cx="3383280" cy="457200"/>
+          </a:xfrm>
+          <a:prstGeom prst="rect">
+            <a:avLst/>
+          </a:prstGeom>
+          <a:noFill/>
+          <a:ln/>
+        </p:spPr>
+        <p:txBody>
+          <a:bodyPr wrap="square" lIns="0" tIns="0" rIns="0" bIns="0" rtlCol="0" anchor="t"/>
+          <a:lstStyle/>
+          <a:p>
+            <a:pPr indent="0" marL="0">
+              <a:lnSpc>
+                <a:spcPts val="1100"/>
+              </a:lnSpc>
+              <a:buNone/>
+            </a:pPr>
+            <a:r>
+              <a:rPr lang="en-US" sz="800" spc="30" kern="0" dirty="0">
+                <a:solidFill>
+                  <a:srgbClr val="8A8A8A"/>
+                </a:solidFill>
+                <a:latin typeface="Arial" pitchFamily="34" charset="0"/>
+                <a:ea typeface="Arial" pitchFamily="34" charset="-122"/>
+                <a:cs typeface="Arial" pitchFamily="34" charset="-120"/>
+              </a:rPr>
+              <a:t>ПОСТОЯННЫХ РАБОЧИХ МЕСТ В ГОСТИНИЦЕ (ОЦЕНКА)</a:t>
+            </a:r>
+            <a:endParaRPr lang="en-US" sz="800" dirty="0"/>
+          </a:p>
+        </p:txBody>
+      </p:sp>
+      <p:sp>
+        <p:nvSpPr>
+          <p:cNvPr id="9" name="Text 7"/>
+          <p:cNvSpPr txBox="1"/>
+          <p:nvPr/>
+        </p:nvSpPr>
+        <p:spPr>
+          <a:xfrm>
+            <a:off x="7818120" y="1051560"/>
+            <a:ext cx="3383280" cy="402336"/>
+          </a:xfrm>
+          <a:prstGeom prst="rect">
+            <a:avLst/>
+          </a:prstGeom>
+          <a:noFill/>
+          <a:ln/>
+        </p:spPr>
+        <p:txBody>
+          <a:bodyPr wrap="square" lIns="0" tIns="0" rIns="0" bIns="0" rtlCol="0" anchor="ctr"/>
+          <a:lstStyle/>
+          <a:p>
+            <a:pPr indent="0" marL="0">
+              <a:buNone/>
+            </a:pPr>
+            <a:r>
+              <a:rPr lang="en-US" sz="2400" b="1" dirty="0">
+                <a:solidFill>
+                  <a:srgbClr val="111111"/>
+                </a:solidFill>
+                <a:latin typeface="Arial" pitchFamily="34" charset="0"/>
+                <a:ea typeface="Arial" pitchFamily="34" charset="-122"/>
+                <a:cs typeface="Arial" pitchFamily="34" charset="-120"/>
+              </a:rPr>
+              <a:t>17 140</a:t>
+            </a:r>
+            <a:pPr indent="0" marL="0">
+              <a:buNone/>
+            </a:pPr>
+            <a:r>
+              <a:rPr lang="en-US" sz="1100" b="1" dirty="0">
+                <a:solidFill>
+                  <a:srgbClr val="FF4D23"/>
+                </a:solidFill>
+                <a:latin typeface="Arial" pitchFamily="34" charset="0"/>
+                <a:ea typeface="Arial" pitchFamily="34" charset="-122"/>
+                <a:cs typeface="Arial" pitchFamily="34" charset="-120"/>
+              </a:rPr>
+              <a:t> м²</a:t>
+            </a:r>
+            <a:endParaRPr lang="en-US" sz="2400" dirty="0"/>
+          </a:p>
+        </p:txBody>
+      </p:sp>
+      <p:sp>
+        <p:nvSpPr>
+          <p:cNvPr id="10" name="Text 8"/>
+          <p:cNvSpPr txBox="1"/>
+          <p:nvPr/>
+        </p:nvSpPr>
+        <p:spPr>
+          <a:xfrm>
+            <a:off x="7818120" y="1472184"/>
+            <a:ext cx="3383280" cy="457200"/>
+          </a:xfrm>
+          <a:prstGeom prst="rect">
+            <a:avLst/>
+          </a:prstGeom>
+          <a:noFill/>
+          <a:ln/>
+        </p:spPr>
+        <p:txBody>
+          <a:bodyPr wrap="square" lIns="0" tIns="0" rIns="0" bIns="0" rtlCol="0" anchor="t"/>
+          <a:lstStyle/>
+          <a:p>
+            <a:pPr indent="0" marL="0">
+              <a:lnSpc>
+                <a:spcPts val="1100"/>
+              </a:lnSpc>
+              <a:buNone/>
+            </a:pPr>
+            <a:r>
+              <a:rPr lang="en-US" sz="800" spc="30" kern="0" dirty="0">
+                <a:solidFill>
+                  <a:srgbClr val="8A8A8A"/>
+                </a:solidFill>
+                <a:latin typeface="Arial" pitchFamily="34" charset="0"/>
+                <a:ea typeface="Arial" pitchFamily="34" charset="-122"/>
+                <a:cs typeface="Arial" pitchFamily="34" charset="-120"/>
+              </a:rPr>
+              <a:t>ВВОД НОВЫХ ПЛОЩАДЕЙ В НАЛОГООБЛАГАЕМУЮ БАЗУ</a:t>
+            </a:r>
+            <a:endParaRPr lang="en-US" sz="800" dirty="0"/>
+          </a:p>
+        </p:txBody>
+      </p:sp>
+      <p:sp>
+        <p:nvSpPr>
+          <p:cNvPr id="11" name="Shape 9"/>
+          <p:cNvSpPr/>
+          <p:nvPr/>
+        </p:nvSpPr>
+        <p:spPr>
+          <a:xfrm>
+            <a:off x="502920" y="2286000"/>
+            <a:ext cx="11183112" cy="7315"/>
+          </a:xfrm>
+          <a:prstGeom prst="rect">
+            <a:avLst/>
+          </a:prstGeom>
+          <a:solidFill>
+            <a:srgbClr val="DCDCDC"/>
+          </a:solidFill>
+          <a:ln w="12700">
+            <a:solidFill>
+              <a:srgbClr val="DCDCDC"/>
+            </a:solidFill>
+            <a:prstDash val="solid"/>
+          </a:ln>
+        </p:spPr>
+      </p:sp>
+      <p:sp>
+        <p:nvSpPr>
+          <p:cNvPr id="12" name="Text 10"/>
+          <p:cNvSpPr txBox="1"/>
+          <p:nvPr/>
+        </p:nvSpPr>
+        <p:spPr>
+          <a:xfrm>
+            <a:off x="502920" y="2542032"/>
+            <a:ext cx="5577840" cy="3108960"/>
+          </a:xfrm>
+          <a:prstGeom prst="rect">
+            <a:avLst/>
+          </a:prstGeom>
+          <a:noFill/>
+          <a:ln/>
+        </p:spPr>
+        <p:txBody>
+          <a:bodyPr wrap="square" lIns="0" tIns="0" rIns="0" bIns="0" rtlCol="0" anchor="t"/>
+          <a:lstStyle/>
+          <a:p>
+            <a:pPr indent="0" marL="0">
+              <a:lnSpc>
+                <a:spcPts val="1600"/>
+              </a:lnSpc>
+              <a:spcAft>
+                <a:spcPts val="1300"/>
+              </a:spcAft>
+              <a:buNone/>
+            </a:pPr>
+            <a:r>
+              <a:rPr lang="en-US" sz="1100" dirty="0">
+                <a:solidFill>
+                  <a:srgbClr val="FF4D23"/>
+                </a:solidFill>
+                <a:latin typeface="Arial" pitchFamily="34" charset="0"/>
+                <a:ea typeface="Arial" pitchFamily="34" charset="-122"/>
+                <a:cs typeface="Arial" pitchFamily="34" charset="-120"/>
+              </a:rPr>
+              <a:t>– </a:t>
+            </a:r>
+            <a:pPr indent="0" marL="0">
+              <a:lnSpc>
+                <a:spcPts val="1600"/>
+              </a:lnSpc>
+              <a:spcAft>
+                <a:spcPts val="1300"/>
+              </a:spcAft>
+              <a:buNone/>
+            </a:pPr>
+            <a:r>
+              <a:rPr lang="en-US" sz="1100" dirty="0">
+                <a:solidFill>
+                  <a:srgbClr val="333333"/>
+                </a:solidFill>
+                <a:latin typeface="Arial" pitchFamily="34" charset="0"/>
+                <a:ea typeface="Arial" pitchFamily="34" charset="-122"/>
+                <a:cs typeface="Arial" pitchFamily="34" charset="-120"/>
+              </a:rPr>
+              <a:t>Загрузка ранее неиспользуемого участка: свободная территория в деловом окружении получает капитальную функцию без сноса и расселения.</a:t>
+            </a:r>
+            <a:endParaRPr lang="en-US" sz="1100" dirty="0"/>
+          </a:p>
+          <a:p>
+            <a:pPr indent="0" marL="0">
+              <a:lnSpc>
+                <a:spcPts val="1600"/>
+              </a:lnSpc>
+              <a:spcAft>
+                <a:spcPts val="1300"/>
+              </a:spcAft>
+              <a:buNone/>
+            </a:pPr>
+            <a:r>
+              <a:rPr lang="en-US" sz="1100" dirty="0">
+                <a:solidFill>
+                  <a:srgbClr val="FF4D23"/>
+                </a:solidFill>
+                <a:latin typeface="Arial" pitchFamily="34" charset="0"/>
+                <a:ea typeface="Arial" pitchFamily="34" charset="-122"/>
+                <a:cs typeface="Arial" pitchFamily="34" charset="-120"/>
+              </a:rPr>
+              <a:t>– </a:t>
+            </a:r>
+            <a:pPr indent="0" marL="0">
+              <a:lnSpc>
+                <a:spcPts val="1600"/>
+              </a:lnSpc>
+              <a:spcAft>
+                <a:spcPts val="1300"/>
+              </a:spcAft>
+              <a:buNone/>
+            </a:pPr>
+            <a:r>
+              <a:rPr lang="en-US" sz="1100" dirty="0">
+                <a:solidFill>
+                  <a:srgbClr val="333333"/>
+                </a:solidFill>
+                <a:latin typeface="Arial" pitchFamily="34" charset="0"/>
+                <a:ea typeface="Arial" pitchFamily="34" charset="-122"/>
+                <a:cs typeface="Arial" pitchFamily="34" charset="-120"/>
+              </a:rPr>
+              <a:t>Круглогодичный турпоток: деловой сегмент зимой и осенью, горный и событийный туризм летом.</a:t>
+            </a:r>
+            <a:endParaRPr lang="en-US" sz="1100" dirty="0"/>
+          </a:p>
+          <a:p>
+            <a:pPr indent="0" marL="0">
+              <a:lnSpc>
+                <a:spcPts val="1600"/>
+              </a:lnSpc>
+              <a:spcAft>
+                <a:spcPts val="1300"/>
+              </a:spcAft>
+              <a:buNone/>
+            </a:pPr>
+            <a:r>
+              <a:rPr lang="en-US" sz="1100" dirty="0">
+                <a:solidFill>
+                  <a:srgbClr val="FF4D23"/>
+                </a:solidFill>
+                <a:latin typeface="Arial" pitchFamily="34" charset="0"/>
+                <a:ea typeface="Arial" pitchFamily="34" charset="-122"/>
+                <a:cs typeface="Arial" pitchFamily="34" charset="-120"/>
+              </a:rPr>
+              <a:t>– </a:t>
+            </a:r>
+            <a:pPr indent="0" marL="0">
+              <a:lnSpc>
+                <a:spcPts val="1600"/>
+              </a:lnSpc>
+              <a:spcAft>
+                <a:spcPts val="1300"/>
+              </a:spcAft>
+              <a:buNone/>
+            </a:pPr>
+            <a:r>
+              <a:rPr lang="en-US" sz="1100" dirty="0">
+                <a:solidFill>
+                  <a:srgbClr val="333333"/>
+                </a:solidFill>
+                <a:latin typeface="Arial" pitchFamily="34" charset="0"/>
+                <a:ea typeface="Arial" pitchFamily="34" charset="-122"/>
+                <a:cs typeface="Arial" pitchFamily="34" charset="-120"/>
+              </a:rPr>
+              <a:t>Общественные функции для района: рестораны и конференц-зона первого этажа работают на город, а не только на постояльцев.</a:t>
+            </a:r>
+            <a:endParaRPr lang="en-US" sz="1100" dirty="0"/>
+          </a:p>
+          <a:p>
+            <a:pPr indent="0" marL="0">
+              <a:lnSpc>
+                <a:spcPts val="1600"/>
+              </a:lnSpc>
+              <a:spcAft>
+                <a:spcPts val="1300"/>
+              </a:spcAft>
+              <a:buNone/>
+            </a:pPr>
+            <a:r>
+              <a:rPr lang="en-US" sz="1100" dirty="0">
+                <a:solidFill>
+                  <a:srgbClr val="FF4D23"/>
+                </a:solidFill>
+                <a:latin typeface="Arial" pitchFamily="34" charset="0"/>
+                <a:ea typeface="Arial" pitchFamily="34" charset="-122"/>
+                <a:cs typeface="Arial" pitchFamily="34" charset="-120"/>
+              </a:rPr>
+              <a:t>– </a:t>
+            </a:r>
+            <a:pPr indent="0" marL="0">
+              <a:lnSpc>
+                <a:spcPts val="1600"/>
+              </a:lnSpc>
+              <a:spcAft>
+                <a:spcPts val="1300"/>
+              </a:spcAft>
+              <a:buNone/>
+            </a:pPr>
+            <a:r>
+              <a:rPr lang="en-US" sz="1100" dirty="0">
+                <a:solidFill>
+                  <a:srgbClr val="333333"/>
+                </a:solidFill>
+                <a:latin typeface="Arial" pitchFamily="34" charset="0"/>
+                <a:ea typeface="Arial" pitchFamily="34" charset="-122"/>
+                <a:cs typeface="Arial" pitchFamily="34" charset="-120"/>
+              </a:rPr>
+              <a:t>4 446,9 м² общественного первого этажа — новая точка притяжения в квартале, доступная не только постояльцам.</a:t>
+            </a:r>
+            <a:endParaRPr lang="en-US" sz="1100" dirty="0"/>
+          </a:p>
+        </p:txBody>
+      </p:sp>
+      <p:sp>
+        <p:nvSpPr>
+          <p:cNvPr id="13" name="Text 11"/>
+          <p:cNvSpPr txBox="1"/>
+          <p:nvPr/>
+        </p:nvSpPr>
+        <p:spPr>
+          <a:xfrm>
+            <a:off x="6766560" y="2542032"/>
+            <a:ext cx="4858207" cy="201168"/>
+          </a:xfrm>
+          <a:prstGeom prst="rect">
+            <a:avLst/>
+          </a:prstGeom>
+          <a:noFill/>
+          <a:ln/>
+        </p:spPr>
+        <p:txBody>
+          <a:bodyPr wrap="square" lIns="0" tIns="0" rIns="0" bIns="0" rtlCol="0" anchor="ctr"/>
+          <a:lstStyle/>
+          <a:p>
+            <a:pPr indent="0" marL="0">
+              <a:buNone/>
+            </a:pPr>
+            <a:r>
+              <a:rPr lang="en-US" sz="850" spc="30" kern="0" dirty="0">
+                <a:solidFill>
+                  <a:srgbClr val="FF4D23"/>
+                </a:solidFill>
+                <a:latin typeface="Arial" pitchFamily="34" charset="0"/>
+                <a:ea typeface="Arial" pitchFamily="34" charset="-122"/>
+                <a:cs typeface="Arial" pitchFamily="34" charset="-120"/>
+              </a:rPr>
+              <a:t>ПОКАЗАТЕЛИ, КОТОРЫЕ ВНОСИТ ЗАКАЗЧИК</a:t>
+            </a:r>
+            <a:endParaRPr lang="en-US" sz="850" dirty="0"/>
+          </a:p>
+        </p:txBody>
+      </p:sp>
+      <p:sp>
+        <p:nvSpPr>
+          <p:cNvPr id="14" name="Text 12"/>
+          <p:cNvSpPr txBox="1"/>
+          <p:nvPr/>
+        </p:nvSpPr>
+        <p:spPr>
+          <a:xfrm>
+            <a:off x="6766560" y="2907792"/>
+            <a:ext cx="3012088" cy="274320"/>
+          </a:xfrm>
+          <a:prstGeom prst="rect">
+            <a:avLst/>
+          </a:prstGeom>
+          <a:noFill/>
+          <a:ln/>
+        </p:spPr>
+        <p:txBody>
+          <a:bodyPr wrap="square" lIns="0" tIns="0" rIns="0" bIns="0" rtlCol="0" anchor="ctr"/>
+          <a:lstStyle/>
+          <a:p>
+            <a:pPr indent="0" marL="0">
+              <a:buNone/>
+            </a:pPr>
+            <a:r>
+              <a:rPr lang="en-US" sz="1000" dirty="0">
+                <a:solidFill>
+                  <a:srgbClr val="333333"/>
+                </a:solidFill>
+                <a:latin typeface="Arial" pitchFamily="34" charset="0"/>
+                <a:ea typeface="Arial" pitchFamily="34" charset="-122"/>
+                <a:cs typeface="Arial" pitchFamily="34" charset="-120"/>
+              </a:rPr>
+              <a:t>Объём инвестиций, млрд ₸</a:t>
+            </a:r>
+            <a:endParaRPr lang="en-US" sz="1000" dirty="0"/>
+          </a:p>
+        </p:txBody>
+      </p:sp>
+      <p:sp>
+        <p:nvSpPr>
+          <p:cNvPr id="15" name="Text 13"/>
+          <p:cNvSpPr txBox="1"/>
+          <p:nvPr/>
+        </p:nvSpPr>
+        <p:spPr>
+          <a:xfrm>
+            <a:off x="9778648" y="2907792"/>
+            <a:ext cx="1846119" cy="274320"/>
+          </a:xfrm>
+          <a:prstGeom prst="rect">
+            <a:avLst/>
+          </a:prstGeom>
+          <a:noFill/>
+          <a:ln/>
+        </p:spPr>
+        <p:txBody>
+          <a:bodyPr wrap="square" lIns="0" tIns="0" rIns="0" bIns="0" rtlCol="0" anchor="ctr"/>
+          <a:lstStyle/>
+          <a:p>
+            <a:pPr algn="r" indent="0" marL="0">
+              <a:buNone/>
+            </a:pPr>
+            <a:r>
+              <a:rPr lang="en-US" sz="1000" dirty="0">
+                <a:solidFill>
+                  <a:srgbClr val="FF4D23"/>
+                </a:solidFill>
+                <a:latin typeface="Arial" pitchFamily="34" charset="0"/>
+                <a:ea typeface="Arial" pitchFamily="34" charset="-122"/>
+                <a:cs typeface="Arial" pitchFamily="34" charset="-120"/>
+              </a:rPr>
+              <a:t>____________</a:t>
+            </a:r>
+            <a:endParaRPr lang="en-US" sz="1000" dirty="0"/>
+          </a:p>
+        </p:txBody>
+      </p:sp>
+      <p:sp>
+        <p:nvSpPr>
+          <p:cNvPr id="16" name="Shape 14"/>
+          <p:cNvSpPr/>
+          <p:nvPr/>
+        </p:nvSpPr>
+        <p:spPr>
+          <a:xfrm>
+            <a:off x="6766560" y="3218688"/>
+            <a:ext cx="4858207" cy="7315"/>
+          </a:xfrm>
+          <a:prstGeom prst="rect">
+            <a:avLst/>
+          </a:prstGeom>
+          <a:solidFill>
+            <a:srgbClr val="DCDCDC"/>
+          </a:solidFill>
+          <a:ln w="12700">
+            <a:solidFill>
+              <a:srgbClr val="DCDCDC"/>
+            </a:solidFill>
+            <a:prstDash val="solid"/>
+          </a:ln>
+        </p:spPr>
+      </p:sp>
+      <p:sp>
+        <p:nvSpPr>
+          <p:cNvPr id="17" name="Text 15"/>
+          <p:cNvSpPr txBox="1"/>
+          <p:nvPr/>
+        </p:nvSpPr>
+        <p:spPr>
+          <a:xfrm>
+            <a:off x="6766560" y="3419856"/>
+            <a:ext cx="3012088" cy="274320"/>
+          </a:xfrm>
+          <a:prstGeom prst="rect">
+            <a:avLst/>
+          </a:prstGeom>
+          <a:noFill/>
+          <a:ln/>
+        </p:spPr>
+        <p:txBody>
+          <a:bodyPr wrap="square" lIns="0" tIns="0" rIns="0" bIns="0" rtlCol="0" anchor="ctr"/>
+          <a:lstStyle/>
+          <a:p>
+            <a:pPr indent="0" marL="0">
+              <a:buNone/>
+            </a:pPr>
+            <a:r>
+              <a:rPr lang="en-US" sz="1000" dirty="0">
+                <a:solidFill>
+                  <a:srgbClr val="333333"/>
+                </a:solidFill>
+                <a:latin typeface="Arial" pitchFamily="34" charset="0"/>
+                <a:ea typeface="Arial" pitchFamily="34" charset="-122"/>
+                <a:cs typeface="Arial" pitchFamily="34" charset="-120"/>
+              </a:rPr>
+              <a:t>Налоговые поступления в год</a:t>
+            </a:r>
+            <a:endParaRPr lang="en-US" sz="1000" dirty="0"/>
+          </a:p>
+        </p:txBody>
+      </p:sp>
+      <p:sp>
+        <p:nvSpPr>
+          <p:cNvPr id="18" name="Text 16"/>
+          <p:cNvSpPr txBox="1"/>
+          <p:nvPr/>
+        </p:nvSpPr>
+        <p:spPr>
+          <a:xfrm>
+            <a:off x="9778648" y="3419856"/>
+            <a:ext cx="1846119" cy="274320"/>
+          </a:xfrm>
+          <a:prstGeom prst="rect">
+            <a:avLst/>
+          </a:prstGeom>
+          <a:noFill/>
+          <a:ln/>
+        </p:spPr>
+        <p:txBody>
+          <a:bodyPr wrap="square" lIns="0" tIns="0" rIns="0" bIns="0" rtlCol="0" anchor="ctr"/>
+          <a:lstStyle/>
+          <a:p>
+            <a:pPr algn="r" indent="0" marL="0">
+              <a:buNone/>
+            </a:pPr>
+            <a:r>
+              <a:rPr lang="en-US" sz="1000" dirty="0">
+                <a:solidFill>
+                  <a:srgbClr val="FF4D23"/>
+                </a:solidFill>
+                <a:latin typeface="Arial" pitchFamily="34" charset="0"/>
+                <a:ea typeface="Arial" pitchFamily="34" charset="-122"/>
+                <a:cs typeface="Arial" pitchFamily="34" charset="-120"/>
+              </a:rPr>
+              <a:t>____________</a:t>
+            </a:r>
+            <a:endParaRPr lang="en-US" sz="1000" dirty="0"/>
+          </a:p>
+        </p:txBody>
+      </p:sp>
+      <p:sp>
+        <p:nvSpPr>
+          <p:cNvPr id="19" name="Shape 17"/>
+          <p:cNvSpPr/>
+          <p:nvPr/>
+        </p:nvSpPr>
+        <p:spPr>
+          <a:xfrm>
+            <a:off x="6766560" y="3730752"/>
+            <a:ext cx="4858207" cy="7315"/>
+          </a:xfrm>
+          <a:prstGeom prst="rect">
+            <a:avLst/>
+          </a:prstGeom>
+          <a:solidFill>
+            <a:srgbClr val="DCDCDC"/>
+          </a:solidFill>
+          <a:ln w="12700">
+            <a:solidFill>
+              <a:srgbClr val="DCDCDC"/>
+            </a:solidFill>
+            <a:prstDash val="solid"/>
+          </a:ln>
+        </p:spPr>
+      </p:sp>
+      <p:sp>
+        <p:nvSpPr>
+          <p:cNvPr id="20" name="Text 18"/>
+          <p:cNvSpPr txBox="1"/>
+          <p:nvPr/>
+        </p:nvSpPr>
+        <p:spPr>
+          <a:xfrm>
+            <a:off x="6766560" y="3931920"/>
+            <a:ext cx="3012088" cy="274320"/>
+          </a:xfrm>
+          <a:prstGeom prst="rect">
+            <a:avLst/>
+          </a:prstGeom>
+          <a:noFill/>
+          <a:ln/>
+        </p:spPr>
+        <p:txBody>
+          <a:bodyPr wrap="square" lIns="0" tIns="0" rIns="0" bIns="0" rtlCol="0" anchor="ctr"/>
+          <a:lstStyle/>
+          <a:p>
+            <a:pPr indent="0" marL="0">
+              <a:buNone/>
+            </a:pPr>
+            <a:r>
+              <a:rPr lang="en-US" sz="1000" dirty="0">
+                <a:solidFill>
+                  <a:srgbClr val="333333"/>
+                </a:solidFill>
+                <a:latin typeface="Arial" pitchFamily="34" charset="0"/>
+                <a:ea typeface="Arial" pitchFamily="34" charset="-122"/>
+                <a:cs typeface="Arial" pitchFamily="34" charset="-120"/>
+              </a:rPr>
+              <a:t>Рабочие места на период строительства</a:t>
+            </a:r>
+            <a:endParaRPr lang="en-US" sz="1000" dirty="0"/>
+          </a:p>
+        </p:txBody>
+      </p:sp>
+      <p:sp>
+        <p:nvSpPr>
+          <p:cNvPr id="21" name="Text 19"/>
+          <p:cNvSpPr txBox="1"/>
+          <p:nvPr/>
+        </p:nvSpPr>
+        <p:spPr>
+          <a:xfrm>
+            <a:off x="9778648" y="3931920"/>
+            <a:ext cx="1846119" cy="274320"/>
+          </a:xfrm>
+          <a:prstGeom prst="rect">
+            <a:avLst/>
+          </a:prstGeom>
+          <a:noFill/>
+          <a:ln/>
+        </p:spPr>
+        <p:txBody>
+          <a:bodyPr wrap="square" lIns="0" tIns="0" rIns="0" bIns="0" rtlCol="0" anchor="ctr"/>
+          <a:lstStyle/>
+          <a:p>
+            <a:pPr algn="r" indent="0" marL="0">
+              <a:buNone/>
+            </a:pPr>
+            <a:r>
+              <a:rPr lang="en-US" sz="1000" dirty="0">
+                <a:solidFill>
+                  <a:srgbClr val="FF4D23"/>
+                </a:solidFill>
+                <a:latin typeface="Arial" pitchFamily="34" charset="0"/>
+                <a:ea typeface="Arial" pitchFamily="34" charset="-122"/>
+                <a:cs typeface="Arial" pitchFamily="34" charset="-120"/>
+              </a:rPr>
+              <a:t>____________</a:t>
+            </a:r>
+            <a:endParaRPr lang="en-US" sz="1000" dirty="0"/>
+          </a:p>
+        </p:txBody>
+      </p:sp>
+      <p:sp>
+        <p:nvSpPr>
+          <p:cNvPr id="22" name="Shape 20"/>
+          <p:cNvSpPr/>
+          <p:nvPr/>
+        </p:nvSpPr>
+        <p:spPr>
+          <a:xfrm>
+            <a:off x="6766560" y="4242816"/>
+            <a:ext cx="4858207" cy="7315"/>
+          </a:xfrm>
+          <a:prstGeom prst="rect">
+            <a:avLst/>
+          </a:prstGeom>
+          <a:solidFill>
+            <a:srgbClr val="DCDCDC"/>
+          </a:solidFill>
+          <a:ln w="12700">
+            <a:solidFill>
+              <a:srgbClr val="DCDCDC"/>
+            </a:solidFill>
+            <a:prstDash val="solid"/>
+          </a:ln>
+        </p:spPr>
+      </p:sp>
+      <p:sp>
+        <p:nvSpPr>
+          <p:cNvPr id="23" name="Text 21"/>
+          <p:cNvSpPr txBox="1"/>
+          <p:nvPr/>
+        </p:nvSpPr>
+        <p:spPr>
+          <a:xfrm>
+            <a:off x="6766560" y="4443984"/>
+            <a:ext cx="3012088" cy="274320"/>
+          </a:xfrm>
+          <a:prstGeom prst="rect">
+            <a:avLst/>
+          </a:prstGeom>
+          <a:noFill/>
+          <a:ln/>
+        </p:spPr>
+        <p:txBody>
+          <a:bodyPr wrap="square" lIns="0" tIns="0" rIns="0" bIns="0" rtlCol="0" anchor="ctr"/>
+          <a:lstStyle/>
+          <a:p>
+            <a:pPr indent="0" marL="0">
+              <a:buNone/>
+            </a:pPr>
+            <a:r>
+              <a:rPr lang="en-US" sz="1000" dirty="0">
+                <a:solidFill>
+                  <a:srgbClr val="333333"/>
+                </a:solidFill>
+                <a:latin typeface="Arial" pitchFamily="34" charset="0"/>
+                <a:ea typeface="Arial" pitchFamily="34" charset="-122"/>
+                <a:cs typeface="Arial" pitchFamily="34" charset="-120"/>
+              </a:rPr>
+              <a:t>Гостиничный оператор</a:t>
+            </a:r>
+            <a:endParaRPr lang="en-US" sz="1000" dirty="0"/>
+          </a:p>
+        </p:txBody>
+      </p:sp>
+      <p:sp>
+        <p:nvSpPr>
+          <p:cNvPr id="24" name="Text 22"/>
+          <p:cNvSpPr txBox="1"/>
+          <p:nvPr/>
+        </p:nvSpPr>
+        <p:spPr>
+          <a:xfrm>
+            <a:off x="9778648" y="4443984"/>
+            <a:ext cx="1846119" cy="274320"/>
+          </a:xfrm>
+          <a:prstGeom prst="rect">
+            <a:avLst/>
+          </a:prstGeom>
+          <a:noFill/>
+          <a:ln/>
+        </p:spPr>
+        <p:txBody>
+          <a:bodyPr wrap="square" lIns="0" tIns="0" rIns="0" bIns="0" rtlCol="0" anchor="ctr"/>
+          <a:lstStyle/>
+          <a:p>
+            <a:pPr algn="r" indent="0" marL="0">
+              <a:buNone/>
+            </a:pPr>
+            <a:r>
+              <a:rPr lang="en-US" sz="1000" dirty="0">
+                <a:solidFill>
+                  <a:srgbClr val="FF4D23"/>
+                </a:solidFill>
+                <a:latin typeface="Arial" pitchFamily="34" charset="0"/>
+                <a:ea typeface="Arial" pitchFamily="34" charset="-122"/>
+                <a:cs typeface="Arial" pitchFamily="34" charset="-120"/>
+              </a:rPr>
+              <a:t>____________</a:t>
+            </a:r>
+            <a:endParaRPr lang="en-US" sz="1000" dirty="0"/>
+          </a:p>
+        </p:txBody>
+      </p:sp>
+      <p:sp>
+        <p:nvSpPr>
+          <p:cNvPr id="25" name="Shape 23"/>
+          <p:cNvSpPr/>
+          <p:nvPr/>
+        </p:nvSpPr>
+        <p:spPr>
+          <a:xfrm>
+            <a:off x="6766560" y="4754880"/>
+            <a:ext cx="4858207" cy="7315"/>
+          </a:xfrm>
+          <a:prstGeom prst="rect">
+            <a:avLst/>
+          </a:prstGeom>
+          <a:solidFill>
+            <a:srgbClr val="DCDCDC"/>
+          </a:solidFill>
+          <a:ln w="12700">
+            <a:solidFill>
+              <a:srgbClr val="DCDCDC"/>
+            </a:solidFill>
+            <a:prstDash val="solid"/>
+          </a:ln>
+        </p:spPr>
+      </p:sp>
+      <p:sp>
+        <p:nvSpPr>
+          <p:cNvPr id="26" name="Text 24"/>
+          <p:cNvSpPr txBox="1"/>
+          <p:nvPr/>
+        </p:nvSpPr>
+        <p:spPr>
+          <a:xfrm>
+            <a:off x="6766560" y="4956048"/>
+            <a:ext cx="3012088" cy="274320"/>
+          </a:xfrm>
+          <a:prstGeom prst="rect">
+            <a:avLst/>
+          </a:prstGeom>
+          <a:noFill/>
+          <a:ln/>
+        </p:spPr>
+        <p:txBody>
+          <a:bodyPr wrap="square" lIns="0" tIns="0" rIns="0" bIns="0" rtlCol="0" anchor="ctr"/>
+          <a:lstStyle/>
+          <a:p>
+            <a:pPr indent="0" marL="0">
+              <a:buNone/>
+            </a:pPr>
+            <a:r>
+              <a:rPr lang="en-US" sz="1000" dirty="0">
+                <a:solidFill>
+                  <a:srgbClr val="333333"/>
+                </a:solidFill>
+                <a:latin typeface="Arial" pitchFamily="34" charset="0"/>
+                <a:ea typeface="Arial" pitchFamily="34" charset="-122"/>
+                <a:cs typeface="Arial" pitchFamily="34" charset="-120"/>
+              </a:rPr>
+              <a:t>Планируемый срок ввода в эксплуатацию</a:t>
+            </a:r>
+            <a:endParaRPr lang="en-US" sz="1000" dirty="0"/>
+          </a:p>
+        </p:txBody>
+      </p:sp>
+      <p:sp>
+        <p:nvSpPr>
+          <p:cNvPr id="27" name="Text 25"/>
+          <p:cNvSpPr txBox="1"/>
+          <p:nvPr/>
+        </p:nvSpPr>
+        <p:spPr>
+          <a:xfrm>
+            <a:off x="9778648" y="4956048"/>
+            <a:ext cx="1846119" cy="274320"/>
+          </a:xfrm>
+          <a:prstGeom prst="rect">
+            <a:avLst/>
+          </a:prstGeom>
+          <a:noFill/>
+          <a:ln/>
+        </p:spPr>
+        <p:txBody>
+          <a:bodyPr wrap="square" lIns="0" tIns="0" rIns="0" bIns="0" rtlCol="0" anchor="ctr"/>
+          <a:lstStyle/>
+          <a:p>
+            <a:pPr algn="r" indent="0" marL="0">
+              <a:buNone/>
+            </a:pPr>
+            <a:r>
+              <a:rPr lang="en-US" sz="1000" dirty="0">
+                <a:solidFill>
+                  <a:srgbClr val="FF4D23"/>
+                </a:solidFill>
+                <a:latin typeface="Arial" pitchFamily="34" charset="0"/>
+                <a:ea typeface="Arial" pitchFamily="34" charset="-122"/>
+                <a:cs typeface="Arial" pitchFamily="34" charset="-120"/>
+              </a:rPr>
+              <a:t>____________</a:t>
+            </a:r>
+            <a:endParaRPr lang="en-US" sz="1000" dirty="0"/>
+          </a:p>
+        </p:txBody>
+      </p:sp>
+      <p:sp>
+        <p:nvSpPr>
+          <p:cNvPr id="28" name="Shape 26"/>
+          <p:cNvSpPr/>
+          <p:nvPr/>
+        </p:nvSpPr>
+        <p:spPr>
+          <a:xfrm>
+            <a:off x="6766560" y="5266944"/>
+            <a:ext cx="4858207" cy="7315"/>
+          </a:xfrm>
+          <a:prstGeom prst="rect">
+            <a:avLst/>
+          </a:prstGeom>
+          <a:solidFill>
+            <a:srgbClr val="DCDCDC"/>
+          </a:solidFill>
+          <a:ln w="12700">
+            <a:solidFill>
+              <a:srgbClr val="DCDCDC"/>
+            </a:solidFill>
+            <a:prstDash val="solid"/>
+          </a:ln>
+        </p:spPr>
+      </p:sp>
+      <p:sp>
+        <p:nvSpPr>
+          <p:cNvPr id="29" name="Text 27"/>
+          <p:cNvSpPr txBox="1"/>
+          <p:nvPr/>
+        </p:nvSpPr>
+        <p:spPr>
+          <a:xfrm>
+            <a:off x="502920" y="5897880"/>
+            <a:ext cx="11183112" cy="365760"/>
+          </a:xfrm>
+          <a:prstGeom prst="rect">
+            <a:avLst/>
+          </a:prstGeom>
+          <a:noFill/>
+          <a:ln/>
+        </p:spPr>
+        <p:txBody>
+          <a:bodyPr wrap="square" lIns="0" tIns="0" rIns="0" bIns="0" rtlCol="0" anchor="t"/>
+          <a:lstStyle/>
+          <a:p>
+            <a:pPr indent="0" marL="0">
+              <a:lnSpc>
+                <a:spcPts val="1100"/>
+              </a:lnSpc>
+              <a:buNone/>
+            </a:pPr>
+            <a:r>
+              <a:rPr lang="en-US" sz="850" i="1" dirty="0">
+                <a:solidFill>
+                  <a:srgbClr val="8A8A8A"/>
+                </a:solidFill>
+                <a:latin typeface="Arial" pitchFamily="34" charset="0"/>
+                <a:ea typeface="Arial" pitchFamily="34" charset="-122"/>
+                <a:cs typeface="Arial" pitchFamily="34" charset="-120"/>
+              </a:rPr>
+              <a:t>Ёмкость номерного фонда и численность персонала указаны оценочно и подлежат уточнению после утверждения планировочных решений.</a:t>
+            </a:r>
+            <a:endParaRPr lang="en-US" sz="850" dirty="0"/>
+          </a:p>
+        </p:txBody>
+      </p:sp>
+      <p:pic>
+        <p:nvPicPr>
+          <p:cNvPr id="30" name="Image 0" descr="/tmp/claude-0/-home-user-most/9fc1ec31-3c64-5a82-aadb-ddb23fff6e53/scratchpad/assets/logo_most.png">    </p:cNvPr>
+          <p:cNvPicPr>
+            <a:picLocks noChangeAspect="1"/>
+          </p:cNvPicPr>
+          <p:nvPr/>
+        </p:nvPicPr>
+        <p:blipFill>
+          <a:blip r:embed="rId1"/>
+          <a:stretch>
+            <a:fillRect/>
+          </a:stretch>
+        </p:blipFill>
+        <p:spPr>
+          <a:xfrm>
+            <a:off x="11356848" y="5925312"/>
+            <a:ext cx="630936" cy="704088"/>
+          </a:xfrm>
+          <a:prstGeom prst="rect">
+            <a:avLst/>
+          </a:prstGeom>
+        </p:spPr>
+      </p:pic>
+      <p:sp>
+        <p:nvSpPr>
+          <p:cNvPr id="31" name="Text 28"/>
+          <p:cNvSpPr txBox="1"/>
+          <p:nvPr/>
+        </p:nvSpPr>
+        <p:spPr>
+          <a:xfrm>
+            <a:off x="219456" y="6455664"/>
+            <a:ext cx="914400" cy="201168"/>
+          </a:xfrm>
+          <a:prstGeom prst="rect">
+            <a:avLst/>
+          </a:prstGeom>
+          <a:noFill/>
+          <a:ln/>
+        </p:spPr>
+        <p:txBody>
+          <a:bodyPr wrap="square" lIns="0" tIns="0" rIns="0" bIns="0" rtlCol="0" anchor="ctr"/>
+          <a:lstStyle/>
+          <a:p>
+            <a:pPr indent="0" marL="0">
+              <a:buNone/>
+            </a:pPr>
+            <a:r>
+              <a:rPr lang="en-US" sz="800" dirty="0">
+                <a:solidFill>
+                  <a:srgbClr val="8A8A8A"/>
+                </a:solidFill>
+                <a:latin typeface="Arial" pitchFamily="34" charset="0"/>
+                <a:ea typeface="Arial" pitchFamily="34" charset="-122"/>
+                <a:cs typeface="Arial" pitchFamily="34" charset="-120"/>
+              </a:rPr>
+              <a:t>16</a:t>
+            </a:r>
+            <a:endParaRPr lang="en-US" sz="800" dirty="0"/>
+          </a:p>
+        </p:txBody>
+      </p:sp>
+    </p:spTree>
+  </p:cSld>
+  <p:clrMapOvr>
+    <a:masterClrMapping/>
+  </p:clrMapOvr>
+</p:sld>
+</file>
+
+<file path=ppt/slides/slide17.xml><?xml version="1.0" encoding="utf-8"?>
+<p:sld xmlns:a="http://schemas.openxmlformats.org/drawingml/2006/main" xmlns:r="http://schemas.openxmlformats.org/officeDocument/2006/relationships" xmlns:p="http://schemas.openxmlformats.org/presentationml/2006/main">
+  <p:cSld name="Slide 17">
     <p:bg>
       <p:bgPr>
         <a:solidFill>
@@ -12454,7 +13270,7 @@
                 <a:ea typeface="Arial" pitchFamily="34" charset="-122"/>
                 <a:cs typeface="Arial" pitchFamily="34" charset="-120"/>
               </a:rPr>
-              <a:t>Объёмно-пространственное решение</a:t>
+              <a:t>Генезис формы</a:t>
             </a:r>
             <a:endParaRPr lang="en-US" sz="900" dirty="0"/>
           </a:p>
@@ -12532,7 +13348,7 @@
                 <a:ea typeface="Arial" pitchFamily="34" charset="-122"/>
                 <a:cs typeface="Arial" pitchFamily="34" charset="-120"/>
               </a:rPr>
-              <a:t>ГОРИЗОНТАЛЬ ВМЕСТО ВЫСОТЫ</a:t>
+              <a:t>ФОРМА ОТ СИЛУЭТА ГОР</a:t>
             </a:r>
             <a:endParaRPr lang="en-US" sz="1300" dirty="0"/>
           </a:p>
@@ -12547,7 +13363,7 @@
         <p:spPr>
           <a:xfrm>
             <a:off x="502920" y="1325880"/>
-            <a:ext cx="3794760" cy="2011680"/>
+            <a:ext cx="3794760" cy="1828800"/>
           </a:xfrm>
           <a:prstGeom prst="rect">
             <a:avLst/>
@@ -12574,7 +13390,7 @@
                 <a:ea typeface="Arial" pitchFamily="34" charset="-122"/>
                 <a:cs typeface="Arial" pitchFamily="34" charset="-120"/>
               </a:rPr>
-              <a:t>Объём набран горизонтальными лентами перекрытий с плавными скруглениями. Пять этажей вместо башни: комплекс не спорит с панорамой гор и не перекрывает виды соседней застройки. Ленты балконов и террас озеленены по всей длине — зелень становится частью фасада, а не только партера.</a:t>
+              <a:t>Исходная линия проекта — панорама Заилийского Алатау, которая открывается с участка. Ломаная гряда последовательно сглаживается до плавных горизонталей и переходит в ленты перекрытий: здание читается как продолжение ландшафта, а не как объект, поставленный перед ним.</a:t>
             </a:r>
             <a:endParaRPr lang="en-US" sz="1050" dirty="0"/>
           </a:p>
@@ -12588,7 +13404,7 @@
         </p:nvSpPr>
         <p:spPr>
           <a:xfrm>
-            <a:off x="502920" y="2651760"/>
+            <a:off x="502920" y="3246120"/>
             <a:ext cx="3794760" cy="7315"/>
           </a:xfrm>
           <a:prstGeom prst="rect">
@@ -12613,7 +13429,7 @@
         </p:nvSpPr>
         <p:spPr>
           <a:xfrm>
-            <a:off x="502920" y="2834640"/>
+            <a:off x="502920" y="3429000"/>
             <a:ext cx="3794760" cy="2377440"/>
           </a:xfrm>
           <a:prstGeom prst="rect">
@@ -12664,7 +13480,7 @@
                 <a:ea typeface="Arial" pitchFamily="34" charset="-122"/>
                 <a:cs typeface="Arial" pitchFamily="34" charset="-120"/>
               </a:rPr>
-              <a:t>Сомасштабность: 5 этажей — в габаритах окружающей застройки, без доминанты.</a:t>
+              <a:t>Три шага абстракции: линия хребта — сглаженный контур — ленты перекрытий.</a:t>
             </a:r>
             <a:endParaRPr lang="en-US" sz="1050" dirty="0"/>
           </a:p>
@@ -12707,7 +13523,7 @@
                 <a:ea typeface="Arial" pitchFamily="34" charset="-122"/>
                 <a:cs typeface="Arial" pitchFamily="34" charset="-120"/>
               </a:rPr>
-              <a:t>Озеленённые террасы на каждом ярусе балконов по всей длине фасада.</a:t>
+              <a:t>Переменная высота лент повторяет ритм гряды: объём нарастает к центру и опадает к краям.</a:t>
             </a:r>
             <a:endParaRPr lang="en-US" sz="1050" dirty="0"/>
           </a:p>
@@ -12750,50 +13566,7 @@
                 <a:ea typeface="Arial" pitchFamily="34" charset="-122"/>
                 <a:cs typeface="Arial" pitchFamily="34" charset="-120"/>
               </a:rPr>
-              <a:t>Раскрытие на горы: номера и общественные террасы ориентированы на панораму.</a:t>
-            </a:r>
-            <a:endParaRPr lang="en-US" sz="1050" dirty="0"/>
-          </a:p>
-          <a:p>
-            <a:pPr indent="0" marL="0">
-              <a:lnSpc>
-                <a:spcPts val="1500"/>
-              </a:lnSpc>
-              <a:spcAft>
-                <a:spcPts val="900"/>
-              </a:spcAft>
-              <a:buNone/>
-            </a:pPr>
-            <a:r>
-              <a:rPr lang="en-US" sz="1050" dirty="0">
-                <a:solidFill>
-                  <a:srgbClr val="FF4D23"/>
-                </a:solidFill>
-                <a:latin typeface="Arial" pitchFamily="34" charset="0"/>
-                <a:ea typeface="Arial" pitchFamily="34" charset="-122"/>
-                <a:cs typeface="Arial" pitchFamily="34" charset="-120"/>
-              </a:rPr>
-              <a:t>– </a:t>
-            </a:r>
-            <a:pPr indent="0" marL="0">
-              <a:lnSpc>
-                <a:spcPts val="1500"/>
-              </a:lnSpc>
-              <a:spcAft>
-                <a:spcPts val="900"/>
-              </a:spcAft>
-              <a:buNone/>
-            </a:pPr>
-            <a:r>
-              <a:rPr lang="en-US" sz="1050" dirty="0">
-                <a:solidFill>
-                  <a:srgbClr val="333333"/>
-                </a:solidFill>
-                <a:latin typeface="Arial" pitchFamily="34" charset="0"/>
-                <a:ea typeface="Arial" pitchFamily="34" charset="-122"/>
-                <a:cs typeface="Arial" pitchFamily="34" charset="-120"/>
-              </a:rPr>
-              <a:t>Входная группа выделена высоким портиком с круговым подъездом.</a:t>
+              <a:t>Пять ярусов держат горизонталь и не конкурируют с панорамой.</a:t>
             </a:r>
             <a:endParaRPr lang="en-US" sz="1050" dirty="0"/>
           </a:p>
@@ -12801,7 +13574,7 @@
       </p:sp>
       <p:pic>
         <p:nvPicPr>
-          <p:cNvPr id="9" name="Image 0" descr="/tmp/claude-0/-home-user-most/9fc1ec31-3c64-5a82-aadb-ddb23fff6e53/scratchpad/assets/facade.jpg">    </p:cNvPr>
+          <p:cNvPr id="9" name="Image 0" descr="/tmp/claude-0/-home-user-most/9fc1ec31-3c64-5a82-aadb-ddb23fff6e53/scratchpad/assets/genesis.jpg">    </p:cNvPr>
           <p:cNvPicPr>
             <a:picLocks noChangeAspect="1"/>
           </p:cNvPicPr>
@@ -12816,7 +13589,7 @@
         <p:spPr>
           <a:xfrm>
             <a:off x="4709160" y="960120"/>
-            <a:ext cx="6949440" cy="3913632"/>
+            <a:ext cx="6949440" cy="4636008"/>
           </a:xfrm>
           <a:prstGeom prst="rect">
             <a:avLst/>
@@ -12831,8 +13604,8 @@
         </p:nvSpPr>
         <p:spPr>
           <a:xfrm>
-            <a:off x="4709160" y="5257800"/>
-            <a:ext cx="2194560" cy="402336"/>
+            <a:off x="4709160" y="5669280"/>
+            <a:ext cx="6949440" cy="219456"/>
           </a:xfrm>
           <a:prstGeom prst="rect">
             <a:avLst/>
@@ -12848,63 +13621,7 @@
               <a:buNone/>
             </a:pPr>
             <a:r>
-              <a:rPr lang="en-US" sz="2600" b="1" dirty="0">
-                <a:solidFill>
-                  <a:srgbClr val="111111"/>
-                </a:solidFill>
-                <a:latin typeface="Arial" pitchFamily="34" charset="0"/>
-                <a:ea typeface="Arial" pitchFamily="34" charset="-122"/>
-                <a:cs typeface="Arial" pitchFamily="34" charset="-120"/>
-              </a:rPr>
-              <a:t>5</a:t>
-            </a:r>
-            <a:pPr indent="0" marL="0">
-              <a:buNone/>
-            </a:pPr>
-            <a:r>
-              <a:rPr lang="en-US" sz="1100" b="1" dirty="0">
-                <a:solidFill>
-                  <a:srgbClr val="FF4D23"/>
-                </a:solidFill>
-                <a:latin typeface="Arial" pitchFamily="34" charset="0"/>
-                <a:ea typeface="Arial" pitchFamily="34" charset="-122"/>
-                <a:cs typeface="Arial" pitchFamily="34" charset="-120"/>
-              </a:rPr>
-              <a:t> этажей</a:t>
-            </a:r>
-            <a:endParaRPr lang="en-US" sz="2600" dirty="0"/>
-          </a:p>
-        </p:txBody>
-      </p:sp>
-      <p:sp>
-        <p:nvSpPr>
-          <p:cNvPr id="11" name="Text 8"/>
-          <p:cNvSpPr txBox="1"/>
-          <p:nvPr/>
-        </p:nvSpPr>
-        <p:spPr>
-          <a:xfrm>
-            <a:off x="4709160" y="5678424"/>
-            <a:ext cx="2194560" cy="384048"/>
-          </a:xfrm>
-          <a:prstGeom prst="rect">
-            <a:avLst/>
-          </a:prstGeom>
-          <a:noFill/>
-          <a:ln/>
-        </p:spPr>
-        <p:txBody>
-          <a:bodyPr wrap="square" lIns="0" tIns="0" rIns="0" bIns="0" rtlCol="0" anchor="t"/>
-          <a:lstStyle/>
-          <a:p>
-            <a:pPr indent="0" marL="0">
-              <a:lnSpc>
-                <a:spcPts val="1100"/>
-              </a:lnSpc>
-              <a:buNone/>
-            </a:pPr>
-            <a:r>
-              <a:rPr lang="en-US" sz="800" spc="30" kern="0" dirty="0">
+              <a:rPr lang="en-US" sz="800" dirty="0">
                 <a:solidFill>
                   <a:srgbClr val="8A8A8A"/>
                 </a:solidFill>
@@ -12912,102 +13629,7 @@
                 <a:ea typeface="Arial" pitchFamily="34" charset="-122"/>
                 <a:cs typeface="Arial" pitchFamily="34" charset="-120"/>
               </a:rPr>
-              <a:t>ЭТАЖНОСТЬ ОБОИХ КОРПУСОВ</a:t>
-            </a:r>
-            <a:endParaRPr lang="en-US" sz="800" dirty="0"/>
-          </a:p>
-        </p:txBody>
-      </p:sp>
-      <p:sp>
-        <p:nvSpPr>
-          <p:cNvPr id="12" name="Text 9"/>
-          <p:cNvSpPr txBox="1"/>
-          <p:nvPr/>
-        </p:nvSpPr>
-        <p:spPr>
-          <a:xfrm>
-            <a:off x="7086600" y="5257800"/>
-            <a:ext cx="4480560" cy="402336"/>
-          </a:xfrm>
-          <a:prstGeom prst="rect">
-            <a:avLst/>
-          </a:prstGeom>
-          <a:noFill/>
-          <a:ln/>
-        </p:spPr>
-        <p:txBody>
-          <a:bodyPr wrap="square" lIns="0" tIns="0" rIns="0" bIns="0" rtlCol="0" anchor="ctr"/>
-          <a:lstStyle/>
-          <a:p>
-            <a:pPr indent="0" marL="0">
-              <a:buNone/>
-            </a:pPr>
-            <a:r>
-              <a:rPr lang="en-US" sz="2600" b="1" dirty="0">
-                <a:solidFill>
-                  <a:srgbClr val="111111"/>
-                </a:solidFill>
-                <a:latin typeface="Arial" pitchFamily="34" charset="0"/>
-                <a:ea typeface="Arial" pitchFamily="34" charset="-122"/>
-                <a:cs typeface="Arial" pitchFamily="34" charset="-120"/>
-              </a:rPr>
-              <a:t>17 140,22</a:t>
-            </a:r>
-            <a:pPr indent="0" marL="0">
-              <a:buNone/>
-            </a:pPr>
-            <a:r>
-              <a:rPr lang="en-US" sz="1100" b="1" dirty="0">
-                <a:solidFill>
-                  <a:srgbClr val="FF4D23"/>
-                </a:solidFill>
-                <a:latin typeface="Arial" pitchFamily="34" charset="0"/>
-                <a:ea typeface="Arial" pitchFamily="34" charset="-122"/>
-                <a:cs typeface="Arial" pitchFamily="34" charset="-120"/>
-              </a:rPr>
-              <a:t> м²</a:t>
-            </a:r>
-            <a:endParaRPr lang="en-US" sz="2600" dirty="0"/>
-          </a:p>
-        </p:txBody>
-      </p:sp>
-      <p:sp>
-        <p:nvSpPr>
-          <p:cNvPr id="13" name="Text 10"/>
-          <p:cNvSpPr txBox="1"/>
-          <p:nvPr/>
-        </p:nvSpPr>
-        <p:spPr>
-          <a:xfrm>
-            <a:off x="7086600" y="5678424"/>
-            <a:ext cx="4480560" cy="384048"/>
-          </a:xfrm>
-          <a:prstGeom prst="rect">
-            <a:avLst/>
-          </a:prstGeom>
-          <a:noFill/>
-          <a:ln/>
-        </p:spPr>
-        <p:txBody>
-          <a:bodyPr wrap="square" lIns="0" tIns="0" rIns="0" bIns="0" rtlCol="0" anchor="t"/>
-          <a:lstStyle/>
-          <a:p>
-            <a:pPr indent="0" marL="0">
-              <a:lnSpc>
-                <a:spcPts val="1100"/>
-              </a:lnSpc>
-              <a:buNone/>
-            </a:pPr>
-            <a:r>
-              <a:rPr lang="en-US" sz="800" spc="30" kern="0" dirty="0">
-                <a:solidFill>
-                  <a:srgbClr val="8A8A8A"/>
-                </a:solidFill>
-                <a:latin typeface="Arial" pitchFamily="34" charset="0"/>
-                <a:ea typeface="Arial" pitchFamily="34" charset="-122"/>
-                <a:cs typeface="Arial" pitchFamily="34" charset="-120"/>
-              </a:rPr>
-              <a:t>ОБЩАЯ ПЛОЩАДЬ ЗДАНИЯ</a:t>
+              <a:t>Генезис формы: от силуэта Заилийского Алатау к лентам перекрытий.</a:t>
             </a:r>
             <a:endParaRPr lang="en-US" sz="800" dirty="0"/>
           </a:p>
@@ -13015,7 +13637,7 @@
       </p:sp>
       <p:pic>
         <p:nvPicPr>
-          <p:cNvPr id="14" name="Image 1" descr="/tmp/claude-0/-home-user-most/9fc1ec31-3c64-5a82-aadb-ddb23fff6e53/scratchpad/assets/logo_most.png">    </p:cNvPr>
+          <p:cNvPr id="11" name="Image 1" descr="/tmp/claude-0/-home-user-most/9fc1ec31-3c64-5a82-aadb-ddb23fff6e53/scratchpad/assets/logo_most.png">    </p:cNvPr>
           <p:cNvPicPr>
             <a:picLocks noChangeAspect="1"/>
           </p:cNvPicPr>
@@ -13039,7 +13661,7 @@
       </p:pic>
       <p:sp>
         <p:nvSpPr>
-          <p:cNvPr id="15" name="Text 11"/>
+          <p:cNvPr id="12" name="Text 8"/>
           <p:cNvSpPr txBox="1"/>
           <p:nvPr/>
         </p:nvSpPr>

--- a/presentations/aurora-hotel/MOST_Bukhtarminskaya_akimat.pptx
+++ b/presentations/aurora-hotel/MOST_Bukhtarminskaya_akimat.pptx
@@ -962,8 +962,8 @@
           <a:p>
             <a:r>
               <a:rPr lang="en-US" dirty="0"/>
-              <a:t>ОСТОРОЖНО: на генплане парковочные места не размечены — видна только рампа въезда с запада. Не утверждать наличие подземного паркинга, пока это не подтверждено заказчиком.
-Число машино-мест вписать до показа — это первый вопрос акимата.</a:t>
+              <a:t>На визуализированном генплане читаются: рампа под корпусом со шлагбаумом (подземный паркинг) и ряд наземных гостевых мест вдоль западной кромки.
+Вместимость подземного паркинга по чертежу не считается — подтвердить у заказчика и вписать в плашку до показа. Это первый вопрос акимата.</a:t>
             </a:r>
             <a:endParaRPr lang="en-US" dirty="0"/>
           </a:p>
@@ -5519,7 +5519,7 @@
       </p:sp>
       <p:pic>
         <p:nvPicPr>
-          <p:cNvPr id="12" name="Image 0" descr="/tmp/claude-0/-home-user-most/9fc1ec31-3c64-5a82-aadb-ddb23fff6e53/scratchpad/assets/green.jpg">    </p:cNvPr>
+          <p:cNvPr id="12" name="Image 0" descr="/tmp/claude-0/-home-user-most/9fc1ec31-3c64-5a82-aadb-ddb23fff6e53/scratchpad/assets/plan_green.jpg">    </p:cNvPr>
           <p:cNvPicPr>
             <a:picLocks noChangeAspect="1"/>
           </p:cNvPicPr>
@@ -5574,7 +5574,7 @@
                 <a:ea typeface="Arial" pitchFamily="34" charset="-122"/>
                 <a:cs typeface="Arial" pitchFamily="34" charset="-120"/>
               </a:rPr>
-              <a:t>Фрагмент генплана: полоса озеленения между проездом и границей участка.</a:t>
+              <a:t>Зелёная полоса между кольцевым проездом и границей участка.</a:t>
             </a:r>
             <a:endParaRPr lang="en-US" sz="800" dirty="0"/>
           </a:p>
@@ -5890,7 +5890,7 @@
                 <a:ea typeface="Arial" pitchFamily="34" charset="-122"/>
                 <a:cs typeface="Arial" pitchFamily="34" charset="-120"/>
               </a:rPr>
-              <a:t>Единый узел въезда в западной части участка, со стороны внутриквартального проезда, а не напрямую с ул. Бухтарминской — уличный поток не разрывается.</a:t>
+              <a:t>Два узла въезда: северо-восточный со стороны ул. Бухтарминской и юго-западный со стороны внутриквартального проезда. Оба вынесены от перекрёстка.</a:t>
             </a:r>
             <a:endParaRPr lang="en-US" sz="1050" dirty="0"/>
           </a:p>
@@ -5933,7 +5933,7 @@
                 <a:ea typeface="Arial" pitchFamily="34" charset="-122"/>
                 <a:cs typeface="Arial" pitchFamily="34" charset="-120"/>
               </a:rPr>
-              <a:t>Кольцевой проезд вокруг застройки: подъезд ко всем входам, разгрузка и проезд пожарной техники.</a:t>
+              <a:t>Рампа в подземный паркинг — в юго-западной части, уходит под основной корпус; на въезде шлагбаум.</a:t>
             </a:r>
             <a:endParaRPr lang="en-US" sz="1050" dirty="0"/>
           </a:p>
@@ -5976,7 +5976,50 @@
                 <a:ea typeface="Arial" pitchFamily="34" charset="-122"/>
                 <a:cs typeface="Arial" pitchFamily="34" charset="-120"/>
               </a:rPr>
-              <a:t>Круговой подъезд к главному входу отделён от хозяйственного двора.</a:t>
+              <a:t>Наземные гостевые места вынесены на западную кромку, вдоль улицы — гостевой транспорт не заезжает во двор.</a:t>
+            </a:r>
+            <a:endParaRPr lang="en-US" sz="1050" dirty="0"/>
+          </a:p>
+          <a:p>
+            <a:pPr indent="0" marL="0">
+              <a:lnSpc>
+                <a:spcPts val="1500"/>
+              </a:lnSpc>
+              <a:spcAft>
+                <a:spcPts val="900"/>
+              </a:spcAft>
+              <a:buNone/>
+            </a:pPr>
+            <a:r>
+              <a:rPr lang="en-US" sz="1050" dirty="0">
+                <a:solidFill>
+                  <a:srgbClr val="FF4D23"/>
+                </a:solidFill>
+                <a:latin typeface="Arial" pitchFamily="34" charset="0"/>
+                <a:ea typeface="Arial" pitchFamily="34" charset="-122"/>
+                <a:cs typeface="Arial" pitchFamily="34" charset="-120"/>
+              </a:rPr>
+              <a:t>– </a:t>
+            </a:r>
+            <a:pPr indent="0" marL="0">
+              <a:lnSpc>
+                <a:spcPts val="1500"/>
+              </a:lnSpc>
+              <a:spcAft>
+                <a:spcPts val="900"/>
+              </a:spcAft>
+              <a:buNone/>
+            </a:pPr>
+            <a:r>
+              <a:rPr lang="en-US" sz="1050" dirty="0">
+                <a:solidFill>
+                  <a:srgbClr val="333333"/>
+                </a:solidFill>
+                <a:latin typeface="Arial" pitchFamily="34" charset="0"/>
+                <a:ea typeface="Arial" pitchFamily="34" charset="-122"/>
+                <a:cs typeface="Arial" pitchFamily="34" charset="-120"/>
+              </a:rPr>
+              <a:t>Кольцевой проезд вокруг застройки: подъезд ко всем входам, разгрузка и проезд пожарной техники.</a:t>
             </a:r>
             <a:endParaRPr lang="en-US" sz="1050" dirty="0"/>
           </a:p>
@@ -6082,7 +6125,7 @@
                 <a:ea typeface="Arial" pitchFamily="34" charset="-122"/>
                 <a:cs typeface="Arial" pitchFamily="34" charset="-120"/>
               </a:rPr>
-              <a:t>Количество и тип парковки определяются расчётом по нормативу к утверждённой ёмкости номерного фонда на стадии эскизного проекта.</a:t>
+              <a:t>Подземный паркинг под основным корпусом и наземные гостевые места вдоль западной границы. Итоговое количество определяется расчётом по нормативу к утверждённой ёмкости номерного фонда.</a:t>
             </a:r>
             <a:endParaRPr lang="en-US" sz="1000" dirty="0"/>
           </a:p>
@@ -6156,7 +6199,7 @@
       </p:sp>
       <p:pic>
         <p:nvPicPr>
-          <p:cNvPr id="12" name="Image 0" descr="/tmp/claude-0/-home-user-most/9fc1ec31-3c64-5a82-aadb-ddb23fff6e53/scratchpad/assets/entrance.jpg">    </p:cNvPr>
+          <p:cNvPr id="12" name="Image 0" descr="/tmp/claude-0/-home-user-most/9fc1ec31-3c64-5a82-aadb-ddb23fff6e53/scratchpad/assets/plan_transport.jpg">    </p:cNvPr>
           <p:cNvPicPr>
             <a:picLocks noChangeAspect="1"/>
           </p:cNvPicPr>
@@ -6211,7 +6254,7 @@
                 <a:ea typeface="Arial" pitchFamily="34" charset="-122"/>
                 <a:cs typeface="Arial" pitchFamily="34" charset="-120"/>
               </a:rPr>
-              <a:t>Фрагмент генплана: узел въезда в западной части участка.</a:t>
+              <a:t>Юго-западный узел: рампа в подземный паркинг под корпусом и ряд наземных гостевых мест вдоль улицы.</a:t>
             </a:r>
             <a:endParaRPr lang="en-US" sz="800" dirty="0"/>
           </a:p>
@@ -9320,7 +9363,7 @@
       </p:sp>
       <p:pic>
         <p:nvPicPr>
-          <p:cNvPr id="5" name="Image 0" descr="/tmp/claude-0/-home-user-most/9fc1ec31-3c64-5a82-aadb-ddb23fff6e53/scratchpad/assets/genplan_context.jpg">    </p:cNvPr>
+          <p:cNvPr id="5" name="Image 0" descr="/tmp/claude-0/-home-user-most/9fc1ec31-3c64-5a82-aadb-ddb23fff6e53/scratchpad/assets/plan_render.jpg">    </p:cNvPr>
           <p:cNvPicPr>
             <a:picLocks noChangeAspect="1"/>
           </p:cNvPicPr>
@@ -9334,8 +9377,8 @@
         </p:blipFill>
         <p:spPr>
           <a:xfrm>
-            <a:off x="502920" y="868680"/>
-            <a:ext cx="6053328" cy="5669280"/>
+            <a:off x="502920" y="960120"/>
+            <a:ext cx="6053328" cy="4544568"/>
           </a:xfrm>
           <a:prstGeom prst="rect">
             <a:avLst/>
@@ -9345,6 +9388,45 @@
       <p:sp>
         <p:nvSpPr>
           <p:cNvPr id="6" name="Text 3"/>
+          <p:cNvSpPr txBox="1"/>
+          <p:nvPr/>
+        </p:nvSpPr>
+        <p:spPr>
+          <a:xfrm>
+            <a:off x="502920" y="5596128"/>
+            <a:ext cx="6053328" cy="219456"/>
+          </a:xfrm>
+          <a:prstGeom prst="rect">
+            <a:avLst/>
+          </a:prstGeom>
+          <a:noFill/>
+          <a:ln/>
+        </p:spPr>
+        <p:txBody>
+          <a:bodyPr wrap="square" lIns="0" tIns="0" rIns="0" bIns="0" rtlCol="0" anchor="ctr"/>
+          <a:lstStyle/>
+          <a:p>
+            <a:pPr indent="0" marL="0">
+              <a:buNone/>
+            </a:pPr>
+            <a:r>
+              <a:rPr lang="en-US" sz="800" dirty="0">
+                <a:solidFill>
+                  <a:srgbClr val="8A8A8A"/>
+                </a:solidFill>
+                <a:latin typeface="Arial" pitchFamily="34" charset="0"/>
+                <a:ea typeface="Arial" pitchFamily="34" charset="-122"/>
+                <a:cs typeface="Arial" pitchFamily="34" charset="-120"/>
+              </a:rPr>
+              <a:t>Генеральный план в контексте квартала. Синим — граница участка, красным — границы смежных землепользований.</a:t>
+            </a:r>
+            <a:endParaRPr lang="en-US" sz="800" dirty="0"/>
+          </a:p>
+        </p:txBody>
+      </p:sp>
+      <p:sp>
+        <p:nvSpPr>
+          <p:cNvPr id="7" name="Text 4"/>
           <p:cNvSpPr txBox="1"/>
           <p:nvPr/>
         </p:nvSpPr>
@@ -9386,7 +9468,7 @@
       </p:sp>
       <p:sp>
         <p:nvSpPr>
-          <p:cNvPr id="7" name="Shape 4"/>
+          <p:cNvPr id="8" name="Shape 5"/>
           <p:cNvSpPr/>
           <p:nvPr/>
         </p:nvSpPr>
@@ -9411,7 +9493,7 @@
       </p:sp>
       <p:sp>
         <p:nvSpPr>
-          <p:cNvPr id="8" name="Text 5"/>
+          <p:cNvPr id="9" name="Text 6"/>
           <p:cNvSpPr txBox="1"/>
           <p:nvPr/>
         </p:nvSpPr>
@@ -9605,7 +9687,7 @@
       </p:sp>
       <p:sp>
         <p:nvSpPr>
-          <p:cNvPr id="9" name="Shape 6"/>
+          <p:cNvPr id="10" name="Shape 7"/>
           <p:cNvSpPr/>
           <p:nvPr/>
         </p:nvSpPr>
@@ -9630,7 +9712,7 @@
       </p:sp>
       <p:sp>
         <p:nvSpPr>
-          <p:cNvPr id="10" name="Text 7"/>
+          <p:cNvPr id="11" name="Text 8"/>
           <p:cNvSpPr txBox="1"/>
           <p:nvPr/>
         </p:nvSpPr>
@@ -9683,7 +9765,7 @@
       </p:sp>
       <p:sp>
         <p:nvSpPr>
-          <p:cNvPr id="11" name="Text 8"/>
+          <p:cNvPr id="12" name="Text 9"/>
           <p:cNvSpPr txBox="1"/>
           <p:nvPr/>
         </p:nvSpPr>
@@ -9725,7 +9807,7 @@
       </p:sp>
       <p:pic>
         <p:nvPicPr>
-          <p:cNvPr id="12" name="Image 1" descr="/tmp/claude-0/-home-user-most/9fc1ec31-3c64-5a82-aadb-ddb23fff6e53/scratchpad/assets/logo_most.png">    </p:cNvPr>
+          <p:cNvPr id="13" name="Image 1" descr="/tmp/claude-0/-home-user-most/9fc1ec31-3c64-5a82-aadb-ddb23fff6e53/scratchpad/assets/logo_most.png">    </p:cNvPr>
           <p:cNvPicPr>
             <a:picLocks noChangeAspect="1"/>
           </p:cNvPicPr>
@@ -9749,7 +9831,7 @@
       </p:pic>
       <p:sp>
         <p:nvSpPr>
-          <p:cNvPr id="13" name="Text 9"/>
+          <p:cNvPr id="14" name="Text 10"/>
           <p:cNvSpPr txBox="1"/>
           <p:nvPr/>
         </p:nvSpPr>

--- a/presentations/aurora-hotel/MOST_Bukhtarminskaya_akimat.pptx
+++ b/presentations/aurora-hotel/MOST_Bukhtarminskaya_akimat.pptx
@@ -22,9 +22,10 @@
     <p:sldId id="270" r:id="rId16"/>
     <p:sldId id="271" r:id="rId17"/>
     <p:sldId id="272" r:id="rId18"/>
+    <p:sldId id="273" r:id="rId19"/>
   </p:sldIdLst>
   <p:notesMasterIdLst>
-    <p:notesMasterId r:id="rId19"/>
+    <p:notesMasterId r:id="rId20"/>
   </p:notesMasterIdLst>
   <p:sldSz cx="12192000" cy="6858000"/>
   <p:notesSz cx="6858000" cy="12192000"/>
@@ -607,7 +608,8 @@
           <a:p>
             <a:r>
               <a:rPr lang="en-US" dirty="0"/>
-              <a:t>Главный аргумент для градсовета: сознательный отказ от высотности. При 1,4 га можно было поставить башню — вместо этого пять этажей и раскрытие видов.</a:t>
+              <a:t>Ключевой слайд архитектурного блока: форма не произвольная, она выведена из силуэта хребта, который виден с участка.
+Отсюда же следует отказ от высотности — здание держит горизонталь панорамы.</a:t>
             </a:r>
             <a:endParaRPr lang="en-US" dirty="0"/>
           </a:p>
@@ -695,8 +697,7 @@
           <a:p>
             <a:r>
               <a:rPr lang="en-US" dirty="0"/>
-              <a:t>4 446,9 м² — из ТЭП. 4446,9/17140,22 = 25,9 % ≈ 26 %.
-Набор общественных функций — предложение бюро; окончательный состав за заказчиком и оператором.</a:t>
+              <a:t>Главный аргумент для градсовета: сознательный отказ от высотности. При 1,4 га можно было поставить башню — вместо этого пять этажей и раскрытие видов.</a:t>
             </a:r>
             <a:endParaRPr lang="en-US" dirty="0"/>
           </a:p>
@@ -784,8 +785,8 @@
           <a:p>
             <a:r>
               <a:rPr lang="en-US" dirty="0"/>
-              <a:t>ВАЖНО: 260–300 номеров — оценка бюро, а не утверждённая цифра. Так и формулировать.
-База: 12 693,32 м² × 0,65 ≈ 8 250 м² полезной площади; ÷ 28–32 м² на номер. 12 693,32 / 17 140,22 = 74,1 %; 12 693,32 / 4 этажа = 3 173,3 м².</a:t>
+              <a:t>4 446,9 м² — из ТЭП. 4446,9/17140,22 = 25,9 % ≈ 26 %.
+Набор общественных функций — предложение бюро; окончательный состав за заказчиком и оператором.</a:t>
             </a:r>
             <a:endParaRPr lang="en-US" dirty="0"/>
           </a:p>
@@ -873,8 +874,8 @@
           <a:p>
             <a:r>
               <a:rPr lang="en-US" dirty="0"/>
-              <a:t>9 058,89 м² = 14 000 − 4 941,11. Это территория вне пятна застройки, включая проезды.
-Отдельную долю озеленения не называть — баланс территории даётся на стадии ЭП.</a:t>
+              <a:t>ВАЖНО: 260–300 номеров — оценка бюро, а не утверждённая цифра. Так и формулировать.
+База: 12 693,32 м² × 0,65 ≈ 8 250 м² полезной площади; ÷ 28–32 м² на номер. 12 693,32 / 17 140,22 = 74,1 %; 12 693,32 / 4 этажа = 3 173,3 м².</a:t>
             </a:r>
             <a:endParaRPr lang="en-US" dirty="0"/>
           </a:p>
@@ -962,8 +963,8 @@
           <a:p>
             <a:r>
               <a:rPr lang="en-US" dirty="0"/>
-              <a:t>На визуализированном генплане читаются: рампа под корпусом со шлагбаумом (подземный паркинг) и ряд наземных гостевых мест вдоль западной кромки.
-Вместимость подземного паркинга по чертежу не считается — подтвердить у заказчика и вписать в плашку до показа. Это первый вопрос акимата.</a:t>
+              <a:t>9 058,89 м² = 14 000 − 4 941,11. Это территория вне пятна застройки, включая проезды.
+Отдельную долю озеленения не называть — баланс территории даётся на стадии ЭП.</a:t>
             </a:r>
             <a:endParaRPr lang="en-US" dirty="0"/>
           </a:p>
@@ -1051,8 +1052,8 @@
           <a:p>
             <a:r>
               <a:rPr lang="en-US" dirty="0"/>
-              <a:t>Левая колонка — только то, что читается с генплана, ничего не приписано.
-Правая — честный перечень открытых вопросов. Для градсовета это сильнее, чем заявление о полном соответствии всем нормам.</a:t>
+              <a:t>На визуализированном генплане читаются: рампа под корпусом со шлагбаумом (подземный паркинг) и ряд наземных гостевых мест вдоль западной кромки.
+Вместимость подземного паркинга по чертежу не считается — подтвердить у заказчика и вписать в плашку до показа. Это первый вопрос акимата.</a:t>
             </a:r>
             <a:endParaRPr lang="en-US" dirty="0"/>
           </a:p>
@@ -1140,8 +1141,8 @@
           <a:p>
             <a:r>
               <a:rPr lang="en-US" dirty="0"/>
-              <a:t>ВНИМАНИЕ: 160–210 рабочих мест — расчёт от отраслевого ориентира 0,6–0,7 сотрудника на номер для гостиниц 4 звезды, применённого к оценке 260–300 номеров. Это оценка, не факт.
-Четыре поля справа обязательно заполнить данными заказчика до показа.</a:t>
+              <a:t>Левая колонка — только то, что читается с генплана, ничего не приписано.
+Правая — честный перечень открытых вопросов. Для градсовета это сильнее, чем заявление о полном соответствии всем нормам.</a:t>
             </a:r>
             <a:endParaRPr lang="en-US" dirty="0"/>
           </a:p>
@@ -1229,8 +1230,8 @@
           <a:p>
             <a:r>
               <a:rPr lang="en-US" dirty="0"/>
-              <a:t>Контактный лист. QR ведёт на most-a.com.
-Устно на этом слайде — три запроса к акимату: одобрить архитектурно-градостроительную концепцию, выдать АПЗ для перехода к эскизному проекту, определить технические условия на подключение к инженерным сетям.</a:t>
+              <a:t>ВНИМАНИЕ: 160–210 рабочих мест — расчёт от отраслевого ориентира 0,6–0,7 сотрудника на номер для гостиниц 4 звезды, применённого к оценке 260–300 номеров. Это оценка, не факт.
+Четыре поля справа обязательно заполнить данными заказчика до показа.</a:t>
             </a:r>
             <a:endParaRPr lang="en-US" dirty="0"/>
           </a:p>
@@ -1254,6 +1255,95 @@
             <a:fld id="{F7021451-1387-4CA6-816F-3879F97B5CBC}" type="slidenum">
               <a:rPr lang="en-US"/>
               <a:t>17</a:t>
+            </a:fld>
+            <a:endParaRPr lang="en-US"/>
+          </a:p>
+        </p:txBody>
+      </p:sp>
+    </p:spTree>
+    <p:extLst>
+      <p:ext uri="{BB962C8B-B14F-4D97-AF65-F5344CB8AC3E}">
+        <p14:creationId xmlns:p14="http://schemas.microsoft.com/office/powerpoint/2010/main" val="1024086991"/>
+      </p:ext>
+    </p:extLst>
+  </p:cSld>
+  <p:clrMapOvr>
+    <a:masterClrMapping/>
+  </p:clrMapOvr>
+</p:notes>
+</file>
+
+<file path=ppt/notesSlides/notesSlide18.xml><?xml version="1.0" encoding="utf-8"?>
+<p:notes xmlns:a="http://schemas.openxmlformats.org/drawingml/2006/main" xmlns:r="http://schemas.openxmlformats.org/officeDocument/2006/relationships" xmlns:p="http://schemas.openxmlformats.org/presentationml/2006/main">
+  <p:cSld>
+    <p:spTree>
+      <p:nvGrpSpPr>
+        <p:cNvPr id="1" name=""/>
+        <p:cNvGrpSpPr/>
+        <p:nvPr/>
+      </p:nvGrpSpPr>
+      <p:grpSpPr>
+        <a:xfrm>
+          <a:off x="0" y="0"/>
+          <a:ext cx="0" cy="0"/>
+          <a:chOff x="0" y="0"/>
+          <a:chExt cx="0" cy="0"/>
+        </a:xfrm>
+      </p:grpSpPr>
+      <p:sp>
+        <p:nvSpPr>
+          <p:cNvPr id="2" name="Slide Image Placeholder 1"/>
+          <p:cNvSpPr>
+            <a:spLocks noGrp="1" noRot="1" noChangeAspect="1"/>
+          </p:cNvSpPr>
+          <p:nvPr>
+            <p:ph type="sldImg"/>
+          </p:nvPr>
+        </p:nvSpPr>
+        <p:spPr/>
+      </p:sp>
+      <p:sp>
+        <p:nvSpPr>
+          <p:cNvPr id="3" name="Notes Placeholder 2"/>
+          <p:cNvSpPr>
+            <a:spLocks noGrp="1"/>
+          </p:cNvSpPr>
+          <p:nvPr>
+            <p:ph type="body" idx="1"/>
+          </p:nvPr>
+        </p:nvSpPr>
+        <p:spPr/>
+        <p:txBody>
+          <a:bodyPr/>
+          <a:lstStyle/>
+          <a:p>
+            <a:r>
+              <a:rPr lang="en-US" dirty="0"/>
+              <a:t>Контактный лист. QR ведёт на most-a.com.
+Устно на этом слайде — три запроса к акимату: одобрить архитектурно-градостроительную концепцию, выдать АПЗ для перехода к эскизному проекту, определить технические условия на подключение к инженерным сетям.</a:t>
+            </a:r>
+            <a:endParaRPr lang="en-US" dirty="0"/>
+          </a:p>
+        </p:txBody>
+      </p:sp>
+      <p:sp>
+        <p:nvSpPr>
+          <p:cNvPr id="4" name="Slide Number Placeholder 3"/>
+          <p:cNvSpPr>
+            <a:spLocks noGrp="1"/>
+          </p:cNvSpPr>
+          <p:nvPr>
+            <p:ph type="sldNum" sz="quarter" idx="10"/>
+          </p:nvPr>
+        </p:nvSpPr>
+        <p:spPr/>
+        <p:txBody>
+          <a:bodyPr/>
+          <a:lstStyle/>
+          <a:p>
+            <a:fld id="{F7021451-1387-4CA6-816F-3879F97B5CBC}" type="slidenum">
+              <a:rPr lang="en-US"/>
+              <a:t>18</a:t>
             </a:fld>
             <a:endParaRPr lang="en-US"/>
           </a:p>
@@ -1319,6 +1409,8 @@
             <a:r>
               <a:rPr lang="en-US" dirty="0"/>
               <a:t>Красным на схеме — границы смежных землепользований, синим — граница участка.
+АЗС: на чертеже генплана от неё прочерчена дуга радиусом 50 м. По замеру чертежа ближайший угол пятна застройки лежит практически на этой линии — в пределах точности чертежа.
+ГОТОВНОСТЬ К ВОПРОСУ: размер санитарно-защитной зоны АЗС зависит от типа станции (отпускается ли газовое моторное топливо) и устанавливается по действующим Санитарным правилам РК. Категорию действующей АЗС и её установленную СЗЗ нужно подтвердить до градсовета: если зона окажется больше 50 м, потребуется проект СЗЗ с расчётом рассеивания либо корректировка посадки северного корпуса.
 Район города и кадастровый номер — данные заказчика, вписать до показа.</a:t>
             </a:r>
             <a:endParaRPr lang="en-US" dirty="0"/>
@@ -1761,7 +1853,7 @@
           <a:p>
             <a:r>
               <a:rPr lang="en-US" dirty="0"/>
-              <a:t>Каждый номер раскрыт на панораму города и Заилийского Алатау, с собственным балконом на озеленённой ленте фасада.</a:t>
+              <a:t>Ресторан первого этажа: панорамное остекление, выход на открытую террасу в сад, раскрытие на хребет. Работает и на город, не только на постояльцев.</a:t>
             </a:r>
             <a:endParaRPr lang="en-US" dirty="0"/>
           </a:p>
@@ -1849,7 +1941,7 @@
           <a:p>
             <a:r>
               <a:rPr lang="en-US" dirty="0"/>
-              <a:t>Озеленённые террасы на лентах балконов, раскрытие на город и горы.</a:t>
+              <a:t>Каждый номер раскрыт на панораму города и Заилийского Алатау, с собственным балконом на озеленённой ленте фасада.</a:t>
             </a:r>
             <a:endParaRPr lang="en-US" dirty="0"/>
           </a:p>
@@ -1937,8 +2029,7 @@
           <a:p>
             <a:r>
               <a:rPr lang="en-US" dirty="0"/>
-              <a:t>Ключевой слайд архитектурного блока: форма не произвольная, она выведена из силуэта хребта, который виден с участка.
-Отсюда же следует отказ от высотности — здание держит горизонталь панорамы.</a:t>
+              <a:t>Озеленённые террасы на лентах балконов, раскрытие на город и горы.</a:t>
             </a:r>
             <a:endParaRPr lang="en-US" dirty="0"/>
           </a:p>
@@ -2913,7 +3004,7 @@
                 <a:ea typeface="Arial" pitchFamily="34" charset="-122"/>
                 <a:cs typeface="Arial" pitchFamily="34" charset="-120"/>
               </a:rPr>
-              <a:t>Объёмно-пространственное решение</a:t>
+              <a:t>Генезис формы</a:t>
             </a:r>
             <a:endParaRPr lang="en-US" sz="900" dirty="0"/>
           </a:p>
@@ -2991,7 +3082,7 @@
                 <a:ea typeface="Arial" pitchFamily="34" charset="-122"/>
                 <a:cs typeface="Arial" pitchFamily="34" charset="-120"/>
               </a:rPr>
-              <a:t>ГОРИЗОНТАЛЬ ВМЕСТО ВЫСОТЫ</a:t>
+              <a:t>ФОРМА ОТ СИЛУЭТА ГОР</a:t>
             </a:r>
             <a:endParaRPr lang="en-US" sz="1300" dirty="0"/>
           </a:p>
@@ -3006,7 +3097,7 @@
         <p:spPr>
           <a:xfrm>
             <a:off x="502920" y="1325880"/>
-            <a:ext cx="3794760" cy="2011680"/>
+            <a:ext cx="3794760" cy="1828800"/>
           </a:xfrm>
           <a:prstGeom prst="rect">
             <a:avLst/>
@@ -3033,7 +3124,7 @@
                 <a:ea typeface="Arial" pitchFamily="34" charset="-122"/>
                 <a:cs typeface="Arial" pitchFamily="34" charset="-120"/>
               </a:rPr>
-              <a:t>Объём набран горизонтальными лентами перекрытий с плавными скруглениями. Пять этажей вместо башни: комплекс не спорит с панорамой гор и не перекрывает виды соседней застройки. Ленты балконов и террас озеленены по всей длине — зелень становится частью фасада, а не только партера.</a:t>
+              <a:t>Исходная линия проекта — панорама Заилийского Алатау, которая открывается с участка. Ломаная гряда последовательно сглаживается до плавных горизонталей и переходит в ленты перекрытий: здание читается как продолжение ландшафта, а не как объект, поставленный перед ним.</a:t>
             </a:r>
             <a:endParaRPr lang="en-US" sz="1050" dirty="0"/>
           </a:p>
@@ -3047,7 +3138,7 @@
         </p:nvSpPr>
         <p:spPr>
           <a:xfrm>
-            <a:off x="502920" y="2651760"/>
+            <a:off x="502920" y="3246120"/>
             <a:ext cx="3794760" cy="7315"/>
           </a:xfrm>
           <a:prstGeom prst="rect">
@@ -3072,7 +3163,7 @@
         </p:nvSpPr>
         <p:spPr>
           <a:xfrm>
-            <a:off x="502920" y="2834640"/>
+            <a:off x="502920" y="3429000"/>
             <a:ext cx="3794760" cy="2377440"/>
           </a:xfrm>
           <a:prstGeom prst="rect">
@@ -3123,7 +3214,7 @@
                 <a:ea typeface="Arial" pitchFamily="34" charset="-122"/>
                 <a:cs typeface="Arial" pitchFamily="34" charset="-120"/>
               </a:rPr>
-              <a:t>Сомасштабность: 5 этажей — в габаритах окружающей застройки, без доминанты.</a:t>
+              <a:t>Три шага абстракции: линия хребта — сглаженный контур — ленты перекрытий.</a:t>
             </a:r>
             <a:endParaRPr lang="en-US" sz="1050" dirty="0"/>
           </a:p>
@@ -3166,7 +3257,7 @@
                 <a:ea typeface="Arial" pitchFamily="34" charset="-122"/>
                 <a:cs typeface="Arial" pitchFamily="34" charset="-120"/>
               </a:rPr>
-              <a:t>Озеленённые террасы на каждом ярусе балконов по всей длине фасада.</a:t>
+              <a:t>Переменная высота лент повторяет ритм гряды: объём нарастает к центру и опадает к краям.</a:t>
             </a:r>
             <a:endParaRPr lang="en-US" sz="1050" dirty="0"/>
           </a:p>
@@ -3209,50 +3300,7 @@
                 <a:ea typeface="Arial" pitchFamily="34" charset="-122"/>
                 <a:cs typeface="Arial" pitchFamily="34" charset="-120"/>
               </a:rPr>
-              <a:t>Раскрытие на горы: номера и общественные террасы ориентированы на панораму.</a:t>
-            </a:r>
-            <a:endParaRPr lang="en-US" sz="1050" dirty="0"/>
-          </a:p>
-          <a:p>
-            <a:pPr indent="0" marL="0">
-              <a:lnSpc>
-                <a:spcPts val="1500"/>
-              </a:lnSpc>
-              <a:spcAft>
-                <a:spcPts val="900"/>
-              </a:spcAft>
-              <a:buNone/>
-            </a:pPr>
-            <a:r>
-              <a:rPr lang="en-US" sz="1050" dirty="0">
-                <a:solidFill>
-                  <a:srgbClr val="FF4D23"/>
-                </a:solidFill>
-                <a:latin typeface="Arial" pitchFamily="34" charset="0"/>
-                <a:ea typeface="Arial" pitchFamily="34" charset="-122"/>
-                <a:cs typeface="Arial" pitchFamily="34" charset="-120"/>
-              </a:rPr>
-              <a:t>– </a:t>
-            </a:r>
-            <a:pPr indent="0" marL="0">
-              <a:lnSpc>
-                <a:spcPts val="1500"/>
-              </a:lnSpc>
-              <a:spcAft>
-                <a:spcPts val="900"/>
-              </a:spcAft>
-              <a:buNone/>
-            </a:pPr>
-            <a:r>
-              <a:rPr lang="en-US" sz="1050" dirty="0">
-                <a:solidFill>
-                  <a:srgbClr val="333333"/>
-                </a:solidFill>
-                <a:latin typeface="Arial" pitchFamily="34" charset="0"/>
-                <a:ea typeface="Arial" pitchFamily="34" charset="-122"/>
-                <a:cs typeface="Arial" pitchFamily="34" charset="-120"/>
-              </a:rPr>
-              <a:t>Входная группа выделена высоким портиком с круговым подъездом.</a:t>
+              <a:t>Пять ярусов держат горизонталь и не конкурируют с панорамой.</a:t>
             </a:r>
             <a:endParaRPr lang="en-US" sz="1050" dirty="0"/>
           </a:p>
@@ -3260,7 +3308,7 @@
       </p:sp>
       <p:pic>
         <p:nvPicPr>
-          <p:cNvPr id="9" name="Image 0" descr="/tmp/claude-0/-home-user-most/9fc1ec31-3c64-5a82-aadb-ddb23fff6e53/scratchpad/assets/facade.jpg">    </p:cNvPr>
+          <p:cNvPr id="9" name="Image 0" descr="/tmp/claude-0/-home-user-most/9fc1ec31-3c64-5a82-aadb-ddb23fff6e53/scratchpad/assets/genesis.jpg">    </p:cNvPr>
           <p:cNvPicPr>
             <a:picLocks noChangeAspect="1"/>
           </p:cNvPicPr>
@@ -3275,7 +3323,7 @@
         <p:spPr>
           <a:xfrm>
             <a:off x="4709160" y="960120"/>
-            <a:ext cx="6949440" cy="3913632"/>
+            <a:ext cx="6949440" cy="4636008"/>
           </a:xfrm>
           <a:prstGeom prst="rect">
             <a:avLst/>
@@ -3290,8 +3338,8 @@
         </p:nvSpPr>
         <p:spPr>
           <a:xfrm>
-            <a:off x="4709160" y="5257800"/>
-            <a:ext cx="2194560" cy="402336"/>
+            <a:off x="4709160" y="5669280"/>
+            <a:ext cx="6949440" cy="219456"/>
           </a:xfrm>
           <a:prstGeom prst="rect">
             <a:avLst/>
@@ -3307,63 +3355,7 @@
               <a:buNone/>
             </a:pPr>
             <a:r>
-              <a:rPr lang="en-US" sz="2600" b="1" dirty="0">
-                <a:solidFill>
-                  <a:srgbClr val="111111"/>
-                </a:solidFill>
-                <a:latin typeface="Arial" pitchFamily="34" charset="0"/>
-                <a:ea typeface="Arial" pitchFamily="34" charset="-122"/>
-                <a:cs typeface="Arial" pitchFamily="34" charset="-120"/>
-              </a:rPr>
-              <a:t>5</a:t>
-            </a:r>
-            <a:pPr indent="0" marL="0">
-              <a:buNone/>
-            </a:pPr>
-            <a:r>
-              <a:rPr lang="en-US" sz="1100" b="1" dirty="0">
-                <a:solidFill>
-                  <a:srgbClr val="FF4D23"/>
-                </a:solidFill>
-                <a:latin typeface="Arial" pitchFamily="34" charset="0"/>
-                <a:ea typeface="Arial" pitchFamily="34" charset="-122"/>
-                <a:cs typeface="Arial" pitchFamily="34" charset="-120"/>
-              </a:rPr>
-              <a:t> этажей</a:t>
-            </a:r>
-            <a:endParaRPr lang="en-US" sz="2600" dirty="0"/>
-          </a:p>
-        </p:txBody>
-      </p:sp>
-      <p:sp>
-        <p:nvSpPr>
-          <p:cNvPr id="11" name="Text 8"/>
-          <p:cNvSpPr txBox="1"/>
-          <p:nvPr/>
-        </p:nvSpPr>
-        <p:spPr>
-          <a:xfrm>
-            <a:off x="4709160" y="5678424"/>
-            <a:ext cx="2194560" cy="384048"/>
-          </a:xfrm>
-          <a:prstGeom prst="rect">
-            <a:avLst/>
-          </a:prstGeom>
-          <a:noFill/>
-          <a:ln/>
-        </p:spPr>
-        <p:txBody>
-          <a:bodyPr wrap="square" lIns="0" tIns="0" rIns="0" bIns="0" rtlCol="0" anchor="t"/>
-          <a:lstStyle/>
-          <a:p>
-            <a:pPr indent="0" marL="0">
-              <a:lnSpc>
-                <a:spcPts val="1100"/>
-              </a:lnSpc>
-              <a:buNone/>
-            </a:pPr>
-            <a:r>
-              <a:rPr lang="en-US" sz="800" spc="30" kern="0" dirty="0">
+              <a:rPr lang="en-US" sz="800" dirty="0">
                 <a:solidFill>
                   <a:srgbClr val="8A8A8A"/>
                 </a:solidFill>
@@ -3371,102 +3363,7 @@
                 <a:ea typeface="Arial" pitchFamily="34" charset="-122"/>
                 <a:cs typeface="Arial" pitchFamily="34" charset="-120"/>
               </a:rPr>
-              <a:t>ЭТАЖНОСТЬ ОБОИХ КОРПУСОВ</a:t>
-            </a:r>
-            <a:endParaRPr lang="en-US" sz="800" dirty="0"/>
-          </a:p>
-        </p:txBody>
-      </p:sp>
-      <p:sp>
-        <p:nvSpPr>
-          <p:cNvPr id="12" name="Text 9"/>
-          <p:cNvSpPr txBox="1"/>
-          <p:nvPr/>
-        </p:nvSpPr>
-        <p:spPr>
-          <a:xfrm>
-            <a:off x="7086600" y="5257800"/>
-            <a:ext cx="4480560" cy="402336"/>
-          </a:xfrm>
-          <a:prstGeom prst="rect">
-            <a:avLst/>
-          </a:prstGeom>
-          <a:noFill/>
-          <a:ln/>
-        </p:spPr>
-        <p:txBody>
-          <a:bodyPr wrap="square" lIns="0" tIns="0" rIns="0" bIns="0" rtlCol="0" anchor="ctr"/>
-          <a:lstStyle/>
-          <a:p>
-            <a:pPr indent="0" marL="0">
-              <a:buNone/>
-            </a:pPr>
-            <a:r>
-              <a:rPr lang="en-US" sz="2600" b="1" dirty="0">
-                <a:solidFill>
-                  <a:srgbClr val="111111"/>
-                </a:solidFill>
-                <a:latin typeface="Arial" pitchFamily="34" charset="0"/>
-                <a:ea typeface="Arial" pitchFamily="34" charset="-122"/>
-                <a:cs typeface="Arial" pitchFamily="34" charset="-120"/>
-              </a:rPr>
-              <a:t>17 140,22</a:t>
-            </a:r>
-            <a:pPr indent="0" marL="0">
-              <a:buNone/>
-            </a:pPr>
-            <a:r>
-              <a:rPr lang="en-US" sz="1100" b="1" dirty="0">
-                <a:solidFill>
-                  <a:srgbClr val="FF4D23"/>
-                </a:solidFill>
-                <a:latin typeface="Arial" pitchFamily="34" charset="0"/>
-                <a:ea typeface="Arial" pitchFamily="34" charset="-122"/>
-                <a:cs typeface="Arial" pitchFamily="34" charset="-120"/>
-              </a:rPr>
-              <a:t> м²</a:t>
-            </a:r>
-            <a:endParaRPr lang="en-US" sz="2600" dirty="0"/>
-          </a:p>
-        </p:txBody>
-      </p:sp>
-      <p:sp>
-        <p:nvSpPr>
-          <p:cNvPr id="13" name="Text 10"/>
-          <p:cNvSpPr txBox="1"/>
-          <p:nvPr/>
-        </p:nvSpPr>
-        <p:spPr>
-          <a:xfrm>
-            <a:off x="7086600" y="5678424"/>
-            <a:ext cx="4480560" cy="384048"/>
-          </a:xfrm>
-          <a:prstGeom prst="rect">
-            <a:avLst/>
-          </a:prstGeom>
-          <a:noFill/>
-          <a:ln/>
-        </p:spPr>
-        <p:txBody>
-          <a:bodyPr wrap="square" lIns="0" tIns="0" rIns="0" bIns="0" rtlCol="0" anchor="t"/>
-          <a:lstStyle/>
-          <a:p>
-            <a:pPr indent="0" marL="0">
-              <a:lnSpc>
-                <a:spcPts val="1100"/>
-              </a:lnSpc>
-              <a:buNone/>
-            </a:pPr>
-            <a:r>
-              <a:rPr lang="en-US" sz="800" spc="30" kern="0" dirty="0">
-                <a:solidFill>
-                  <a:srgbClr val="8A8A8A"/>
-                </a:solidFill>
-                <a:latin typeface="Arial" pitchFamily="34" charset="0"/>
-                <a:ea typeface="Arial" pitchFamily="34" charset="-122"/>
-                <a:cs typeface="Arial" pitchFamily="34" charset="-120"/>
-              </a:rPr>
-              <a:t>ОБЩАЯ ПЛОЩАДЬ ЗДАНИЯ</a:t>
+              <a:t>Генезис формы: от силуэта Заилийского Алатау к лентам перекрытий.</a:t>
             </a:r>
             <a:endParaRPr lang="en-US" sz="800" dirty="0"/>
           </a:p>
@@ -3474,7 +3371,7 @@
       </p:sp>
       <p:pic>
         <p:nvPicPr>
-          <p:cNvPr id="14" name="Image 1" descr="/tmp/claude-0/-home-user-most/9fc1ec31-3c64-5a82-aadb-ddb23fff6e53/scratchpad/assets/logo_most.png">    </p:cNvPr>
+          <p:cNvPr id="11" name="Image 1" descr="/tmp/claude-0/-home-user-most/9fc1ec31-3c64-5a82-aadb-ddb23fff6e53/scratchpad/assets/logo_most.png">    </p:cNvPr>
           <p:cNvPicPr>
             <a:picLocks noChangeAspect="1"/>
           </p:cNvPicPr>
@@ -3498,7 +3395,7 @@
       </p:pic>
       <p:sp>
         <p:nvSpPr>
-          <p:cNvPr id="15" name="Text 11"/>
+          <p:cNvPr id="12" name="Text 8"/>
           <p:cNvSpPr txBox="1"/>
           <p:nvPr/>
         </p:nvSpPr>
@@ -3600,7 +3497,7 @@
                 <a:ea typeface="Arial" pitchFamily="34" charset="-122"/>
                 <a:cs typeface="Arial" pitchFamily="34" charset="-120"/>
               </a:rPr>
-              <a:t>ФУНКЦИЯ</a:t>
+              <a:t>АРХИТЕКТУРА</a:t>
             </a:r>
             <a:endParaRPr lang="en-US" sz="950" dirty="0"/>
           </a:p>
@@ -3639,7 +3536,7 @@
                 <a:ea typeface="Arial" pitchFamily="34" charset="-122"/>
                 <a:cs typeface="Arial" pitchFamily="34" charset="-120"/>
               </a:rPr>
-              <a:t>Функциональное зонирование</a:t>
+              <a:t>Объёмно-пространственное решение</a:t>
             </a:r>
             <a:endParaRPr lang="en-US" sz="900" dirty="0"/>
           </a:p>
@@ -3678,7 +3575,7 @@
                 <a:ea typeface="Arial" pitchFamily="34" charset="-122"/>
                 <a:cs typeface="Arial" pitchFamily="34" charset="-120"/>
               </a:rPr>
-              <a:t>ПЕРВЫЙ ЭТАЖ</a:t>
+              <a:t>КОНЦЕПЦИЯ</a:t>
             </a:r>
             <a:endParaRPr lang="en-US" sz="950" dirty="0"/>
           </a:p>
@@ -3717,7 +3614,7 @@
                 <a:ea typeface="Arial" pitchFamily="34" charset="-122"/>
                 <a:cs typeface="Arial" pitchFamily="34" charset="-120"/>
               </a:rPr>
-              <a:t>ПЕРВЫЙ ЭТАЖ — ОБЩЕСТВЕННЫЙ</a:t>
+              <a:t>ГОРИЗОНТАЛЬ ВМЕСТО ВЫСОТЫ</a:t>
             </a:r>
             <a:endParaRPr lang="en-US" sz="1300" dirty="0"/>
           </a:p>
@@ -3732,7 +3629,7 @@
         <p:spPr>
           <a:xfrm>
             <a:off x="502920" y="1325880"/>
-            <a:ext cx="3794760" cy="1097280"/>
+            <a:ext cx="3794760" cy="2011680"/>
           </a:xfrm>
           <a:prstGeom prst="rect">
             <a:avLst/>
@@ -3759,7 +3656,7 @@
                 <a:ea typeface="Arial" pitchFamily="34" charset="-122"/>
                 <a:cs typeface="Arial" pitchFamily="34" charset="-120"/>
               </a:rPr>
-              <a:t>4 446,9 м² первого этажа — четверть всей площади комплекса — отданы функциям, которыми пользуются не только постояльцы.</a:t>
+              <a:t>Объём набран горизонтальными лентами перекрытий с плавными скруглениями. Пять этажей вместо башни: комплекс не спорит с панорамой гор и не перекрывает виды соседней застройки. Ленты балконов и террас озеленены по всей длине — зелень становится частью фасада, а не только партера.</a:t>
             </a:r>
             <a:endParaRPr lang="en-US" sz="1050" dirty="0"/>
           </a:p>
@@ -3773,7 +3670,7 @@
         </p:nvSpPr>
         <p:spPr>
           <a:xfrm>
-            <a:off x="502920" y="2514600"/>
+            <a:off x="502920" y="2651760"/>
             <a:ext cx="3794760" cy="7315"/>
           </a:xfrm>
           <a:prstGeom prst="rect">
@@ -3798,8 +3695,8 @@
         </p:nvSpPr>
         <p:spPr>
           <a:xfrm>
-            <a:off x="502920" y="2697480"/>
-            <a:ext cx="3794760" cy="2743200"/>
+            <a:off x="502920" y="2834640"/>
+            <a:ext cx="3794760" cy="2377440"/>
           </a:xfrm>
           <a:prstGeom prst="rect">
             <a:avLst/>
@@ -3849,7 +3746,7 @@
                 <a:ea typeface="Arial" pitchFamily="34" charset="-122"/>
                 <a:cs typeface="Arial" pitchFamily="34" charset="-120"/>
               </a:rPr>
-              <a:t>Лобби и стойка приёма: круговой подъезд, зона высадки, вестибюль двойной высоты.</a:t>
+              <a:t>Сомасштабность: 5 этажей — в габаритах окружающей застройки, без доминанты.</a:t>
             </a:r>
             <a:endParaRPr lang="en-US" sz="1050" dirty="0"/>
           </a:p>
@@ -3892,7 +3789,7 @@
                 <a:ea typeface="Arial" pitchFamily="34" charset="-122"/>
                 <a:cs typeface="Arial" pitchFamily="34" charset="-120"/>
               </a:rPr>
-              <a:t>Рестораны и кафе — работают на город, а не только на гостей гостиницы.</a:t>
+              <a:t>Озеленённые террасы на каждом ярусе балконов по всей длине фасада.</a:t>
             </a:r>
             <a:endParaRPr lang="en-US" sz="1050" dirty="0"/>
           </a:p>
@@ -3935,7 +3832,7 @@
                 <a:ea typeface="Arial" pitchFamily="34" charset="-122"/>
                 <a:cs typeface="Arial" pitchFamily="34" charset="-120"/>
               </a:rPr>
-              <a:t>Конференц-зона для деловых мероприятий и городских событий.</a:t>
+              <a:t>Раскрытие на горы: номера и общественные террасы ориентированы на панораму.</a:t>
             </a:r>
             <a:endParaRPr lang="en-US" sz="1050" dirty="0"/>
           </a:p>
@@ -3978,7 +3875,7 @@
                 <a:ea typeface="Arial" pitchFamily="34" charset="-122"/>
                 <a:cs typeface="Arial" pitchFamily="34" charset="-120"/>
               </a:rPr>
-              <a:t>Оздоровительный блок: СПА и фитнес. Состав уточняется на стадии эскизного проекта.</a:t>
+              <a:t>Входная группа выделена высоким портиком с круговым подъездом.</a:t>
             </a:r>
             <a:endParaRPr lang="en-US" sz="1050" dirty="0"/>
           </a:p>
@@ -3986,7 +3883,7 @@
       </p:sp>
       <p:pic>
         <p:nvPicPr>
-          <p:cNvPr id="9" name="Image 0" descr="/tmp/claude-0/-home-user-most/9fc1ec31-3c64-5a82-aadb-ddb23fff6e53/scratchpad/assets/lobby.jpg">    </p:cNvPr>
+          <p:cNvPr id="9" name="Image 0" descr="/tmp/claude-0/-home-user-most/9fc1ec31-3c64-5a82-aadb-ddb23fff6e53/scratchpad/assets/facade.jpg">    </p:cNvPr>
           <p:cNvPicPr>
             <a:picLocks noChangeAspect="1"/>
           </p:cNvPicPr>
@@ -4017,7 +3914,7 @@
         <p:spPr>
           <a:xfrm>
             <a:off x="4709160" y="5257800"/>
-            <a:ext cx="3291840" cy="402336"/>
+            <a:ext cx="2194560" cy="402336"/>
           </a:xfrm>
           <a:prstGeom prst="rect">
             <a:avLst/>
@@ -4041,7 +3938,7 @@
                 <a:ea typeface="Arial" pitchFamily="34" charset="-122"/>
                 <a:cs typeface="Arial" pitchFamily="34" charset="-120"/>
               </a:rPr>
-              <a:t>4 446,9</a:t>
+              <a:t>5</a:t>
             </a:r>
             <a:pPr indent="0" marL="0">
               <a:buNone/>
@@ -4055,7 +3952,7 @@
                 <a:ea typeface="Arial" pitchFamily="34" charset="-122"/>
                 <a:cs typeface="Arial" pitchFamily="34" charset="-120"/>
               </a:rPr>
-              <a:t> м²</a:t>
+              <a:t> этажей</a:t>
             </a:r>
             <a:endParaRPr lang="en-US" sz="2600" dirty="0"/>
           </a:p>
@@ -4070,7 +3967,7 @@
         <p:spPr>
           <a:xfrm>
             <a:off x="4709160" y="5678424"/>
-            <a:ext cx="3291840" cy="384048"/>
+            <a:ext cx="2194560" cy="384048"/>
           </a:xfrm>
           <a:prstGeom prst="rect">
             <a:avLst/>
@@ -4097,7 +3994,7 @@
                 <a:ea typeface="Arial" pitchFamily="34" charset="-122"/>
                 <a:cs typeface="Arial" pitchFamily="34" charset="-120"/>
               </a:rPr>
-              <a:t>ПЛОЩАДЬ ПЕРВОГО ЭТАЖА</a:t>
+              <a:t>ЭТАЖНОСТЬ ОБОИХ КОРПУСОВ</a:t>
             </a:r>
             <a:endParaRPr lang="en-US" sz="800" dirty="0"/>
           </a:p>
@@ -4111,8 +4008,8 @@
         </p:nvSpPr>
         <p:spPr>
           <a:xfrm>
-            <a:off x="8183880" y="5257800"/>
-            <a:ext cx="3383280" cy="402336"/>
+            <a:off x="7086600" y="5257800"/>
+            <a:ext cx="4480560" cy="402336"/>
           </a:xfrm>
           <a:prstGeom prst="rect">
             <a:avLst/>
@@ -4136,7 +4033,7 @@
                 <a:ea typeface="Arial" pitchFamily="34" charset="-122"/>
                 <a:cs typeface="Arial" pitchFamily="34" charset="-120"/>
               </a:rPr>
-              <a:t>26</a:t>
+              <a:t>17 140,22</a:t>
             </a:r>
             <a:pPr indent="0" marL="0">
               <a:buNone/>
@@ -4150,7 +4047,7 @@
                 <a:ea typeface="Arial" pitchFamily="34" charset="-122"/>
                 <a:cs typeface="Arial" pitchFamily="34" charset="-120"/>
               </a:rPr>
-              <a:t> %</a:t>
+              <a:t> м²</a:t>
             </a:r>
             <a:endParaRPr lang="en-US" sz="2600" dirty="0"/>
           </a:p>
@@ -4164,8 +4061,8 @@
         </p:nvSpPr>
         <p:spPr>
           <a:xfrm>
-            <a:off x="8183880" y="5678424"/>
-            <a:ext cx="3383280" cy="384048"/>
+            <a:off x="7086600" y="5678424"/>
+            <a:ext cx="4480560" cy="384048"/>
           </a:xfrm>
           <a:prstGeom prst="rect">
             <a:avLst/>
@@ -4192,7 +4089,7 @@
                 <a:ea typeface="Arial" pitchFamily="34" charset="-122"/>
                 <a:cs typeface="Arial" pitchFamily="34" charset="-120"/>
               </a:rPr>
-              <a:t>ДОЛЯ ПЕРВОГО ЭТАЖА В ОБЩЕЙ ПЛОЩАДИ</a:t>
+              <a:t>ОБЩАЯ ПЛОЩАДЬ ЗДАНИЯ</a:t>
             </a:r>
             <a:endParaRPr lang="en-US" sz="800" dirty="0"/>
           </a:p>
@@ -4326,7 +4223,7 @@
                 <a:ea typeface="Arial" pitchFamily="34" charset="-122"/>
                 <a:cs typeface="Arial" pitchFamily="34" charset="-120"/>
               </a:rPr>
-              <a:t>НОМЕРНОЙ ФОНД</a:t>
+              <a:t>ФУНКЦИЯ</a:t>
             </a:r>
             <a:endParaRPr lang="en-US" sz="950" dirty="0"/>
           </a:p>
@@ -4365,7 +4262,7 @@
                 <a:ea typeface="Arial" pitchFamily="34" charset="-122"/>
                 <a:cs typeface="Arial" pitchFamily="34" charset="-120"/>
               </a:rPr>
-              <a:t>Этажи со 2-го по 5-й</a:t>
+              <a:t>Функциональное зонирование</a:t>
             </a:r>
             <a:endParaRPr lang="en-US" sz="900" dirty="0"/>
           </a:p>
@@ -4404,7 +4301,7 @@
                 <a:ea typeface="Arial" pitchFamily="34" charset="-122"/>
                 <a:cs typeface="Arial" pitchFamily="34" charset="-120"/>
               </a:rPr>
-              <a:t>ЁМКОСТЬ</a:t>
+              <a:t>ПЕРВЫЙ ЭТАЖ</a:t>
             </a:r>
             <a:endParaRPr lang="en-US" sz="950" dirty="0"/>
           </a:p>
@@ -4443,7 +4340,7 @@
                 <a:ea typeface="Arial" pitchFamily="34" charset="-122"/>
                 <a:cs typeface="Arial" pitchFamily="34" charset="-120"/>
               </a:rPr>
-              <a:t>НОМЕРНОЙ ФОНД</a:t>
+              <a:t>ПЕРВЫЙ ЭТАЖ — ОБЩЕСТВЕННЫЙ</a:t>
             </a:r>
             <a:endParaRPr lang="en-US" sz="1300" dirty="0"/>
           </a:p>
@@ -4458,7 +4355,7 @@
         <p:spPr>
           <a:xfrm>
             <a:off x="502920" y="1325880"/>
-            <a:ext cx="3794760" cy="914400"/>
+            <a:ext cx="3794760" cy="1097280"/>
           </a:xfrm>
           <a:prstGeom prst="rect">
             <a:avLst/>
@@ -4485,7 +4382,7 @@
                 <a:ea typeface="Arial" pitchFamily="34" charset="-122"/>
                 <a:cs typeface="Arial" pitchFamily="34" charset="-120"/>
               </a:rPr>
-              <a:t>Этажи со 2-го по 5-й полностью отданы номерам: 12 693,32 м², или 74,1 % общей площади здания.</a:t>
+              <a:t>4 446,9 м² первого этажа — четверть всей площади комплекса — отданы функциям, которыми пользуются не только постояльцы.</a:t>
             </a:r>
             <a:endParaRPr lang="en-US" sz="1050" dirty="0"/>
           </a:p>
@@ -4499,7 +4396,7 @@
         </p:nvSpPr>
         <p:spPr>
           <a:xfrm>
-            <a:off x="502920" y="2377440"/>
+            <a:off x="502920" y="2514600"/>
             <a:ext cx="3794760" cy="7315"/>
           </a:xfrm>
           <a:prstGeom prst="rect">
@@ -4524,38 +4421,30 @@
         </p:nvSpPr>
         <p:spPr>
           <a:xfrm>
-            <a:off x="502920" y="2560320"/>
-            <a:ext cx="3794760" cy="402336"/>
-          </a:xfrm>
-          <a:prstGeom prst="rect">
-            <a:avLst/>
-          </a:prstGeom>
-          <a:noFill/>
-          <a:ln/>
-        </p:spPr>
-        <p:txBody>
-          <a:bodyPr wrap="square" lIns="0" tIns="0" rIns="0" bIns="0" rtlCol="0" anchor="ctr"/>
-          <a:lstStyle/>
-          <a:p>
-            <a:pPr indent="0" marL="0">
-              <a:buNone/>
-            </a:pPr>
-            <a:r>
-              <a:rPr lang="en-US" sz="2600" b="1" dirty="0">
-                <a:solidFill>
-                  <a:srgbClr val="111111"/>
-                </a:solidFill>
-                <a:latin typeface="Arial" pitchFamily="34" charset="0"/>
-                <a:ea typeface="Arial" pitchFamily="34" charset="-122"/>
-                <a:cs typeface="Arial" pitchFamily="34" charset="-120"/>
-              </a:rPr>
-              <a:t>12 693,32</a:t>
-            </a:r>
-            <a:pPr indent="0" marL="0">
-              <a:buNone/>
-            </a:pPr>
-            <a:r>
-              <a:rPr lang="en-US" sz="1100" b="1" dirty="0">
+            <a:off x="502920" y="2697480"/>
+            <a:ext cx="3794760" cy="2743200"/>
+          </a:xfrm>
+          <a:prstGeom prst="rect">
+            <a:avLst/>
+          </a:prstGeom>
+          <a:noFill/>
+          <a:ln/>
+        </p:spPr>
+        <p:txBody>
+          <a:bodyPr wrap="square" lIns="0" tIns="0" rIns="0" bIns="0" rtlCol="0" anchor="t"/>
+          <a:lstStyle/>
+          <a:p>
+            <a:pPr indent="0" marL="0">
+              <a:lnSpc>
+                <a:spcPts val="1500"/>
+              </a:lnSpc>
+              <a:spcAft>
+                <a:spcPts val="900"/>
+              </a:spcAft>
+              <a:buNone/>
+            </a:pPr>
+            <a:r>
+              <a:rPr lang="en-US" sz="1050" dirty="0">
                 <a:solidFill>
                   <a:srgbClr val="FF4D23"/>
                 </a:solidFill>
@@ -4563,94 +4452,42 @@
                 <a:ea typeface="Arial" pitchFamily="34" charset="-122"/>
                 <a:cs typeface="Arial" pitchFamily="34" charset="-120"/>
               </a:rPr>
-              <a:t> м²</a:t>
-            </a:r>
-            <a:endParaRPr lang="en-US" sz="2600" dirty="0"/>
-          </a:p>
-        </p:txBody>
-      </p:sp>
-      <p:sp>
-        <p:nvSpPr>
-          <p:cNvPr id="9" name="Text 7"/>
-          <p:cNvSpPr txBox="1"/>
-          <p:nvPr/>
-        </p:nvSpPr>
-        <p:spPr>
-          <a:xfrm>
-            <a:off x="502920" y="2980944"/>
-            <a:ext cx="3794760" cy="384048"/>
-          </a:xfrm>
-          <a:prstGeom prst="rect">
-            <a:avLst/>
-          </a:prstGeom>
-          <a:noFill/>
-          <a:ln/>
-        </p:spPr>
-        <p:txBody>
-          <a:bodyPr wrap="square" lIns="0" tIns="0" rIns="0" bIns="0" rtlCol="0" anchor="t"/>
-          <a:lstStyle/>
-          <a:p>
+              <a:t>– </a:t>
+            </a:r>
             <a:pPr indent="0" marL="0">
               <a:lnSpc>
-                <a:spcPts val="1100"/>
+                <a:spcPts val="1500"/>
               </a:lnSpc>
-              <a:buNone/>
-            </a:pPr>
-            <a:r>
-              <a:rPr lang="en-US" sz="800" spc="30" kern="0" dirty="0">
-                <a:solidFill>
-                  <a:srgbClr val="8A8A8A"/>
-                </a:solidFill>
-                <a:latin typeface="Arial" pitchFamily="34" charset="0"/>
-                <a:ea typeface="Arial" pitchFamily="34" charset="-122"/>
-                <a:cs typeface="Arial" pitchFamily="34" charset="-120"/>
-              </a:rPr>
-              <a:t>ПЛОЩАДЬ НОМЕРНОГО ФОНДА</a:t>
-            </a:r>
-            <a:endParaRPr lang="en-US" sz="800" dirty="0"/>
-          </a:p>
-        </p:txBody>
-      </p:sp>
-      <p:sp>
-        <p:nvSpPr>
-          <p:cNvPr id="10" name="Text 8"/>
-          <p:cNvSpPr txBox="1"/>
-          <p:nvPr/>
-        </p:nvSpPr>
-        <p:spPr>
-          <a:xfrm>
-            <a:off x="502920" y="3566160"/>
-            <a:ext cx="3794760" cy="402336"/>
-          </a:xfrm>
-          <a:prstGeom prst="rect">
-            <a:avLst/>
-          </a:prstGeom>
-          <a:noFill/>
-          <a:ln/>
-        </p:spPr>
-        <p:txBody>
-          <a:bodyPr wrap="square" lIns="0" tIns="0" rIns="0" bIns="0" rtlCol="0" anchor="ctr"/>
-          <a:lstStyle/>
-          <a:p>
-            <a:pPr indent="0" marL="0">
-              <a:buNone/>
-            </a:pPr>
-            <a:r>
-              <a:rPr lang="en-US" sz="2600" b="1" dirty="0">
-                <a:solidFill>
-                  <a:srgbClr val="111111"/>
-                </a:solidFill>
-                <a:latin typeface="Arial" pitchFamily="34" charset="0"/>
-                <a:ea typeface="Arial" pitchFamily="34" charset="-122"/>
-                <a:cs typeface="Arial" pitchFamily="34" charset="-120"/>
-              </a:rPr>
-              <a:t>≈ 3 173</a:t>
-            </a:r>
-            <a:pPr indent="0" marL="0">
-              <a:buNone/>
-            </a:pPr>
-            <a:r>
-              <a:rPr lang="en-US" sz="1100" b="1" dirty="0">
+              <a:spcAft>
+                <a:spcPts val="900"/>
+              </a:spcAft>
+              <a:buNone/>
+            </a:pPr>
+            <a:r>
+              <a:rPr lang="en-US" sz="1050" dirty="0">
+                <a:solidFill>
+                  <a:srgbClr val="333333"/>
+                </a:solidFill>
+                <a:latin typeface="Arial" pitchFamily="34" charset="0"/>
+                <a:ea typeface="Arial" pitchFamily="34" charset="-122"/>
+                <a:cs typeface="Arial" pitchFamily="34" charset="-120"/>
+              </a:rPr>
+              <a:t>Лобби и стойка приёма: круговой подъезд, зона высадки, вестибюль двойной высоты.</a:t>
+            </a:r>
+            <a:endParaRPr lang="en-US" sz="1050" dirty="0"/>
+          </a:p>
+          <a:p>
+            <a:pPr indent="0" marL="0">
+              <a:lnSpc>
+                <a:spcPts val="1500"/>
+              </a:lnSpc>
+              <a:spcAft>
+                <a:spcPts val="900"/>
+              </a:spcAft>
+              <a:buNone/>
+            </a:pPr>
+            <a:r>
+              <a:rPr lang="en-US" sz="1050" dirty="0">
                 <a:solidFill>
                   <a:srgbClr val="FF4D23"/>
                 </a:solidFill>
@@ -4658,105 +4495,42 @@
                 <a:ea typeface="Arial" pitchFamily="34" charset="-122"/>
                 <a:cs typeface="Arial" pitchFamily="34" charset="-120"/>
               </a:rPr>
-              <a:t> м²</a:t>
-            </a:r>
-            <a:endParaRPr lang="en-US" sz="2600" dirty="0"/>
-          </a:p>
-        </p:txBody>
-      </p:sp>
-      <p:sp>
-        <p:nvSpPr>
-          <p:cNvPr id="11" name="Text 9"/>
-          <p:cNvSpPr txBox="1"/>
-          <p:nvPr/>
-        </p:nvSpPr>
-        <p:spPr>
-          <a:xfrm>
-            <a:off x="502920" y="3986784"/>
-            <a:ext cx="3794760" cy="384048"/>
-          </a:xfrm>
-          <a:prstGeom prst="rect">
-            <a:avLst/>
-          </a:prstGeom>
-          <a:noFill/>
-          <a:ln/>
-        </p:spPr>
-        <p:txBody>
-          <a:bodyPr wrap="square" lIns="0" tIns="0" rIns="0" bIns="0" rtlCol="0" anchor="t"/>
-          <a:lstStyle/>
-          <a:p>
+              <a:t>– </a:t>
+            </a:r>
             <a:pPr indent="0" marL="0">
               <a:lnSpc>
-                <a:spcPts val="1100"/>
+                <a:spcPts val="1500"/>
               </a:lnSpc>
-              <a:buNone/>
-            </a:pPr>
-            <a:r>
-              <a:rPr lang="en-US" sz="800" spc="30" kern="0" dirty="0">
-                <a:solidFill>
-                  <a:srgbClr val="8A8A8A"/>
-                </a:solidFill>
-                <a:latin typeface="Arial" pitchFamily="34" charset="0"/>
-                <a:ea typeface="Arial" pitchFamily="34" charset="-122"/>
-                <a:cs typeface="Arial" pitchFamily="34" charset="-120"/>
-              </a:rPr>
-              <a:t>СРЕДНЯЯ ПЛОЩАДЬ ЭТАЖА НОМЕРНОГО КОРПУСА</a:t>
-            </a:r>
-            <a:endParaRPr lang="en-US" sz="800" dirty="0"/>
-          </a:p>
-        </p:txBody>
-      </p:sp>
-      <p:sp>
-        <p:nvSpPr>
-          <p:cNvPr id="12" name="Shape 10"/>
-          <p:cNvSpPr/>
-          <p:nvPr/>
-        </p:nvSpPr>
-        <p:spPr>
-          <a:xfrm>
-            <a:off x="502920" y="4572000"/>
-            <a:ext cx="3794760" cy="7315"/>
-          </a:xfrm>
-          <a:prstGeom prst="rect">
-            <a:avLst/>
-          </a:prstGeom>
-          <a:solidFill>
-            <a:srgbClr val="DCDCDC"/>
-          </a:solidFill>
-          <a:ln w="12700">
-            <a:solidFill>
-              <a:srgbClr val="DCDCDC"/>
-            </a:solidFill>
-            <a:prstDash val="solid"/>
-          </a:ln>
-        </p:spPr>
-      </p:sp>
-      <p:sp>
-        <p:nvSpPr>
-          <p:cNvPr id="13" name="Text 11"/>
-          <p:cNvSpPr txBox="1"/>
-          <p:nvPr/>
-        </p:nvSpPr>
-        <p:spPr>
-          <a:xfrm>
-            <a:off x="502920" y="4700016"/>
-            <a:ext cx="3794760" cy="201168"/>
-          </a:xfrm>
-          <a:prstGeom prst="rect">
-            <a:avLst/>
-          </a:prstGeom>
-          <a:noFill/>
-          <a:ln/>
-        </p:spPr>
-        <p:txBody>
-          <a:bodyPr wrap="square" lIns="0" tIns="0" rIns="0" bIns="0" rtlCol="0" anchor="ctr"/>
-          <a:lstStyle/>
-          <a:p>
-            <a:pPr indent="0" marL="0">
-              <a:buNone/>
-            </a:pPr>
-            <a:r>
-              <a:rPr lang="en-US" sz="850" spc="30" kern="0" dirty="0">
+              <a:spcAft>
+                <a:spcPts val="900"/>
+              </a:spcAft>
+              <a:buNone/>
+            </a:pPr>
+            <a:r>
+              <a:rPr lang="en-US" sz="1050" dirty="0">
+                <a:solidFill>
+                  <a:srgbClr val="333333"/>
+                </a:solidFill>
+                <a:latin typeface="Arial" pitchFamily="34" charset="0"/>
+                <a:ea typeface="Arial" pitchFamily="34" charset="-122"/>
+                <a:cs typeface="Arial" pitchFamily="34" charset="-120"/>
+              </a:rPr>
+              <a:t>Рестораны и кафе — работают на город, а не только на гостей гостиницы.</a:t>
+            </a:r>
+            <a:endParaRPr lang="en-US" sz="1050" dirty="0"/>
+          </a:p>
+          <a:p>
+            <a:pPr indent="0" marL="0">
+              <a:lnSpc>
+                <a:spcPts val="1500"/>
+              </a:lnSpc>
+              <a:spcAft>
+                <a:spcPts val="900"/>
+              </a:spcAft>
+              <a:buNone/>
+            </a:pPr>
+            <a:r>
+              <a:rPr lang="en-US" sz="1050" dirty="0">
                 <a:solidFill>
                   <a:srgbClr val="FF4D23"/>
                 </a:solidFill>
@@ -4764,38 +4538,42 @@
                 <a:ea typeface="Arial" pitchFamily="34" charset="-122"/>
                 <a:cs typeface="Arial" pitchFamily="34" charset="-120"/>
               </a:rPr>
-              <a:t>ЁМКОСТЬ — ПРЕДВАРИТЕЛЬНАЯ ОЦЕНКА</a:t>
-            </a:r>
-            <a:endParaRPr lang="en-US" sz="850" dirty="0"/>
-          </a:p>
-        </p:txBody>
-      </p:sp>
-      <p:sp>
-        <p:nvSpPr>
-          <p:cNvPr id="14" name="Text 12"/>
-          <p:cNvSpPr txBox="1"/>
-          <p:nvPr/>
-        </p:nvSpPr>
-        <p:spPr>
-          <a:xfrm>
-            <a:off x="502920" y="4956048"/>
-            <a:ext cx="3794760" cy="402336"/>
-          </a:xfrm>
-          <a:prstGeom prst="rect">
-            <a:avLst/>
-          </a:prstGeom>
-          <a:noFill/>
-          <a:ln/>
-        </p:spPr>
-        <p:txBody>
-          <a:bodyPr wrap="square" lIns="0" tIns="0" rIns="0" bIns="0" rtlCol="0" anchor="ctr"/>
-          <a:lstStyle/>
-          <a:p>
-            <a:pPr indent="0" marL="0">
-              <a:buNone/>
-            </a:pPr>
-            <a:r>
-              <a:rPr lang="en-US" sz="2600" b="1" dirty="0">
+              <a:t>– </a:t>
+            </a:r>
+            <a:pPr indent="0" marL="0">
+              <a:lnSpc>
+                <a:spcPts val="1500"/>
+              </a:lnSpc>
+              <a:spcAft>
+                <a:spcPts val="900"/>
+              </a:spcAft>
+              <a:buNone/>
+            </a:pPr>
+            <a:r>
+              <a:rPr lang="en-US" sz="1050" dirty="0">
+                <a:solidFill>
+                  <a:srgbClr val="333333"/>
+                </a:solidFill>
+                <a:latin typeface="Arial" pitchFamily="34" charset="0"/>
+                <a:ea typeface="Arial" pitchFamily="34" charset="-122"/>
+                <a:cs typeface="Arial" pitchFamily="34" charset="-120"/>
+              </a:rPr>
+              <a:t>Конференц-зона для деловых мероприятий и городских событий.</a:t>
+            </a:r>
+            <a:endParaRPr lang="en-US" sz="1050" dirty="0"/>
+          </a:p>
+          <a:p>
+            <a:pPr indent="0" marL="0">
+              <a:lnSpc>
+                <a:spcPts val="1500"/>
+              </a:lnSpc>
+              <a:spcAft>
+                <a:spcPts val="900"/>
+              </a:spcAft>
+              <a:buNone/>
+            </a:pPr>
+            <a:r>
+              <a:rPr lang="en-US" sz="1050" dirty="0">
                 <a:solidFill>
                   <a:srgbClr val="FF4D23"/>
                 </a:solidFill>
@@ -4803,71 +4581,35 @@
                 <a:ea typeface="Arial" pitchFamily="34" charset="-122"/>
                 <a:cs typeface="Arial" pitchFamily="34" charset="-120"/>
               </a:rPr>
-              <a:t>260 – 300</a:t>
-            </a:r>
-            <a:pPr indent="0" marL="0">
-              <a:buNone/>
-            </a:pPr>
-            <a:r>
-              <a:rPr lang="en-US" sz="1100" b="1" dirty="0">
-                <a:solidFill>
-                  <a:srgbClr val="111111"/>
-                </a:solidFill>
-                <a:latin typeface="Arial" pitchFamily="34" charset="0"/>
-                <a:ea typeface="Arial" pitchFamily="34" charset="-122"/>
-                <a:cs typeface="Arial" pitchFamily="34" charset="-120"/>
-              </a:rPr>
-              <a:t>  номеров</a:t>
-            </a:r>
-            <a:endParaRPr lang="en-US" sz="2600" dirty="0"/>
-          </a:p>
-        </p:txBody>
-      </p:sp>
-      <p:sp>
-        <p:nvSpPr>
-          <p:cNvPr id="15" name="Text 13"/>
-          <p:cNvSpPr txBox="1"/>
-          <p:nvPr/>
-        </p:nvSpPr>
-        <p:spPr>
-          <a:xfrm>
-            <a:off x="502920" y="5413248"/>
-            <a:ext cx="3794760" cy="822960"/>
-          </a:xfrm>
-          <a:prstGeom prst="rect">
-            <a:avLst/>
-          </a:prstGeom>
-          <a:noFill/>
-          <a:ln/>
-        </p:spPr>
-        <p:txBody>
-          <a:bodyPr wrap="square" lIns="0" tIns="0" rIns="0" bIns="0" rtlCol="0" anchor="t"/>
-          <a:lstStyle/>
-          <a:p>
+              <a:t>– </a:t>
+            </a:r>
             <a:pPr indent="0" marL="0">
               <a:lnSpc>
-                <a:spcPts val="1200"/>
+                <a:spcPts val="1500"/>
               </a:lnSpc>
-              <a:buNone/>
-            </a:pPr>
-            <a:r>
-              <a:rPr lang="en-US" sz="900" dirty="0">
-                <a:solidFill>
-                  <a:srgbClr val="8A8A8A"/>
-                </a:solidFill>
-                <a:latin typeface="Arial" pitchFamily="34" charset="0"/>
-                <a:ea typeface="Arial" pitchFamily="34" charset="-122"/>
-                <a:cs typeface="Arial" pitchFamily="34" charset="-120"/>
-              </a:rPr>
-              <a:t>Расчёт от 12 693,32 м² при полезной площади этажа около 65 % и номере 28–32 м². Точная ёмкость определяется планировками на стадии эскизного проекта.</a:t>
-            </a:r>
-            <a:endParaRPr lang="en-US" sz="900" dirty="0"/>
+              <a:spcAft>
+                <a:spcPts val="900"/>
+              </a:spcAft>
+              <a:buNone/>
+            </a:pPr>
+            <a:r>
+              <a:rPr lang="en-US" sz="1050" dirty="0">
+                <a:solidFill>
+                  <a:srgbClr val="333333"/>
+                </a:solidFill>
+                <a:latin typeface="Arial" pitchFamily="34" charset="0"/>
+                <a:ea typeface="Arial" pitchFamily="34" charset="-122"/>
+                <a:cs typeface="Arial" pitchFamily="34" charset="-120"/>
+              </a:rPr>
+              <a:t>Оздоровительный блок: СПА и фитнес. Состав уточняется на стадии эскизного проекта.</a:t>
+            </a:r>
+            <a:endParaRPr lang="en-US" sz="1050" dirty="0"/>
           </a:p>
         </p:txBody>
       </p:sp>
       <p:pic>
         <p:nvPicPr>
-          <p:cNvPr id="16" name="Image 0" descr="/tmp/claude-0/-home-user-most/9fc1ec31-3c64-5a82-aadb-ddb23fff6e53/scratchpad/assets/room.jpg">    </p:cNvPr>
+          <p:cNvPr id="9" name="Image 0" descr="/tmp/claude-0/-home-user-most/9fc1ec31-3c64-5a82-aadb-ddb23fff6e53/scratchpad/assets/lobby.jpg">    </p:cNvPr>
           <p:cNvPicPr>
             <a:picLocks noChangeAspect="1"/>
           </p:cNvPicPr>
@@ -4882,7 +4624,7 @@
         <p:spPr>
           <a:xfrm>
             <a:off x="4709160" y="960120"/>
-            <a:ext cx="6949440" cy="4636008"/>
+            <a:ext cx="6949440" cy="3913632"/>
           </a:xfrm>
           <a:prstGeom prst="rect">
             <a:avLst/>
@@ -4891,14 +4633,14 @@
       </p:pic>
       <p:sp>
         <p:nvSpPr>
-          <p:cNvPr id="17" name="Text 14"/>
-          <p:cNvSpPr txBox="1"/>
-          <p:nvPr/>
-        </p:nvSpPr>
-        <p:spPr>
-          <a:xfrm>
-            <a:off x="4709160" y="5669280"/>
-            <a:ext cx="6949440" cy="219456"/>
+          <p:cNvPr id="10" name="Text 7"/>
+          <p:cNvSpPr txBox="1"/>
+          <p:nvPr/>
+        </p:nvSpPr>
+        <p:spPr>
+          <a:xfrm>
+            <a:off x="4709160" y="5257800"/>
+            <a:ext cx="3291840" cy="402336"/>
           </a:xfrm>
           <a:prstGeom prst="rect">
             <a:avLst/>
@@ -4914,7 +4656,63 @@
               <a:buNone/>
             </a:pPr>
             <a:r>
-              <a:rPr lang="en-US" sz="800" dirty="0">
+              <a:rPr lang="en-US" sz="2600" b="1" dirty="0">
+                <a:solidFill>
+                  <a:srgbClr val="111111"/>
+                </a:solidFill>
+                <a:latin typeface="Arial" pitchFamily="34" charset="0"/>
+                <a:ea typeface="Arial" pitchFamily="34" charset="-122"/>
+                <a:cs typeface="Arial" pitchFamily="34" charset="-120"/>
+              </a:rPr>
+              <a:t>4 446,9</a:t>
+            </a:r>
+            <a:pPr indent="0" marL="0">
+              <a:buNone/>
+            </a:pPr>
+            <a:r>
+              <a:rPr lang="en-US" sz="1100" b="1" dirty="0">
+                <a:solidFill>
+                  <a:srgbClr val="FF4D23"/>
+                </a:solidFill>
+                <a:latin typeface="Arial" pitchFamily="34" charset="0"/>
+                <a:ea typeface="Arial" pitchFamily="34" charset="-122"/>
+                <a:cs typeface="Arial" pitchFamily="34" charset="-120"/>
+              </a:rPr>
+              <a:t> м²</a:t>
+            </a:r>
+            <a:endParaRPr lang="en-US" sz="2600" dirty="0"/>
+          </a:p>
+        </p:txBody>
+      </p:sp>
+      <p:sp>
+        <p:nvSpPr>
+          <p:cNvPr id="11" name="Text 8"/>
+          <p:cNvSpPr txBox="1"/>
+          <p:nvPr/>
+        </p:nvSpPr>
+        <p:spPr>
+          <a:xfrm>
+            <a:off x="4709160" y="5678424"/>
+            <a:ext cx="3291840" cy="384048"/>
+          </a:xfrm>
+          <a:prstGeom prst="rect">
+            <a:avLst/>
+          </a:prstGeom>
+          <a:noFill/>
+          <a:ln/>
+        </p:spPr>
+        <p:txBody>
+          <a:bodyPr wrap="square" lIns="0" tIns="0" rIns="0" bIns="0" rtlCol="0" anchor="t"/>
+          <a:lstStyle/>
+          <a:p>
+            <a:pPr indent="0" marL="0">
+              <a:lnSpc>
+                <a:spcPts val="1100"/>
+              </a:lnSpc>
+              <a:buNone/>
+            </a:pPr>
+            <a:r>
+              <a:rPr lang="en-US" sz="800" spc="30" kern="0" dirty="0">
                 <a:solidFill>
                   <a:srgbClr val="8A8A8A"/>
                 </a:solidFill>
@@ -4922,7 +4720,102 @@
                 <a:ea typeface="Arial" pitchFamily="34" charset="-122"/>
                 <a:cs typeface="Arial" pitchFamily="34" charset="-120"/>
               </a:rPr>
-              <a:t>Типовой номер: балкон на озеленённой ленте фасада, раскрытие на город и хребет.</a:t>
+              <a:t>ПЛОЩАДЬ ПЕРВОГО ЭТАЖА</a:t>
+            </a:r>
+            <a:endParaRPr lang="en-US" sz="800" dirty="0"/>
+          </a:p>
+        </p:txBody>
+      </p:sp>
+      <p:sp>
+        <p:nvSpPr>
+          <p:cNvPr id="12" name="Text 9"/>
+          <p:cNvSpPr txBox="1"/>
+          <p:nvPr/>
+        </p:nvSpPr>
+        <p:spPr>
+          <a:xfrm>
+            <a:off x="8183880" y="5257800"/>
+            <a:ext cx="3383280" cy="402336"/>
+          </a:xfrm>
+          <a:prstGeom prst="rect">
+            <a:avLst/>
+          </a:prstGeom>
+          <a:noFill/>
+          <a:ln/>
+        </p:spPr>
+        <p:txBody>
+          <a:bodyPr wrap="square" lIns="0" tIns="0" rIns="0" bIns="0" rtlCol="0" anchor="ctr"/>
+          <a:lstStyle/>
+          <a:p>
+            <a:pPr indent="0" marL="0">
+              <a:buNone/>
+            </a:pPr>
+            <a:r>
+              <a:rPr lang="en-US" sz="2600" b="1" dirty="0">
+                <a:solidFill>
+                  <a:srgbClr val="111111"/>
+                </a:solidFill>
+                <a:latin typeface="Arial" pitchFamily="34" charset="0"/>
+                <a:ea typeface="Arial" pitchFamily="34" charset="-122"/>
+                <a:cs typeface="Arial" pitchFamily="34" charset="-120"/>
+              </a:rPr>
+              <a:t>26</a:t>
+            </a:r>
+            <a:pPr indent="0" marL="0">
+              <a:buNone/>
+            </a:pPr>
+            <a:r>
+              <a:rPr lang="en-US" sz="1100" b="1" dirty="0">
+                <a:solidFill>
+                  <a:srgbClr val="FF4D23"/>
+                </a:solidFill>
+                <a:latin typeface="Arial" pitchFamily="34" charset="0"/>
+                <a:ea typeface="Arial" pitchFamily="34" charset="-122"/>
+                <a:cs typeface="Arial" pitchFamily="34" charset="-120"/>
+              </a:rPr>
+              <a:t> %</a:t>
+            </a:r>
+            <a:endParaRPr lang="en-US" sz="2600" dirty="0"/>
+          </a:p>
+        </p:txBody>
+      </p:sp>
+      <p:sp>
+        <p:nvSpPr>
+          <p:cNvPr id="13" name="Text 10"/>
+          <p:cNvSpPr txBox="1"/>
+          <p:nvPr/>
+        </p:nvSpPr>
+        <p:spPr>
+          <a:xfrm>
+            <a:off x="8183880" y="5678424"/>
+            <a:ext cx="3383280" cy="384048"/>
+          </a:xfrm>
+          <a:prstGeom prst="rect">
+            <a:avLst/>
+          </a:prstGeom>
+          <a:noFill/>
+          <a:ln/>
+        </p:spPr>
+        <p:txBody>
+          <a:bodyPr wrap="square" lIns="0" tIns="0" rIns="0" bIns="0" rtlCol="0" anchor="t"/>
+          <a:lstStyle/>
+          <a:p>
+            <a:pPr indent="0" marL="0">
+              <a:lnSpc>
+                <a:spcPts val="1100"/>
+              </a:lnSpc>
+              <a:buNone/>
+            </a:pPr>
+            <a:r>
+              <a:rPr lang="en-US" sz="800" spc="30" kern="0" dirty="0">
+                <a:solidFill>
+                  <a:srgbClr val="8A8A8A"/>
+                </a:solidFill>
+                <a:latin typeface="Arial" pitchFamily="34" charset="0"/>
+                <a:ea typeface="Arial" pitchFamily="34" charset="-122"/>
+                <a:cs typeface="Arial" pitchFamily="34" charset="-120"/>
+              </a:rPr>
+              <a:t>ДОЛЯ ПЕРВОГО ЭТАЖА В ОБЩЕЙ ПЛОЩАДИ</a:t>
             </a:r>
             <a:endParaRPr lang="en-US" sz="800" dirty="0"/>
           </a:p>
@@ -4930,7 +4823,7 @@
       </p:sp>
       <p:pic>
         <p:nvPicPr>
-          <p:cNvPr id="18" name="Image 1" descr="/tmp/claude-0/-home-user-most/9fc1ec31-3c64-5a82-aadb-ddb23fff6e53/scratchpad/assets/logo_most.png">    </p:cNvPr>
+          <p:cNvPr id="14" name="Image 1" descr="/tmp/claude-0/-home-user-most/9fc1ec31-3c64-5a82-aadb-ddb23fff6e53/scratchpad/assets/logo_most.png">    </p:cNvPr>
           <p:cNvPicPr>
             <a:picLocks noChangeAspect="1"/>
           </p:cNvPicPr>
@@ -4954,7 +4847,7 @@
       </p:pic>
       <p:sp>
         <p:nvSpPr>
-          <p:cNvPr id="19" name="Text 15"/>
+          <p:cNvPr id="15" name="Text 11"/>
           <p:cNvSpPr txBox="1"/>
           <p:nvPr/>
         </p:nvSpPr>
@@ -5056,7 +4949,7 @@
                 <a:ea typeface="Arial" pitchFamily="34" charset="-122"/>
                 <a:cs typeface="Arial" pitchFamily="34" charset="-120"/>
               </a:rPr>
-              <a:t>БЛАГОУСТРОЙСТВО</a:t>
+              <a:t>НОМЕРНОЙ ФОНД</a:t>
             </a:r>
             <a:endParaRPr lang="en-US" sz="950" dirty="0"/>
           </a:p>
@@ -5095,7 +4988,7 @@
                 <a:ea typeface="Arial" pitchFamily="34" charset="-122"/>
                 <a:cs typeface="Arial" pitchFamily="34" charset="-120"/>
               </a:rPr>
-              <a:t>Озеленение и открытые пространства</a:t>
+              <a:t>Этажи со 2-го по 5-й</a:t>
             </a:r>
             <a:endParaRPr lang="en-US" sz="900" dirty="0"/>
           </a:p>
@@ -5134,7 +5027,7 @@
                 <a:ea typeface="Arial" pitchFamily="34" charset="-122"/>
                 <a:cs typeface="Arial" pitchFamily="34" charset="-120"/>
               </a:rPr>
-              <a:t>ФРАГМЕНТ ГЕНПЛАНА</a:t>
+              <a:t>ЁМКОСТЬ</a:t>
             </a:r>
             <a:endParaRPr lang="en-US" sz="950" dirty="0"/>
           </a:p>
@@ -5173,7 +5066,7 @@
                 <a:ea typeface="Arial" pitchFamily="34" charset="-122"/>
                 <a:cs typeface="Arial" pitchFamily="34" charset="-120"/>
               </a:rPr>
-              <a:t>ДВЕ ТРЕТИ УЧАСТКА ОТКРЫТЫ</a:t>
+              <a:t>НОМЕРНОЙ ФОНД</a:t>
             </a:r>
             <a:endParaRPr lang="en-US" sz="1300" dirty="0"/>
           </a:p>
@@ -5215,7 +5108,7 @@
                 <a:ea typeface="Arial" pitchFamily="34" charset="-122"/>
                 <a:cs typeface="Arial" pitchFamily="34" charset="-120"/>
               </a:rPr>
-              <a:t>Вне пятна застройки остаётся 9 058,89 м² — 64,7 % участка. Это площадь под проезды, площадки и озеленение.</a:t>
+              <a:t>Этажи со 2-го по 5-й полностью отданы номерам: 12 693,32 м², или 74,1 % общей площади здания.</a:t>
             </a:r>
             <a:endParaRPr lang="en-US" sz="1050" dirty="0"/>
           </a:p>
@@ -5279,7 +5172,7 @@
                 <a:ea typeface="Arial" pitchFamily="34" charset="-122"/>
                 <a:cs typeface="Arial" pitchFamily="34" charset="-120"/>
               </a:rPr>
-              <a:t>9 058,89</a:t>
+              <a:t>12 693,32</a:t>
             </a:r>
             <a:pPr indent="0" marL="0">
               <a:buNone/>
@@ -5335,7 +5228,7 @@
                 <a:ea typeface="Arial" pitchFamily="34" charset="-122"/>
                 <a:cs typeface="Arial" pitchFamily="34" charset="-120"/>
               </a:rPr>
-              <a:t>ТЕРРИТОРИЯ ВНЕ ПЯТНА ЗАСТРОЙКИ — 64,7 %</a:t>
+              <a:t>ПЛОЩАДЬ НОМЕРНОГО ФОНДА</a:t>
             </a:r>
             <a:endParaRPr lang="en-US" sz="800" dirty="0"/>
           </a:p>
@@ -5343,13 +5236,108 @@
       </p:sp>
       <p:sp>
         <p:nvSpPr>
-          <p:cNvPr id="10" name="Shape 8"/>
+          <p:cNvPr id="10" name="Text 8"/>
+          <p:cNvSpPr txBox="1"/>
+          <p:nvPr/>
+        </p:nvSpPr>
+        <p:spPr>
+          <a:xfrm>
+            <a:off x="502920" y="3566160"/>
+            <a:ext cx="3794760" cy="402336"/>
+          </a:xfrm>
+          <a:prstGeom prst="rect">
+            <a:avLst/>
+          </a:prstGeom>
+          <a:noFill/>
+          <a:ln/>
+        </p:spPr>
+        <p:txBody>
+          <a:bodyPr wrap="square" lIns="0" tIns="0" rIns="0" bIns="0" rtlCol="0" anchor="ctr"/>
+          <a:lstStyle/>
+          <a:p>
+            <a:pPr indent="0" marL="0">
+              <a:buNone/>
+            </a:pPr>
+            <a:r>
+              <a:rPr lang="en-US" sz="2600" b="1" dirty="0">
+                <a:solidFill>
+                  <a:srgbClr val="111111"/>
+                </a:solidFill>
+                <a:latin typeface="Arial" pitchFamily="34" charset="0"/>
+                <a:ea typeface="Arial" pitchFamily="34" charset="-122"/>
+                <a:cs typeface="Arial" pitchFamily="34" charset="-120"/>
+              </a:rPr>
+              <a:t>≈ 3 173</a:t>
+            </a:r>
+            <a:pPr indent="0" marL="0">
+              <a:buNone/>
+            </a:pPr>
+            <a:r>
+              <a:rPr lang="en-US" sz="1100" b="1" dirty="0">
+                <a:solidFill>
+                  <a:srgbClr val="FF4D23"/>
+                </a:solidFill>
+                <a:latin typeface="Arial" pitchFamily="34" charset="0"/>
+                <a:ea typeface="Arial" pitchFamily="34" charset="-122"/>
+                <a:cs typeface="Arial" pitchFamily="34" charset="-120"/>
+              </a:rPr>
+              <a:t> м²</a:t>
+            </a:r>
+            <a:endParaRPr lang="en-US" sz="2600" dirty="0"/>
+          </a:p>
+        </p:txBody>
+      </p:sp>
+      <p:sp>
+        <p:nvSpPr>
+          <p:cNvPr id="11" name="Text 9"/>
+          <p:cNvSpPr txBox="1"/>
+          <p:nvPr/>
+        </p:nvSpPr>
+        <p:spPr>
+          <a:xfrm>
+            <a:off x="502920" y="3986784"/>
+            <a:ext cx="3794760" cy="384048"/>
+          </a:xfrm>
+          <a:prstGeom prst="rect">
+            <a:avLst/>
+          </a:prstGeom>
+          <a:noFill/>
+          <a:ln/>
+        </p:spPr>
+        <p:txBody>
+          <a:bodyPr wrap="square" lIns="0" tIns="0" rIns="0" bIns="0" rtlCol="0" anchor="t"/>
+          <a:lstStyle/>
+          <a:p>
+            <a:pPr indent="0" marL="0">
+              <a:lnSpc>
+                <a:spcPts val="1100"/>
+              </a:lnSpc>
+              <a:buNone/>
+            </a:pPr>
+            <a:r>
+              <a:rPr lang="en-US" sz="800" spc="30" kern="0" dirty="0">
+                <a:solidFill>
+                  <a:srgbClr val="8A8A8A"/>
+                </a:solidFill>
+                <a:latin typeface="Arial" pitchFamily="34" charset="0"/>
+                <a:ea typeface="Arial" pitchFamily="34" charset="-122"/>
+                <a:cs typeface="Arial" pitchFamily="34" charset="-120"/>
+              </a:rPr>
+              <a:t>СРЕДНЯЯ ПЛОЩАДЬ ЭТАЖА НОМЕРНОГО КОРПУСА</a:t>
+            </a:r>
+            <a:endParaRPr lang="en-US" sz="800" dirty="0"/>
+          </a:p>
+        </p:txBody>
+      </p:sp>
+      <p:sp>
+        <p:nvSpPr>
+          <p:cNvPr id="12" name="Shape 10"/>
           <p:cNvSpPr/>
           <p:nvPr/>
         </p:nvSpPr>
         <p:spPr>
           <a:xfrm>
-            <a:off x="502920" y="3566160"/>
+            <a:off x="502920" y="4572000"/>
             <a:ext cx="3794760" cy="7315"/>
           </a:xfrm>
           <a:prstGeom prst="rect">
@@ -5368,14 +5356,106 @@
       </p:sp>
       <p:sp>
         <p:nvSpPr>
-          <p:cNvPr id="11" name="Text 9"/>
-          <p:cNvSpPr txBox="1"/>
-          <p:nvPr/>
-        </p:nvSpPr>
-        <p:spPr>
-          <a:xfrm>
-            <a:off x="502920" y="3749040"/>
-            <a:ext cx="3794760" cy="2377440"/>
+          <p:cNvPr id="13" name="Text 11"/>
+          <p:cNvSpPr txBox="1"/>
+          <p:nvPr/>
+        </p:nvSpPr>
+        <p:spPr>
+          <a:xfrm>
+            <a:off x="502920" y="4700016"/>
+            <a:ext cx="3794760" cy="201168"/>
+          </a:xfrm>
+          <a:prstGeom prst="rect">
+            <a:avLst/>
+          </a:prstGeom>
+          <a:noFill/>
+          <a:ln/>
+        </p:spPr>
+        <p:txBody>
+          <a:bodyPr wrap="square" lIns="0" tIns="0" rIns="0" bIns="0" rtlCol="0" anchor="ctr"/>
+          <a:lstStyle/>
+          <a:p>
+            <a:pPr indent="0" marL="0">
+              <a:buNone/>
+            </a:pPr>
+            <a:r>
+              <a:rPr lang="en-US" sz="850" spc="30" kern="0" dirty="0">
+                <a:solidFill>
+                  <a:srgbClr val="FF4D23"/>
+                </a:solidFill>
+                <a:latin typeface="Arial" pitchFamily="34" charset="0"/>
+                <a:ea typeface="Arial" pitchFamily="34" charset="-122"/>
+                <a:cs typeface="Arial" pitchFamily="34" charset="-120"/>
+              </a:rPr>
+              <a:t>ЁМКОСТЬ — ПРЕДВАРИТЕЛЬНАЯ ОЦЕНКА</a:t>
+            </a:r>
+            <a:endParaRPr lang="en-US" sz="850" dirty="0"/>
+          </a:p>
+        </p:txBody>
+      </p:sp>
+      <p:sp>
+        <p:nvSpPr>
+          <p:cNvPr id="14" name="Text 12"/>
+          <p:cNvSpPr txBox="1"/>
+          <p:nvPr/>
+        </p:nvSpPr>
+        <p:spPr>
+          <a:xfrm>
+            <a:off x="502920" y="4956048"/>
+            <a:ext cx="3794760" cy="402336"/>
+          </a:xfrm>
+          <a:prstGeom prst="rect">
+            <a:avLst/>
+          </a:prstGeom>
+          <a:noFill/>
+          <a:ln/>
+        </p:spPr>
+        <p:txBody>
+          <a:bodyPr wrap="square" lIns="0" tIns="0" rIns="0" bIns="0" rtlCol="0" anchor="ctr"/>
+          <a:lstStyle/>
+          <a:p>
+            <a:pPr indent="0" marL="0">
+              <a:buNone/>
+            </a:pPr>
+            <a:r>
+              <a:rPr lang="en-US" sz="2600" b="1" dirty="0">
+                <a:solidFill>
+                  <a:srgbClr val="FF4D23"/>
+                </a:solidFill>
+                <a:latin typeface="Arial" pitchFamily="34" charset="0"/>
+                <a:ea typeface="Arial" pitchFamily="34" charset="-122"/>
+                <a:cs typeface="Arial" pitchFamily="34" charset="-120"/>
+              </a:rPr>
+              <a:t>260 – 300</a:t>
+            </a:r>
+            <a:pPr indent="0" marL="0">
+              <a:buNone/>
+            </a:pPr>
+            <a:r>
+              <a:rPr lang="en-US" sz="1100" b="1" dirty="0">
+                <a:solidFill>
+                  <a:srgbClr val="111111"/>
+                </a:solidFill>
+                <a:latin typeface="Arial" pitchFamily="34" charset="0"/>
+                <a:ea typeface="Arial" pitchFamily="34" charset="-122"/>
+                <a:cs typeface="Arial" pitchFamily="34" charset="-120"/>
+              </a:rPr>
+              <a:t>  номеров</a:t>
+            </a:r>
+            <a:endParaRPr lang="en-US" sz="2600" dirty="0"/>
+          </a:p>
+        </p:txBody>
+      </p:sp>
+      <p:sp>
+        <p:nvSpPr>
+          <p:cNvPr id="15" name="Text 13"/>
+          <p:cNvSpPr txBox="1"/>
+          <p:nvPr/>
+        </p:nvSpPr>
+        <p:spPr>
+          <a:xfrm>
+            <a:off x="502920" y="5413248"/>
+            <a:ext cx="3794760" cy="822960"/>
           </a:xfrm>
           <a:prstGeom prst="rect">
             <a:avLst/>
@@ -5389,137 +5469,28 @@
           <a:p>
             <a:pPr indent="0" marL="0">
               <a:lnSpc>
-                <a:spcPts val="1500"/>
+                <a:spcPts val="1200"/>
               </a:lnSpc>
-              <a:spcAft>
-                <a:spcPts val="900"/>
-              </a:spcAft>
-              <a:buNone/>
-            </a:pPr>
-            <a:r>
-              <a:rPr lang="en-US" sz="1050" dirty="0">
-                <a:solidFill>
-                  <a:srgbClr val="FF4D23"/>
-                </a:solidFill>
-                <a:latin typeface="Arial" pitchFamily="34" charset="0"/>
-                <a:ea typeface="Arial" pitchFamily="34" charset="-122"/>
-                <a:cs typeface="Arial" pitchFamily="34" charset="-120"/>
-              </a:rPr>
-              <a:t>– </a:t>
-            </a:r>
-            <a:pPr indent="0" marL="0">
-              <a:lnSpc>
-                <a:spcPts val="1500"/>
-              </a:lnSpc>
-              <a:spcAft>
-                <a:spcPts val="900"/>
-              </a:spcAft>
-              <a:buNone/>
-            </a:pPr>
-            <a:r>
-              <a:rPr lang="en-US" sz="1050" dirty="0">
-                <a:solidFill>
-                  <a:srgbClr val="333333"/>
-                </a:solidFill>
-                <a:latin typeface="Arial" pitchFamily="34" charset="0"/>
-                <a:ea typeface="Arial" pitchFamily="34" charset="-122"/>
-                <a:cs typeface="Arial" pitchFamily="34" charset="-120"/>
-              </a:rPr>
-              <a:t>Рядовая посадка деревьев по всему периметру: зелёная полоса отделяет застройку от границ участка и улицы.</a:t>
-            </a:r>
-            <a:endParaRPr lang="en-US" sz="1050" dirty="0"/>
-          </a:p>
-          <a:p>
-            <a:pPr indent="0" marL="0">
-              <a:lnSpc>
-                <a:spcPts val="1500"/>
-              </a:lnSpc>
-              <a:spcAft>
-                <a:spcPts val="900"/>
-              </a:spcAft>
-              <a:buNone/>
-            </a:pPr>
-            <a:r>
-              <a:rPr lang="en-US" sz="1050" dirty="0">
-                <a:solidFill>
-                  <a:srgbClr val="FF4D23"/>
-                </a:solidFill>
-                <a:latin typeface="Arial" pitchFamily="34" charset="0"/>
-                <a:ea typeface="Arial" pitchFamily="34" charset="-122"/>
-                <a:cs typeface="Arial" pitchFamily="34" charset="-120"/>
-              </a:rPr>
-              <a:t>– </a:t>
-            </a:r>
-            <a:pPr indent="0" marL="0">
-              <a:lnSpc>
-                <a:spcPts val="1500"/>
-              </a:lnSpc>
-              <a:spcAft>
-                <a:spcPts val="900"/>
-              </a:spcAft>
-              <a:buNone/>
-            </a:pPr>
-            <a:r>
-              <a:rPr lang="en-US" sz="1050" dirty="0">
-                <a:solidFill>
-                  <a:srgbClr val="333333"/>
-                </a:solidFill>
-                <a:latin typeface="Arial" pitchFamily="34" charset="0"/>
-                <a:ea typeface="Arial" pitchFamily="34" charset="-122"/>
-                <a:cs typeface="Arial" pitchFamily="34" charset="-120"/>
-              </a:rPr>
-              <a:t>Внутренний двор между корпусами — защищённое от улицы пространство отдыха.</a:t>
-            </a:r>
-            <a:endParaRPr lang="en-US" sz="1050" dirty="0"/>
-          </a:p>
-          <a:p>
-            <a:pPr indent="0" marL="0">
-              <a:lnSpc>
-                <a:spcPts val="1500"/>
-              </a:lnSpc>
-              <a:spcAft>
-                <a:spcPts val="900"/>
-              </a:spcAft>
-              <a:buNone/>
-            </a:pPr>
-            <a:r>
-              <a:rPr lang="en-US" sz="1050" dirty="0">
-                <a:solidFill>
-                  <a:srgbClr val="FF4D23"/>
-                </a:solidFill>
-                <a:latin typeface="Arial" pitchFamily="34" charset="0"/>
-                <a:ea typeface="Arial" pitchFamily="34" charset="-122"/>
-                <a:cs typeface="Arial" pitchFamily="34" charset="-120"/>
-              </a:rPr>
-              <a:t>– </a:t>
-            </a:r>
-            <a:pPr indent="0" marL="0">
-              <a:lnSpc>
-                <a:spcPts val="1500"/>
-              </a:lnSpc>
-              <a:spcAft>
-                <a:spcPts val="900"/>
-              </a:spcAft>
-              <a:buNone/>
-            </a:pPr>
-            <a:r>
-              <a:rPr lang="en-US" sz="1050" dirty="0">
-                <a:solidFill>
-                  <a:srgbClr val="333333"/>
-                </a:solidFill>
-                <a:latin typeface="Arial" pitchFamily="34" charset="0"/>
-                <a:ea typeface="Arial" pitchFamily="34" charset="-122"/>
-                <a:cs typeface="Arial" pitchFamily="34" charset="-120"/>
-              </a:rPr>
-              <a:t>Озеленение на террасах продолжает партер вверх по фасаду.</a:t>
-            </a:r>
-            <a:endParaRPr lang="en-US" sz="1050" dirty="0"/>
+              <a:buNone/>
+            </a:pPr>
+            <a:r>
+              <a:rPr lang="en-US" sz="900" dirty="0">
+                <a:solidFill>
+                  <a:srgbClr val="8A8A8A"/>
+                </a:solidFill>
+                <a:latin typeface="Arial" pitchFamily="34" charset="0"/>
+                <a:ea typeface="Arial" pitchFamily="34" charset="-122"/>
+                <a:cs typeface="Arial" pitchFamily="34" charset="-120"/>
+              </a:rPr>
+              <a:t>Расчёт от 12 693,32 м² при полезной площади этажа около 65 % и номере 28–32 м². Точная ёмкость определяется планировками на стадии эскизного проекта.</a:t>
+            </a:r>
+            <a:endParaRPr lang="en-US" sz="900" dirty="0"/>
           </a:p>
         </p:txBody>
       </p:sp>
       <p:pic>
         <p:nvPicPr>
-          <p:cNvPr id="12" name="Image 0" descr="/tmp/claude-0/-home-user-most/9fc1ec31-3c64-5a82-aadb-ddb23fff6e53/scratchpad/assets/plan_green.jpg">    </p:cNvPr>
+          <p:cNvPr id="16" name="Image 0" descr="/tmp/claude-0/-home-user-most/9fc1ec31-3c64-5a82-aadb-ddb23fff6e53/scratchpad/assets/room.jpg">    </p:cNvPr>
           <p:cNvPicPr>
             <a:picLocks noChangeAspect="1"/>
           </p:cNvPicPr>
@@ -5543,7 +5514,7 @@
       </p:pic>
       <p:sp>
         <p:nvSpPr>
-          <p:cNvPr id="13" name="Text 10"/>
+          <p:cNvPr id="17" name="Text 14"/>
           <p:cNvSpPr txBox="1"/>
           <p:nvPr/>
         </p:nvSpPr>
@@ -5574,7 +5545,7 @@
                 <a:ea typeface="Arial" pitchFamily="34" charset="-122"/>
                 <a:cs typeface="Arial" pitchFamily="34" charset="-120"/>
               </a:rPr>
-              <a:t>Зелёная полоса между кольцевым проездом и границей участка.</a:t>
+              <a:t>Типовой номер: балкон на озеленённой ленте фасада, раскрытие на город и хребет.</a:t>
             </a:r>
             <a:endParaRPr lang="en-US" sz="800" dirty="0"/>
           </a:p>
@@ -5582,7 +5553,7 @@
       </p:sp>
       <p:pic>
         <p:nvPicPr>
-          <p:cNvPr id="14" name="Image 1" descr="/tmp/claude-0/-home-user-most/9fc1ec31-3c64-5a82-aadb-ddb23fff6e53/scratchpad/assets/logo_most.png">    </p:cNvPr>
+          <p:cNvPr id="18" name="Image 1" descr="/tmp/claude-0/-home-user-most/9fc1ec31-3c64-5a82-aadb-ddb23fff6e53/scratchpad/assets/logo_most.png">    </p:cNvPr>
           <p:cNvPicPr>
             <a:picLocks noChangeAspect="1"/>
           </p:cNvPicPr>
@@ -5606,7 +5577,7 @@
       </p:pic>
       <p:sp>
         <p:nvSpPr>
-          <p:cNvPr id="15" name="Text 11"/>
+          <p:cNvPr id="19" name="Text 15"/>
           <p:cNvSpPr txBox="1"/>
           <p:nvPr/>
         </p:nvSpPr>
@@ -5708,7 +5679,7 @@
                 <a:ea typeface="Arial" pitchFamily="34" charset="-122"/>
                 <a:cs typeface="Arial" pitchFamily="34" charset="-120"/>
               </a:rPr>
-              <a:t>ТРАНСПОРТ</a:t>
+              <a:t>БЛАГОУСТРОЙСТВО</a:t>
             </a:r>
             <a:endParaRPr lang="en-US" sz="950" dirty="0"/>
           </a:p>
@@ -5747,7 +5718,7 @@
                 <a:ea typeface="Arial" pitchFamily="34" charset="-122"/>
                 <a:cs typeface="Arial" pitchFamily="34" charset="-120"/>
               </a:rPr>
-              <a:t>Въезды, проезды и хранение автомобилей</a:t>
+              <a:t>Озеленение и открытые пространства</a:t>
             </a:r>
             <a:endParaRPr lang="en-US" sz="900" dirty="0"/>
           </a:p>
@@ -5786,7 +5757,7 @@
                 <a:ea typeface="Arial" pitchFamily="34" charset="-122"/>
                 <a:cs typeface="Arial" pitchFamily="34" charset="-120"/>
               </a:rPr>
-              <a:t>УЗЕЛ ВЪЕЗДА</a:t>
+              <a:t>ФРАГМЕНТ ГЕНПЛАНА</a:t>
             </a:r>
             <a:endParaRPr lang="en-US" sz="950" dirty="0"/>
           </a:p>
@@ -5825,7 +5796,7 @@
                 <a:ea typeface="Arial" pitchFamily="34" charset="-122"/>
                 <a:cs typeface="Arial" pitchFamily="34" charset="-120"/>
               </a:rPr>
-              <a:t>ОБСЛУЖИВАНИЕ УЧАСТКА</a:t>
+              <a:t>ДВЕ ТРЕТИ УЧАСТКА ОТКРЫТЫ</a:t>
             </a:r>
             <a:endParaRPr lang="en-US" sz="1300" dirty="0"/>
           </a:p>
@@ -5839,8 +5810,8 @@
         </p:nvSpPr>
         <p:spPr>
           <a:xfrm>
-            <a:off x="502920" y="1371600"/>
-            <a:ext cx="3794760" cy="2743200"/>
+            <a:off x="502920" y="1325880"/>
+            <a:ext cx="3794760" cy="914400"/>
           </a:xfrm>
           <a:prstGeom prst="rect">
             <a:avLst/>
@@ -5856,170 +5827,18 @@
               <a:lnSpc>
                 <a:spcPts val="1500"/>
               </a:lnSpc>
-              <a:spcAft>
-                <a:spcPts val="900"/>
-              </a:spcAft>
               <a:buNone/>
             </a:pPr>
             <a:r>
               <a:rPr lang="en-US" sz="1050" dirty="0">
                 <a:solidFill>
-                  <a:srgbClr val="FF4D23"/>
-                </a:solidFill>
-                <a:latin typeface="Arial" pitchFamily="34" charset="0"/>
-                <a:ea typeface="Arial" pitchFamily="34" charset="-122"/>
-                <a:cs typeface="Arial" pitchFamily="34" charset="-120"/>
-              </a:rPr>
-              <a:t>– </a:t>
-            </a:r>
-            <a:pPr indent="0" marL="0">
-              <a:lnSpc>
-                <a:spcPts val="1500"/>
-              </a:lnSpc>
-              <a:spcAft>
-                <a:spcPts val="900"/>
-              </a:spcAft>
-              <a:buNone/>
-            </a:pPr>
-            <a:r>
-              <a:rPr lang="en-US" sz="1050" dirty="0">
-                <a:solidFill>
                   <a:srgbClr val="333333"/>
                 </a:solidFill>
                 <a:latin typeface="Arial" pitchFamily="34" charset="0"/>
                 <a:ea typeface="Arial" pitchFamily="34" charset="-122"/>
                 <a:cs typeface="Arial" pitchFamily="34" charset="-120"/>
               </a:rPr>
-              <a:t>Два узла въезда: северо-восточный со стороны ул. Бухтарминской и юго-западный со стороны внутриквартального проезда. Оба вынесены от перекрёстка.</a:t>
-            </a:r>
-            <a:endParaRPr lang="en-US" sz="1050" dirty="0"/>
-          </a:p>
-          <a:p>
-            <a:pPr indent="0" marL="0">
-              <a:lnSpc>
-                <a:spcPts val="1500"/>
-              </a:lnSpc>
-              <a:spcAft>
-                <a:spcPts val="900"/>
-              </a:spcAft>
-              <a:buNone/>
-            </a:pPr>
-            <a:r>
-              <a:rPr lang="en-US" sz="1050" dirty="0">
-                <a:solidFill>
-                  <a:srgbClr val="FF4D23"/>
-                </a:solidFill>
-                <a:latin typeface="Arial" pitchFamily="34" charset="0"/>
-                <a:ea typeface="Arial" pitchFamily="34" charset="-122"/>
-                <a:cs typeface="Arial" pitchFamily="34" charset="-120"/>
-              </a:rPr>
-              <a:t>– </a:t>
-            </a:r>
-            <a:pPr indent="0" marL="0">
-              <a:lnSpc>
-                <a:spcPts val="1500"/>
-              </a:lnSpc>
-              <a:spcAft>
-                <a:spcPts val="900"/>
-              </a:spcAft>
-              <a:buNone/>
-            </a:pPr>
-            <a:r>
-              <a:rPr lang="en-US" sz="1050" dirty="0">
-                <a:solidFill>
-                  <a:srgbClr val="333333"/>
-                </a:solidFill>
-                <a:latin typeface="Arial" pitchFamily="34" charset="0"/>
-                <a:ea typeface="Arial" pitchFamily="34" charset="-122"/>
-                <a:cs typeface="Arial" pitchFamily="34" charset="-120"/>
-              </a:rPr>
-              <a:t>Рампа в подземный паркинг — в юго-западной части, уходит под основной корпус; на въезде шлагбаум.</a:t>
-            </a:r>
-            <a:endParaRPr lang="en-US" sz="1050" dirty="0"/>
-          </a:p>
-          <a:p>
-            <a:pPr indent="0" marL="0">
-              <a:lnSpc>
-                <a:spcPts val="1500"/>
-              </a:lnSpc>
-              <a:spcAft>
-                <a:spcPts val="900"/>
-              </a:spcAft>
-              <a:buNone/>
-            </a:pPr>
-            <a:r>
-              <a:rPr lang="en-US" sz="1050" dirty="0">
-                <a:solidFill>
-                  <a:srgbClr val="FF4D23"/>
-                </a:solidFill>
-                <a:latin typeface="Arial" pitchFamily="34" charset="0"/>
-                <a:ea typeface="Arial" pitchFamily="34" charset="-122"/>
-                <a:cs typeface="Arial" pitchFamily="34" charset="-120"/>
-              </a:rPr>
-              <a:t>– </a:t>
-            </a:r>
-            <a:pPr indent="0" marL="0">
-              <a:lnSpc>
-                <a:spcPts val="1500"/>
-              </a:lnSpc>
-              <a:spcAft>
-                <a:spcPts val="900"/>
-              </a:spcAft>
-              <a:buNone/>
-            </a:pPr>
-            <a:r>
-              <a:rPr lang="en-US" sz="1050" dirty="0">
-                <a:solidFill>
-                  <a:srgbClr val="333333"/>
-                </a:solidFill>
-                <a:latin typeface="Arial" pitchFamily="34" charset="0"/>
-                <a:ea typeface="Arial" pitchFamily="34" charset="-122"/>
-                <a:cs typeface="Arial" pitchFamily="34" charset="-120"/>
-              </a:rPr>
-              <a:t>Наземные гостевые места вынесены на западную кромку, вдоль улицы — гостевой транспорт не заезжает во двор.</a:t>
-            </a:r>
-            <a:endParaRPr lang="en-US" sz="1050" dirty="0"/>
-          </a:p>
-          <a:p>
-            <a:pPr indent="0" marL="0">
-              <a:lnSpc>
-                <a:spcPts val="1500"/>
-              </a:lnSpc>
-              <a:spcAft>
-                <a:spcPts val="900"/>
-              </a:spcAft>
-              <a:buNone/>
-            </a:pPr>
-            <a:r>
-              <a:rPr lang="en-US" sz="1050" dirty="0">
-                <a:solidFill>
-                  <a:srgbClr val="FF4D23"/>
-                </a:solidFill>
-                <a:latin typeface="Arial" pitchFamily="34" charset="0"/>
-                <a:ea typeface="Arial" pitchFamily="34" charset="-122"/>
-                <a:cs typeface="Arial" pitchFamily="34" charset="-120"/>
-              </a:rPr>
-              <a:t>– </a:t>
-            </a:r>
-            <a:pPr indent="0" marL="0">
-              <a:lnSpc>
-                <a:spcPts val="1500"/>
-              </a:lnSpc>
-              <a:spcAft>
-                <a:spcPts val="900"/>
-              </a:spcAft>
-              <a:buNone/>
-            </a:pPr>
-            <a:r>
-              <a:rPr lang="en-US" sz="1050" dirty="0">
-                <a:solidFill>
-                  <a:srgbClr val="333333"/>
-                </a:solidFill>
-                <a:latin typeface="Arial" pitchFamily="34" charset="0"/>
-                <a:ea typeface="Arial" pitchFamily="34" charset="-122"/>
-                <a:cs typeface="Arial" pitchFamily="34" charset="-120"/>
-              </a:rPr>
-              <a:t>Кольцевой проезд вокруг застройки: подъезд ко всем входам, разгрузка и проезд пожарной техники.</a:t>
+              <a:t>Вне пятна застройки остаётся 9 058,89 м² — 64,7 % участка. Это площадь под проезды, площадки и озеленение.</a:t>
             </a:r>
             <a:endParaRPr lang="en-US" sz="1050" dirty="0"/>
           </a:p>
@@ -6033,7 +5852,7 @@
         </p:nvSpPr>
         <p:spPr>
           <a:xfrm>
-            <a:off x="502920" y="4206240"/>
+            <a:off x="502920" y="2377440"/>
             <a:ext cx="3794760" cy="7315"/>
           </a:xfrm>
           <a:prstGeom prst="rect">
@@ -6058,8 +5877,8 @@
         </p:nvSpPr>
         <p:spPr>
           <a:xfrm>
-            <a:off x="502920" y="4334256"/>
-            <a:ext cx="3794760" cy="201168"/>
+            <a:off x="502920" y="2560320"/>
+            <a:ext cx="3794760" cy="402336"/>
           </a:xfrm>
           <a:prstGeom prst="rect">
             <a:avLst/>
@@ -6075,7 +5894,21 @@
               <a:buNone/>
             </a:pPr>
             <a:r>
-              <a:rPr lang="en-US" sz="850" spc="30" kern="0" dirty="0">
+              <a:rPr lang="en-US" sz="2600" b="1" dirty="0">
+                <a:solidFill>
+                  <a:srgbClr val="111111"/>
+                </a:solidFill>
+                <a:latin typeface="Arial" pitchFamily="34" charset="0"/>
+                <a:ea typeface="Arial" pitchFamily="34" charset="-122"/>
+                <a:cs typeface="Arial" pitchFamily="34" charset="-120"/>
+              </a:rPr>
+              <a:t>9 058,89</a:t>
+            </a:r>
+            <a:pPr indent="0" marL="0">
+              <a:buNone/>
+            </a:pPr>
+            <a:r>
+              <a:rPr lang="en-US" sz="1100" b="1" dirty="0">
                 <a:solidFill>
                   <a:srgbClr val="FF4D23"/>
                 </a:solidFill>
@@ -6083,9 +5916,9 @@
                 <a:ea typeface="Arial" pitchFamily="34" charset="-122"/>
                 <a:cs typeface="Arial" pitchFamily="34" charset="-120"/>
               </a:rPr>
-              <a:t>МАШИНО-МЕСТА</a:t>
-            </a:r>
-            <a:endParaRPr lang="en-US" sz="850" dirty="0"/>
+              <a:t> м²</a:t>
+            </a:r>
+            <a:endParaRPr lang="en-US" sz="2600" dirty="0"/>
           </a:p>
         </p:txBody>
       </p:sp>
@@ -6097,8 +5930,8 @@
         </p:nvSpPr>
         <p:spPr>
           <a:xfrm>
-            <a:off x="502920" y="4590288"/>
-            <a:ext cx="3794760" cy="777240"/>
+            <a:off x="502920" y="2980944"/>
+            <a:ext cx="3794760" cy="384048"/>
           </a:xfrm>
           <a:prstGeom prst="rect">
             <a:avLst/>
@@ -6112,22 +5945,22 @@
           <a:p>
             <a:pPr indent="0" marL="0">
               <a:lnSpc>
-                <a:spcPts val="1400"/>
+                <a:spcPts val="1100"/>
               </a:lnSpc>
               <a:buNone/>
             </a:pPr>
             <a:r>
-              <a:rPr lang="en-US" sz="1000" dirty="0">
-                <a:solidFill>
-                  <a:srgbClr val="333333"/>
-                </a:solidFill>
-                <a:latin typeface="Arial" pitchFamily="34" charset="0"/>
-                <a:ea typeface="Arial" pitchFamily="34" charset="-122"/>
-                <a:cs typeface="Arial" pitchFamily="34" charset="-120"/>
-              </a:rPr>
-              <a:t>Подземный паркинг под основным корпусом и наземные гостевые места вдоль западной границы. Итоговое количество определяется расчётом по нормативу к утверждённой ёмкости номерного фонда.</a:t>
-            </a:r>
-            <a:endParaRPr lang="en-US" sz="1000" dirty="0"/>
+              <a:rPr lang="en-US" sz="800" spc="30" kern="0" dirty="0">
+                <a:solidFill>
+                  <a:srgbClr val="8A8A8A"/>
+                </a:solidFill>
+                <a:latin typeface="Arial" pitchFamily="34" charset="0"/>
+                <a:ea typeface="Arial" pitchFamily="34" charset="-122"/>
+                <a:cs typeface="Arial" pitchFamily="34" charset="-120"/>
+              </a:rPr>
+              <a:t>ТЕРРИТОРИЯ ВНЕ ПЯТНА ЗАСТРОЙКИ — 64,7 %</a:t>
+            </a:r>
+            <a:endParaRPr lang="en-US" sz="800" dirty="0"/>
           </a:p>
         </p:txBody>
       </p:sp>
@@ -6139,20 +5972,18 @@
         </p:nvSpPr>
         <p:spPr>
           <a:xfrm>
-            <a:off x="502920" y="5440680"/>
-            <a:ext cx="2468880" cy="310896"/>
-          </a:xfrm>
-          <a:prstGeom prst="roundRect">
-            <a:avLst>
-              <a:gd name="adj" fmla="val 17647"/>
-            </a:avLst>
+            <a:off x="502920" y="3566160"/>
+            <a:ext cx="3794760" cy="7315"/>
+          </a:xfrm>
+          <a:prstGeom prst="rect">
+            <a:avLst/>
           </a:prstGeom>
           <a:solidFill>
-            <a:srgbClr val="FFFFFF"/>
+            <a:srgbClr val="DCDCDC"/>
           </a:solidFill>
-          <a:ln w="9525">
+          <a:ln w="12700">
             <a:solidFill>
-              <a:srgbClr val="FF4D23"/>
+              <a:srgbClr val="DCDCDC"/>
             </a:solidFill>
             <a:prstDash val="solid"/>
           </a:ln>
@@ -6166,24 +5997,30 @@
         </p:nvSpPr>
         <p:spPr>
           <a:xfrm>
-            <a:off x="502920" y="5440680"/>
-            <a:ext cx="2468880" cy="310896"/>
-          </a:xfrm>
-          <a:prstGeom prst="rect">
-            <a:avLst/>
-          </a:prstGeom>
-          <a:noFill/>
-          <a:ln/>
-        </p:spPr>
-        <p:txBody>
-          <a:bodyPr wrap="square" lIns="0" tIns="0" rIns="0" bIns="0" rtlCol="0" anchor="ctr"/>
-          <a:lstStyle/>
-          <a:p>
-            <a:pPr algn="ctr" indent="0" marL="0">
-              <a:buNone/>
-            </a:pPr>
-            <a:r>
-              <a:rPr lang="en-US" sz="900" i="1" dirty="0">
+            <a:off x="502920" y="3749040"/>
+            <a:ext cx="3794760" cy="2377440"/>
+          </a:xfrm>
+          <a:prstGeom prst="rect">
+            <a:avLst/>
+          </a:prstGeom>
+          <a:noFill/>
+          <a:ln/>
+        </p:spPr>
+        <p:txBody>
+          <a:bodyPr wrap="square" lIns="0" tIns="0" rIns="0" bIns="0" rtlCol="0" anchor="t"/>
+          <a:lstStyle/>
+          <a:p>
+            <a:pPr indent="0" marL="0">
+              <a:lnSpc>
+                <a:spcPts val="1500"/>
+              </a:lnSpc>
+              <a:spcAft>
+                <a:spcPts val="900"/>
+              </a:spcAft>
+              <a:buNone/>
+            </a:pPr>
+            <a:r>
+              <a:rPr lang="en-US" sz="1050" dirty="0">
                 <a:solidFill>
                   <a:srgbClr val="FF4D23"/>
                 </a:solidFill>
@@ -6191,15 +6028,121 @@
                 <a:ea typeface="Arial" pitchFamily="34" charset="-122"/>
                 <a:cs typeface="Arial" pitchFamily="34" charset="-120"/>
               </a:rPr>
-              <a:t>вписать: ____ машино-мест</a:t>
-            </a:r>
-            <a:endParaRPr lang="en-US" sz="900" dirty="0"/>
+              <a:t>– </a:t>
+            </a:r>
+            <a:pPr indent="0" marL="0">
+              <a:lnSpc>
+                <a:spcPts val="1500"/>
+              </a:lnSpc>
+              <a:spcAft>
+                <a:spcPts val="900"/>
+              </a:spcAft>
+              <a:buNone/>
+            </a:pPr>
+            <a:r>
+              <a:rPr lang="en-US" sz="1050" dirty="0">
+                <a:solidFill>
+                  <a:srgbClr val="333333"/>
+                </a:solidFill>
+                <a:latin typeface="Arial" pitchFamily="34" charset="0"/>
+                <a:ea typeface="Arial" pitchFamily="34" charset="-122"/>
+                <a:cs typeface="Arial" pitchFamily="34" charset="-120"/>
+              </a:rPr>
+              <a:t>Рядовая посадка деревьев по всему периметру: зелёная полоса отделяет застройку от границ участка и улицы.</a:t>
+            </a:r>
+            <a:endParaRPr lang="en-US" sz="1050" dirty="0"/>
+          </a:p>
+          <a:p>
+            <a:pPr indent="0" marL="0">
+              <a:lnSpc>
+                <a:spcPts val="1500"/>
+              </a:lnSpc>
+              <a:spcAft>
+                <a:spcPts val="900"/>
+              </a:spcAft>
+              <a:buNone/>
+            </a:pPr>
+            <a:r>
+              <a:rPr lang="en-US" sz="1050" dirty="0">
+                <a:solidFill>
+                  <a:srgbClr val="FF4D23"/>
+                </a:solidFill>
+                <a:latin typeface="Arial" pitchFamily="34" charset="0"/>
+                <a:ea typeface="Arial" pitchFamily="34" charset="-122"/>
+                <a:cs typeface="Arial" pitchFamily="34" charset="-120"/>
+              </a:rPr>
+              <a:t>– </a:t>
+            </a:r>
+            <a:pPr indent="0" marL="0">
+              <a:lnSpc>
+                <a:spcPts val="1500"/>
+              </a:lnSpc>
+              <a:spcAft>
+                <a:spcPts val="900"/>
+              </a:spcAft>
+              <a:buNone/>
+            </a:pPr>
+            <a:r>
+              <a:rPr lang="en-US" sz="1050" dirty="0">
+                <a:solidFill>
+                  <a:srgbClr val="333333"/>
+                </a:solidFill>
+                <a:latin typeface="Arial" pitchFamily="34" charset="0"/>
+                <a:ea typeface="Arial" pitchFamily="34" charset="-122"/>
+                <a:cs typeface="Arial" pitchFamily="34" charset="-120"/>
+              </a:rPr>
+              <a:t>Внутренний двор между корпусами — защищённое от улицы пространство отдыха.</a:t>
+            </a:r>
+            <a:endParaRPr lang="en-US" sz="1050" dirty="0"/>
+          </a:p>
+          <a:p>
+            <a:pPr indent="0" marL="0">
+              <a:lnSpc>
+                <a:spcPts val="1500"/>
+              </a:lnSpc>
+              <a:spcAft>
+                <a:spcPts val="900"/>
+              </a:spcAft>
+              <a:buNone/>
+            </a:pPr>
+            <a:r>
+              <a:rPr lang="en-US" sz="1050" dirty="0">
+                <a:solidFill>
+                  <a:srgbClr val="FF4D23"/>
+                </a:solidFill>
+                <a:latin typeface="Arial" pitchFamily="34" charset="0"/>
+                <a:ea typeface="Arial" pitchFamily="34" charset="-122"/>
+                <a:cs typeface="Arial" pitchFamily="34" charset="-120"/>
+              </a:rPr>
+              <a:t>– </a:t>
+            </a:r>
+            <a:pPr indent="0" marL="0">
+              <a:lnSpc>
+                <a:spcPts val="1500"/>
+              </a:lnSpc>
+              <a:spcAft>
+                <a:spcPts val="900"/>
+              </a:spcAft>
+              <a:buNone/>
+            </a:pPr>
+            <a:r>
+              <a:rPr lang="en-US" sz="1050" dirty="0">
+                <a:solidFill>
+                  <a:srgbClr val="333333"/>
+                </a:solidFill>
+                <a:latin typeface="Arial" pitchFamily="34" charset="0"/>
+                <a:ea typeface="Arial" pitchFamily="34" charset="-122"/>
+                <a:cs typeface="Arial" pitchFamily="34" charset="-120"/>
+              </a:rPr>
+              <a:t>Озеленение на террасах продолжает партер вверх по фасаду.</a:t>
+            </a:r>
+            <a:endParaRPr lang="en-US" sz="1050" dirty="0"/>
           </a:p>
         </p:txBody>
       </p:sp>
       <p:pic>
         <p:nvPicPr>
-          <p:cNvPr id="12" name="Image 0" descr="/tmp/claude-0/-home-user-most/9fc1ec31-3c64-5a82-aadb-ddb23fff6e53/scratchpad/assets/plan_transport.jpg">    </p:cNvPr>
+          <p:cNvPr id="12" name="Image 0" descr="/tmp/claude-0/-home-user-most/9fc1ec31-3c64-5a82-aadb-ddb23fff6e53/scratchpad/assets/plan_green.jpg">    </p:cNvPr>
           <p:cNvPicPr>
             <a:picLocks noChangeAspect="1"/>
           </p:cNvPicPr>
@@ -6254,7 +6197,7 @@
                 <a:ea typeface="Arial" pitchFamily="34" charset="-122"/>
                 <a:cs typeface="Arial" pitchFamily="34" charset="-120"/>
               </a:rPr>
-              <a:t>Юго-западный узел: рампа в подземный паркинг под корпусом и ряд наземных гостевых мест вдоль улицы.</a:t>
+              <a:t>Зелёная полоса между кольцевым проездом и границей участка.</a:t>
             </a:r>
             <a:endParaRPr lang="en-US" sz="800" dirty="0"/>
           </a:p>
@@ -6388,7 +6331,7 @@
                 <a:ea typeface="Arial" pitchFamily="34" charset="-122"/>
                 <a:cs typeface="Arial" pitchFamily="34" charset="-120"/>
               </a:rPr>
-              <a:t>РЕГЛАМЕНТЫ</a:t>
+              <a:t>ТРАНСПОРТ</a:t>
             </a:r>
             <a:endParaRPr lang="en-US" sz="950" dirty="0"/>
           </a:p>
@@ -6427,7 +6370,7 @@
                 <a:ea typeface="Arial" pitchFamily="34" charset="-122"/>
                 <a:cs typeface="Arial" pitchFamily="34" charset="-120"/>
               </a:rPr>
-              <a:t>Статус проработки</a:t>
+              <a:t>Въезды, проезды и хранение автомобилей</a:t>
             </a:r>
             <a:endParaRPr lang="en-US" sz="900" dirty="0"/>
           </a:p>
@@ -6466,7 +6409,7 @@
                 <a:ea typeface="Arial" pitchFamily="34" charset="-122"/>
                 <a:cs typeface="Arial" pitchFamily="34" charset="-120"/>
               </a:rPr>
-              <a:t>НОРМЫ</a:t>
+              <a:t>УЗЕЛ ВЪЕЗДА</a:t>
             </a:r>
             <a:endParaRPr lang="en-US" sz="950" dirty="0"/>
           </a:p>
@@ -6480,8 +6423,8 @@
         </p:nvSpPr>
         <p:spPr>
           <a:xfrm>
-            <a:off x="502920" y="1051560"/>
-            <a:ext cx="5394960" cy="256032"/>
+            <a:off x="502920" y="960120"/>
+            <a:ext cx="3794760" cy="256032"/>
           </a:xfrm>
           <a:prstGeom prst="rect">
             <a:avLst/>
@@ -6497,7 +6440,7 @@
               <a:buNone/>
             </a:pPr>
             <a:r>
-              <a:rPr lang="en-US" sz="1200" b="1" spc="30" kern="0" dirty="0">
+              <a:rPr lang="en-US" sz="1300" b="1" spc="30" kern="0" dirty="0">
                 <a:solidFill>
                   <a:srgbClr val="FF4D23"/>
                 </a:solidFill>
@@ -6505,47 +6448,22 @@
                 <a:ea typeface="Arial" pitchFamily="34" charset="-122"/>
                 <a:cs typeface="Arial" pitchFamily="34" charset="-120"/>
               </a:rPr>
-              <a:t>ПОДТВЕРЖДЕНО ГЕНПЛАНОМ</a:t>
-            </a:r>
-            <a:endParaRPr lang="en-US" sz="1200" dirty="0"/>
-          </a:p>
-        </p:txBody>
-      </p:sp>
-      <p:sp>
-        <p:nvSpPr>
-          <p:cNvPr id="6" name="Shape 4"/>
-          <p:cNvSpPr/>
-          <p:nvPr/>
-        </p:nvSpPr>
-        <p:spPr>
-          <a:xfrm>
-            <a:off x="502920" y="1417320"/>
-            <a:ext cx="5394960" cy="7315"/>
-          </a:xfrm>
-          <a:prstGeom prst="rect">
-            <a:avLst/>
-          </a:prstGeom>
-          <a:solidFill>
-            <a:srgbClr val="111111"/>
-          </a:solidFill>
-          <a:ln w="12700">
-            <a:solidFill>
-              <a:srgbClr val="111111"/>
-            </a:solidFill>
-            <a:prstDash val="solid"/>
-          </a:ln>
-        </p:spPr>
-      </p:sp>
-      <p:sp>
-        <p:nvSpPr>
-          <p:cNvPr id="7" name="Text 5"/>
-          <p:cNvSpPr txBox="1"/>
-          <p:nvPr/>
-        </p:nvSpPr>
-        <p:spPr>
-          <a:xfrm>
-            <a:off x="502920" y="1627632"/>
-            <a:ext cx="5394960" cy="4206240"/>
+              <a:t>ОБСЛУЖИВАНИЕ УЧАСТКА</a:t>
+            </a:r>
+            <a:endParaRPr lang="en-US" sz="1300" dirty="0"/>
+          </a:p>
+        </p:txBody>
+      </p:sp>
+      <p:sp>
+        <p:nvSpPr>
+          <p:cNvPr id="6" name="Text 4"/>
+          <p:cNvSpPr txBox="1"/>
+          <p:nvPr/>
+        </p:nvSpPr>
+        <p:spPr>
+          <a:xfrm>
+            <a:off x="502920" y="1371600"/>
+            <a:ext cx="3794760" cy="2743200"/>
           </a:xfrm>
           <a:prstGeom prst="rect">
             <a:avLst/>
@@ -6562,7 +6480,7 @@
                 <a:spcPts val="1500"/>
               </a:lnSpc>
               <a:spcAft>
-                <a:spcPts val="1100"/>
+                <a:spcPts val="900"/>
               </a:spcAft>
               <a:buNone/>
             </a:pPr>
@@ -6582,7 +6500,7 @@
                 <a:spcPts val="1500"/>
               </a:lnSpc>
               <a:spcAft>
-                <a:spcPts val="1100"/>
+                <a:spcPts val="900"/>
               </a:spcAft>
               <a:buNone/>
             </a:pPr>
@@ -6595,7 +6513,7 @@
                 <a:ea typeface="Arial" pitchFamily="34" charset="-122"/>
                 <a:cs typeface="Arial" pitchFamily="34" charset="-120"/>
               </a:rPr>
-              <a:t>Отступы от границ участка: 6,00 м с запада и юга, 3,00 м с северо-востока, 17,49 м с востока — вынесены на чертёж.</a:t>
+              <a:t>Два узла въезда: северо-восточный со стороны ул. Бухтарминской и юго-западный со стороны внутриквартального проезда. Оба вынесены от перекрёстка.</a:t>
             </a:r>
             <a:endParaRPr lang="en-US" sz="1050" dirty="0"/>
           </a:p>
@@ -6605,7 +6523,7 @@
                 <a:spcPts val="1500"/>
               </a:lnSpc>
               <a:spcAft>
-                <a:spcPts val="1100"/>
+                <a:spcPts val="900"/>
               </a:spcAft>
               <a:buNone/>
             </a:pPr>
@@ -6625,7 +6543,7 @@
                 <a:spcPts val="1500"/>
               </a:lnSpc>
               <a:spcAft>
-                <a:spcPts val="1100"/>
+                <a:spcPts val="900"/>
               </a:spcAft>
               <a:buNone/>
             </a:pPr>
@@ -6638,7 +6556,7 @@
                 <a:ea typeface="Arial" pitchFamily="34" charset="-122"/>
                 <a:cs typeface="Arial" pitchFamily="34" charset="-120"/>
               </a:rPr>
-              <a:t>Этажность: 5 этажей по обоим корпусам, без превышения высотных отметок соседней застройки.</a:t>
+              <a:t>Рампа в подземный паркинг — в юго-западной части, уходит под основной корпус; на въезде шлагбаум.</a:t>
             </a:r>
             <a:endParaRPr lang="en-US" sz="1050" dirty="0"/>
           </a:p>
@@ -6648,7 +6566,7 @@
                 <a:spcPts val="1500"/>
               </a:lnSpc>
               <a:spcAft>
-                <a:spcPts val="1100"/>
+                <a:spcPts val="900"/>
               </a:spcAft>
               <a:buNone/>
             </a:pPr>
@@ -6668,7 +6586,7 @@
                 <a:spcPts val="1500"/>
               </a:lnSpc>
               <a:spcAft>
-                <a:spcPts val="1100"/>
+                <a:spcPts val="900"/>
               </a:spcAft>
               <a:buNone/>
             </a:pPr>
@@ -6681,7 +6599,7 @@
                 <a:ea typeface="Arial" pitchFamily="34" charset="-122"/>
                 <a:cs typeface="Arial" pitchFamily="34" charset="-120"/>
               </a:rPr>
-              <a:t>Пожарный проезд: замкнутый кольцевой проезд вокруг пятна застройки.</a:t>
+              <a:t>Наземные гостевые места вынесены на западную кромку, вдоль улицы — гостевой транспорт не заезжает во двор.</a:t>
             </a:r>
             <a:endParaRPr lang="en-US" sz="1050" dirty="0"/>
           </a:p>
@@ -6691,7 +6609,7 @@
                 <a:spcPts val="1500"/>
               </a:lnSpc>
               <a:spcAft>
-                <a:spcPts val="1100"/>
+                <a:spcPts val="900"/>
               </a:spcAft>
               <a:buNone/>
             </a:pPr>
@@ -6711,7 +6629,7 @@
                 <a:spcPts val="1500"/>
               </a:lnSpc>
               <a:spcAft>
-                <a:spcPts val="1100"/>
+                <a:spcPts val="900"/>
               </a:spcAft>
               <a:buNone/>
             </a:pPr>
@@ -6724,366 +6642,22 @@
                 <a:ea typeface="Arial" pitchFamily="34" charset="-122"/>
                 <a:cs typeface="Arial" pitchFamily="34" charset="-120"/>
               </a:rPr>
-              <a:t>Плотность застройки: 35,3 % участка, коэффициент использования территории 1,22.</a:t>
+              <a:t>Кольцевой проезд вокруг застройки: подъезд ко всем входам, разгрузка и проезд пожарной техники.</a:t>
             </a:r>
             <a:endParaRPr lang="en-US" sz="1050" dirty="0"/>
           </a:p>
-          <a:p>
-            <a:pPr indent="0" marL="0">
-              <a:lnSpc>
-                <a:spcPts val="1500"/>
-              </a:lnSpc>
-              <a:spcAft>
-                <a:spcPts val="1100"/>
-              </a:spcAft>
-              <a:buNone/>
-            </a:pPr>
-            <a:r>
-              <a:rPr lang="en-US" sz="1050" dirty="0">
-                <a:solidFill>
-                  <a:srgbClr val="FF4D23"/>
-                </a:solidFill>
-                <a:latin typeface="Arial" pitchFamily="34" charset="0"/>
-                <a:ea typeface="Arial" pitchFamily="34" charset="-122"/>
-                <a:cs typeface="Arial" pitchFamily="34" charset="-120"/>
-              </a:rPr>
-              <a:t>– </a:t>
-            </a:r>
-            <a:pPr indent="0" marL="0">
-              <a:lnSpc>
-                <a:spcPts val="1500"/>
-              </a:lnSpc>
-              <a:spcAft>
-                <a:spcPts val="1100"/>
-              </a:spcAft>
-              <a:buNone/>
-            </a:pPr>
-            <a:r>
-              <a:rPr lang="en-US" sz="1050" dirty="0">
-                <a:solidFill>
-                  <a:srgbClr val="333333"/>
-                </a:solidFill>
-                <a:latin typeface="Arial" pitchFamily="34" charset="0"/>
-                <a:ea typeface="Arial" pitchFamily="34" charset="-122"/>
-                <a:cs typeface="Arial" pitchFamily="34" charset="-120"/>
-              </a:rPr>
-              <a:t>Озеленение: рядовая посадка деревьев по всему периметру участка.</a:t>
-            </a:r>
-            <a:endParaRPr lang="en-US" sz="1050" dirty="0"/>
-          </a:p>
-        </p:txBody>
-      </p:sp>
-      <p:sp>
-        <p:nvSpPr>
-          <p:cNvPr id="8" name="Text 6"/>
-          <p:cNvSpPr txBox="1"/>
-          <p:nvPr/>
-        </p:nvSpPr>
-        <p:spPr>
-          <a:xfrm>
-            <a:off x="6766560" y="1051560"/>
-            <a:ext cx="5394960" cy="256032"/>
-          </a:xfrm>
-          <a:prstGeom prst="rect">
-            <a:avLst/>
-          </a:prstGeom>
-          <a:noFill/>
-          <a:ln/>
-        </p:spPr>
-        <p:txBody>
-          <a:bodyPr wrap="square" lIns="0" tIns="0" rIns="0" bIns="0" rtlCol="0" anchor="ctr"/>
-          <a:lstStyle/>
-          <a:p>
-            <a:pPr indent="0" marL="0">
-              <a:buNone/>
-            </a:pPr>
-            <a:r>
-              <a:rPr lang="en-US" sz="1200" b="1" spc="30" kern="0" dirty="0">
-                <a:solidFill>
-                  <a:srgbClr val="FF4D23"/>
-                </a:solidFill>
-                <a:latin typeface="Arial" pitchFamily="34" charset="0"/>
-                <a:ea typeface="Arial" pitchFamily="34" charset="-122"/>
-                <a:cs typeface="Arial" pitchFamily="34" charset="-120"/>
-              </a:rPr>
-              <a:t>УТОЧНЯЕТСЯ НА СТАДИИ ЭП И ПСД</a:t>
-            </a:r>
-            <a:endParaRPr lang="en-US" sz="1200" dirty="0"/>
-          </a:p>
-        </p:txBody>
-      </p:sp>
-      <p:sp>
-        <p:nvSpPr>
-          <p:cNvPr id="9" name="Shape 7"/>
+        </p:txBody>
+      </p:sp>
+      <p:sp>
+        <p:nvSpPr>
+          <p:cNvPr id="7" name="Shape 5"/>
           <p:cNvSpPr/>
           <p:nvPr/>
         </p:nvSpPr>
         <p:spPr>
           <a:xfrm>
-            <a:off x="6766560" y="1417320"/>
-            <a:ext cx="5394960" cy="7315"/>
-          </a:xfrm>
-          <a:prstGeom prst="rect">
-            <a:avLst/>
-          </a:prstGeom>
-          <a:solidFill>
-            <a:srgbClr val="111111"/>
-          </a:solidFill>
-          <a:ln w="12700">
-            <a:solidFill>
-              <a:srgbClr val="111111"/>
-            </a:solidFill>
-            <a:prstDash val="solid"/>
-          </a:ln>
-        </p:spPr>
-      </p:sp>
-      <p:sp>
-        <p:nvSpPr>
-          <p:cNvPr id="10" name="Text 8"/>
-          <p:cNvSpPr txBox="1"/>
-          <p:nvPr/>
-        </p:nvSpPr>
-        <p:spPr>
-          <a:xfrm>
-            <a:off x="6766560" y="1627632"/>
-            <a:ext cx="5394960" cy="4206240"/>
-          </a:xfrm>
-          <a:prstGeom prst="rect">
-            <a:avLst/>
-          </a:prstGeom>
-          <a:noFill/>
-          <a:ln/>
-        </p:spPr>
-        <p:txBody>
-          <a:bodyPr wrap="square" lIns="0" tIns="0" rIns="0" bIns="0" rtlCol="0" anchor="t"/>
-          <a:lstStyle/>
-          <a:p>
-            <a:pPr indent="0" marL="0">
-              <a:lnSpc>
-                <a:spcPts val="1500"/>
-              </a:lnSpc>
-              <a:spcAft>
-                <a:spcPts val="1100"/>
-              </a:spcAft>
-              <a:buNone/>
-            </a:pPr>
-            <a:r>
-              <a:rPr lang="en-US" sz="1050" dirty="0">
-                <a:solidFill>
-                  <a:srgbClr val="FF4D23"/>
-                </a:solidFill>
-                <a:latin typeface="Arial" pitchFamily="34" charset="0"/>
-                <a:ea typeface="Arial" pitchFamily="34" charset="-122"/>
-                <a:cs typeface="Arial" pitchFamily="34" charset="-120"/>
-              </a:rPr>
-              <a:t>– </a:t>
-            </a:r>
-            <a:pPr indent="0" marL="0">
-              <a:lnSpc>
-                <a:spcPts val="1500"/>
-              </a:lnSpc>
-              <a:spcAft>
-                <a:spcPts val="1100"/>
-              </a:spcAft>
-              <a:buNone/>
-            </a:pPr>
-            <a:r>
-              <a:rPr lang="en-US" sz="1050" dirty="0">
-                <a:solidFill>
-                  <a:srgbClr val="333333"/>
-                </a:solidFill>
-                <a:latin typeface="Arial" pitchFamily="34" charset="0"/>
-                <a:ea typeface="Arial" pitchFamily="34" charset="-122"/>
-                <a:cs typeface="Arial" pitchFamily="34" charset="-120"/>
-              </a:rPr>
-              <a:t>Расчёт машино-мест по нормативу для гостиниц, от утверждённой ёмкости номерного фонда.</a:t>
-            </a:r>
-            <a:endParaRPr lang="en-US" sz="1050" dirty="0"/>
-          </a:p>
-          <a:p>
-            <a:pPr indent="0" marL="0">
-              <a:lnSpc>
-                <a:spcPts val="1500"/>
-              </a:lnSpc>
-              <a:spcAft>
-                <a:spcPts val="1100"/>
-              </a:spcAft>
-              <a:buNone/>
-            </a:pPr>
-            <a:r>
-              <a:rPr lang="en-US" sz="1050" dirty="0">
-                <a:solidFill>
-                  <a:srgbClr val="FF4D23"/>
-                </a:solidFill>
-                <a:latin typeface="Arial" pitchFamily="34" charset="0"/>
-                <a:ea typeface="Arial" pitchFamily="34" charset="-122"/>
-                <a:cs typeface="Arial" pitchFamily="34" charset="-120"/>
-              </a:rPr>
-              <a:t>– </a:t>
-            </a:r>
-            <a:pPr indent="0" marL="0">
-              <a:lnSpc>
-                <a:spcPts val="1500"/>
-              </a:lnSpc>
-              <a:spcAft>
-                <a:spcPts val="1100"/>
-              </a:spcAft>
-              <a:buNone/>
-            </a:pPr>
-            <a:r>
-              <a:rPr lang="en-US" sz="1050" dirty="0">
-                <a:solidFill>
-                  <a:srgbClr val="333333"/>
-                </a:solidFill>
-                <a:latin typeface="Arial" pitchFamily="34" charset="0"/>
-                <a:ea typeface="Arial" pitchFamily="34" charset="-122"/>
-                <a:cs typeface="Arial" pitchFamily="34" charset="-120"/>
-              </a:rPr>
-              <a:t>Баланс территории раздельно: озеленение, покрытия, проезды, площадки.</a:t>
-            </a:r>
-            <a:endParaRPr lang="en-US" sz="1050" dirty="0"/>
-          </a:p>
-          <a:p>
-            <a:pPr indent="0" marL="0">
-              <a:lnSpc>
-                <a:spcPts val="1500"/>
-              </a:lnSpc>
-              <a:spcAft>
-                <a:spcPts val="1100"/>
-              </a:spcAft>
-              <a:buNone/>
-            </a:pPr>
-            <a:r>
-              <a:rPr lang="en-US" sz="1050" dirty="0">
-                <a:solidFill>
-                  <a:srgbClr val="FF4D23"/>
-                </a:solidFill>
-                <a:latin typeface="Arial" pitchFamily="34" charset="0"/>
-                <a:ea typeface="Arial" pitchFamily="34" charset="-122"/>
-                <a:cs typeface="Arial" pitchFamily="34" charset="-120"/>
-              </a:rPr>
-              <a:t>– </a:t>
-            </a:r>
-            <a:pPr indent="0" marL="0">
-              <a:lnSpc>
-                <a:spcPts val="1500"/>
-              </a:lnSpc>
-              <a:spcAft>
-                <a:spcPts val="1100"/>
-              </a:spcAft>
-              <a:buNone/>
-            </a:pPr>
-            <a:r>
-              <a:rPr lang="en-US" sz="1050" dirty="0">
-                <a:solidFill>
-                  <a:srgbClr val="333333"/>
-                </a:solidFill>
-                <a:latin typeface="Arial" pitchFamily="34" charset="0"/>
-                <a:ea typeface="Arial" pitchFamily="34" charset="-122"/>
-                <a:cs typeface="Arial" pitchFamily="34" charset="-120"/>
-              </a:rPr>
-              <a:t>Инженерное обеспечение: технические условия на воду, канализацию, тепло и электроснабжение.</a:t>
-            </a:r>
-            <a:endParaRPr lang="en-US" sz="1050" dirty="0"/>
-          </a:p>
-          <a:p>
-            <a:pPr indent="0" marL="0">
-              <a:lnSpc>
-                <a:spcPts val="1500"/>
-              </a:lnSpc>
-              <a:spcAft>
-                <a:spcPts val="1100"/>
-              </a:spcAft>
-              <a:buNone/>
-            </a:pPr>
-            <a:r>
-              <a:rPr lang="en-US" sz="1050" dirty="0">
-                <a:solidFill>
-                  <a:srgbClr val="FF4D23"/>
-                </a:solidFill>
-                <a:latin typeface="Arial" pitchFamily="34" charset="0"/>
-                <a:ea typeface="Arial" pitchFamily="34" charset="-122"/>
-                <a:cs typeface="Arial" pitchFamily="34" charset="-120"/>
-              </a:rPr>
-              <a:t>– </a:t>
-            </a:r>
-            <a:pPr indent="0" marL="0">
-              <a:lnSpc>
-                <a:spcPts val="1500"/>
-              </a:lnSpc>
-              <a:spcAft>
-                <a:spcPts val="1100"/>
-              </a:spcAft>
-              <a:buNone/>
-            </a:pPr>
-            <a:r>
-              <a:rPr lang="en-US" sz="1050" dirty="0">
-                <a:solidFill>
-                  <a:srgbClr val="333333"/>
-                </a:solidFill>
-                <a:latin typeface="Arial" pitchFamily="34" charset="0"/>
-                <a:ea typeface="Arial" pitchFamily="34" charset="-122"/>
-                <a:cs typeface="Arial" pitchFamily="34" charset="-120"/>
-              </a:rPr>
-              <a:t>Расчёты инсоляции и шума по отношению к смежным землепользованиям.</a:t>
-            </a:r>
-            <a:endParaRPr lang="en-US" sz="1050" dirty="0"/>
-          </a:p>
-          <a:p>
-            <a:pPr indent="0" marL="0">
-              <a:lnSpc>
-                <a:spcPts val="1500"/>
-              </a:lnSpc>
-              <a:spcAft>
-                <a:spcPts val="1100"/>
-              </a:spcAft>
-              <a:buNone/>
-            </a:pPr>
-            <a:r>
-              <a:rPr lang="en-US" sz="1050" dirty="0">
-                <a:solidFill>
-                  <a:srgbClr val="FF4D23"/>
-                </a:solidFill>
-                <a:latin typeface="Arial" pitchFamily="34" charset="0"/>
-                <a:ea typeface="Arial" pitchFamily="34" charset="-122"/>
-                <a:cs typeface="Arial" pitchFamily="34" charset="-120"/>
-              </a:rPr>
-              <a:t>– </a:t>
-            </a:r>
-            <a:pPr indent="0" marL="0">
-              <a:lnSpc>
-                <a:spcPts val="1500"/>
-              </a:lnSpc>
-              <a:spcAft>
-                <a:spcPts val="1100"/>
-              </a:spcAft>
-              <a:buNone/>
-            </a:pPr>
-            <a:r>
-              <a:rPr lang="en-US" sz="1050" dirty="0">
-                <a:solidFill>
-                  <a:srgbClr val="333333"/>
-                </a:solidFill>
-                <a:latin typeface="Arial" pitchFamily="34" charset="0"/>
-                <a:ea typeface="Arial" pitchFamily="34" charset="-122"/>
-                <a:cs typeface="Arial" pitchFamily="34" charset="-120"/>
-              </a:rPr>
-              <a:t>Планировочные решения этажей и итоговая ёмкость номерного фонда.</a:t>
-            </a:r>
-            <a:endParaRPr lang="en-US" sz="1050" dirty="0"/>
-          </a:p>
-        </p:txBody>
-      </p:sp>
-      <p:sp>
-        <p:nvSpPr>
-          <p:cNvPr id="11" name="Shape 9"/>
-          <p:cNvSpPr/>
-          <p:nvPr/>
-        </p:nvSpPr>
-        <p:spPr>
-          <a:xfrm>
-            <a:off x="502920" y="4892040"/>
-            <a:ext cx="11183112" cy="7315"/>
+            <a:off x="502920" y="4206240"/>
+            <a:ext cx="3794760" cy="7315"/>
           </a:xfrm>
           <a:prstGeom prst="rect">
             <a:avLst/>
@@ -7101,14 +6675,14 @@
       </p:sp>
       <p:sp>
         <p:nvSpPr>
-          <p:cNvPr id="12" name="Text 10"/>
-          <p:cNvSpPr txBox="1"/>
-          <p:nvPr/>
-        </p:nvSpPr>
-        <p:spPr>
-          <a:xfrm>
-            <a:off x="502920" y="5029200"/>
-            <a:ext cx="5486400" cy="201168"/>
+          <p:cNvPr id="8" name="Text 6"/>
+          <p:cNvSpPr txBox="1"/>
+          <p:nvPr/>
+        </p:nvSpPr>
+        <p:spPr>
+          <a:xfrm>
+            <a:off x="502920" y="4334256"/>
+            <a:ext cx="3794760" cy="201168"/>
           </a:xfrm>
           <a:prstGeom prst="rect">
             <a:avLst/>
@@ -7132,7 +6706,7 @@
                 <a:ea typeface="Arial" pitchFamily="34" charset="-122"/>
                 <a:cs typeface="Arial" pitchFamily="34" charset="-120"/>
               </a:rPr>
-              <a:t>ПОКАЗАТЕЛИ, ПРОВЕРЯЕМЫЕ ГРАДОСТРОИТЕЛЬНЫМ СОВЕТОМ</a:t>
+              <a:t>МАШИНО-МЕСТА</a:t>
             </a:r>
             <a:endParaRPr lang="en-US" sz="850" dirty="0"/>
           </a:p>
@@ -7140,14 +6714,83 @@
       </p:sp>
       <p:sp>
         <p:nvSpPr>
-          <p:cNvPr id="13" name="Text 11"/>
-          <p:cNvSpPr txBox="1"/>
-          <p:nvPr/>
-        </p:nvSpPr>
-        <p:spPr>
-          <a:xfrm>
-            <a:off x="502920" y="5349240"/>
-            <a:ext cx="2521458" cy="402336"/>
+          <p:cNvPr id="9" name="Text 7"/>
+          <p:cNvSpPr txBox="1"/>
+          <p:nvPr/>
+        </p:nvSpPr>
+        <p:spPr>
+          <a:xfrm>
+            <a:off x="502920" y="4590288"/>
+            <a:ext cx="3794760" cy="777240"/>
+          </a:xfrm>
+          <a:prstGeom prst="rect">
+            <a:avLst/>
+          </a:prstGeom>
+          <a:noFill/>
+          <a:ln/>
+        </p:spPr>
+        <p:txBody>
+          <a:bodyPr wrap="square" lIns="0" tIns="0" rIns="0" bIns="0" rtlCol="0" anchor="t"/>
+          <a:lstStyle/>
+          <a:p>
+            <a:pPr indent="0" marL="0">
+              <a:lnSpc>
+                <a:spcPts val="1400"/>
+              </a:lnSpc>
+              <a:buNone/>
+            </a:pPr>
+            <a:r>
+              <a:rPr lang="en-US" sz="1000" dirty="0">
+                <a:solidFill>
+                  <a:srgbClr val="333333"/>
+                </a:solidFill>
+                <a:latin typeface="Arial" pitchFamily="34" charset="0"/>
+                <a:ea typeface="Arial" pitchFamily="34" charset="-122"/>
+                <a:cs typeface="Arial" pitchFamily="34" charset="-120"/>
+              </a:rPr>
+              <a:t>Подземный паркинг под основным корпусом и наземные гостевые места вдоль западной границы. Итоговое количество определяется расчётом по нормативу к утверждённой ёмкости номерного фонда.</a:t>
+            </a:r>
+            <a:endParaRPr lang="en-US" sz="1000" dirty="0"/>
+          </a:p>
+        </p:txBody>
+      </p:sp>
+      <p:sp>
+        <p:nvSpPr>
+          <p:cNvPr id="10" name="Shape 8"/>
+          <p:cNvSpPr/>
+          <p:nvPr/>
+        </p:nvSpPr>
+        <p:spPr>
+          <a:xfrm>
+            <a:off x="502920" y="5440680"/>
+            <a:ext cx="2468880" cy="310896"/>
+          </a:xfrm>
+          <a:prstGeom prst="roundRect">
+            <a:avLst>
+              <a:gd name="adj" fmla="val 17647"/>
+            </a:avLst>
+          </a:prstGeom>
+          <a:solidFill>
+            <a:srgbClr val="FFFFFF"/>
+          </a:solidFill>
+          <a:ln w="9525">
+            <a:solidFill>
+              <a:srgbClr val="FF4D23"/>
+            </a:solidFill>
+            <a:prstDash val="solid"/>
+          </a:ln>
+        </p:spPr>
+      </p:sp>
+      <p:sp>
+        <p:nvSpPr>
+          <p:cNvPr id="11" name="Text 9"/>
+          <p:cNvSpPr txBox="1"/>
+          <p:nvPr/>
+        </p:nvSpPr>
+        <p:spPr>
+          <a:xfrm>
+            <a:off x="502920" y="5440680"/>
+            <a:ext cx="2468880" cy="310896"/>
           </a:xfrm>
           <a:prstGeom prst="rect">
             <a:avLst/>
@@ -7159,25 +6802,11 @@
           <a:bodyPr wrap="square" lIns="0" tIns="0" rIns="0" bIns="0" rtlCol="0" anchor="ctr"/>
           <a:lstStyle/>
           <a:p>
-            <a:pPr indent="0" marL="0">
-              <a:buNone/>
-            </a:pPr>
-            <a:r>
-              <a:rPr lang="en-US" sz="2200" b="1" dirty="0">
-                <a:solidFill>
-                  <a:srgbClr val="111111"/>
-                </a:solidFill>
-                <a:latin typeface="Arial" pitchFamily="34" charset="0"/>
-                <a:ea typeface="Arial" pitchFamily="34" charset="-122"/>
-                <a:cs typeface="Arial" pitchFamily="34" charset="-120"/>
-              </a:rPr>
-              <a:t>5</a:t>
-            </a:r>
-            <a:pPr indent="0" marL="0">
-              <a:buNone/>
-            </a:pPr>
-            <a:r>
-              <a:rPr lang="en-US" sz="1100" b="1" dirty="0">
+            <a:pPr algn="ctr" indent="0" marL="0">
+              <a:buNone/>
+            </a:pPr>
+            <a:r>
+              <a:rPr lang="en-US" sz="900" i="1" dirty="0">
                 <a:solidFill>
                   <a:srgbClr val="FF4D23"/>
                 </a:solidFill>
@@ -7185,331 +6814,15 @@
                 <a:ea typeface="Arial" pitchFamily="34" charset="-122"/>
                 <a:cs typeface="Arial" pitchFamily="34" charset="-120"/>
               </a:rPr>
-              <a:t> этажей</a:t>
-            </a:r>
-            <a:endParaRPr lang="en-US" sz="2200" dirty="0"/>
-          </a:p>
-        </p:txBody>
-      </p:sp>
-      <p:sp>
-        <p:nvSpPr>
-          <p:cNvPr id="14" name="Text 12"/>
-          <p:cNvSpPr txBox="1"/>
-          <p:nvPr/>
-        </p:nvSpPr>
-        <p:spPr>
-          <a:xfrm>
-            <a:off x="502920" y="5769864"/>
-            <a:ext cx="2521458" cy="384048"/>
-          </a:xfrm>
-          <a:prstGeom prst="rect">
-            <a:avLst/>
-          </a:prstGeom>
-          <a:noFill/>
-          <a:ln/>
-        </p:spPr>
-        <p:txBody>
-          <a:bodyPr wrap="square" lIns="0" tIns="0" rIns="0" bIns="0" rtlCol="0" anchor="t"/>
-          <a:lstStyle/>
-          <a:p>
-            <a:pPr indent="0" marL="0">
-              <a:lnSpc>
-                <a:spcPts val="1100"/>
-              </a:lnSpc>
-              <a:buNone/>
-            </a:pPr>
-            <a:r>
-              <a:rPr lang="en-US" sz="800" spc="30" kern="0" dirty="0">
-                <a:solidFill>
-                  <a:srgbClr val="8A8A8A"/>
-                </a:solidFill>
-                <a:latin typeface="Arial" pitchFamily="34" charset="0"/>
-                <a:ea typeface="Arial" pitchFamily="34" charset="-122"/>
-                <a:cs typeface="Arial" pitchFamily="34" charset="-120"/>
-              </a:rPr>
-              <a:t>ЭТАЖНОСТЬ ОБОИХ КОРПУСОВ</a:t>
-            </a:r>
-            <a:endParaRPr lang="en-US" sz="800" dirty="0"/>
-          </a:p>
-        </p:txBody>
-      </p:sp>
-      <p:sp>
-        <p:nvSpPr>
-          <p:cNvPr id="15" name="Text 13"/>
-          <p:cNvSpPr txBox="1"/>
-          <p:nvPr/>
-        </p:nvSpPr>
-        <p:spPr>
-          <a:xfrm>
-            <a:off x="3298698" y="5349240"/>
-            <a:ext cx="2521458" cy="402336"/>
-          </a:xfrm>
-          <a:prstGeom prst="rect">
-            <a:avLst/>
-          </a:prstGeom>
-          <a:noFill/>
-          <a:ln/>
-        </p:spPr>
-        <p:txBody>
-          <a:bodyPr wrap="square" lIns="0" tIns="0" rIns="0" bIns="0" rtlCol="0" anchor="ctr"/>
-          <a:lstStyle/>
-          <a:p>
-            <a:pPr indent="0" marL="0">
-              <a:buNone/>
-            </a:pPr>
-            <a:r>
-              <a:rPr lang="en-US" sz="2200" b="1" dirty="0">
-                <a:solidFill>
-                  <a:srgbClr val="111111"/>
-                </a:solidFill>
-                <a:latin typeface="Arial" pitchFamily="34" charset="0"/>
-                <a:ea typeface="Arial" pitchFamily="34" charset="-122"/>
-                <a:cs typeface="Arial" pitchFamily="34" charset="-120"/>
-              </a:rPr>
-              <a:t>35,3</a:t>
-            </a:r>
-            <a:pPr indent="0" marL="0">
-              <a:buNone/>
-            </a:pPr>
-            <a:r>
-              <a:rPr lang="en-US" sz="1100" b="1" dirty="0">
-                <a:solidFill>
-                  <a:srgbClr val="FF4D23"/>
-                </a:solidFill>
-                <a:latin typeface="Arial" pitchFamily="34" charset="0"/>
-                <a:ea typeface="Arial" pitchFamily="34" charset="-122"/>
-                <a:cs typeface="Arial" pitchFamily="34" charset="-120"/>
-              </a:rPr>
-              <a:t> %</a:t>
-            </a:r>
-            <a:endParaRPr lang="en-US" sz="2200" dirty="0"/>
-          </a:p>
-        </p:txBody>
-      </p:sp>
-      <p:sp>
-        <p:nvSpPr>
-          <p:cNvPr id="16" name="Text 14"/>
-          <p:cNvSpPr txBox="1"/>
-          <p:nvPr/>
-        </p:nvSpPr>
-        <p:spPr>
-          <a:xfrm>
-            <a:off x="3298698" y="5769864"/>
-            <a:ext cx="2521458" cy="384048"/>
-          </a:xfrm>
-          <a:prstGeom prst="rect">
-            <a:avLst/>
-          </a:prstGeom>
-          <a:noFill/>
-          <a:ln/>
-        </p:spPr>
-        <p:txBody>
-          <a:bodyPr wrap="square" lIns="0" tIns="0" rIns="0" bIns="0" rtlCol="0" anchor="t"/>
-          <a:lstStyle/>
-          <a:p>
-            <a:pPr indent="0" marL="0">
-              <a:lnSpc>
-                <a:spcPts val="1100"/>
-              </a:lnSpc>
-              <a:buNone/>
-            </a:pPr>
-            <a:r>
-              <a:rPr lang="en-US" sz="800" spc="30" kern="0" dirty="0">
-                <a:solidFill>
-                  <a:srgbClr val="8A8A8A"/>
-                </a:solidFill>
-                <a:latin typeface="Arial" pitchFamily="34" charset="0"/>
-                <a:ea typeface="Arial" pitchFamily="34" charset="-122"/>
-                <a:cs typeface="Arial" pitchFamily="34" charset="-120"/>
-              </a:rPr>
-              <a:t>КОЭФФИЦИЕНТ ЗАСТРОЙКИ</a:t>
-            </a:r>
-            <a:endParaRPr lang="en-US" sz="800" dirty="0"/>
-          </a:p>
-        </p:txBody>
-      </p:sp>
-      <p:sp>
-        <p:nvSpPr>
-          <p:cNvPr id="17" name="Text 15"/>
-          <p:cNvSpPr txBox="1"/>
-          <p:nvPr/>
-        </p:nvSpPr>
-        <p:spPr>
-          <a:xfrm>
-            <a:off x="6094476" y="5349240"/>
-            <a:ext cx="2521458" cy="402336"/>
-          </a:xfrm>
-          <a:prstGeom prst="rect">
-            <a:avLst/>
-          </a:prstGeom>
-          <a:noFill/>
-          <a:ln/>
-        </p:spPr>
-        <p:txBody>
-          <a:bodyPr wrap="square" lIns="0" tIns="0" rIns="0" bIns="0" rtlCol="0" anchor="ctr"/>
-          <a:lstStyle/>
-          <a:p>
-            <a:pPr indent="0" marL="0">
-              <a:buNone/>
-            </a:pPr>
-            <a:r>
-              <a:rPr lang="en-US" sz="2200" b="1" dirty="0">
-                <a:solidFill>
-                  <a:srgbClr val="111111"/>
-                </a:solidFill>
-                <a:latin typeface="Arial" pitchFamily="34" charset="0"/>
-                <a:ea typeface="Arial" pitchFamily="34" charset="-122"/>
-                <a:cs typeface="Arial" pitchFamily="34" charset="-120"/>
-              </a:rPr>
-              <a:t>1,22</a:t>
-            </a:r>
-            <a:pPr indent="0" marL="0">
-              <a:buNone/>
-            </a:pPr>
-            <a:endParaRPr lang="en-US" sz="2200" dirty="0"/>
-          </a:p>
-        </p:txBody>
-      </p:sp>
-      <p:sp>
-        <p:nvSpPr>
-          <p:cNvPr id="18" name="Text 16"/>
-          <p:cNvSpPr txBox="1"/>
-          <p:nvPr/>
-        </p:nvSpPr>
-        <p:spPr>
-          <a:xfrm>
-            <a:off x="6094476" y="5769864"/>
-            <a:ext cx="2521458" cy="384048"/>
-          </a:xfrm>
-          <a:prstGeom prst="rect">
-            <a:avLst/>
-          </a:prstGeom>
-          <a:noFill/>
-          <a:ln/>
-        </p:spPr>
-        <p:txBody>
-          <a:bodyPr wrap="square" lIns="0" tIns="0" rIns="0" bIns="0" rtlCol="0" anchor="t"/>
-          <a:lstStyle/>
-          <a:p>
-            <a:pPr indent="0" marL="0">
-              <a:lnSpc>
-                <a:spcPts val="1100"/>
-              </a:lnSpc>
-              <a:buNone/>
-            </a:pPr>
-            <a:r>
-              <a:rPr lang="en-US" sz="800" spc="30" kern="0" dirty="0">
-                <a:solidFill>
-                  <a:srgbClr val="8A8A8A"/>
-                </a:solidFill>
-                <a:latin typeface="Arial" pitchFamily="34" charset="0"/>
-                <a:ea typeface="Arial" pitchFamily="34" charset="-122"/>
-                <a:cs typeface="Arial" pitchFamily="34" charset="-120"/>
-              </a:rPr>
-              <a:t>КОЭФФИЦИЕНТ ИСПОЛЬЗОВАНИЯ ТЕРРИТОРИИ</a:t>
-            </a:r>
-            <a:endParaRPr lang="en-US" sz="800" dirty="0"/>
-          </a:p>
-        </p:txBody>
-      </p:sp>
-      <p:sp>
-        <p:nvSpPr>
-          <p:cNvPr id="19" name="Text 17"/>
-          <p:cNvSpPr txBox="1"/>
-          <p:nvPr/>
-        </p:nvSpPr>
-        <p:spPr>
-          <a:xfrm>
-            <a:off x="8890254" y="5349240"/>
-            <a:ext cx="2521458" cy="402336"/>
-          </a:xfrm>
-          <a:prstGeom prst="rect">
-            <a:avLst/>
-          </a:prstGeom>
-          <a:noFill/>
-          <a:ln/>
-        </p:spPr>
-        <p:txBody>
-          <a:bodyPr wrap="square" lIns="0" tIns="0" rIns="0" bIns="0" rtlCol="0" anchor="ctr"/>
-          <a:lstStyle/>
-          <a:p>
-            <a:pPr indent="0" marL="0">
-              <a:buNone/>
-            </a:pPr>
-            <a:r>
-              <a:rPr lang="en-US" sz="2200" b="1" dirty="0">
-                <a:solidFill>
-                  <a:srgbClr val="111111"/>
-                </a:solidFill>
-                <a:latin typeface="Arial" pitchFamily="34" charset="0"/>
-                <a:ea typeface="Arial" pitchFamily="34" charset="-122"/>
-                <a:cs typeface="Arial" pitchFamily="34" charset="-120"/>
-              </a:rPr>
-              <a:t>64,7</a:t>
-            </a:r>
-            <a:pPr indent="0" marL="0">
-              <a:buNone/>
-            </a:pPr>
-            <a:r>
-              <a:rPr lang="en-US" sz="1100" b="1" dirty="0">
-                <a:solidFill>
-                  <a:srgbClr val="FF4D23"/>
-                </a:solidFill>
-                <a:latin typeface="Arial" pitchFamily="34" charset="0"/>
-                <a:ea typeface="Arial" pitchFamily="34" charset="-122"/>
-                <a:cs typeface="Arial" pitchFamily="34" charset="-120"/>
-              </a:rPr>
-              <a:t> %</a:t>
-            </a:r>
-            <a:endParaRPr lang="en-US" sz="2200" dirty="0"/>
-          </a:p>
-        </p:txBody>
-      </p:sp>
-      <p:sp>
-        <p:nvSpPr>
-          <p:cNvPr id="20" name="Text 18"/>
-          <p:cNvSpPr txBox="1"/>
-          <p:nvPr/>
-        </p:nvSpPr>
-        <p:spPr>
-          <a:xfrm>
-            <a:off x="8890254" y="5769864"/>
-            <a:ext cx="2521458" cy="384048"/>
-          </a:xfrm>
-          <a:prstGeom prst="rect">
-            <a:avLst/>
-          </a:prstGeom>
-          <a:noFill/>
-          <a:ln/>
-        </p:spPr>
-        <p:txBody>
-          <a:bodyPr wrap="square" lIns="0" tIns="0" rIns="0" bIns="0" rtlCol="0" anchor="t"/>
-          <a:lstStyle/>
-          <a:p>
-            <a:pPr indent="0" marL="0">
-              <a:lnSpc>
-                <a:spcPts val="1100"/>
-              </a:lnSpc>
-              <a:buNone/>
-            </a:pPr>
-            <a:r>
-              <a:rPr lang="en-US" sz="800" spc="30" kern="0" dirty="0">
-                <a:solidFill>
-                  <a:srgbClr val="8A8A8A"/>
-                </a:solidFill>
-                <a:latin typeface="Arial" pitchFamily="34" charset="0"/>
-                <a:ea typeface="Arial" pitchFamily="34" charset="-122"/>
-                <a:cs typeface="Arial" pitchFamily="34" charset="-120"/>
-              </a:rPr>
-              <a:t>СВОБОДНО ОТ ЗАСТРОЙКИ</a:t>
-            </a:r>
-            <a:endParaRPr lang="en-US" sz="800" dirty="0"/>
+              <a:t>вписать: ____ машино-мест</a:t>
+            </a:r>
+            <a:endParaRPr lang="en-US" sz="900" dirty="0"/>
           </a:p>
         </p:txBody>
       </p:sp>
       <p:pic>
         <p:nvPicPr>
-          <p:cNvPr id="21" name="Image 0" descr="/tmp/claude-0/-home-user-most/9fc1ec31-3c64-5a82-aadb-ddb23fff6e53/scratchpad/assets/logo_most.png">    </p:cNvPr>
+          <p:cNvPr id="12" name="Image 0" descr="/tmp/claude-0/-home-user-most/9fc1ec31-3c64-5a82-aadb-ddb23fff6e53/scratchpad/assets/plan_transport.jpg">    </p:cNvPr>
           <p:cNvPicPr>
             <a:picLocks noChangeAspect="1"/>
           </p:cNvPicPr>
@@ -7523,6 +6836,69 @@
         </p:blipFill>
         <p:spPr>
           <a:xfrm>
+            <a:off x="4709160" y="960120"/>
+            <a:ext cx="6949440" cy="4636008"/>
+          </a:xfrm>
+          <a:prstGeom prst="rect">
+            <a:avLst/>
+          </a:prstGeom>
+        </p:spPr>
+      </p:pic>
+      <p:sp>
+        <p:nvSpPr>
+          <p:cNvPr id="13" name="Text 10"/>
+          <p:cNvSpPr txBox="1"/>
+          <p:nvPr/>
+        </p:nvSpPr>
+        <p:spPr>
+          <a:xfrm>
+            <a:off x="4709160" y="5669280"/>
+            <a:ext cx="6949440" cy="219456"/>
+          </a:xfrm>
+          <a:prstGeom prst="rect">
+            <a:avLst/>
+          </a:prstGeom>
+          <a:noFill/>
+          <a:ln/>
+        </p:spPr>
+        <p:txBody>
+          <a:bodyPr wrap="square" lIns="0" tIns="0" rIns="0" bIns="0" rtlCol="0" anchor="ctr"/>
+          <a:lstStyle/>
+          <a:p>
+            <a:pPr indent="0" marL="0">
+              <a:buNone/>
+            </a:pPr>
+            <a:r>
+              <a:rPr lang="en-US" sz="800" dirty="0">
+                <a:solidFill>
+                  <a:srgbClr val="8A8A8A"/>
+                </a:solidFill>
+                <a:latin typeface="Arial" pitchFamily="34" charset="0"/>
+                <a:ea typeface="Arial" pitchFamily="34" charset="-122"/>
+                <a:cs typeface="Arial" pitchFamily="34" charset="-120"/>
+              </a:rPr>
+              <a:t>Юго-западный узел: рампа в подземный паркинг под корпусом и ряд наземных гостевых мест вдоль улицы.</a:t>
+            </a:r>
+            <a:endParaRPr lang="en-US" sz="800" dirty="0"/>
+          </a:p>
+        </p:txBody>
+      </p:sp>
+      <p:pic>
+        <p:nvPicPr>
+          <p:cNvPr id="14" name="Image 1" descr="/tmp/claude-0/-home-user-most/9fc1ec31-3c64-5a82-aadb-ddb23fff6e53/scratchpad/assets/logo_most.png">    </p:cNvPr>
+          <p:cNvPicPr>
+            <a:picLocks noChangeAspect="1"/>
+          </p:cNvPicPr>
+          <p:nvPr/>
+        </p:nvPicPr>
+        <p:blipFill>
+          <a:blip r:embed="rId2"/>
+          <a:stretch>
+            <a:fillRect/>
+          </a:stretch>
+        </p:blipFill>
+        <p:spPr>
+          <a:xfrm>
             <a:off x="11356848" y="5925312"/>
             <a:ext cx="630936" cy="704088"/>
           </a:xfrm>
@@ -7533,7 +6909,7 @@
       </p:pic>
       <p:sp>
         <p:nvSpPr>
-          <p:cNvPr id="22" name="Text 19"/>
+          <p:cNvPr id="15" name="Text 11"/>
           <p:cNvSpPr txBox="1"/>
           <p:nvPr/>
         </p:nvSpPr>
@@ -7635,7 +7011,7 @@
                 <a:ea typeface="Arial" pitchFamily="34" charset="-122"/>
                 <a:cs typeface="Arial" pitchFamily="34" charset="-120"/>
               </a:rPr>
-              <a:t>ЭФФЕКТ</a:t>
+              <a:t>РЕГЛАМЕНТЫ</a:t>
             </a:r>
             <a:endParaRPr lang="en-US" sz="950" dirty="0"/>
           </a:p>
@@ -7674,7 +7050,7 @@
                 <a:ea typeface="Arial" pitchFamily="34" charset="-122"/>
                 <a:cs typeface="Arial" pitchFamily="34" charset="-120"/>
               </a:rPr>
-              <a:t>Социально-экономический эффект</a:t>
+              <a:t>Статус проработки</a:t>
             </a:r>
             <a:endParaRPr lang="en-US" sz="900" dirty="0"/>
           </a:p>
@@ -7713,7 +7089,7 @@
                 <a:ea typeface="Arial" pitchFamily="34" charset="-122"/>
                 <a:cs typeface="Arial" pitchFamily="34" charset="-120"/>
               </a:rPr>
-              <a:t>ДЛЯ ГОРОДА</a:t>
+              <a:t>НОРМЫ</a:t>
             </a:r>
             <a:endParaRPr lang="en-US" sz="950" dirty="0"/>
           </a:p>
@@ -7728,7 +7104,7 @@
         <p:spPr>
           <a:xfrm>
             <a:off x="502920" y="1051560"/>
-            <a:ext cx="3383280" cy="402336"/>
+            <a:ext cx="5394960" cy="256032"/>
           </a:xfrm>
           <a:prstGeom prst="rect">
             <a:avLst/>
@@ -7744,33 +7120,55 @@
               <a:buNone/>
             </a:pPr>
             <a:r>
-              <a:rPr lang="en-US" sz="2400" b="1" dirty="0">
-                <a:solidFill>
-                  <a:srgbClr val="111111"/>
-                </a:solidFill>
-                <a:latin typeface="Arial" pitchFamily="34" charset="0"/>
-                <a:ea typeface="Arial" pitchFamily="34" charset="-122"/>
-                <a:cs typeface="Arial" pitchFamily="34" charset="-120"/>
-              </a:rPr>
-              <a:t>260 – 300</a:t>
-            </a:r>
-            <a:pPr indent="0" marL="0">
-              <a:buNone/>
-            </a:pPr>
-            <a:endParaRPr lang="en-US" sz="2400" dirty="0"/>
-          </a:p>
-        </p:txBody>
-      </p:sp>
-      <p:sp>
-        <p:nvSpPr>
-          <p:cNvPr id="6" name="Text 4"/>
-          <p:cNvSpPr txBox="1"/>
-          <p:nvPr/>
-        </p:nvSpPr>
-        <p:spPr>
-          <a:xfrm>
-            <a:off x="502920" y="1472184"/>
-            <a:ext cx="3383280" cy="457200"/>
+              <a:rPr lang="en-US" sz="1200" b="1" spc="30" kern="0" dirty="0">
+                <a:solidFill>
+                  <a:srgbClr val="FF4D23"/>
+                </a:solidFill>
+                <a:latin typeface="Arial" pitchFamily="34" charset="0"/>
+                <a:ea typeface="Arial" pitchFamily="34" charset="-122"/>
+                <a:cs typeface="Arial" pitchFamily="34" charset="-120"/>
+              </a:rPr>
+              <a:t>ПОДТВЕРЖДЕНО ГЕНПЛАНОМ</a:t>
+            </a:r>
+            <a:endParaRPr lang="en-US" sz="1200" dirty="0"/>
+          </a:p>
+        </p:txBody>
+      </p:sp>
+      <p:sp>
+        <p:nvSpPr>
+          <p:cNvPr id="6" name="Shape 4"/>
+          <p:cNvSpPr/>
+          <p:nvPr/>
+        </p:nvSpPr>
+        <p:spPr>
+          <a:xfrm>
+            <a:off x="502920" y="1417320"/>
+            <a:ext cx="5394960" cy="7315"/>
+          </a:xfrm>
+          <a:prstGeom prst="rect">
+            <a:avLst/>
+          </a:prstGeom>
+          <a:solidFill>
+            <a:srgbClr val="111111"/>
+          </a:solidFill>
+          <a:ln w="12700">
+            <a:solidFill>
+              <a:srgbClr val="111111"/>
+            </a:solidFill>
+            <a:prstDash val="solid"/>
+          </a:ln>
+        </p:spPr>
+      </p:sp>
+      <p:sp>
+        <p:nvSpPr>
+          <p:cNvPr id="7" name="Text 5"/>
+          <p:cNvSpPr txBox="1"/>
+          <p:nvPr/>
+        </p:nvSpPr>
+        <p:spPr>
+          <a:xfrm>
+            <a:off x="502920" y="1627632"/>
+            <a:ext cx="5394960" cy="4206240"/>
           </a:xfrm>
           <a:prstGeom prst="rect">
             <a:avLst/>
@@ -7784,35 +7182,230 @@
           <a:p>
             <a:pPr indent="0" marL="0">
               <a:lnSpc>
+                <a:spcPts val="1500"/>
+              </a:lnSpc>
+              <a:spcAft>
                 <a:spcPts val="1100"/>
+              </a:spcAft>
+              <a:buNone/>
+            </a:pPr>
+            <a:r>
+              <a:rPr lang="en-US" sz="1050" dirty="0">
+                <a:solidFill>
+                  <a:srgbClr val="FF4D23"/>
+                </a:solidFill>
+                <a:latin typeface="Arial" pitchFamily="34" charset="0"/>
+                <a:ea typeface="Arial" pitchFamily="34" charset="-122"/>
+                <a:cs typeface="Arial" pitchFamily="34" charset="-120"/>
+              </a:rPr>
+              <a:t>– </a:t>
+            </a:r>
+            <a:pPr indent="0" marL="0">
+              <a:lnSpc>
+                <a:spcPts val="1500"/>
               </a:lnSpc>
-              <a:buNone/>
-            </a:pPr>
-            <a:r>
-              <a:rPr lang="en-US" sz="800" spc="30" kern="0" dirty="0">
-                <a:solidFill>
-                  <a:srgbClr val="8A8A8A"/>
-                </a:solidFill>
-                <a:latin typeface="Arial" pitchFamily="34" charset="0"/>
-                <a:ea typeface="Arial" pitchFamily="34" charset="-122"/>
-                <a:cs typeface="Arial" pitchFamily="34" charset="-120"/>
-              </a:rPr>
-              <a:t>НОМЕРОВ 4 ЗВЕЗДЫ К ФОНДУ АЛМАТЫ (ОЦЕНКА)</a:t>
-            </a:r>
-            <a:endParaRPr lang="en-US" sz="800" dirty="0"/>
-          </a:p>
-        </p:txBody>
-      </p:sp>
-      <p:sp>
-        <p:nvSpPr>
-          <p:cNvPr id="7" name="Text 5"/>
-          <p:cNvSpPr txBox="1"/>
-          <p:nvPr/>
-        </p:nvSpPr>
-        <p:spPr>
-          <a:xfrm>
-            <a:off x="4160520" y="1051560"/>
-            <a:ext cx="3383280" cy="402336"/>
+              <a:spcAft>
+                <a:spcPts val="1100"/>
+              </a:spcAft>
+              <a:buNone/>
+            </a:pPr>
+            <a:r>
+              <a:rPr lang="en-US" sz="1050" dirty="0">
+                <a:solidFill>
+                  <a:srgbClr val="333333"/>
+                </a:solidFill>
+                <a:latin typeface="Arial" pitchFamily="34" charset="0"/>
+                <a:ea typeface="Arial" pitchFamily="34" charset="-122"/>
+                <a:cs typeface="Arial" pitchFamily="34" charset="-120"/>
+              </a:rPr>
+              <a:t>Отступы от границ участка: 6,00 м с запада и юга, 3,00 м с северо-востока, 17,49 м с востока — вынесены на чертёж.</a:t>
+            </a:r>
+            <a:endParaRPr lang="en-US" sz="1050" dirty="0"/>
+          </a:p>
+          <a:p>
+            <a:pPr indent="0" marL="0">
+              <a:lnSpc>
+                <a:spcPts val="1500"/>
+              </a:lnSpc>
+              <a:spcAft>
+                <a:spcPts val="1100"/>
+              </a:spcAft>
+              <a:buNone/>
+            </a:pPr>
+            <a:r>
+              <a:rPr lang="en-US" sz="1050" dirty="0">
+                <a:solidFill>
+                  <a:srgbClr val="FF4D23"/>
+                </a:solidFill>
+                <a:latin typeface="Arial" pitchFamily="34" charset="0"/>
+                <a:ea typeface="Arial" pitchFamily="34" charset="-122"/>
+                <a:cs typeface="Arial" pitchFamily="34" charset="-120"/>
+              </a:rPr>
+              <a:t>– </a:t>
+            </a:r>
+            <a:pPr indent="0" marL="0">
+              <a:lnSpc>
+                <a:spcPts val="1500"/>
+              </a:lnSpc>
+              <a:spcAft>
+                <a:spcPts val="1100"/>
+              </a:spcAft>
+              <a:buNone/>
+            </a:pPr>
+            <a:r>
+              <a:rPr lang="en-US" sz="1050" dirty="0">
+                <a:solidFill>
+                  <a:srgbClr val="333333"/>
+                </a:solidFill>
+                <a:latin typeface="Arial" pitchFamily="34" charset="0"/>
+                <a:ea typeface="Arial" pitchFamily="34" charset="-122"/>
+                <a:cs typeface="Arial" pitchFamily="34" charset="-120"/>
+              </a:rPr>
+              <a:t>Этажность: 5 этажей по обоим корпусам, без превышения высотных отметок соседней застройки.</a:t>
+            </a:r>
+            <a:endParaRPr lang="en-US" sz="1050" dirty="0"/>
+          </a:p>
+          <a:p>
+            <a:pPr indent="0" marL="0">
+              <a:lnSpc>
+                <a:spcPts val="1500"/>
+              </a:lnSpc>
+              <a:spcAft>
+                <a:spcPts val="1100"/>
+              </a:spcAft>
+              <a:buNone/>
+            </a:pPr>
+            <a:r>
+              <a:rPr lang="en-US" sz="1050" dirty="0">
+                <a:solidFill>
+                  <a:srgbClr val="FF4D23"/>
+                </a:solidFill>
+                <a:latin typeface="Arial" pitchFamily="34" charset="0"/>
+                <a:ea typeface="Arial" pitchFamily="34" charset="-122"/>
+                <a:cs typeface="Arial" pitchFamily="34" charset="-120"/>
+              </a:rPr>
+              <a:t>– </a:t>
+            </a:r>
+            <a:pPr indent="0" marL="0">
+              <a:lnSpc>
+                <a:spcPts val="1500"/>
+              </a:lnSpc>
+              <a:spcAft>
+                <a:spcPts val="1100"/>
+              </a:spcAft>
+              <a:buNone/>
+            </a:pPr>
+            <a:r>
+              <a:rPr lang="en-US" sz="1050" dirty="0">
+                <a:solidFill>
+                  <a:srgbClr val="333333"/>
+                </a:solidFill>
+                <a:latin typeface="Arial" pitchFamily="34" charset="0"/>
+                <a:ea typeface="Arial" pitchFamily="34" charset="-122"/>
+                <a:cs typeface="Arial" pitchFamily="34" charset="-120"/>
+              </a:rPr>
+              <a:t>Пожарный проезд: замкнутый кольцевой проезд вокруг пятна застройки.</a:t>
+            </a:r>
+            <a:endParaRPr lang="en-US" sz="1050" dirty="0"/>
+          </a:p>
+          <a:p>
+            <a:pPr indent="0" marL="0">
+              <a:lnSpc>
+                <a:spcPts val="1500"/>
+              </a:lnSpc>
+              <a:spcAft>
+                <a:spcPts val="1100"/>
+              </a:spcAft>
+              <a:buNone/>
+            </a:pPr>
+            <a:r>
+              <a:rPr lang="en-US" sz="1050" dirty="0">
+                <a:solidFill>
+                  <a:srgbClr val="FF4D23"/>
+                </a:solidFill>
+                <a:latin typeface="Arial" pitchFamily="34" charset="0"/>
+                <a:ea typeface="Arial" pitchFamily="34" charset="-122"/>
+                <a:cs typeface="Arial" pitchFamily="34" charset="-120"/>
+              </a:rPr>
+              <a:t>– </a:t>
+            </a:r>
+            <a:pPr indent="0" marL="0">
+              <a:lnSpc>
+                <a:spcPts val="1500"/>
+              </a:lnSpc>
+              <a:spcAft>
+                <a:spcPts val="1100"/>
+              </a:spcAft>
+              <a:buNone/>
+            </a:pPr>
+            <a:r>
+              <a:rPr lang="en-US" sz="1050" dirty="0">
+                <a:solidFill>
+                  <a:srgbClr val="333333"/>
+                </a:solidFill>
+                <a:latin typeface="Arial" pitchFamily="34" charset="0"/>
+                <a:ea typeface="Arial" pitchFamily="34" charset="-122"/>
+                <a:cs typeface="Arial" pitchFamily="34" charset="-120"/>
+              </a:rPr>
+              <a:t>Плотность застройки: 35,3 % участка, коэффициент использования территории 1,22.</a:t>
+            </a:r>
+            <a:endParaRPr lang="en-US" sz="1050" dirty="0"/>
+          </a:p>
+          <a:p>
+            <a:pPr indent="0" marL="0">
+              <a:lnSpc>
+                <a:spcPts val="1500"/>
+              </a:lnSpc>
+              <a:spcAft>
+                <a:spcPts val="1100"/>
+              </a:spcAft>
+              <a:buNone/>
+            </a:pPr>
+            <a:r>
+              <a:rPr lang="en-US" sz="1050" dirty="0">
+                <a:solidFill>
+                  <a:srgbClr val="FF4D23"/>
+                </a:solidFill>
+                <a:latin typeface="Arial" pitchFamily="34" charset="0"/>
+                <a:ea typeface="Arial" pitchFamily="34" charset="-122"/>
+                <a:cs typeface="Arial" pitchFamily="34" charset="-120"/>
+              </a:rPr>
+              <a:t>– </a:t>
+            </a:r>
+            <a:pPr indent="0" marL="0">
+              <a:lnSpc>
+                <a:spcPts val="1500"/>
+              </a:lnSpc>
+              <a:spcAft>
+                <a:spcPts val="1100"/>
+              </a:spcAft>
+              <a:buNone/>
+            </a:pPr>
+            <a:r>
+              <a:rPr lang="en-US" sz="1050" dirty="0">
+                <a:solidFill>
+                  <a:srgbClr val="333333"/>
+                </a:solidFill>
+                <a:latin typeface="Arial" pitchFamily="34" charset="0"/>
+                <a:ea typeface="Arial" pitchFamily="34" charset="-122"/>
+                <a:cs typeface="Arial" pitchFamily="34" charset="-120"/>
+              </a:rPr>
+              <a:t>Озеленение: рядовая посадка деревьев по всему периметру участка.</a:t>
+            </a:r>
+            <a:endParaRPr lang="en-US" sz="1050" dirty="0"/>
+          </a:p>
+        </p:txBody>
+      </p:sp>
+      <p:sp>
+        <p:nvSpPr>
+          <p:cNvPr id="8" name="Text 6"/>
+          <p:cNvSpPr txBox="1"/>
+          <p:nvPr/>
+        </p:nvSpPr>
+        <p:spPr>
+          <a:xfrm>
+            <a:off x="6766560" y="1051560"/>
+            <a:ext cx="5394960" cy="256032"/>
           </a:xfrm>
           <a:prstGeom prst="rect">
             <a:avLst/>
@@ -7828,33 +7421,55 @@
               <a:buNone/>
             </a:pPr>
             <a:r>
-              <a:rPr lang="en-US" sz="2400" b="1" dirty="0">
-                <a:solidFill>
-                  <a:srgbClr val="111111"/>
-                </a:solidFill>
-                <a:latin typeface="Arial" pitchFamily="34" charset="0"/>
-                <a:ea typeface="Arial" pitchFamily="34" charset="-122"/>
-                <a:cs typeface="Arial" pitchFamily="34" charset="-120"/>
-              </a:rPr>
-              <a:t>160 – 210</a:t>
-            </a:r>
-            <a:pPr indent="0" marL="0">
-              <a:buNone/>
-            </a:pPr>
-            <a:endParaRPr lang="en-US" sz="2400" dirty="0"/>
-          </a:p>
-        </p:txBody>
-      </p:sp>
-      <p:sp>
-        <p:nvSpPr>
-          <p:cNvPr id="8" name="Text 6"/>
-          <p:cNvSpPr txBox="1"/>
-          <p:nvPr/>
-        </p:nvSpPr>
-        <p:spPr>
-          <a:xfrm>
-            <a:off x="4160520" y="1472184"/>
-            <a:ext cx="3383280" cy="457200"/>
+              <a:rPr lang="en-US" sz="1200" b="1" spc="30" kern="0" dirty="0">
+                <a:solidFill>
+                  <a:srgbClr val="FF4D23"/>
+                </a:solidFill>
+                <a:latin typeface="Arial" pitchFamily="34" charset="0"/>
+                <a:ea typeface="Arial" pitchFamily="34" charset="-122"/>
+                <a:cs typeface="Arial" pitchFamily="34" charset="-120"/>
+              </a:rPr>
+              <a:t>УТОЧНЯЕТСЯ НА СТАДИИ ЭП И ПСД</a:t>
+            </a:r>
+            <a:endParaRPr lang="en-US" sz="1200" dirty="0"/>
+          </a:p>
+        </p:txBody>
+      </p:sp>
+      <p:sp>
+        <p:nvSpPr>
+          <p:cNvPr id="9" name="Shape 7"/>
+          <p:cNvSpPr/>
+          <p:nvPr/>
+        </p:nvSpPr>
+        <p:spPr>
+          <a:xfrm>
+            <a:off x="6766560" y="1417320"/>
+            <a:ext cx="5394960" cy="7315"/>
+          </a:xfrm>
+          <a:prstGeom prst="rect">
+            <a:avLst/>
+          </a:prstGeom>
+          <a:solidFill>
+            <a:srgbClr val="111111"/>
+          </a:solidFill>
+          <a:ln w="12700">
+            <a:solidFill>
+              <a:srgbClr val="111111"/>
+            </a:solidFill>
+            <a:prstDash val="solid"/>
+          </a:ln>
+        </p:spPr>
+      </p:sp>
+      <p:sp>
+        <p:nvSpPr>
+          <p:cNvPr id="10" name="Text 8"/>
+          <p:cNvSpPr txBox="1"/>
+          <p:nvPr/>
+        </p:nvSpPr>
+        <p:spPr>
+          <a:xfrm>
+            <a:off x="6766560" y="1627632"/>
+            <a:ext cx="5394960" cy="4206240"/>
           </a:xfrm>
           <a:prstGeom prst="rect">
             <a:avLst/>
@@ -7868,65 +7483,15 @@
           <a:p>
             <a:pPr indent="0" marL="0">
               <a:lnSpc>
-                <a:spcPts val="1100"/>
+                <a:spcPts val="1500"/>
               </a:lnSpc>
-              <a:buNone/>
-            </a:pPr>
-            <a:r>
-              <a:rPr lang="en-US" sz="800" spc="30" kern="0" dirty="0">
-                <a:solidFill>
-                  <a:srgbClr val="8A8A8A"/>
-                </a:solidFill>
-                <a:latin typeface="Arial" pitchFamily="34" charset="0"/>
-                <a:ea typeface="Arial" pitchFamily="34" charset="-122"/>
-                <a:cs typeface="Arial" pitchFamily="34" charset="-120"/>
-              </a:rPr>
-              <a:t>ПОСТОЯННЫХ РАБОЧИХ МЕСТ В ГОСТИНИЦЕ (ОЦЕНКА)</a:t>
-            </a:r>
-            <a:endParaRPr lang="en-US" sz="800" dirty="0"/>
-          </a:p>
-        </p:txBody>
-      </p:sp>
-      <p:sp>
-        <p:nvSpPr>
-          <p:cNvPr id="9" name="Text 7"/>
-          <p:cNvSpPr txBox="1"/>
-          <p:nvPr/>
-        </p:nvSpPr>
-        <p:spPr>
-          <a:xfrm>
-            <a:off x="7818120" y="1051560"/>
-            <a:ext cx="3383280" cy="402336"/>
-          </a:xfrm>
-          <a:prstGeom prst="rect">
-            <a:avLst/>
-          </a:prstGeom>
-          <a:noFill/>
-          <a:ln/>
-        </p:spPr>
-        <p:txBody>
-          <a:bodyPr wrap="square" lIns="0" tIns="0" rIns="0" bIns="0" rtlCol="0" anchor="ctr"/>
-          <a:lstStyle/>
-          <a:p>
-            <a:pPr indent="0" marL="0">
-              <a:buNone/>
-            </a:pPr>
-            <a:r>
-              <a:rPr lang="en-US" sz="2400" b="1" dirty="0">
-                <a:solidFill>
-                  <a:srgbClr val="111111"/>
-                </a:solidFill>
-                <a:latin typeface="Arial" pitchFamily="34" charset="0"/>
-                <a:ea typeface="Arial" pitchFamily="34" charset="-122"/>
-                <a:cs typeface="Arial" pitchFamily="34" charset="-120"/>
-              </a:rPr>
-              <a:t>17 140</a:t>
-            </a:r>
-            <a:pPr indent="0" marL="0">
-              <a:buNone/>
-            </a:pPr>
-            <a:r>
-              <a:rPr lang="en-US" sz="1100" b="1" dirty="0">
+              <a:spcAft>
+                <a:spcPts val="900"/>
+              </a:spcAft>
+              <a:buNone/>
+            </a:pPr>
+            <a:r>
+              <a:rPr lang="en-US" sz="1050" dirty="0">
                 <a:solidFill>
                   <a:srgbClr val="FF4D23"/>
                 </a:solidFill>
@@ -7934,51 +7499,244 @@
                 <a:ea typeface="Arial" pitchFamily="34" charset="-122"/>
                 <a:cs typeface="Arial" pitchFamily="34" charset="-120"/>
               </a:rPr>
-              <a:t> м²</a:t>
-            </a:r>
-            <a:endParaRPr lang="en-US" sz="2400" dirty="0"/>
-          </a:p>
-        </p:txBody>
-      </p:sp>
-      <p:sp>
-        <p:nvSpPr>
-          <p:cNvPr id="10" name="Text 8"/>
-          <p:cNvSpPr txBox="1"/>
-          <p:nvPr/>
-        </p:nvSpPr>
-        <p:spPr>
-          <a:xfrm>
-            <a:off x="7818120" y="1472184"/>
-            <a:ext cx="3383280" cy="457200"/>
-          </a:xfrm>
-          <a:prstGeom prst="rect">
-            <a:avLst/>
-          </a:prstGeom>
-          <a:noFill/>
-          <a:ln/>
-        </p:spPr>
-        <p:txBody>
-          <a:bodyPr wrap="square" lIns="0" tIns="0" rIns="0" bIns="0" rtlCol="0" anchor="t"/>
-          <a:lstStyle/>
-          <a:p>
+              <a:t>– </a:t>
+            </a:r>
             <a:pPr indent="0" marL="0">
               <a:lnSpc>
-                <a:spcPts val="1100"/>
+                <a:spcPts val="1500"/>
               </a:lnSpc>
-              <a:buNone/>
-            </a:pPr>
-            <a:r>
-              <a:rPr lang="en-US" sz="800" spc="30" kern="0" dirty="0">
-                <a:solidFill>
-                  <a:srgbClr val="8A8A8A"/>
-                </a:solidFill>
-                <a:latin typeface="Arial" pitchFamily="34" charset="0"/>
-                <a:ea typeface="Arial" pitchFamily="34" charset="-122"/>
-                <a:cs typeface="Arial" pitchFamily="34" charset="-120"/>
-              </a:rPr>
-              <a:t>ВВОД НОВЫХ ПЛОЩАДЕЙ В НАЛОГООБЛАГАЕМУЮ БАЗУ</a:t>
-            </a:r>
-            <a:endParaRPr lang="en-US" sz="800" dirty="0"/>
+              <a:spcAft>
+                <a:spcPts val="900"/>
+              </a:spcAft>
+              <a:buNone/>
+            </a:pPr>
+            <a:r>
+              <a:rPr lang="en-US" sz="1050" dirty="0">
+                <a:solidFill>
+                  <a:srgbClr val="333333"/>
+                </a:solidFill>
+                <a:latin typeface="Arial" pitchFamily="34" charset="0"/>
+                <a:ea typeface="Arial" pitchFamily="34" charset="-122"/>
+                <a:cs typeface="Arial" pitchFamily="34" charset="-120"/>
+              </a:rPr>
+              <a:t>Расчёт машино-мест по нормативу для гостиниц, от утверждённой ёмкости номерного фонда.</a:t>
+            </a:r>
+            <a:endParaRPr lang="en-US" sz="1050" dirty="0"/>
+          </a:p>
+          <a:p>
+            <a:pPr indent="0" marL="0">
+              <a:lnSpc>
+                <a:spcPts val="1500"/>
+              </a:lnSpc>
+              <a:spcAft>
+                <a:spcPts val="900"/>
+              </a:spcAft>
+              <a:buNone/>
+            </a:pPr>
+            <a:r>
+              <a:rPr lang="en-US" sz="1050" dirty="0">
+                <a:solidFill>
+                  <a:srgbClr val="FF4D23"/>
+                </a:solidFill>
+                <a:latin typeface="Arial" pitchFamily="34" charset="0"/>
+                <a:ea typeface="Arial" pitchFamily="34" charset="-122"/>
+                <a:cs typeface="Arial" pitchFamily="34" charset="-120"/>
+              </a:rPr>
+              <a:t>– </a:t>
+            </a:r>
+            <a:pPr indent="0" marL="0">
+              <a:lnSpc>
+                <a:spcPts val="1500"/>
+              </a:lnSpc>
+              <a:spcAft>
+                <a:spcPts val="900"/>
+              </a:spcAft>
+              <a:buNone/>
+            </a:pPr>
+            <a:r>
+              <a:rPr lang="en-US" sz="1050" dirty="0">
+                <a:solidFill>
+                  <a:srgbClr val="333333"/>
+                </a:solidFill>
+                <a:latin typeface="Arial" pitchFamily="34" charset="0"/>
+                <a:ea typeface="Arial" pitchFamily="34" charset="-122"/>
+                <a:cs typeface="Arial" pitchFamily="34" charset="-120"/>
+              </a:rPr>
+              <a:t>Баланс территории раздельно: озеленение, покрытия, проезды, площадки.</a:t>
+            </a:r>
+            <a:endParaRPr lang="en-US" sz="1050" dirty="0"/>
+          </a:p>
+          <a:p>
+            <a:pPr indent="0" marL="0">
+              <a:lnSpc>
+                <a:spcPts val="1500"/>
+              </a:lnSpc>
+              <a:spcAft>
+                <a:spcPts val="900"/>
+              </a:spcAft>
+              <a:buNone/>
+            </a:pPr>
+            <a:r>
+              <a:rPr lang="en-US" sz="1050" dirty="0">
+                <a:solidFill>
+                  <a:srgbClr val="FF4D23"/>
+                </a:solidFill>
+                <a:latin typeface="Arial" pitchFamily="34" charset="0"/>
+                <a:ea typeface="Arial" pitchFamily="34" charset="-122"/>
+                <a:cs typeface="Arial" pitchFamily="34" charset="-120"/>
+              </a:rPr>
+              <a:t>– </a:t>
+            </a:r>
+            <a:pPr indent="0" marL="0">
+              <a:lnSpc>
+                <a:spcPts val="1500"/>
+              </a:lnSpc>
+              <a:spcAft>
+                <a:spcPts val="900"/>
+              </a:spcAft>
+              <a:buNone/>
+            </a:pPr>
+            <a:r>
+              <a:rPr lang="en-US" sz="1050" dirty="0">
+                <a:solidFill>
+                  <a:srgbClr val="333333"/>
+                </a:solidFill>
+                <a:latin typeface="Arial" pitchFamily="34" charset="0"/>
+                <a:ea typeface="Arial" pitchFamily="34" charset="-122"/>
+                <a:cs typeface="Arial" pitchFamily="34" charset="-120"/>
+              </a:rPr>
+              <a:t>Инженерное обеспечение: технические условия на воду, канализацию, тепло и электроснабжение.</a:t>
+            </a:r>
+            <a:endParaRPr lang="en-US" sz="1050" dirty="0"/>
+          </a:p>
+          <a:p>
+            <a:pPr indent="0" marL="0">
+              <a:lnSpc>
+                <a:spcPts val="1500"/>
+              </a:lnSpc>
+              <a:spcAft>
+                <a:spcPts val="900"/>
+              </a:spcAft>
+              <a:buNone/>
+            </a:pPr>
+            <a:r>
+              <a:rPr lang="en-US" sz="1050" dirty="0">
+                <a:solidFill>
+                  <a:srgbClr val="FF4D23"/>
+                </a:solidFill>
+                <a:latin typeface="Arial" pitchFamily="34" charset="0"/>
+                <a:ea typeface="Arial" pitchFamily="34" charset="-122"/>
+                <a:cs typeface="Arial" pitchFamily="34" charset="-120"/>
+              </a:rPr>
+              <a:t>– </a:t>
+            </a:r>
+            <a:pPr indent="0" marL="0">
+              <a:lnSpc>
+                <a:spcPts val="1500"/>
+              </a:lnSpc>
+              <a:spcAft>
+                <a:spcPts val="900"/>
+              </a:spcAft>
+              <a:buNone/>
+            </a:pPr>
+            <a:r>
+              <a:rPr lang="en-US" sz="1050" dirty="0">
+                <a:solidFill>
+                  <a:srgbClr val="333333"/>
+                </a:solidFill>
+                <a:latin typeface="Arial" pitchFamily="34" charset="0"/>
+                <a:ea typeface="Arial" pitchFamily="34" charset="-122"/>
+                <a:cs typeface="Arial" pitchFamily="34" charset="-120"/>
+              </a:rPr>
+              <a:t>Расчёты инсоляции и шума по отношению к смежным землепользованиям.</a:t>
+            </a:r>
+            <a:endParaRPr lang="en-US" sz="1050" dirty="0"/>
+          </a:p>
+          <a:p>
+            <a:pPr indent="0" marL="0">
+              <a:lnSpc>
+                <a:spcPts val="1500"/>
+              </a:lnSpc>
+              <a:spcAft>
+                <a:spcPts val="900"/>
+              </a:spcAft>
+              <a:buNone/>
+            </a:pPr>
+            <a:r>
+              <a:rPr lang="en-US" sz="1050" dirty="0">
+                <a:solidFill>
+                  <a:srgbClr val="FF4D23"/>
+                </a:solidFill>
+                <a:latin typeface="Arial" pitchFamily="34" charset="0"/>
+                <a:ea typeface="Arial" pitchFamily="34" charset="-122"/>
+                <a:cs typeface="Arial" pitchFamily="34" charset="-120"/>
+              </a:rPr>
+              <a:t>– </a:t>
+            </a:r>
+            <a:pPr indent="0" marL="0">
+              <a:lnSpc>
+                <a:spcPts val="1500"/>
+              </a:lnSpc>
+              <a:spcAft>
+                <a:spcPts val="900"/>
+              </a:spcAft>
+              <a:buNone/>
+            </a:pPr>
+            <a:r>
+              <a:rPr lang="en-US" sz="1050" dirty="0">
+                <a:solidFill>
+                  <a:srgbClr val="333333"/>
+                </a:solidFill>
+                <a:latin typeface="Arial" pitchFamily="34" charset="0"/>
+                <a:ea typeface="Arial" pitchFamily="34" charset="-122"/>
+                <a:cs typeface="Arial" pitchFamily="34" charset="-120"/>
+              </a:rPr>
+              <a:t>Планировочные решения этажей и итоговая ёмкость номерного фонда.</a:t>
+            </a:r>
+            <a:endParaRPr lang="en-US" sz="1050" dirty="0"/>
+          </a:p>
+          <a:p>
+            <a:pPr indent="0" marL="0">
+              <a:lnSpc>
+                <a:spcPts val="1500"/>
+              </a:lnSpc>
+              <a:spcAft>
+                <a:spcPts val="900"/>
+              </a:spcAft>
+              <a:buNone/>
+            </a:pPr>
+            <a:r>
+              <a:rPr lang="en-US" sz="1050" dirty="0">
+                <a:solidFill>
+                  <a:srgbClr val="FF4D23"/>
+                </a:solidFill>
+                <a:latin typeface="Arial" pitchFamily="34" charset="0"/>
+                <a:ea typeface="Arial" pitchFamily="34" charset="-122"/>
+                <a:cs typeface="Arial" pitchFamily="34" charset="-120"/>
+              </a:rPr>
+              <a:t>– </a:t>
+            </a:r>
+            <a:pPr indent="0" marL="0">
+              <a:lnSpc>
+                <a:spcPts val="1500"/>
+              </a:lnSpc>
+              <a:spcAft>
+                <a:spcPts val="900"/>
+              </a:spcAft>
+              <a:buNone/>
+            </a:pPr>
+            <a:r>
+              <a:rPr lang="en-US" sz="1050" dirty="0">
+                <a:solidFill>
+                  <a:srgbClr val="333333"/>
+                </a:solidFill>
+                <a:latin typeface="Arial" pitchFamily="34" charset="0"/>
+                <a:ea typeface="Arial" pitchFamily="34" charset="-122"/>
+                <a:cs typeface="Arial" pitchFamily="34" charset="-120"/>
+              </a:rPr>
+              <a:t>Санитарно-защитная зона действующей АЗС к северу: подтвердить тип станции и установленный размер СЗЗ. На генплане прочерчена зона 50 м.</a:t>
+            </a:r>
+            <a:endParaRPr lang="en-US" sz="1050" dirty="0"/>
           </a:p>
         </p:txBody>
       </p:sp>
@@ -7990,7 +7748,7 @@
         </p:nvSpPr>
         <p:spPr>
           <a:xfrm>
-            <a:off x="502920" y="2286000"/>
+            <a:off x="502920" y="4892040"/>
             <a:ext cx="11183112" cy="7315"/>
           </a:xfrm>
           <a:prstGeom prst="rect">
@@ -8015,30 +7773,24 @@
         </p:nvSpPr>
         <p:spPr>
           <a:xfrm>
-            <a:off x="502920" y="2542032"/>
-            <a:ext cx="5577840" cy="3108960"/>
-          </a:xfrm>
-          <a:prstGeom prst="rect">
-            <a:avLst/>
-          </a:prstGeom>
-          <a:noFill/>
-          <a:ln/>
-        </p:spPr>
-        <p:txBody>
-          <a:bodyPr wrap="square" lIns="0" tIns="0" rIns="0" bIns="0" rtlCol="0" anchor="t"/>
-          <a:lstStyle/>
-          <a:p>
-            <a:pPr indent="0" marL="0">
-              <a:lnSpc>
-                <a:spcPts val="1600"/>
-              </a:lnSpc>
-              <a:spcAft>
-                <a:spcPts val="1300"/>
-              </a:spcAft>
-              <a:buNone/>
-            </a:pPr>
-            <a:r>
-              <a:rPr lang="en-US" sz="1100" dirty="0">
+            <a:off x="502920" y="5029200"/>
+            <a:ext cx="5486400" cy="201168"/>
+          </a:xfrm>
+          <a:prstGeom prst="rect">
+            <a:avLst/>
+          </a:prstGeom>
+          <a:noFill/>
+          <a:ln/>
+        </p:spPr>
+        <p:txBody>
+          <a:bodyPr wrap="square" lIns="0" tIns="0" rIns="0" bIns="0" rtlCol="0" anchor="ctr"/>
+          <a:lstStyle/>
+          <a:p>
+            <a:pPr indent="0" marL="0">
+              <a:buNone/>
+            </a:pPr>
+            <a:r>
+              <a:rPr lang="en-US" sz="850" spc="30" kern="0" dirty="0">
                 <a:solidFill>
                   <a:srgbClr val="FF4D23"/>
                 </a:solidFill>
@@ -8046,42 +7798,52 @@
                 <a:ea typeface="Arial" pitchFamily="34" charset="-122"/>
                 <a:cs typeface="Arial" pitchFamily="34" charset="-120"/>
               </a:rPr>
-              <a:t>– </a:t>
-            </a:r>
-            <a:pPr indent="0" marL="0">
-              <a:lnSpc>
-                <a:spcPts val="1600"/>
-              </a:lnSpc>
-              <a:spcAft>
-                <a:spcPts val="1300"/>
-              </a:spcAft>
-              <a:buNone/>
-            </a:pPr>
-            <a:r>
-              <a:rPr lang="en-US" sz="1100" dirty="0">
-                <a:solidFill>
-                  <a:srgbClr val="333333"/>
-                </a:solidFill>
-                <a:latin typeface="Arial" pitchFamily="34" charset="0"/>
-                <a:ea typeface="Arial" pitchFamily="34" charset="-122"/>
-                <a:cs typeface="Arial" pitchFamily="34" charset="-120"/>
-              </a:rPr>
-              <a:t>Загрузка ранее неиспользуемого участка: свободная территория в деловом окружении получает капитальную функцию без сноса и расселения.</a:t>
-            </a:r>
-            <a:endParaRPr lang="en-US" sz="1100" dirty="0"/>
-          </a:p>
-          <a:p>
-            <a:pPr indent="0" marL="0">
-              <a:lnSpc>
-                <a:spcPts val="1600"/>
-              </a:lnSpc>
-              <a:spcAft>
-                <a:spcPts val="1300"/>
-              </a:spcAft>
-              <a:buNone/>
-            </a:pPr>
-            <a:r>
-              <a:rPr lang="en-US" sz="1100" dirty="0">
+              <a:t>ПОКАЗАТЕЛИ, ПРОВЕРЯЕМЫЕ ГРАДОСТРОИТЕЛЬНЫМ СОВЕТОМ</a:t>
+            </a:r>
+            <a:endParaRPr lang="en-US" sz="850" dirty="0"/>
+          </a:p>
+        </p:txBody>
+      </p:sp>
+      <p:sp>
+        <p:nvSpPr>
+          <p:cNvPr id="13" name="Text 11"/>
+          <p:cNvSpPr txBox="1"/>
+          <p:nvPr/>
+        </p:nvSpPr>
+        <p:spPr>
+          <a:xfrm>
+            <a:off x="502920" y="5349240"/>
+            <a:ext cx="2521458" cy="402336"/>
+          </a:xfrm>
+          <a:prstGeom prst="rect">
+            <a:avLst/>
+          </a:prstGeom>
+          <a:noFill/>
+          <a:ln/>
+        </p:spPr>
+        <p:txBody>
+          <a:bodyPr wrap="square" lIns="0" tIns="0" rIns="0" bIns="0" rtlCol="0" anchor="ctr"/>
+          <a:lstStyle/>
+          <a:p>
+            <a:pPr indent="0" marL="0">
+              <a:buNone/>
+            </a:pPr>
+            <a:r>
+              <a:rPr lang="en-US" sz="2200" b="1" dirty="0">
+                <a:solidFill>
+                  <a:srgbClr val="111111"/>
+                </a:solidFill>
+                <a:latin typeface="Arial" pitchFamily="34" charset="0"/>
+                <a:ea typeface="Arial" pitchFamily="34" charset="-122"/>
+                <a:cs typeface="Arial" pitchFamily="34" charset="-120"/>
+              </a:rPr>
+              <a:t>5</a:t>
+            </a:r>
+            <a:pPr indent="0" marL="0">
+              <a:buNone/>
+            </a:pPr>
+            <a:r>
+              <a:rPr lang="en-US" sz="1100" b="1" dirty="0">
                 <a:solidFill>
                   <a:srgbClr val="FF4D23"/>
                 </a:solidFill>
@@ -8089,154 +7851,9 @@
                 <a:ea typeface="Arial" pitchFamily="34" charset="-122"/>
                 <a:cs typeface="Arial" pitchFamily="34" charset="-120"/>
               </a:rPr>
-              <a:t>– </a:t>
-            </a:r>
-            <a:pPr indent="0" marL="0">
-              <a:lnSpc>
-                <a:spcPts val="1600"/>
-              </a:lnSpc>
-              <a:spcAft>
-                <a:spcPts val="1300"/>
-              </a:spcAft>
-              <a:buNone/>
-            </a:pPr>
-            <a:r>
-              <a:rPr lang="en-US" sz="1100" dirty="0">
-                <a:solidFill>
-                  <a:srgbClr val="333333"/>
-                </a:solidFill>
-                <a:latin typeface="Arial" pitchFamily="34" charset="0"/>
-                <a:ea typeface="Arial" pitchFamily="34" charset="-122"/>
-                <a:cs typeface="Arial" pitchFamily="34" charset="-120"/>
-              </a:rPr>
-              <a:t>Круглогодичный турпоток: деловой сегмент зимой и осенью, горный и событийный туризм летом.</a:t>
-            </a:r>
-            <a:endParaRPr lang="en-US" sz="1100" dirty="0"/>
-          </a:p>
-          <a:p>
-            <a:pPr indent="0" marL="0">
-              <a:lnSpc>
-                <a:spcPts val="1600"/>
-              </a:lnSpc>
-              <a:spcAft>
-                <a:spcPts val="1300"/>
-              </a:spcAft>
-              <a:buNone/>
-            </a:pPr>
-            <a:r>
-              <a:rPr lang="en-US" sz="1100" dirty="0">
-                <a:solidFill>
-                  <a:srgbClr val="FF4D23"/>
-                </a:solidFill>
-                <a:latin typeface="Arial" pitchFamily="34" charset="0"/>
-                <a:ea typeface="Arial" pitchFamily="34" charset="-122"/>
-                <a:cs typeface="Arial" pitchFamily="34" charset="-120"/>
-              </a:rPr>
-              <a:t>– </a:t>
-            </a:r>
-            <a:pPr indent="0" marL="0">
-              <a:lnSpc>
-                <a:spcPts val="1600"/>
-              </a:lnSpc>
-              <a:spcAft>
-                <a:spcPts val="1300"/>
-              </a:spcAft>
-              <a:buNone/>
-            </a:pPr>
-            <a:r>
-              <a:rPr lang="en-US" sz="1100" dirty="0">
-                <a:solidFill>
-                  <a:srgbClr val="333333"/>
-                </a:solidFill>
-                <a:latin typeface="Arial" pitchFamily="34" charset="0"/>
-                <a:ea typeface="Arial" pitchFamily="34" charset="-122"/>
-                <a:cs typeface="Arial" pitchFamily="34" charset="-120"/>
-              </a:rPr>
-              <a:t>Общественные функции для района: рестораны и конференц-зона первого этажа работают на город, а не только на постояльцев.</a:t>
-            </a:r>
-            <a:endParaRPr lang="en-US" sz="1100" dirty="0"/>
-          </a:p>
-          <a:p>
-            <a:pPr indent="0" marL="0">
-              <a:lnSpc>
-                <a:spcPts val="1600"/>
-              </a:lnSpc>
-              <a:spcAft>
-                <a:spcPts val="1300"/>
-              </a:spcAft>
-              <a:buNone/>
-            </a:pPr>
-            <a:r>
-              <a:rPr lang="en-US" sz="1100" dirty="0">
-                <a:solidFill>
-                  <a:srgbClr val="FF4D23"/>
-                </a:solidFill>
-                <a:latin typeface="Arial" pitchFamily="34" charset="0"/>
-                <a:ea typeface="Arial" pitchFamily="34" charset="-122"/>
-                <a:cs typeface="Arial" pitchFamily="34" charset="-120"/>
-              </a:rPr>
-              <a:t>– </a:t>
-            </a:r>
-            <a:pPr indent="0" marL="0">
-              <a:lnSpc>
-                <a:spcPts val="1600"/>
-              </a:lnSpc>
-              <a:spcAft>
-                <a:spcPts val="1300"/>
-              </a:spcAft>
-              <a:buNone/>
-            </a:pPr>
-            <a:r>
-              <a:rPr lang="en-US" sz="1100" dirty="0">
-                <a:solidFill>
-                  <a:srgbClr val="333333"/>
-                </a:solidFill>
-                <a:latin typeface="Arial" pitchFamily="34" charset="0"/>
-                <a:ea typeface="Arial" pitchFamily="34" charset="-122"/>
-                <a:cs typeface="Arial" pitchFamily="34" charset="-120"/>
-              </a:rPr>
-              <a:t>4 446,9 м² общественного первого этажа — новая точка притяжения в квартале, доступная не только постояльцам.</a:t>
-            </a:r>
-            <a:endParaRPr lang="en-US" sz="1100" dirty="0"/>
-          </a:p>
-        </p:txBody>
-      </p:sp>
-      <p:sp>
-        <p:nvSpPr>
-          <p:cNvPr id="13" name="Text 11"/>
-          <p:cNvSpPr txBox="1"/>
-          <p:nvPr/>
-        </p:nvSpPr>
-        <p:spPr>
-          <a:xfrm>
-            <a:off x="6766560" y="2542032"/>
-            <a:ext cx="4858207" cy="201168"/>
-          </a:xfrm>
-          <a:prstGeom prst="rect">
-            <a:avLst/>
-          </a:prstGeom>
-          <a:noFill/>
-          <a:ln/>
-        </p:spPr>
-        <p:txBody>
-          <a:bodyPr wrap="square" lIns="0" tIns="0" rIns="0" bIns="0" rtlCol="0" anchor="ctr"/>
-          <a:lstStyle/>
-          <a:p>
-            <a:pPr indent="0" marL="0">
-              <a:buNone/>
-            </a:pPr>
-            <a:r>
-              <a:rPr lang="en-US" sz="850" spc="30" kern="0" dirty="0">
-                <a:solidFill>
-                  <a:srgbClr val="FF4D23"/>
-                </a:solidFill>
-                <a:latin typeface="Arial" pitchFamily="34" charset="0"/>
-                <a:ea typeface="Arial" pitchFamily="34" charset="-122"/>
-                <a:cs typeface="Arial" pitchFamily="34" charset="-120"/>
-              </a:rPr>
-              <a:t>ПОКАЗАТЕЛИ, КОТОРЫЕ ВНОСИТ ЗАКАЗЧИК</a:t>
-            </a:r>
-            <a:endParaRPr lang="en-US" sz="850" dirty="0"/>
+              <a:t> этажей</a:t>
+            </a:r>
+            <a:endParaRPr lang="en-US" sz="2200" dirty="0"/>
           </a:p>
         </p:txBody>
       </p:sp>
@@ -8248,523 +7865,8 @@
         </p:nvSpPr>
         <p:spPr>
           <a:xfrm>
-            <a:off x="6766560" y="2907792"/>
-            <a:ext cx="3012088" cy="274320"/>
-          </a:xfrm>
-          <a:prstGeom prst="rect">
-            <a:avLst/>
-          </a:prstGeom>
-          <a:noFill/>
-          <a:ln/>
-        </p:spPr>
-        <p:txBody>
-          <a:bodyPr wrap="square" lIns="0" tIns="0" rIns="0" bIns="0" rtlCol="0" anchor="ctr"/>
-          <a:lstStyle/>
-          <a:p>
-            <a:pPr indent="0" marL="0">
-              <a:buNone/>
-            </a:pPr>
-            <a:r>
-              <a:rPr lang="en-US" sz="1000" dirty="0">
-                <a:solidFill>
-                  <a:srgbClr val="333333"/>
-                </a:solidFill>
-                <a:latin typeface="Arial" pitchFamily="34" charset="0"/>
-                <a:ea typeface="Arial" pitchFamily="34" charset="-122"/>
-                <a:cs typeface="Arial" pitchFamily="34" charset="-120"/>
-              </a:rPr>
-              <a:t>Объём инвестиций, млрд ₸</a:t>
-            </a:r>
-            <a:endParaRPr lang="en-US" sz="1000" dirty="0"/>
-          </a:p>
-        </p:txBody>
-      </p:sp>
-      <p:sp>
-        <p:nvSpPr>
-          <p:cNvPr id="15" name="Text 13"/>
-          <p:cNvSpPr txBox="1"/>
-          <p:nvPr/>
-        </p:nvSpPr>
-        <p:spPr>
-          <a:xfrm>
-            <a:off x="9778648" y="2907792"/>
-            <a:ext cx="1846119" cy="274320"/>
-          </a:xfrm>
-          <a:prstGeom prst="rect">
-            <a:avLst/>
-          </a:prstGeom>
-          <a:noFill/>
-          <a:ln/>
-        </p:spPr>
-        <p:txBody>
-          <a:bodyPr wrap="square" lIns="0" tIns="0" rIns="0" bIns="0" rtlCol="0" anchor="ctr"/>
-          <a:lstStyle/>
-          <a:p>
-            <a:pPr algn="r" indent="0" marL="0">
-              <a:buNone/>
-            </a:pPr>
-            <a:r>
-              <a:rPr lang="en-US" sz="1000" dirty="0">
-                <a:solidFill>
-                  <a:srgbClr val="FF4D23"/>
-                </a:solidFill>
-                <a:latin typeface="Arial" pitchFamily="34" charset="0"/>
-                <a:ea typeface="Arial" pitchFamily="34" charset="-122"/>
-                <a:cs typeface="Arial" pitchFamily="34" charset="-120"/>
-              </a:rPr>
-              <a:t>____________</a:t>
-            </a:r>
-            <a:endParaRPr lang="en-US" sz="1000" dirty="0"/>
-          </a:p>
-        </p:txBody>
-      </p:sp>
-      <p:sp>
-        <p:nvSpPr>
-          <p:cNvPr id="16" name="Shape 14"/>
-          <p:cNvSpPr/>
-          <p:nvPr/>
-        </p:nvSpPr>
-        <p:spPr>
-          <a:xfrm>
-            <a:off x="6766560" y="3218688"/>
-            <a:ext cx="4858207" cy="7315"/>
-          </a:xfrm>
-          <a:prstGeom prst="rect">
-            <a:avLst/>
-          </a:prstGeom>
-          <a:solidFill>
-            <a:srgbClr val="DCDCDC"/>
-          </a:solidFill>
-          <a:ln w="12700">
-            <a:solidFill>
-              <a:srgbClr val="DCDCDC"/>
-            </a:solidFill>
-            <a:prstDash val="solid"/>
-          </a:ln>
-        </p:spPr>
-      </p:sp>
-      <p:sp>
-        <p:nvSpPr>
-          <p:cNvPr id="17" name="Text 15"/>
-          <p:cNvSpPr txBox="1"/>
-          <p:nvPr/>
-        </p:nvSpPr>
-        <p:spPr>
-          <a:xfrm>
-            <a:off x="6766560" y="3419856"/>
-            <a:ext cx="3012088" cy="274320"/>
-          </a:xfrm>
-          <a:prstGeom prst="rect">
-            <a:avLst/>
-          </a:prstGeom>
-          <a:noFill/>
-          <a:ln/>
-        </p:spPr>
-        <p:txBody>
-          <a:bodyPr wrap="square" lIns="0" tIns="0" rIns="0" bIns="0" rtlCol="0" anchor="ctr"/>
-          <a:lstStyle/>
-          <a:p>
-            <a:pPr indent="0" marL="0">
-              <a:buNone/>
-            </a:pPr>
-            <a:r>
-              <a:rPr lang="en-US" sz="1000" dirty="0">
-                <a:solidFill>
-                  <a:srgbClr val="333333"/>
-                </a:solidFill>
-                <a:latin typeface="Arial" pitchFamily="34" charset="0"/>
-                <a:ea typeface="Arial" pitchFamily="34" charset="-122"/>
-                <a:cs typeface="Arial" pitchFamily="34" charset="-120"/>
-              </a:rPr>
-              <a:t>Налоговые поступления в год</a:t>
-            </a:r>
-            <a:endParaRPr lang="en-US" sz="1000" dirty="0"/>
-          </a:p>
-        </p:txBody>
-      </p:sp>
-      <p:sp>
-        <p:nvSpPr>
-          <p:cNvPr id="18" name="Text 16"/>
-          <p:cNvSpPr txBox="1"/>
-          <p:nvPr/>
-        </p:nvSpPr>
-        <p:spPr>
-          <a:xfrm>
-            <a:off x="9778648" y="3419856"/>
-            <a:ext cx="1846119" cy="274320"/>
-          </a:xfrm>
-          <a:prstGeom prst="rect">
-            <a:avLst/>
-          </a:prstGeom>
-          <a:noFill/>
-          <a:ln/>
-        </p:spPr>
-        <p:txBody>
-          <a:bodyPr wrap="square" lIns="0" tIns="0" rIns="0" bIns="0" rtlCol="0" anchor="ctr"/>
-          <a:lstStyle/>
-          <a:p>
-            <a:pPr algn="r" indent="0" marL="0">
-              <a:buNone/>
-            </a:pPr>
-            <a:r>
-              <a:rPr lang="en-US" sz="1000" dirty="0">
-                <a:solidFill>
-                  <a:srgbClr val="FF4D23"/>
-                </a:solidFill>
-                <a:latin typeface="Arial" pitchFamily="34" charset="0"/>
-                <a:ea typeface="Arial" pitchFamily="34" charset="-122"/>
-                <a:cs typeface="Arial" pitchFamily="34" charset="-120"/>
-              </a:rPr>
-              <a:t>____________</a:t>
-            </a:r>
-            <a:endParaRPr lang="en-US" sz="1000" dirty="0"/>
-          </a:p>
-        </p:txBody>
-      </p:sp>
-      <p:sp>
-        <p:nvSpPr>
-          <p:cNvPr id="19" name="Shape 17"/>
-          <p:cNvSpPr/>
-          <p:nvPr/>
-        </p:nvSpPr>
-        <p:spPr>
-          <a:xfrm>
-            <a:off x="6766560" y="3730752"/>
-            <a:ext cx="4858207" cy="7315"/>
-          </a:xfrm>
-          <a:prstGeom prst="rect">
-            <a:avLst/>
-          </a:prstGeom>
-          <a:solidFill>
-            <a:srgbClr val="DCDCDC"/>
-          </a:solidFill>
-          <a:ln w="12700">
-            <a:solidFill>
-              <a:srgbClr val="DCDCDC"/>
-            </a:solidFill>
-            <a:prstDash val="solid"/>
-          </a:ln>
-        </p:spPr>
-      </p:sp>
-      <p:sp>
-        <p:nvSpPr>
-          <p:cNvPr id="20" name="Text 18"/>
-          <p:cNvSpPr txBox="1"/>
-          <p:nvPr/>
-        </p:nvSpPr>
-        <p:spPr>
-          <a:xfrm>
-            <a:off x="6766560" y="3931920"/>
-            <a:ext cx="3012088" cy="274320"/>
-          </a:xfrm>
-          <a:prstGeom prst="rect">
-            <a:avLst/>
-          </a:prstGeom>
-          <a:noFill/>
-          <a:ln/>
-        </p:spPr>
-        <p:txBody>
-          <a:bodyPr wrap="square" lIns="0" tIns="0" rIns="0" bIns="0" rtlCol="0" anchor="ctr"/>
-          <a:lstStyle/>
-          <a:p>
-            <a:pPr indent="0" marL="0">
-              <a:buNone/>
-            </a:pPr>
-            <a:r>
-              <a:rPr lang="en-US" sz="1000" dirty="0">
-                <a:solidFill>
-                  <a:srgbClr val="333333"/>
-                </a:solidFill>
-                <a:latin typeface="Arial" pitchFamily="34" charset="0"/>
-                <a:ea typeface="Arial" pitchFamily="34" charset="-122"/>
-                <a:cs typeface="Arial" pitchFamily="34" charset="-120"/>
-              </a:rPr>
-              <a:t>Рабочие места на период строительства</a:t>
-            </a:r>
-            <a:endParaRPr lang="en-US" sz="1000" dirty="0"/>
-          </a:p>
-        </p:txBody>
-      </p:sp>
-      <p:sp>
-        <p:nvSpPr>
-          <p:cNvPr id="21" name="Text 19"/>
-          <p:cNvSpPr txBox="1"/>
-          <p:nvPr/>
-        </p:nvSpPr>
-        <p:spPr>
-          <a:xfrm>
-            <a:off x="9778648" y="3931920"/>
-            <a:ext cx="1846119" cy="274320"/>
-          </a:xfrm>
-          <a:prstGeom prst="rect">
-            <a:avLst/>
-          </a:prstGeom>
-          <a:noFill/>
-          <a:ln/>
-        </p:spPr>
-        <p:txBody>
-          <a:bodyPr wrap="square" lIns="0" tIns="0" rIns="0" bIns="0" rtlCol="0" anchor="ctr"/>
-          <a:lstStyle/>
-          <a:p>
-            <a:pPr algn="r" indent="0" marL="0">
-              <a:buNone/>
-            </a:pPr>
-            <a:r>
-              <a:rPr lang="en-US" sz="1000" dirty="0">
-                <a:solidFill>
-                  <a:srgbClr val="FF4D23"/>
-                </a:solidFill>
-                <a:latin typeface="Arial" pitchFamily="34" charset="0"/>
-                <a:ea typeface="Arial" pitchFamily="34" charset="-122"/>
-                <a:cs typeface="Arial" pitchFamily="34" charset="-120"/>
-              </a:rPr>
-              <a:t>____________</a:t>
-            </a:r>
-            <a:endParaRPr lang="en-US" sz="1000" dirty="0"/>
-          </a:p>
-        </p:txBody>
-      </p:sp>
-      <p:sp>
-        <p:nvSpPr>
-          <p:cNvPr id="22" name="Shape 20"/>
-          <p:cNvSpPr/>
-          <p:nvPr/>
-        </p:nvSpPr>
-        <p:spPr>
-          <a:xfrm>
-            <a:off x="6766560" y="4242816"/>
-            <a:ext cx="4858207" cy="7315"/>
-          </a:xfrm>
-          <a:prstGeom prst="rect">
-            <a:avLst/>
-          </a:prstGeom>
-          <a:solidFill>
-            <a:srgbClr val="DCDCDC"/>
-          </a:solidFill>
-          <a:ln w="12700">
-            <a:solidFill>
-              <a:srgbClr val="DCDCDC"/>
-            </a:solidFill>
-            <a:prstDash val="solid"/>
-          </a:ln>
-        </p:spPr>
-      </p:sp>
-      <p:sp>
-        <p:nvSpPr>
-          <p:cNvPr id="23" name="Text 21"/>
-          <p:cNvSpPr txBox="1"/>
-          <p:nvPr/>
-        </p:nvSpPr>
-        <p:spPr>
-          <a:xfrm>
-            <a:off x="6766560" y="4443984"/>
-            <a:ext cx="3012088" cy="274320"/>
-          </a:xfrm>
-          <a:prstGeom prst="rect">
-            <a:avLst/>
-          </a:prstGeom>
-          <a:noFill/>
-          <a:ln/>
-        </p:spPr>
-        <p:txBody>
-          <a:bodyPr wrap="square" lIns="0" tIns="0" rIns="0" bIns="0" rtlCol="0" anchor="ctr"/>
-          <a:lstStyle/>
-          <a:p>
-            <a:pPr indent="0" marL="0">
-              <a:buNone/>
-            </a:pPr>
-            <a:r>
-              <a:rPr lang="en-US" sz="1000" dirty="0">
-                <a:solidFill>
-                  <a:srgbClr val="333333"/>
-                </a:solidFill>
-                <a:latin typeface="Arial" pitchFamily="34" charset="0"/>
-                <a:ea typeface="Arial" pitchFamily="34" charset="-122"/>
-                <a:cs typeface="Arial" pitchFamily="34" charset="-120"/>
-              </a:rPr>
-              <a:t>Гостиничный оператор</a:t>
-            </a:r>
-            <a:endParaRPr lang="en-US" sz="1000" dirty="0"/>
-          </a:p>
-        </p:txBody>
-      </p:sp>
-      <p:sp>
-        <p:nvSpPr>
-          <p:cNvPr id="24" name="Text 22"/>
-          <p:cNvSpPr txBox="1"/>
-          <p:nvPr/>
-        </p:nvSpPr>
-        <p:spPr>
-          <a:xfrm>
-            <a:off x="9778648" y="4443984"/>
-            <a:ext cx="1846119" cy="274320"/>
-          </a:xfrm>
-          <a:prstGeom prst="rect">
-            <a:avLst/>
-          </a:prstGeom>
-          <a:noFill/>
-          <a:ln/>
-        </p:spPr>
-        <p:txBody>
-          <a:bodyPr wrap="square" lIns="0" tIns="0" rIns="0" bIns="0" rtlCol="0" anchor="ctr"/>
-          <a:lstStyle/>
-          <a:p>
-            <a:pPr algn="r" indent="0" marL="0">
-              <a:buNone/>
-            </a:pPr>
-            <a:r>
-              <a:rPr lang="en-US" sz="1000" dirty="0">
-                <a:solidFill>
-                  <a:srgbClr val="FF4D23"/>
-                </a:solidFill>
-                <a:latin typeface="Arial" pitchFamily="34" charset="0"/>
-                <a:ea typeface="Arial" pitchFamily="34" charset="-122"/>
-                <a:cs typeface="Arial" pitchFamily="34" charset="-120"/>
-              </a:rPr>
-              <a:t>____________</a:t>
-            </a:r>
-            <a:endParaRPr lang="en-US" sz="1000" dirty="0"/>
-          </a:p>
-        </p:txBody>
-      </p:sp>
-      <p:sp>
-        <p:nvSpPr>
-          <p:cNvPr id="25" name="Shape 23"/>
-          <p:cNvSpPr/>
-          <p:nvPr/>
-        </p:nvSpPr>
-        <p:spPr>
-          <a:xfrm>
-            <a:off x="6766560" y="4754880"/>
-            <a:ext cx="4858207" cy="7315"/>
-          </a:xfrm>
-          <a:prstGeom prst="rect">
-            <a:avLst/>
-          </a:prstGeom>
-          <a:solidFill>
-            <a:srgbClr val="DCDCDC"/>
-          </a:solidFill>
-          <a:ln w="12700">
-            <a:solidFill>
-              <a:srgbClr val="DCDCDC"/>
-            </a:solidFill>
-            <a:prstDash val="solid"/>
-          </a:ln>
-        </p:spPr>
-      </p:sp>
-      <p:sp>
-        <p:nvSpPr>
-          <p:cNvPr id="26" name="Text 24"/>
-          <p:cNvSpPr txBox="1"/>
-          <p:nvPr/>
-        </p:nvSpPr>
-        <p:spPr>
-          <a:xfrm>
-            <a:off x="6766560" y="4956048"/>
-            <a:ext cx="3012088" cy="274320"/>
-          </a:xfrm>
-          <a:prstGeom prst="rect">
-            <a:avLst/>
-          </a:prstGeom>
-          <a:noFill/>
-          <a:ln/>
-        </p:spPr>
-        <p:txBody>
-          <a:bodyPr wrap="square" lIns="0" tIns="0" rIns="0" bIns="0" rtlCol="0" anchor="ctr"/>
-          <a:lstStyle/>
-          <a:p>
-            <a:pPr indent="0" marL="0">
-              <a:buNone/>
-            </a:pPr>
-            <a:r>
-              <a:rPr lang="en-US" sz="1000" dirty="0">
-                <a:solidFill>
-                  <a:srgbClr val="333333"/>
-                </a:solidFill>
-                <a:latin typeface="Arial" pitchFamily="34" charset="0"/>
-                <a:ea typeface="Arial" pitchFamily="34" charset="-122"/>
-                <a:cs typeface="Arial" pitchFamily="34" charset="-120"/>
-              </a:rPr>
-              <a:t>Планируемый срок ввода в эксплуатацию</a:t>
-            </a:r>
-            <a:endParaRPr lang="en-US" sz="1000" dirty="0"/>
-          </a:p>
-        </p:txBody>
-      </p:sp>
-      <p:sp>
-        <p:nvSpPr>
-          <p:cNvPr id="27" name="Text 25"/>
-          <p:cNvSpPr txBox="1"/>
-          <p:nvPr/>
-        </p:nvSpPr>
-        <p:spPr>
-          <a:xfrm>
-            <a:off x="9778648" y="4956048"/>
-            <a:ext cx="1846119" cy="274320"/>
-          </a:xfrm>
-          <a:prstGeom prst="rect">
-            <a:avLst/>
-          </a:prstGeom>
-          <a:noFill/>
-          <a:ln/>
-        </p:spPr>
-        <p:txBody>
-          <a:bodyPr wrap="square" lIns="0" tIns="0" rIns="0" bIns="0" rtlCol="0" anchor="ctr"/>
-          <a:lstStyle/>
-          <a:p>
-            <a:pPr algn="r" indent="0" marL="0">
-              <a:buNone/>
-            </a:pPr>
-            <a:r>
-              <a:rPr lang="en-US" sz="1000" dirty="0">
-                <a:solidFill>
-                  <a:srgbClr val="FF4D23"/>
-                </a:solidFill>
-                <a:latin typeface="Arial" pitchFamily="34" charset="0"/>
-                <a:ea typeface="Arial" pitchFamily="34" charset="-122"/>
-                <a:cs typeface="Arial" pitchFamily="34" charset="-120"/>
-              </a:rPr>
-              <a:t>____________</a:t>
-            </a:r>
-            <a:endParaRPr lang="en-US" sz="1000" dirty="0"/>
-          </a:p>
-        </p:txBody>
-      </p:sp>
-      <p:sp>
-        <p:nvSpPr>
-          <p:cNvPr id="28" name="Shape 26"/>
-          <p:cNvSpPr/>
-          <p:nvPr/>
-        </p:nvSpPr>
-        <p:spPr>
-          <a:xfrm>
-            <a:off x="6766560" y="5266944"/>
-            <a:ext cx="4858207" cy="7315"/>
-          </a:xfrm>
-          <a:prstGeom prst="rect">
-            <a:avLst/>
-          </a:prstGeom>
-          <a:solidFill>
-            <a:srgbClr val="DCDCDC"/>
-          </a:solidFill>
-          <a:ln w="12700">
-            <a:solidFill>
-              <a:srgbClr val="DCDCDC"/>
-            </a:solidFill>
-            <a:prstDash val="solid"/>
-          </a:ln>
-        </p:spPr>
-      </p:sp>
-      <p:sp>
-        <p:nvSpPr>
-          <p:cNvPr id="29" name="Text 27"/>
-          <p:cNvSpPr txBox="1"/>
-          <p:nvPr/>
-        </p:nvSpPr>
-        <p:spPr>
-          <a:xfrm>
-            <a:off x="502920" y="5897880"/>
-            <a:ext cx="11183112" cy="365760"/>
+            <a:off x="502920" y="5769864"/>
+            <a:ext cx="2521458" cy="384048"/>
           </a:xfrm>
           <a:prstGeom prst="rect">
             <a:avLst/>
@@ -8783,7 +7885,7 @@
               <a:buNone/>
             </a:pPr>
             <a:r>
-              <a:rPr lang="en-US" sz="850" i="1" dirty="0">
+              <a:rPr lang="en-US" sz="800" spc="30" kern="0" dirty="0">
                 <a:solidFill>
                   <a:srgbClr val="8A8A8A"/>
                 </a:solidFill>
@@ -8791,15 +7893,289 @@
                 <a:ea typeface="Arial" pitchFamily="34" charset="-122"/>
                 <a:cs typeface="Arial" pitchFamily="34" charset="-120"/>
               </a:rPr>
-              <a:t>Ёмкость номерного фонда и численность персонала указаны оценочно и подлежат уточнению после утверждения планировочных решений.</a:t>
-            </a:r>
-            <a:endParaRPr lang="en-US" sz="850" dirty="0"/>
+              <a:t>ЭТАЖНОСТЬ ОБОИХ КОРПУСОВ</a:t>
+            </a:r>
+            <a:endParaRPr lang="en-US" sz="800" dirty="0"/>
+          </a:p>
+        </p:txBody>
+      </p:sp>
+      <p:sp>
+        <p:nvSpPr>
+          <p:cNvPr id="15" name="Text 13"/>
+          <p:cNvSpPr txBox="1"/>
+          <p:nvPr/>
+        </p:nvSpPr>
+        <p:spPr>
+          <a:xfrm>
+            <a:off x="3298698" y="5349240"/>
+            <a:ext cx="2521458" cy="402336"/>
+          </a:xfrm>
+          <a:prstGeom prst="rect">
+            <a:avLst/>
+          </a:prstGeom>
+          <a:noFill/>
+          <a:ln/>
+        </p:spPr>
+        <p:txBody>
+          <a:bodyPr wrap="square" lIns="0" tIns="0" rIns="0" bIns="0" rtlCol="0" anchor="ctr"/>
+          <a:lstStyle/>
+          <a:p>
+            <a:pPr indent="0" marL="0">
+              <a:buNone/>
+            </a:pPr>
+            <a:r>
+              <a:rPr lang="en-US" sz="2200" b="1" dirty="0">
+                <a:solidFill>
+                  <a:srgbClr val="111111"/>
+                </a:solidFill>
+                <a:latin typeface="Arial" pitchFamily="34" charset="0"/>
+                <a:ea typeface="Arial" pitchFamily="34" charset="-122"/>
+                <a:cs typeface="Arial" pitchFamily="34" charset="-120"/>
+              </a:rPr>
+              <a:t>35,3</a:t>
+            </a:r>
+            <a:pPr indent="0" marL="0">
+              <a:buNone/>
+            </a:pPr>
+            <a:r>
+              <a:rPr lang="en-US" sz="1100" b="1" dirty="0">
+                <a:solidFill>
+                  <a:srgbClr val="FF4D23"/>
+                </a:solidFill>
+                <a:latin typeface="Arial" pitchFamily="34" charset="0"/>
+                <a:ea typeface="Arial" pitchFamily="34" charset="-122"/>
+                <a:cs typeface="Arial" pitchFamily="34" charset="-120"/>
+              </a:rPr>
+              <a:t> %</a:t>
+            </a:r>
+            <a:endParaRPr lang="en-US" sz="2200" dirty="0"/>
+          </a:p>
+        </p:txBody>
+      </p:sp>
+      <p:sp>
+        <p:nvSpPr>
+          <p:cNvPr id="16" name="Text 14"/>
+          <p:cNvSpPr txBox="1"/>
+          <p:nvPr/>
+        </p:nvSpPr>
+        <p:spPr>
+          <a:xfrm>
+            <a:off x="3298698" y="5769864"/>
+            <a:ext cx="2521458" cy="384048"/>
+          </a:xfrm>
+          <a:prstGeom prst="rect">
+            <a:avLst/>
+          </a:prstGeom>
+          <a:noFill/>
+          <a:ln/>
+        </p:spPr>
+        <p:txBody>
+          <a:bodyPr wrap="square" lIns="0" tIns="0" rIns="0" bIns="0" rtlCol="0" anchor="t"/>
+          <a:lstStyle/>
+          <a:p>
+            <a:pPr indent="0" marL="0">
+              <a:lnSpc>
+                <a:spcPts val="1100"/>
+              </a:lnSpc>
+              <a:buNone/>
+            </a:pPr>
+            <a:r>
+              <a:rPr lang="en-US" sz="800" spc="30" kern="0" dirty="0">
+                <a:solidFill>
+                  <a:srgbClr val="8A8A8A"/>
+                </a:solidFill>
+                <a:latin typeface="Arial" pitchFamily="34" charset="0"/>
+                <a:ea typeface="Arial" pitchFamily="34" charset="-122"/>
+                <a:cs typeface="Arial" pitchFamily="34" charset="-120"/>
+              </a:rPr>
+              <a:t>КОЭФФИЦИЕНТ ЗАСТРОЙКИ</a:t>
+            </a:r>
+            <a:endParaRPr lang="en-US" sz="800" dirty="0"/>
+          </a:p>
+        </p:txBody>
+      </p:sp>
+      <p:sp>
+        <p:nvSpPr>
+          <p:cNvPr id="17" name="Text 15"/>
+          <p:cNvSpPr txBox="1"/>
+          <p:nvPr/>
+        </p:nvSpPr>
+        <p:spPr>
+          <a:xfrm>
+            <a:off x="6094476" y="5349240"/>
+            <a:ext cx="2521458" cy="402336"/>
+          </a:xfrm>
+          <a:prstGeom prst="rect">
+            <a:avLst/>
+          </a:prstGeom>
+          <a:noFill/>
+          <a:ln/>
+        </p:spPr>
+        <p:txBody>
+          <a:bodyPr wrap="square" lIns="0" tIns="0" rIns="0" bIns="0" rtlCol="0" anchor="ctr"/>
+          <a:lstStyle/>
+          <a:p>
+            <a:pPr indent="0" marL="0">
+              <a:buNone/>
+            </a:pPr>
+            <a:r>
+              <a:rPr lang="en-US" sz="2200" b="1" dirty="0">
+                <a:solidFill>
+                  <a:srgbClr val="111111"/>
+                </a:solidFill>
+                <a:latin typeface="Arial" pitchFamily="34" charset="0"/>
+                <a:ea typeface="Arial" pitchFamily="34" charset="-122"/>
+                <a:cs typeface="Arial" pitchFamily="34" charset="-120"/>
+              </a:rPr>
+              <a:t>1,22</a:t>
+            </a:r>
+            <a:pPr indent="0" marL="0">
+              <a:buNone/>
+            </a:pPr>
+            <a:endParaRPr lang="en-US" sz="2200" dirty="0"/>
+          </a:p>
+        </p:txBody>
+      </p:sp>
+      <p:sp>
+        <p:nvSpPr>
+          <p:cNvPr id="18" name="Text 16"/>
+          <p:cNvSpPr txBox="1"/>
+          <p:nvPr/>
+        </p:nvSpPr>
+        <p:spPr>
+          <a:xfrm>
+            <a:off x="6094476" y="5769864"/>
+            <a:ext cx="2521458" cy="384048"/>
+          </a:xfrm>
+          <a:prstGeom prst="rect">
+            <a:avLst/>
+          </a:prstGeom>
+          <a:noFill/>
+          <a:ln/>
+        </p:spPr>
+        <p:txBody>
+          <a:bodyPr wrap="square" lIns="0" tIns="0" rIns="0" bIns="0" rtlCol="0" anchor="t"/>
+          <a:lstStyle/>
+          <a:p>
+            <a:pPr indent="0" marL="0">
+              <a:lnSpc>
+                <a:spcPts val="1100"/>
+              </a:lnSpc>
+              <a:buNone/>
+            </a:pPr>
+            <a:r>
+              <a:rPr lang="en-US" sz="800" spc="30" kern="0" dirty="0">
+                <a:solidFill>
+                  <a:srgbClr val="8A8A8A"/>
+                </a:solidFill>
+                <a:latin typeface="Arial" pitchFamily="34" charset="0"/>
+                <a:ea typeface="Arial" pitchFamily="34" charset="-122"/>
+                <a:cs typeface="Arial" pitchFamily="34" charset="-120"/>
+              </a:rPr>
+              <a:t>КОЭФФИЦИЕНТ ИСПОЛЬЗОВАНИЯ ТЕРРИТОРИИ</a:t>
+            </a:r>
+            <a:endParaRPr lang="en-US" sz="800" dirty="0"/>
+          </a:p>
+        </p:txBody>
+      </p:sp>
+      <p:sp>
+        <p:nvSpPr>
+          <p:cNvPr id="19" name="Text 17"/>
+          <p:cNvSpPr txBox="1"/>
+          <p:nvPr/>
+        </p:nvSpPr>
+        <p:spPr>
+          <a:xfrm>
+            <a:off x="8890254" y="5349240"/>
+            <a:ext cx="2521458" cy="402336"/>
+          </a:xfrm>
+          <a:prstGeom prst="rect">
+            <a:avLst/>
+          </a:prstGeom>
+          <a:noFill/>
+          <a:ln/>
+        </p:spPr>
+        <p:txBody>
+          <a:bodyPr wrap="square" lIns="0" tIns="0" rIns="0" bIns="0" rtlCol="0" anchor="ctr"/>
+          <a:lstStyle/>
+          <a:p>
+            <a:pPr indent="0" marL="0">
+              <a:buNone/>
+            </a:pPr>
+            <a:r>
+              <a:rPr lang="en-US" sz="2200" b="1" dirty="0">
+                <a:solidFill>
+                  <a:srgbClr val="111111"/>
+                </a:solidFill>
+                <a:latin typeface="Arial" pitchFamily="34" charset="0"/>
+                <a:ea typeface="Arial" pitchFamily="34" charset="-122"/>
+                <a:cs typeface="Arial" pitchFamily="34" charset="-120"/>
+              </a:rPr>
+              <a:t>64,7</a:t>
+            </a:r>
+            <a:pPr indent="0" marL="0">
+              <a:buNone/>
+            </a:pPr>
+            <a:r>
+              <a:rPr lang="en-US" sz="1100" b="1" dirty="0">
+                <a:solidFill>
+                  <a:srgbClr val="FF4D23"/>
+                </a:solidFill>
+                <a:latin typeface="Arial" pitchFamily="34" charset="0"/>
+                <a:ea typeface="Arial" pitchFamily="34" charset="-122"/>
+                <a:cs typeface="Arial" pitchFamily="34" charset="-120"/>
+              </a:rPr>
+              <a:t> %</a:t>
+            </a:r>
+            <a:endParaRPr lang="en-US" sz="2200" dirty="0"/>
+          </a:p>
+        </p:txBody>
+      </p:sp>
+      <p:sp>
+        <p:nvSpPr>
+          <p:cNvPr id="20" name="Text 18"/>
+          <p:cNvSpPr txBox="1"/>
+          <p:nvPr/>
+        </p:nvSpPr>
+        <p:spPr>
+          <a:xfrm>
+            <a:off x="8890254" y="5769864"/>
+            <a:ext cx="2521458" cy="384048"/>
+          </a:xfrm>
+          <a:prstGeom prst="rect">
+            <a:avLst/>
+          </a:prstGeom>
+          <a:noFill/>
+          <a:ln/>
+        </p:spPr>
+        <p:txBody>
+          <a:bodyPr wrap="square" lIns="0" tIns="0" rIns="0" bIns="0" rtlCol="0" anchor="t"/>
+          <a:lstStyle/>
+          <a:p>
+            <a:pPr indent="0" marL="0">
+              <a:lnSpc>
+                <a:spcPts val="1100"/>
+              </a:lnSpc>
+              <a:buNone/>
+            </a:pPr>
+            <a:r>
+              <a:rPr lang="en-US" sz="800" spc="30" kern="0" dirty="0">
+                <a:solidFill>
+                  <a:srgbClr val="8A8A8A"/>
+                </a:solidFill>
+                <a:latin typeface="Arial" pitchFamily="34" charset="0"/>
+                <a:ea typeface="Arial" pitchFamily="34" charset="-122"/>
+                <a:cs typeface="Arial" pitchFamily="34" charset="-120"/>
+              </a:rPr>
+              <a:t>СВОБОДНО ОТ ЗАСТРОЙКИ</a:t>
+            </a:r>
+            <a:endParaRPr lang="en-US" sz="800" dirty="0"/>
           </a:p>
         </p:txBody>
       </p:sp>
       <p:pic>
         <p:nvPicPr>
-          <p:cNvPr id="30" name="Image 0" descr="/tmp/claude-0/-home-user-most/9fc1ec31-3c64-5a82-aadb-ddb23fff6e53/scratchpad/assets/logo_most.png">    </p:cNvPr>
+          <p:cNvPr id="21" name="Image 0" descr="/tmp/claude-0/-home-user-most/9fc1ec31-3c64-5a82-aadb-ddb23fff6e53/scratchpad/assets/logo_most.png">    </p:cNvPr>
           <p:cNvPicPr>
             <a:picLocks noChangeAspect="1"/>
           </p:cNvPicPr>
@@ -8823,7 +8199,7 @@
       </p:pic>
       <p:sp>
         <p:nvSpPr>
-          <p:cNvPr id="31" name="Text 28"/>
+          <p:cNvPr id="22" name="Text 19"/>
           <p:cNvSpPr txBox="1"/>
           <p:nvPr/>
         </p:nvSpPr>
@@ -8894,6 +8270,1296 @@
       </p:grpSpPr>
       <p:sp>
         <p:nvSpPr>
+          <p:cNvPr id="2" name="Text 0"/>
+          <p:cNvSpPr txBox="1"/>
+          <p:nvPr/>
+        </p:nvSpPr>
+        <p:spPr>
+          <a:xfrm>
+            <a:off x="219456" y="164592"/>
+            <a:ext cx="6400800" cy="219456"/>
+          </a:xfrm>
+          <a:prstGeom prst="rect">
+            <a:avLst/>
+          </a:prstGeom>
+          <a:noFill/>
+          <a:ln/>
+        </p:spPr>
+        <p:txBody>
+          <a:bodyPr wrap="square" lIns="0" tIns="0" rIns="0" bIns="0" rtlCol="0" anchor="ctr"/>
+          <a:lstStyle/>
+          <a:p>
+            <a:pPr indent="0" marL="0">
+              <a:buNone/>
+            </a:pPr>
+            <a:r>
+              <a:rPr lang="en-US" sz="950" b="1" spc="60" kern="0" dirty="0">
+                <a:solidFill>
+                  <a:srgbClr val="111111"/>
+                </a:solidFill>
+                <a:latin typeface="Arial" pitchFamily="34" charset="0"/>
+                <a:ea typeface="Arial" pitchFamily="34" charset="-122"/>
+                <a:cs typeface="Arial" pitchFamily="34" charset="-120"/>
+              </a:rPr>
+              <a:t>ЭФФЕКТ</a:t>
+            </a:r>
+            <a:endParaRPr lang="en-US" sz="950" dirty="0"/>
+          </a:p>
+        </p:txBody>
+      </p:sp>
+      <p:sp>
+        <p:nvSpPr>
+          <p:cNvPr id="3" name="Text 1"/>
+          <p:cNvSpPr txBox="1"/>
+          <p:nvPr/>
+        </p:nvSpPr>
+        <p:spPr>
+          <a:xfrm>
+            <a:off x="219456" y="374904"/>
+            <a:ext cx="6400800" cy="201168"/>
+          </a:xfrm>
+          <a:prstGeom prst="rect">
+            <a:avLst/>
+          </a:prstGeom>
+          <a:noFill/>
+          <a:ln/>
+        </p:spPr>
+        <p:txBody>
+          <a:bodyPr wrap="square" lIns="0" tIns="0" rIns="0" bIns="0" rtlCol="0" anchor="ctr"/>
+          <a:lstStyle/>
+          <a:p>
+            <a:pPr indent="0" marL="0">
+              <a:buNone/>
+            </a:pPr>
+            <a:r>
+              <a:rPr lang="en-US" sz="900" dirty="0">
+                <a:solidFill>
+                  <a:srgbClr val="111111"/>
+                </a:solidFill>
+                <a:latin typeface="Arial" pitchFamily="34" charset="0"/>
+                <a:ea typeface="Arial" pitchFamily="34" charset="-122"/>
+                <a:cs typeface="Arial" pitchFamily="34" charset="-120"/>
+              </a:rPr>
+              <a:t>Социально-экономический эффект</a:t>
+            </a:r>
+            <a:endParaRPr lang="en-US" sz="900" dirty="0"/>
+          </a:p>
+        </p:txBody>
+      </p:sp>
+      <p:sp>
+        <p:nvSpPr>
+          <p:cNvPr id="4" name="Text 2"/>
+          <p:cNvSpPr txBox="1"/>
+          <p:nvPr/>
+        </p:nvSpPr>
+        <p:spPr>
+          <a:xfrm>
+            <a:off x="5571439" y="164592"/>
+            <a:ext cx="6400800" cy="219456"/>
+          </a:xfrm>
+          <a:prstGeom prst="rect">
+            <a:avLst/>
+          </a:prstGeom>
+          <a:noFill/>
+          <a:ln/>
+        </p:spPr>
+        <p:txBody>
+          <a:bodyPr wrap="square" lIns="0" tIns="0" rIns="0" bIns="0" rtlCol="0" anchor="ctr"/>
+          <a:lstStyle/>
+          <a:p>
+            <a:pPr algn="r" indent="0" marL="0">
+              <a:buNone/>
+            </a:pPr>
+            <a:r>
+              <a:rPr lang="en-US" sz="950" spc="60" kern="0" dirty="0">
+                <a:solidFill>
+                  <a:srgbClr val="FF4D23"/>
+                </a:solidFill>
+                <a:latin typeface="Arial" pitchFamily="34" charset="0"/>
+                <a:ea typeface="Arial" pitchFamily="34" charset="-122"/>
+                <a:cs typeface="Arial" pitchFamily="34" charset="-120"/>
+              </a:rPr>
+              <a:t>ДЛЯ ГОРОДА</a:t>
+            </a:r>
+            <a:endParaRPr lang="en-US" sz="950" dirty="0"/>
+          </a:p>
+        </p:txBody>
+      </p:sp>
+      <p:sp>
+        <p:nvSpPr>
+          <p:cNvPr id="5" name="Text 3"/>
+          <p:cNvSpPr txBox="1"/>
+          <p:nvPr/>
+        </p:nvSpPr>
+        <p:spPr>
+          <a:xfrm>
+            <a:off x="502920" y="1051560"/>
+            <a:ext cx="3383280" cy="402336"/>
+          </a:xfrm>
+          <a:prstGeom prst="rect">
+            <a:avLst/>
+          </a:prstGeom>
+          <a:noFill/>
+          <a:ln/>
+        </p:spPr>
+        <p:txBody>
+          <a:bodyPr wrap="square" lIns="0" tIns="0" rIns="0" bIns="0" rtlCol="0" anchor="ctr"/>
+          <a:lstStyle/>
+          <a:p>
+            <a:pPr indent="0" marL="0">
+              <a:buNone/>
+            </a:pPr>
+            <a:r>
+              <a:rPr lang="en-US" sz="2400" b="1" dirty="0">
+                <a:solidFill>
+                  <a:srgbClr val="111111"/>
+                </a:solidFill>
+                <a:latin typeface="Arial" pitchFamily="34" charset="0"/>
+                <a:ea typeface="Arial" pitchFamily="34" charset="-122"/>
+                <a:cs typeface="Arial" pitchFamily="34" charset="-120"/>
+              </a:rPr>
+              <a:t>260 – 300</a:t>
+            </a:r>
+            <a:pPr indent="0" marL="0">
+              <a:buNone/>
+            </a:pPr>
+            <a:endParaRPr lang="en-US" sz="2400" dirty="0"/>
+          </a:p>
+        </p:txBody>
+      </p:sp>
+      <p:sp>
+        <p:nvSpPr>
+          <p:cNvPr id="6" name="Text 4"/>
+          <p:cNvSpPr txBox="1"/>
+          <p:nvPr/>
+        </p:nvSpPr>
+        <p:spPr>
+          <a:xfrm>
+            <a:off x="502920" y="1472184"/>
+            <a:ext cx="3383280" cy="457200"/>
+          </a:xfrm>
+          <a:prstGeom prst="rect">
+            <a:avLst/>
+          </a:prstGeom>
+          <a:noFill/>
+          <a:ln/>
+        </p:spPr>
+        <p:txBody>
+          <a:bodyPr wrap="square" lIns="0" tIns="0" rIns="0" bIns="0" rtlCol="0" anchor="t"/>
+          <a:lstStyle/>
+          <a:p>
+            <a:pPr indent="0" marL="0">
+              <a:lnSpc>
+                <a:spcPts val="1100"/>
+              </a:lnSpc>
+              <a:buNone/>
+            </a:pPr>
+            <a:r>
+              <a:rPr lang="en-US" sz="800" spc="30" kern="0" dirty="0">
+                <a:solidFill>
+                  <a:srgbClr val="8A8A8A"/>
+                </a:solidFill>
+                <a:latin typeface="Arial" pitchFamily="34" charset="0"/>
+                <a:ea typeface="Arial" pitchFamily="34" charset="-122"/>
+                <a:cs typeface="Arial" pitchFamily="34" charset="-120"/>
+              </a:rPr>
+              <a:t>НОМЕРОВ 4 ЗВЕЗДЫ К ФОНДУ АЛМАТЫ (ОЦЕНКА)</a:t>
+            </a:r>
+            <a:endParaRPr lang="en-US" sz="800" dirty="0"/>
+          </a:p>
+        </p:txBody>
+      </p:sp>
+      <p:sp>
+        <p:nvSpPr>
+          <p:cNvPr id="7" name="Text 5"/>
+          <p:cNvSpPr txBox="1"/>
+          <p:nvPr/>
+        </p:nvSpPr>
+        <p:spPr>
+          <a:xfrm>
+            <a:off x="4160520" y="1051560"/>
+            <a:ext cx="3383280" cy="402336"/>
+          </a:xfrm>
+          <a:prstGeom prst="rect">
+            <a:avLst/>
+          </a:prstGeom>
+          <a:noFill/>
+          <a:ln/>
+        </p:spPr>
+        <p:txBody>
+          <a:bodyPr wrap="square" lIns="0" tIns="0" rIns="0" bIns="0" rtlCol="0" anchor="ctr"/>
+          <a:lstStyle/>
+          <a:p>
+            <a:pPr indent="0" marL="0">
+              <a:buNone/>
+            </a:pPr>
+            <a:r>
+              <a:rPr lang="en-US" sz="2400" b="1" dirty="0">
+                <a:solidFill>
+                  <a:srgbClr val="111111"/>
+                </a:solidFill>
+                <a:latin typeface="Arial" pitchFamily="34" charset="0"/>
+                <a:ea typeface="Arial" pitchFamily="34" charset="-122"/>
+                <a:cs typeface="Arial" pitchFamily="34" charset="-120"/>
+              </a:rPr>
+              <a:t>160 – 210</a:t>
+            </a:r>
+            <a:pPr indent="0" marL="0">
+              <a:buNone/>
+            </a:pPr>
+            <a:endParaRPr lang="en-US" sz="2400" dirty="0"/>
+          </a:p>
+        </p:txBody>
+      </p:sp>
+      <p:sp>
+        <p:nvSpPr>
+          <p:cNvPr id="8" name="Text 6"/>
+          <p:cNvSpPr txBox="1"/>
+          <p:nvPr/>
+        </p:nvSpPr>
+        <p:spPr>
+          <a:xfrm>
+            <a:off x="4160520" y="1472184"/>
+            <a:ext cx="3383280" cy="457200"/>
+          </a:xfrm>
+          <a:prstGeom prst="rect">
+            <a:avLst/>
+          </a:prstGeom>
+          <a:noFill/>
+          <a:ln/>
+        </p:spPr>
+        <p:txBody>
+          <a:bodyPr wrap="square" lIns="0" tIns="0" rIns="0" bIns="0" rtlCol="0" anchor="t"/>
+          <a:lstStyle/>
+          <a:p>
+            <a:pPr indent="0" marL="0">
+              <a:lnSpc>
+                <a:spcPts val="1100"/>
+              </a:lnSpc>
+              <a:buNone/>
+            </a:pPr>
+            <a:r>
+              <a:rPr lang="en-US" sz="800" spc="30" kern="0" dirty="0">
+                <a:solidFill>
+                  <a:srgbClr val="8A8A8A"/>
+                </a:solidFill>
+                <a:latin typeface="Arial" pitchFamily="34" charset="0"/>
+                <a:ea typeface="Arial" pitchFamily="34" charset="-122"/>
+                <a:cs typeface="Arial" pitchFamily="34" charset="-120"/>
+              </a:rPr>
+              <a:t>ПОСТОЯННЫХ РАБОЧИХ МЕСТ В ГОСТИНИЦЕ (ОЦЕНКА)</a:t>
+            </a:r>
+            <a:endParaRPr lang="en-US" sz="800" dirty="0"/>
+          </a:p>
+        </p:txBody>
+      </p:sp>
+      <p:sp>
+        <p:nvSpPr>
+          <p:cNvPr id="9" name="Text 7"/>
+          <p:cNvSpPr txBox="1"/>
+          <p:nvPr/>
+        </p:nvSpPr>
+        <p:spPr>
+          <a:xfrm>
+            <a:off x="7818120" y="1051560"/>
+            <a:ext cx="3383280" cy="402336"/>
+          </a:xfrm>
+          <a:prstGeom prst="rect">
+            <a:avLst/>
+          </a:prstGeom>
+          <a:noFill/>
+          <a:ln/>
+        </p:spPr>
+        <p:txBody>
+          <a:bodyPr wrap="square" lIns="0" tIns="0" rIns="0" bIns="0" rtlCol="0" anchor="ctr"/>
+          <a:lstStyle/>
+          <a:p>
+            <a:pPr indent="0" marL="0">
+              <a:buNone/>
+            </a:pPr>
+            <a:r>
+              <a:rPr lang="en-US" sz="2400" b="1" dirty="0">
+                <a:solidFill>
+                  <a:srgbClr val="111111"/>
+                </a:solidFill>
+                <a:latin typeface="Arial" pitchFamily="34" charset="0"/>
+                <a:ea typeface="Arial" pitchFamily="34" charset="-122"/>
+                <a:cs typeface="Arial" pitchFamily="34" charset="-120"/>
+              </a:rPr>
+              <a:t>17 140</a:t>
+            </a:r>
+            <a:pPr indent="0" marL="0">
+              <a:buNone/>
+            </a:pPr>
+            <a:r>
+              <a:rPr lang="en-US" sz="1100" b="1" dirty="0">
+                <a:solidFill>
+                  <a:srgbClr val="FF4D23"/>
+                </a:solidFill>
+                <a:latin typeface="Arial" pitchFamily="34" charset="0"/>
+                <a:ea typeface="Arial" pitchFamily="34" charset="-122"/>
+                <a:cs typeface="Arial" pitchFamily="34" charset="-120"/>
+              </a:rPr>
+              <a:t> м²</a:t>
+            </a:r>
+            <a:endParaRPr lang="en-US" sz="2400" dirty="0"/>
+          </a:p>
+        </p:txBody>
+      </p:sp>
+      <p:sp>
+        <p:nvSpPr>
+          <p:cNvPr id="10" name="Text 8"/>
+          <p:cNvSpPr txBox="1"/>
+          <p:nvPr/>
+        </p:nvSpPr>
+        <p:spPr>
+          <a:xfrm>
+            <a:off x="7818120" y="1472184"/>
+            <a:ext cx="3383280" cy="457200"/>
+          </a:xfrm>
+          <a:prstGeom prst="rect">
+            <a:avLst/>
+          </a:prstGeom>
+          <a:noFill/>
+          <a:ln/>
+        </p:spPr>
+        <p:txBody>
+          <a:bodyPr wrap="square" lIns="0" tIns="0" rIns="0" bIns="0" rtlCol="0" anchor="t"/>
+          <a:lstStyle/>
+          <a:p>
+            <a:pPr indent="0" marL="0">
+              <a:lnSpc>
+                <a:spcPts val="1100"/>
+              </a:lnSpc>
+              <a:buNone/>
+            </a:pPr>
+            <a:r>
+              <a:rPr lang="en-US" sz="800" spc="30" kern="0" dirty="0">
+                <a:solidFill>
+                  <a:srgbClr val="8A8A8A"/>
+                </a:solidFill>
+                <a:latin typeface="Arial" pitchFamily="34" charset="0"/>
+                <a:ea typeface="Arial" pitchFamily="34" charset="-122"/>
+                <a:cs typeface="Arial" pitchFamily="34" charset="-120"/>
+              </a:rPr>
+              <a:t>ВВОД НОВЫХ ПЛОЩАДЕЙ В НАЛОГООБЛАГАЕМУЮ БАЗУ</a:t>
+            </a:r>
+            <a:endParaRPr lang="en-US" sz="800" dirty="0"/>
+          </a:p>
+        </p:txBody>
+      </p:sp>
+      <p:sp>
+        <p:nvSpPr>
+          <p:cNvPr id="11" name="Shape 9"/>
+          <p:cNvSpPr/>
+          <p:nvPr/>
+        </p:nvSpPr>
+        <p:spPr>
+          <a:xfrm>
+            <a:off x="502920" y="2286000"/>
+            <a:ext cx="11183112" cy="7315"/>
+          </a:xfrm>
+          <a:prstGeom prst="rect">
+            <a:avLst/>
+          </a:prstGeom>
+          <a:solidFill>
+            <a:srgbClr val="DCDCDC"/>
+          </a:solidFill>
+          <a:ln w="12700">
+            <a:solidFill>
+              <a:srgbClr val="DCDCDC"/>
+            </a:solidFill>
+            <a:prstDash val="solid"/>
+          </a:ln>
+        </p:spPr>
+      </p:sp>
+      <p:sp>
+        <p:nvSpPr>
+          <p:cNvPr id="12" name="Text 10"/>
+          <p:cNvSpPr txBox="1"/>
+          <p:nvPr/>
+        </p:nvSpPr>
+        <p:spPr>
+          <a:xfrm>
+            <a:off x="502920" y="2542032"/>
+            <a:ext cx="5577840" cy="3108960"/>
+          </a:xfrm>
+          <a:prstGeom prst="rect">
+            <a:avLst/>
+          </a:prstGeom>
+          <a:noFill/>
+          <a:ln/>
+        </p:spPr>
+        <p:txBody>
+          <a:bodyPr wrap="square" lIns="0" tIns="0" rIns="0" bIns="0" rtlCol="0" anchor="t"/>
+          <a:lstStyle/>
+          <a:p>
+            <a:pPr indent="0" marL="0">
+              <a:lnSpc>
+                <a:spcPts val="1600"/>
+              </a:lnSpc>
+              <a:spcAft>
+                <a:spcPts val="1300"/>
+              </a:spcAft>
+              <a:buNone/>
+            </a:pPr>
+            <a:r>
+              <a:rPr lang="en-US" sz="1100" dirty="0">
+                <a:solidFill>
+                  <a:srgbClr val="FF4D23"/>
+                </a:solidFill>
+                <a:latin typeface="Arial" pitchFamily="34" charset="0"/>
+                <a:ea typeface="Arial" pitchFamily="34" charset="-122"/>
+                <a:cs typeface="Arial" pitchFamily="34" charset="-120"/>
+              </a:rPr>
+              <a:t>– </a:t>
+            </a:r>
+            <a:pPr indent="0" marL="0">
+              <a:lnSpc>
+                <a:spcPts val="1600"/>
+              </a:lnSpc>
+              <a:spcAft>
+                <a:spcPts val="1300"/>
+              </a:spcAft>
+              <a:buNone/>
+            </a:pPr>
+            <a:r>
+              <a:rPr lang="en-US" sz="1100" dirty="0">
+                <a:solidFill>
+                  <a:srgbClr val="333333"/>
+                </a:solidFill>
+                <a:latin typeface="Arial" pitchFamily="34" charset="0"/>
+                <a:ea typeface="Arial" pitchFamily="34" charset="-122"/>
+                <a:cs typeface="Arial" pitchFamily="34" charset="-120"/>
+              </a:rPr>
+              <a:t>Загрузка ранее неиспользуемого участка: свободная территория в деловом окружении получает капитальную функцию без сноса и расселения.</a:t>
+            </a:r>
+            <a:endParaRPr lang="en-US" sz="1100" dirty="0"/>
+          </a:p>
+          <a:p>
+            <a:pPr indent="0" marL="0">
+              <a:lnSpc>
+                <a:spcPts val="1600"/>
+              </a:lnSpc>
+              <a:spcAft>
+                <a:spcPts val="1300"/>
+              </a:spcAft>
+              <a:buNone/>
+            </a:pPr>
+            <a:r>
+              <a:rPr lang="en-US" sz="1100" dirty="0">
+                <a:solidFill>
+                  <a:srgbClr val="FF4D23"/>
+                </a:solidFill>
+                <a:latin typeface="Arial" pitchFamily="34" charset="0"/>
+                <a:ea typeface="Arial" pitchFamily="34" charset="-122"/>
+                <a:cs typeface="Arial" pitchFamily="34" charset="-120"/>
+              </a:rPr>
+              <a:t>– </a:t>
+            </a:r>
+            <a:pPr indent="0" marL="0">
+              <a:lnSpc>
+                <a:spcPts val="1600"/>
+              </a:lnSpc>
+              <a:spcAft>
+                <a:spcPts val="1300"/>
+              </a:spcAft>
+              <a:buNone/>
+            </a:pPr>
+            <a:r>
+              <a:rPr lang="en-US" sz="1100" dirty="0">
+                <a:solidFill>
+                  <a:srgbClr val="333333"/>
+                </a:solidFill>
+                <a:latin typeface="Arial" pitchFamily="34" charset="0"/>
+                <a:ea typeface="Arial" pitchFamily="34" charset="-122"/>
+                <a:cs typeface="Arial" pitchFamily="34" charset="-120"/>
+              </a:rPr>
+              <a:t>Круглогодичный турпоток: деловой сегмент зимой и осенью, горный и событийный туризм летом.</a:t>
+            </a:r>
+            <a:endParaRPr lang="en-US" sz="1100" dirty="0"/>
+          </a:p>
+          <a:p>
+            <a:pPr indent="0" marL="0">
+              <a:lnSpc>
+                <a:spcPts val="1600"/>
+              </a:lnSpc>
+              <a:spcAft>
+                <a:spcPts val="1300"/>
+              </a:spcAft>
+              <a:buNone/>
+            </a:pPr>
+            <a:r>
+              <a:rPr lang="en-US" sz="1100" dirty="0">
+                <a:solidFill>
+                  <a:srgbClr val="FF4D23"/>
+                </a:solidFill>
+                <a:latin typeface="Arial" pitchFamily="34" charset="0"/>
+                <a:ea typeface="Arial" pitchFamily="34" charset="-122"/>
+                <a:cs typeface="Arial" pitchFamily="34" charset="-120"/>
+              </a:rPr>
+              <a:t>– </a:t>
+            </a:r>
+            <a:pPr indent="0" marL="0">
+              <a:lnSpc>
+                <a:spcPts val="1600"/>
+              </a:lnSpc>
+              <a:spcAft>
+                <a:spcPts val="1300"/>
+              </a:spcAft>
+              <a:buNone/>
+            </a:pPr>
+            <a:r>
+              <a:rPr lang="en-US" sz="1100" dirty="0">
+                <a:solidFill>
+                  <a:srgbClr val="333333"/>
+                </a:solidFill>
+                <a:latin typeface="Arial" pitchFamily="34" charset="0"/>
+                <a:ea typeface="Arial" pitchFamily="34" charset="-122"/>
+                <a:cs typeface="Arial" pitchFamily="34" charset="-120"/>
+              </a:rPr>
+              <a:t>Общественные функции для района: рестораны и конференц-зона первого этажа работают на город, а не только на постояльцев.</a:t>
+            </a:r>
+            <a:endParaRPr lang="en-US" sz="1100" dirty="0"/>
+          </a:p>
+          <a:p>
+            <a:pPr indent="0" marL="0">
+              <a:lnSpc>
+                <a:spcPts val="1600"/>
+              </a:lnSpc>
+              <a:spcAft>
+                <a:spcPts val="1300"/>
+              </a:spcAft>
+              <a:buNone/>
+            </a:pPr>
+            <a:r>
+              <a:rPr lang="en-US" sz="1100" dirty="0">
+                <a:solidFill>
+                  <a:srgbClr val="FF4D23"/>
+                </a:solidFill>
+                <a:latin typeface="Arial" pitchFamily="34" charset="0"/>
+                <a:ea typeface="Arial" pitchFamily="34" charset="-122"/>
+                <a:cs typeface="Arial" pitchFamily="34" charset="-120"/>
+              </a:rPr>
+              <a:t>– </a:t>
+            </a:r>
+            <a:pPr indent="0" marL="0">
+              <a:lnSpc>
+                <a:spcPts val="1600"/>
+              </a:lnSpc>
+              <a:spcAft>
+                <a:spcPts val="1300"/>
+              </a:spcAft>
+              <a:buNone/>
+            </a:pPr>
+            <a:r>
+              <a:rPr lang="en-US" sz="1100" dirty="0">
+                <a:solidFill>
+                  <a:srgbClr val="333333"/>
+                </a:solidFill>
+                <a:latin typeface="Arial" pitchFamily="34" charset="0"/>
+                <a:ea typeface="Arial" pitchFamily="34" charset="-122"/>
+                <a:cs typeface="Arial" pitchFamily="34" charset="-120"/>
+              </a:rPr>
+              <a:t>4 446,9 м² общественного первого этажа — новая точка притяжения в квартале, доступная не только постояльцам.</a:t>
+            </a:r>
+            <a:endParaRPr lang="en-US" sz="1100" dirty="0"/>
+          </a:p>
+        </p:txBody>
+      </p:sp>
+      <p:sp>
+        <p:nvSpPr>
+          <p:cNvPr id="13" name="Text 11"/>
+          <p:cNvSpPr txBox="1"/>
+          <p:nvPr/>
+        </p:nvSpPr>
+        <p:spPr>
+          <a:xfrm>
+            <a:off x="6766560" y="2542032"/>
+            <a:ext cx="4858207" cy="201168"/>
+          </a:xfrm>
+          <a:prstGeom prst="rect">
+            <a:avLst/>
+          </a:prstGeom>
+          <a:noFill/>
+          <a:ln/>
+        </p:spPr>
+        <p:txBody>
+          <a:bodyPr wrap="square" lIns="0" tIns="0" rIns="0" bIns="0" rtlCol="0" anchor="ctr"/>
+          <a:lstStyle/>
+          <a:p>
+            <a:pPr indent="0" marL="0">
+              <a:buNone/>
+            </a:pPr>
+            <a:r>
+              <a:rPr lang="en-US" sz="850" spc="30" kern="0" dirty="0">
+                <a:solidFill>
+                  <a:srgbClr val="FF4D23"/>
+                </a:solidFill>
+                <a:latin typeface="Arial" pitchFamily="34" charset="0"/>
+                <a:ea typeface="Arial" pitchFamily="34" charset="-122"/>
+                <a:cs typeface="Arial" pitchFamily="34" charset="-120"/>
+              </a:rPr>
+              <a:t>ПОКАЗАТЕЛИ, КОТОРЫЕ ВНОСИТ ЗАКАЗЧИК</a:t>
+            </a:r>
+            <a:endParaRPr lang="en-US" sz="850" dirty="0"/>
+          </a:p>
+        </p:txBody>
+      </p:sp>
+      <p:sp>
+        <p:nvSpPr>
+          <p:cNvPr id="14" name="Text 12"/>
+          <p:cNvSpPr txBox="1"/>
+          <p:nvPr/>
+        </p:nvSpPr>
+        <p:spPr>
+          <a:xfrm>
+            <a:off x="6766560" y="2907792"/>
+            <a:ext cx="3012088" cy="274320"/>
+          </a:xfrm>
+          <a:prstGeom prst="rect">
+            <a:avLst/>
+          </a:prstGeom>
+          <a:noFill/>
+          <a:ln/>
+        </p:spPr>
+        <p:txBody>
+          <a:bodyPr wrap="square" lIns="0" tIns="0" rIns="0" bIns="0" rtlCol="0" anchor="ctr"/>
+          <a:lstStyle/>
+          <a:p>
+            <a:pPr indent="0" marL="0">
+              <a:buNone/>
+            </a:pPr>
+            <a:r>
+              <a:rPr lang="en-US" sz="1000" dirty="0">
+                <a:solidFill>
+                  <a:srgbClr val="333333"/>
+                </a:solidFill>
+                <a:latin typeface="Arial" pitchFamily="34" charset="0"/>
+                <a:ea typeface="Arial" pitchFamily="34" charset="-122"/>
+                <a:cs typeface="Arial" pitchFamily="34" charset="-120"/>
+              </a:rPr>
+              <a:t>Объём инвестиций, млрд ₸</a:t>
+            </a:r>
+            <a:endParaRPr lang="en-US" sz="1000" dirty="0"/>
+          </a:p>
+        </p:txBody>
+      </p:sp>
+      <p:sp>
+        <p:nvSpPr>
+          <p:cNvPr id="15" name="Text 13"/>
+          <p:cNvSpPr txBox="1"/>
+          <p:nvPr/>
+        </p:nvSpPr>
+        <p:spPr>
+          <a:xfrm>
+            <a:off x="9778648" y="2907792"/>
+            <a:ext cx="1846119" cy="274320"/>
+          </a:xfrm>
+          <a:prstGeom prst="rect">
+            <a:avLst/>
+          </a:prstGeom>
+          <a:noFill/>
+          <a:ln/>
+        </p:spPr>
+        <p:txBody>
+          <a:bodyPr wrap="square" lIns="0" tIns="0" rIns="0" bIns="0" rtlCol="0" anchor="ctr"/>
+          <a:lstStyle/>
+          <a:p>
+            <a:pPr algn="r" indent="0" marL="0">
+              <a:buNone/>
+            </a:pPr>
+            <a:r>
+              <a:rPr lang="en-US" sz="1000" dirty="0">
+                <a:solidFill>
+                  <a:srgbClr val="FF4D23"/>
+                </a:solidFill>
+                <a:latin typeface="Arial" pitchFamily="34" charset="0"/>
+                <a:ea typeface="Arial" pitchFamily="34" charset="-122"/>
+                <a:cs typeface="Arial" pitchFamily="34" charset="-120"/>
+              </a:rPr>
+              <a:t>____________</a:t>
+            </a:r>
+            <a:endParaRPr lang="en-US" sz="1000" dirty="0"/>
+          </a:p>
+        </p:txBody>
+      </p:sp>
+      <p:sp>
+        <p:nvSpPr>
+          <p:cNvPr id="16" name="Shape 14"/>
+          <p:cNvSpPr/>
+          <p:nvPr/>
+        </p:nvSpPr>
+        <p:spPr>
+          <a:xfrm>
+            <a:off x="6766560" y="3218688"/>
+            <a:ext cx="4858207" cy="7315"/>
+          </a:xfrm>
+          <a:prstGeom prst="rect">
+            <a:avLst/>
+          </a:prstGeom>
+          <a:solidFill>
+            <a:srgbClr val="DCDCDC"/>
+          </a:solidFill>
+          <a:ln w="12700">
+            <a:solidFill>
+              <a:srgbClr val="DCDCDC"/>
+            </a:solidFill>
+            <a:prstDash val="solid"/>
+          </a:ln>
+        </p:spPr>
+      </p:sp>
+      <p:sp>
+        <p:nvSpPr>
+          <p:cNvPr id="17" name="Text 15"/>
+          <p:cNvSpPr txBox="1"/>
+          <p:nvPr/>
+        </p:nvSpPr>
+        <p:spPr>
+          <a:xfrm>
+            <a:off x="6766560" y="3419856"/>
+            <a:ext cx="3012088" cy="274320"/>
+          </a:xfrm>
+          <a:prstGeom prst="rect">
+            <a:avLst/>
+          </a:prstGeom>
+          <a:noFill/>
+          <a:ln/>
+        </p:spPr>
+        <p:txBody>
+          <a:bodyPr wrap="square" lIns="0" tIns="0" rIns="0" bIns="0" rtlCol="0" anchor="ctr"/>
+          <a:lstStyle/>
+          <a:p>
+            <a:pPr indent="0" marL="0">
+              <a:buNone/>
+            </a:pPr>
+            <a:r>
+              <a:rPr lang="en-US" sz="1000" dirty="0">
+                <a:solidFill>
+                  <a:srgbClr val="333333"/>
+                </a:solidFill>
+                <a:latin typeface="Arial" pitchFamily="34" charset="0"/>
+                <a:ea typeface="Arial" pitchFamily="34" charset="-122"/>
+                <a:cs typeface="Arial" pitchFamily="34" charset="-120"/>
+              </a:rPr>
+              <a:t>Налоговые поступления в год</a:t>
+            </a:r>
+            <a:endParaRPr lang="en-US" sz="1000" dirty="0"/>
+          </a:p>
+        </p:txBody>
+      </p:sp>
+      <p:sp>
+        <p:nvSpPr>
+          <p:cNvPr id="18" name="Text 16"/>
+          <p:cNvSpPr txBox="1"/>
+          <p:nvPr/>
+        </p:nvSpPr>
+        <p:spPr>
+          <a:xfrm>
+            <a:off x="9778648" y="3419856"/>
+            <a:ext cx="1846119" cy="274320"/>
+          </a:xfrm>
+          <a:prstGeom prst="rect">
+            <a:avLst/>
+          </a:prstGeom>
+          <a:noFill/>
+          <a:ln/>
+        </p:spPr>
+        <p:txBody>
+          <a:bodyPr wrap="square" lIns="0" tIns="0" rIns="0" bIns="0" rtlCol="0" anchor="ctr"/>
+          <a:lstStyle/>
+          <a:p>
+            <a:pPr algn="r" indent="0" marL="0">
+              <a:buNone/>
+            </a:pPr>
+            <a:r>
+              <a:rPr lang="en-US" sz="1000" dirty="0">
+                <a:solidFill>
+                  <a:srgbClr val="FF4D23"/>
+                </a:solidFill>
+                <a:latin typeface="Arial" pitchFamily="34" charset="0"/>
+                <a:ea typeface="Arial" pitchFamily="34" charset="-122"/>
+                <a:cs typeface="Arial" pitchFamily="34" charset="-120"/>
+              </a:rPr>
+              <a:t>____________</a:t>
+            </a:r>
+            <a:endParaRPr lang="en-US" sz="1000" dirty="0"/>
+          </a:p>
+        </p:txBody>
+      </p:sp>
+      <p:sp>
+        <p:nvSpPr>
+          <p:cNvPr id="19" name="Shape 17"/>
+          <p:cNvSpPr/>
+          <p:nvPr/>
+        </p:nvSpPr>
+        <p:spPr>
+          <a:xfrm>
+            <a:off x="6766560" y="3730752"/>
+            <a:ext cx="4858207" cy="7315"/>
+          </a:xfrm>
+          <a:prstGeom prst="rect">
+            <a:avLst/>
+          </a:prstGeom>
+          <a:solidFill>
+            <a:srgbClr val="DCDCDC"/>
+          </a:solidFill>
+          <a:ln w="12700">
+            <a:solidFill>
+              <a:srgbClr val="DCDCDC"/>
+            </a:solidFill>
+            <a:prstDash val="solid"/>
+          </a:ln>
+        </p:spPr>
+      </p:sp>
+      <p:sp>
+        <p:nvSpPr>
+          <p:cNvPr id="20" name="Text 18"/>
+          <p:cNvSpPr txBox="1"/>
+          <p:nvPr/>
+        </p:nvSpPr>
+        <p:spPr>
+          <a:xfrm>
+            <a:off x="6766560" y="3931920"/>
+            <a:ext cx="3012088" cy="274320"/>
+          </a:xfrm>
+          <a:prstGeom prst="rect">
+            <a:avLst/>
+          </a:prstGeom>
+          <a:noFill/>
+          <a:ln/>
+        </p:spPr>
+        <p:txBody>
+          <a:bodyPr wrap="square" lIns="0" tIns="0" rIns="0" bIns="0" rtlCol="0" anchor="ctr"/>
+          <a:lstStyle/>
+          <a:p>
+            <a:pPr indent="0" marL="0">
+              <a:buNone/>
+            </a:pPr>
+            <a:r>
+              <a:rPr lang="en-US" sz="1000" dirty="0">
+                <a:solidFill>
+                  <a:srgbClr val="333333"/>
+                </a:solidFill>
+                <a:latin typeface="Arial" pitchFamily="34" charset="0"/>
+                <a:ea typeface="Arial" pitchFamily="34" charset="-122"/>
+                <a:cs typeface="Arial" pitchFamily="34" charset="-120"/>
+              </a:rPr>
+              <a:t>Рабочие места на период строительства</a:t>
+            </a:r>
+            <a:endParaRPr lang="en-US" sz="1000" dirty="0"/>
+          </a:p>
+        </p:txBody>
+      </p:sp>
+      <p:sp>
+        <p:nvSpPr>
+          <p:cNvPr id="21" name="Text 19"/>
+          <p:cNvSpPr txBox="1"/>
+          <p:nvPr/>
+        </p:nvSpPr>
+        <p:spPr>
+          <a:xfrm>
+            <a:off x="9778648" y="3931920"/>
+            <a:ext cx="1846119" cy="274320"/>
+          </a:xfrm>
+          <a:prstGeom prst="rect">
+            <a:avLst/>
+          </a:prstGeom>
+          <a:noFill/>
+          <a:ln/>
+        </p:spPr>
+        <p:txBody>
+          <a:bodyPr wrap="square" lIns="0" tIns="0" rIns="0" bIns="0" rtlCol="0" anchor="ctr"/>
+          <a:lstStyle/>
+          <a:p>
+            <a:pPr algn="r" indent="0" marL="0">
+              <a:buNone/>
+            </a:pPr>
+            <a:r>
+              <a:rPr lang="en-US" sz="1000" dirty="0">
+                <a:solidFill>
+                  <a:srgbClr val="FF4D23"/>
+                </a:solidFill>
+                <a:latin typeface="Arial" pitchFamily="34" charset="0"/>
+                <a:ea typeface="Arial" pitchFamily="34" charset="-122"/>
+                <a:cs typeface="Arial" pitchFamily="34" charset="-120"/>
+              </a:rPr>
+              <a:t>____________</a:t>
+            </a:r>
+            <a:endParaRPr lang="en-US" sz="1000" dirty="0"/>
+          </a:p>
+        </p:txBody>
+      </p:sp>
+      <p:sp>
+        <p:nvSpPr>
+          <p:cNvPr id="22" name="Shape 20"/>
+          <p:cNvSpPr/>
+          <p:nvPr/>
+        </p:nvSpPr>
+        <p:spPr>
+          <a:xfrm>
+            <a:off x="6766560" y="4242816"/>
+            <a:ext cx="4858207" cy="7315"/>
+          </a:xfrm>
+          <a:prstGeom prst="rect">
+            <a:avLst/>
+          </a:prstGeom>
+          <a:solidFill>
+            <a:srgbClr val="DCDCDC"/>
+          </a:solidFill>
+          <a:ln w="12700">
+            <a:solidFill>
+              <a:srgbClr val="DCDCDC"/>
+            </a:solidFill>
+            <a:prstDash val="solid"/>
+          </a:ln>
+        </p:spPr>
+      </p:sp>
+      <p:sp>
+        <p:nvSpPr>
+          <p:cNvPr id="23" name="Text 21"/>
+          <p:cNvSpPr txBox="1"/>
+          <p:nvPr/>
+        </p:nvSpPr>
+        <p:spPr>
+          <a:xfrm>
+            <a:off x="6766560" y="4443984"/>
+            <a:ext cx="3012088" cy="274320"/>
+          </a:xfrm>
+          <a:prstGeom prst="rect">
+            <a:avLst/>
+          </a:prstGeom>
+          <a:noFill/>
+          <a:ln/>
+        </p:spPr>
+        <p:txBody>
+          <a:bodyPr wrap="square" lIns="0" tIns="0" rIns="0" bIns="0" rtlCol="0" anchor="ctr"/>
+          <a:lstStyle/>
+          <a:p>
+            <a:pPr indent="0" marL="0">
+              <a:buNone/>
+            </a:pPr>
+            <a:r>
+              <a:rPr lang="en-US" sz="1000" dirty="0">
+                <a:solidFill>
+                  <a:srgbClr val="333333"/>
+                </a:solidFill>
+                <a:latin typeface="Arial" pitchFamily="34" charset="0"/>
+                <a:ea typeface="Arial" pitchFamily="34" charset="-122"/>
+                <a:cs typeface="Arial" pitchFamily="34" charset="-120"/>
+              </a:rPr>
+              <a:t>Гостиничный оператор</a:t>
+            </a:r>
+            <a:endParaRPr lang="en-US" sz="1000" dirty="0"/>
+          </a:p>
+        </p:txBody>
+      </p:sp>
+      <p:sp>
+        <p:nvSpPr>
+          <p:cNvPr id="24" name="Text 22"/>
+          <p:cNvSpPr txBox="1"/>
+          <p:nvPr/>
+        </p:nvSpPr>
+        <p:spPr>
+          <a:xfrm>
+            <a:off x="9778648" y="4443984"/>
+            <a:ext cx="1846119" cy="274320"/>
+          </a:xfrm>
+          <a:prstGeom prst="rect">
+            <a:avLst/>
+          </a:prstGeom>
+          <a:noFill/>
+          <a:ln/>
+        </p:spPr>
+        <p:txBody>
+          <a:bodyPr wrap="square" lIns="0" tIns="0" rIns="0" bIns="0" rtlCol="0" anchor="ctr"/>
+          <a:lstStyle/>
+          <a:p>
+            <a:pPr algn="r" indent="0" marL="0">
+              <a:buNone/>
+            </a:pPr>
+            <a:r>
+              <a:rPr lang="en-US" sz="1000" dirty="0">
+                <a:solidFill>
+                  <a:srgbClr val="FF4D23"/>
+                </a:solidFill>
+                <a:latin typeface="Arial" pitchFamily="34" charset="0"/>
+                <a:ea typeface="Arial" pitchFamily="34" charset="-122"/>
+                <a:cs typeface="Arial" pitchFamily="34" charset="-120"/>
+              </a:rPr>
+              <a:t>____________</a:t>
+            </a:r>
+            <a:endParaRPr lang="en-US" sz="1000" dirty="0"/>
+          </a:p>
+        </p:txBody>
+      </p:sp>
+      <p:sp>
+        <p:nvSpPr>
+          <p:cNvPr id="25" name="Shape 23"/>
+          <p:cNvSpPr/>
+          <p:nvPr/>
+        </p:nvSpPr>
+        <p:spPr>
+          <a:xfrm>
+            <a:off x="6766560" y="4754880"/>
+            <a:ext cx="4858207" cy="7315"/>
+          </a:xfrm>
+          <a:prstGeom prst="rect">
+            <a:avLst/>
+          </a:prstGeom>
+          <a:solidFill>
+            <a:srgbClr val="DCDCDC"/>
+          </a:solidFill>
+          <a:ln w="12700">
+            <a:solidFill>
+              <a:srgbClr val="DCDCDC"/>
+            </a:solidFill>
+            <a:prstDash val="solid"/>
+          </a:ln>
+        </p:spPr>
+      </p:sp>
+      <p:sp>
+        <p:nvSpPr>
+          <p:cNvPr id="26" name="Text 24"/>
+          <p:cNvSpPr txBox="1"/>
+          <p:nvPr/>
+        </p:nvSpPr>
+        <p:spPr>
+          <a:xfrm>
+            <a:off x="6766560" y="4956048"/>
+            <a:ext cx="3012088" cy="274320"/>
+          </a:xfrm>
+          <a:prstGeom prst="rect">
+            <a:avLst/>
+          </a:prstGeom>
+          <a:noFill/>
+          <a:ln/>
+        </p:spPr>
+        <p:txBody>
+          <a:bodyPr wrap="square" lIns="0" tIns="0" rIns="0" bIns="0" rtlCol="0" anchor="ctr"/>
+          <a:lstStyle/>
+          <a:p>
+            <a:pPr indent="0" marL="0">
+              <a:buNone/>
+            </a:pPr>
+            <a:r>
+              <a:rPr lang="en-US" sz="1000" dirty="0">
+                <a:solidFill>
+                  <a:srgbClr val="333333"/>
+                </a:solidFill>
+                <a:latin typeface="Arial" pitchFamily="34" charset="0"/>
+                <a:ea typeface="Arial" pitchFamily="34" charset="-122"/>
+                <a:cs typeface="Arial" pitchFamily="34" charset="-120"/>
+              </a:rPr>
+              <a:t>Планируемый срок ввода в эксплуатацию</a:t>
+            </a:r>
+            <a:endParaRPr lang="en-US" sz="1000" dirty="0"/>
+          </a:p>
+        </p:txBody>
+      </p:sp>
+      <p:sp>
+        <p:nvSpPr>
+          <p:cNvPr id="27" name="Text 25"/>
+          <p:cNvSpPr txBox="1"/>
+          <p:nvPr/>
+        </p:nvSpPr>
+        <p:spPr>
+          <a:xfrm>
+            <a:off x="9778648" y="4956048"/>
+            <a:ext cx="1846119" cy="274320"/>
+          </a:xfrm>
+          <a:prstGeom prst="rect">
+            <a:avLst/>
+          </a:prstGeom>
+          <a:noFill/>
+          <a:ln/>
+        </p:spPr>
+        <p:txBody>
+          <a:bodyPr wrap="square" lIns="0" tIns="0" rIns="0" bIns="0" rtlCol="0" anchor="ctr"/>
+          <a:lstStyle/>
+          <a:p>
+            <a:pPr algn="r" indent="0" marL="0">
+              <a:buNone/>
+            </a:pPr>
+            <a:r>
+              <a:rPr lang="en-US" sz="1000" dirty="0">
+                <a:solidFill>
+                  <a:srgbClr val="FF4D23"/>
+                </a:solidFill>
+                <a:latin typeface="Arial" pitchFamily="34" charset="0"/>
+                <a:ea typeface="Arial" pitchFamily="34" charset="-122"/>
+                <a:cs typeface="Arial" pitchFamily="34" charset="-120"/>
+              </a:rPr>
+              <a:t>____________</a:t>
+            </a:r>
+            <a:endParaRPr lang="en-US" sz="1000" dirty="0"/>
+          </a:p>
+        </p:txBody>
+      </p:sp>
+      <p:sp>
+        <p:nvSpPr>
+          <p:cNvPr id="28" name="Shape 26"/>
+          <p:cNvSpPr/>
+          <p:nvPr/>
+        </p:nvSpPr>
+        <p:spPr>
+          <a:xfrm>
+            <a:off x="6766560" y="5266944"/>
+            <a:ext cx="4858207" cy="7315"/>
+          </a:xfrm>
+          <a:prstGeom prst="rect">
+            <a:avLst/>
+          </a:prstGeom>
+          <a:solidFill>
+            <a:srgbClr val="DCDCDC"/>
+          </a:solidFill>
+          <a:ln w="12700">
+            <a:solidFill>
+              <a:srgbClr val="DCDCDC"/>
+            </a:solidFill>
+            <a:prstDash val="solid"/>
+          </a:ln>
+        </p:spPr>
+      </p:sp>
+      <p:sp>
+        <p:nvSpPr>
+          <p:cNvPr id="29" name="Text 27"/>
+          <p:cNvSpPr txBox="1"/>
+          <p:nvPr/>
+        </p:nvSpPr>
+        <p:spPr>
+          <a:xfrm>
+            <a:off x="502920" y="5897880"/>
+            <a:ext cx="11183112" cy="365760"/>
+          </a:xfrm>
+          <a:prstGeom prst="rect">
+            <a:avLst/>
+          </a:prstGeom>
+          <a:noFill/>
+          <a:ln/>
+        </p:spPr>
+        <p:txBody>
+          <a:bodyPr wrap="square" lIns="0" tIns="0" rIns="0" bIns="0" rtlCol="0" anchor="t"/>
+          <a:lstStyle/>
+          <a:p>
+            <a:pPr indent="0" marL="0">
+              <a:lnSpc>
+                <a:spcPts val="1100"/>
+              </a:lnSpc>
+              <a:buNone/>
+            </a:pPr>
+            <a:r>
+              <a:rPr lang="en-US" sz="850" i="1" dirty="0">
+                <a:solidFill>
+                  <a:srgbClr val="8A8A8A"/>
+                </a:solidFill>
+                <a:latin typeface="Arial" pitchFamily="34" charset="0"/>
+                <a:ea typeface="Arial" pitchFamily="34" charset="-122"/>
+                <a:cs typeface="Arial" pitchFamily="34" charset="-120"/>
+              </a:rPr>
+              <a:t>Ёмкость номерного фонда и численность персонала указаны оценочно и подлежат уточнению после утверждения планировочных решений.</a:t>
+            </a:r>
+            <a:endParaRPr lang="en-US" sz="850" dirty="0"/>
+          </a:p>
+        </p:txBody>
+      </p:sp>
+      <p:pic>
+        <p:nvPicPr>
+          <p:cNvPr id="30" name="Image 0" descr="/tmp/claude-0/-home-user-most/9fc1ec31-3c64-5a82-aadb-ddb23fff6e53/scratchpad/assets/logo_most.png">    </p:cNvPr>
+          <p:cNvPicPr>
+            <a:picLocks noChangeAspect="1"/>
+          </p:cNvPicPr>
+          <p:nvPr/>
+        </p:nvPicPr>
+        <p:blipFill>
+          <a:blip r:embed="rId1"/>
+          <a:stretch>
+            <a:fillRect/>
+          </a:stretch>
+        </p:blipFill>
+        <p:spPr>
+          <a:xfrm>
+            <a:off x="11356848" y="5925312"/>
+            <a:ext cx="630936" cy="704088"/>
+          </a:xfrm>
+          <a:prstGeom prst="rect">
+            <a:avLst/>
+          </a:prstGeom>
+        </p:spPr>
+      </p:pic>
+      <p:sp>
+        <p:nvSpPr>
+          <p:cNvPr id="31" name="Text 28"/>
+          <p:cNvSpPr txBox="1"/>
+          <p:nvPr/>
+        </p:nvSpPr>
+        <p:spPr>
+          <a:xfrm>
+            <a:off x="219456" y="6455664"/>
+            <a:ext cx="914400" cy="201168"/>
+          </a:xfrm>
+          <a:prstGeom prst="rect">
+            <a:avLst/>
+          </a:prstGeom>
+          <a:noFill/>
+          <a:ln/>
+        </p:spPr>
+        <p:txBody>
+          <a:bodyPr wrap="square" lIns="0" tIns="0" rIns="0" bIns="0" rtlCol="0" anchor="ctr"/>
+          <a:lstStyle/>
+          <a:p>
+            <a:pPr indent="0" marL="0">
+              <a:buNone/>
+            </a:pPr>
+            <a:r>
+              <a:rPr lang="en-US" sz="800" dirty="0">
+                <a:solidFill>
+                  <a:srgbClr val="8A8A8A"/>
+                </a:solidFill>
+                <a:latin typeface="Arial" pitchFamily="34" charset="0"/>
+                <a:ea typeface="Arial" pitchFamily="34" charset="-122"/>
+                <a:cs typeface="Arial" pitchFamily="34" charset="-120"/>
+              </a:rPr>
+              <a:t>17</a:t>
+            </a:r>
+            <a:endParaRPr lang="en-US" sz="800" dirty="0"/>
+          </a:p>
+        </p:txBody>
+      </p:sp>
+    </p:spTree>
+  </p:cSld>
+  <p:clrMapOvr>
+    <a:masterClrMapping/>
+  </p:clrMapOvr>
+</p:sld>
+</file>
+
+<file path=ppt/slides/slide18.xml><?xml version="1.0" encoding="utf-8"?>
+<p:sld xmlns:a="http://schemas.openxmlformats.org/drawingml/2006/main" xmlns:r="http://schemas.openxmlformats.org/officeDocument/2006/relationships" xmlns:p="http://schemas.openxmlformats.org/presentationml/2006/main">
+  <p:cSld name="Slide 18">
+    <p:bg>
+      <p:bgPr>
+        <a:solidFill>
+          <a:srgbClr val="FFFFFF"/>
+        </a:solidFill>
+      </p:bgPr>
+    </p:bg>
+    <p:spTree>
+      <p:nvGrpSpPr>
+        <p:cNvPr id="1" name=""/>
+        <p:cNvGrpSpPr/>
+        <p:nvPr/>
+      </p:nvGrpSpPr>
+      <p:grpSpPr>
+        <a:xfrm>
+          <a:off x="0" y="0"/>
+          <a:ext cx="0" cy="0"/>
+          <a:chOff x="0" y="0"/>
+          <a:chExt cx="0" cy="0"/>
+        </a:xfrm>
+      </p:grpSpPr>
+      <p:sp>
+        <p:nvSpPr>
           <p:cNvPr id="2" name="Shape 0"/>
           <p:cNvSpPr/>
           <p:nvPr/>
@@ -9514,10 +10180,10 @@
           <a:p>
             <a:pPr indent="0" marL="0">
               <a:lnSpc>
-                <a:spcPts val="1500"/>
+                <a:spcPts val="1400"/>
               </a:lnSpc>
               <a:spcAft>
-                <a:spcPts val="900"/>
+                <a:spcPts val="800"/>
               </a:spcAft>
               <a:buNone/>
             </a:pPr>
@@ -9534,10 +10200,10 @@
             </a:r>
             <a:pPr indent="0" marL="0">
               <a:lnSpc>
-                <a:spcPts val="1500"/>
+                <a:spcPts val="1400"/>
               </a:lnSpc>
               <a:spcAft>
-                <a:spcPts val="900"/>
+                <a:spcPts val="800"/>
               </a:spcAft>
               <a:buNone/>
             </a:pPr>
@@ -9557,10 +10223,10 @@
           <a:p>
             <a:pPr indent="0" marL="0">
               <a:lnSpc>
-                <a:spcPts val="1500"/>
+                <a:spcPts val="1400"/>
               </a:lnSpc>
               <a:spcAft>
-                <a:spcPts val="900"/>
+                <a:spcPts val="800"/>
               </a:spcAft>
               <a:buNone/>
             </a:pPr>
@@ -9577,10 +10243,10 @@
             </a:r>
             <a:pPr indent="0" marL="0">
               <a:lnSpc>
-                <a:spcPts val="1500"/>
+                <a:spcPts val="1400"/>
               </a:lnSpc>
               <a:spcAft>
-                <a:spcPts val="900"/>
+                <a:spcPts val="800"/>
               </a:spcAft>
               <a:buNone/>
             </a:pPr>
@@ -9600,10 +10266,10 @@
           <a:p>
             <a:pPr indent="0" marL="0">
               <a:lnSpc>
-                <a:spcPts val="1500"/>
+                <a:spcPts val="1400"/>
               </a:lnSpc>
               <a:spcAft>
-                <a:spcPts val="900"/>
+                <a:spcPts val="800"/>
               </a:spcAft>
               <a:buNone/>
             </a:pPr>
@@ -9620,10 +10286,10 @@
             </a:r>
             <a:pPr indent="0" marL="0">
               <a:lnSpc>
-                <a:spcPts val="1500"/>
+                <a:spcPts val="1400"/>
               </a:lnSpc>
               <a:spcAft>
-                <a:spcPts val="900"/>
+                <a:spcPts val="800"/>
               </a:spcAft>
               <a:buNone/>
             </a:pPr>
@@ -9643,10 +10309,10 @@
           <a:p>
             <a:pPr indent="0" marL="0">
               <a:lnSpc>
-                <a:spcPts val="1500"/>
+                <a:spcPts val="1400"/>
               </a:lnSpc>
               <a:spcAft>
-                <a:spcPts val="900"/>
+                <a:spcPts val="800"/>
               </a:spcAft>
               <a:buNone/>
             </a:pPr>
@@ -9663,10 +10329,10 @@
             </a:r>
             <a:pPr indent="0" marL="0">
               <a:lnSpc>
-                <a:spcPts val="1500"/>
+                <a:spcPts val="1400"/>
               </a:lnSpc>
               <a:spcAft>
-                <a:spcPts val="900"/>
+                <a:spcPts val="800"/>
               </a:spcAft>
               <a:buNone/>
             </a:pPr>
@@ -9680,6 +10346,49 @@
                 <a:cs typeface="Arial" pitchFamily="34" charset="-120"/>
               </a:rPr>
               <a:t>Прямой выход на ул. Бухтарминскую обеспечивает подъезд гостей и транспорта обслуживания.</a:t>
+            </a:r>
+            <a:endParaRPr lang="en-US" sz="1050" dirty="0"/>
+          </a:p>
+          <a:p>
+            <a:pPr indent="0" marL="0">
+              <a:lnSpc>
+                <a:spcPts val="1400"/>
+              </a:lnSpc>
+              <a:spcAft>
+                <a:spcPts val="800"/>
+              </a:spcAft>
+              <a:buNone/>
+            </a:pPr>
+            <a:r>
+              <a:rPr lang="en-US" sz="1050" dirty="0">
+                <a:solidFill>
+                  <a:srgbClr val="FF4D23"/>
+                </a:solidFill>
+                <a:latin typeface="Arial" pitchFamily="34" charset="0"/>
+                <a:ea typeface="Arial" pitchFamily="34" charset="-122"/>
+                <a:cs typeface="Arial" pitchFamily="34" charset="-120"/>
+              </a:rPr>
+              <a:t>– </a:t>
+            </a:r>
+            <a:pPr indent="0" marL="0">
+              <a:lnSpc>
+                <a:spcPts val="1400"/>
+              </a:lnSpc>
+              <a:spcAft>
+                <a:spcPts val="800"/>
+              </a:spcAft>
+              <a:buNone/>
+            </a:pPr>
+            <a:r>
+              <a:rPr lang="en-US" sz="1050" dirty="0">
+                <a:solidFill>
+                  <a:srgbClr val="333333"/>
+                </a:solidFill>
+                <a:latin typeface="Arial" pitchFamily="34" charset="0"/>
+                <a:ea typeface="Arial" pitchFamily="34" charset="-122"/>
+                <a:cs typeface="Arial" pitchFamily="34" charset="-120"/>
+              </a:rPr>
+              <a:t>К северу от участка, через внутриквартальный проезд, — действующая АЗС. На генплане от неё прочерчена зона радиусом 50 м; её граница проходит по северному краю пятна застройки.</a:t>
             </a:r>
             <a:endParaRPr lang="en-US" sz="1050" dirty="0"/>
           </a:p>
@@ -9693,7 +10402,7 @@
         </p:nvSpPr>
         <p:spPr>
           <a:xfrm>
-            <a:off x="6903720" y="4709160"/>
+            <a:off x="6903720" y="4773168"/>
             <a:ext cx="4721047" cy="7315"/>
           </a:xfrm>
           <a:prstGeom prst="rect">
@@ -9718,8 +10427,8 @@
         </p:nvSpPr>
         <p:spPr>
           <a:xfrm>
-            <a:off x="6903720" y="4892040"/>
-            <a:ext cx="4721047" cy="402336"/>
+            <a:off x="6903720" y="4956048"/>
+            <a:ext cx="2269084" cy="402336"/>
           </a:xfrm>
           <a:prstGeom prst="rect">
             <a:avLst/>
@@ -9735,7 +10444,7 @@
               <a:buNone/>
             </a:pPr>
             <a:r>
-              <a:rPr lang="en-US" sz="2600" b="1" dirty="0">
+              <a:rPr lang="en-US" sz="2400" b="1" dirty="0">
                 <a:solidFill>
                   <a:srgbClr val="111111"/>
                 </a:solidFill>
@@ -9759,7 +10468,7 @@
               </a:rPr>
               <a:t> га</a:t>
             </a:r>
-            <a:endParaRPr lang="en-US" sz="2600" dirty="0"/>
+            <a:endParaRPr lang="en-US" sz="2400" dirty="0"/>
           </a:p>
         </p:txBody>
       </p:sp>
@@ -9771,8 +10480,8 @@
         </p:nvSpPr>
         <p:spPr>
           <a:xfrm>
-            <a:off x="6903720" y="5312664"/>
-            <a:ext cx="4721047" cy="384048"/>
+            <a:off x="6903720" y="5376672"/>
+            <a:ext cx="2269084" cy="384048"/>
           </a:xfrm>
           <a:prstGeom prst="rect">
             <a:avLst/>
@@ -9805,9 +10514,104 @@
           </a:p>
         </p:txBody>
       </p:sp>
+      <p:sp>
+        <p:nvSpPr>
+          <p:cNvPr id="13" name="Text 10"/>
+          <p:cNvSpPr txBox="1"/>
+          <p:nvPr/>
+        </p:nvSpPr>
+        <p:spPr>
+          <a:xfrm>
+            <a:off x="9264244" y="4956048"/>
+            <a:ext cx="2360524" cy="402336"/>
+          </a:xfrm>
+          <a:prstGeom prst="rect">
+            <a:avLst/>
+          </a:prstGeom>
+          <a:noFill/>
+          <a:ln/>
+        </p:spPr>
+        <p:txBody>
+          <a:bodyPr wrap="square" lIns="0" tIns="0" rIns="0" bIns="0" rtlCol="0" anchor="ctr"/>
+          <a:lstStyle/>
+          <a:p>
+            <a:pPr indent="0" marL="0">
+              <a:buNone/>
+            </a:pPr>
+            <a:r>
+              <a:rPr lang="en-US" sz="2400" b="1" dirty="0">
+                <a:solidFill>
+                  <a:srgbClr val="111111"/>
+                </a:solidFill>
+                <a:latin typeface="Arial" pitchFamily="34" charset="0"/>
+                <a:ea typeface="Arial" pitchFamily="34" charset="-122"/>
+                <a:cs typeface="Arial" pitchFamily="34" charset="-120"/>
+              </a:rPr>
+              <a:t>50</a:t>
+            </a:r>
+            <a:pPr indent="0" marL="0">
+              <a:buNone/>
+            </a:pPr>
+            <a:r>
+              <a:rPr lang="en-US" sz="1100" b="1" dirty="0">
+                <a:solidFill>
+                  <a:srgbClr val="FF4D23"/>
+                </a:solidFill>
+                <a:latin typeface="Arial" pitchFamily="34" charset="0"/>
+                <a:ea typeface="Arial" pitchFamily="34" charset="-122"/>
+                <a:cs typeface="Arial" pitchFamily="34" charset="-120"/>
+              </a:rPr>
+              <a:t> м</a:t>
+            </a:r>
+            <a:endParaRPr lang="en-US" sz="2400" dirty="0"/>
+          </a:p>
+        </p:txBody>
+      </p:sp>
+      <p:sp>
+        <p:nvSpPr>
+          <p:cNvPr id="14" name="Text 11"/>
+          <p:cNvSpPr txBox="1"/>
+          <p:nvPr/>
+        </p:nvSpPr>
+        <p:spPr>
+          <a:xfrm>
+            <a:off x="9264244" y="5376672"/>
+            <a:ext cx="2360524" cy="384048"/>
+          </a:xfrm>
+          <a:prstGeom prst="rect">
+            <a:avLst/>
+          </a:prstGeom>
+          <a:noFill/>
+          <a:ln/>
+        </p:spPr>
+        <p:txBody>
+          <a:bodyPr wrap="square" lIns="0" tIns="0" rIns="0" bIns="0" rtlCol="0" anchor="t"/>
+          <a:lstStyle/>
+          <a:p>
+            <a:pPr indent="0" marL="0">
+              <a:lnSpc>
+                <a:spcPts val="1100"/>
+              </a:lnSpc>
+              <a:buNone/>
+            </a:pPr>
+            <a:r>
+              <a:rPr lang="en-US" sz="800" spc="30" kern="0" dirty="0">
+                <a:solidFill>
+                  <a:srgbClr val="8A8A8A"/>
+                </a:solidFill>
+                <a:latin typeface="Arial" pitchFamily="34" charset="0"/>
+                <a:ea typeface="Arial" pitchFamily="34" charset="-122"/>
+                <a:cs typeface="Arial" pitchFamily="34" charset="-120"/>
+              </a:rPr>
+              <a:t>ДО ДЕЙСТВУЮЩЕЙ АЗС</a:t>
+            </a:r>
+            <a:endParaRPr lang="en-US" sz="800" dirty="0"/>
+          </a:p>
+        </p:txBody>
+      </p:sp>
       <p:pic>
         <p:nvPicPr>
-          <p:cNvPr id="13" name="Image 1" descr="/tmp/claude-0/-home-user-most/9fc1ec31-3c64-5a82-aadb-ddb23fff6e53/scratchpad/assets/logo_most.png">    </p:cNvPr>
+          <p:cNvPr id="15" name="Image 1" descr="/tmp/claude-0/-home-user-most/9fc1ec31-3c64-5a82-aadb-ddb23fff6e53/scratchpad/assets/logo_most.png">    </p:cNvPr>
           <p:cNvPicPr>
             <a:picLocks noChangeAspect="1"/>
           </p:cNvPicPr>
@@ -9831,7 +10635,7 @@
       </p:pic>
       <p:sp>
         <p:nvSpPr>
-          <p:cNvPr id="14" name="Text 10"/>
+          <p:cNvPr id="16" name="Text 12"/>
           <p:cNvSpPr txBox="1"/>
           <p:nvPr/>
         </p:nvSpPr>
@@ -12819,7 +13623,7 @@
       </p:grpSpPr>
       <p:pic>
         <p:nvPicPr>
-          <p:cNvPr id="2" name="Image 0" descr="/tmp/claude-0/-home-user-most/9fc1ec31-3c64-5a82-aadb-ddb23fff6e53/scratchpad/assets/room.jpg">    </p:cNvPr>
+          <p:cNvPr id="2" name="Image 0" descr="/tmp/claude-0/-home-user-most/9fc1ec31-3c64-5a82-aadb-ddb23fff6e53/scratchpad/assets/restaurant.jpg">    </p:cNvPr>
           <p:cNvPicPr>
             <a:picLocks noChangeAspect="1"/>
           </p:cNvPicPr>
@@ -12867,13 +13671,13 @@
             <a:r>
               <a:rPr lang="en-US" sz="950" b="1" spc="60" kern="0" dirty="0">
                 <a:solidFill>
-                  <a:srgbClr val="FFFFFF"/>
-                </a:solidFill>
-                <a:latin typeface="Arial" pitchFamily="34" charset="0"/>
-                <a:ea typeface="Arial" pitchFamily="34" charset="-122"/>
-                <a:cs typeface="Arial" pitchFamily="34" charset="-120"/>
-              </a:rPr>
-              <a:t>НОМЕРНОЙ ФОНД</a:t>
+                  <a:srgbClr val="111111"/>
+                </a:solidFill>
+                <a:latin typeface="Arial" pitchFamily="34" charset="0"/>
+                <a:ea typeface="Arial" pitchFamily="34" charset="-122"/>
+                <a:cs typeface="Arial" pitchFamily="34" charset="-120"/>
+              </a:rPr>
+              <a:t>РЕСТОРАН</a:t>
             </a:r>
             <a:endParaRPr lang="en-US" sz="950" dirty="0"/>
           </a:p>
@@ -12906,13 +13710,13 @@
             <a:r>
               <a:rPr lang="en-US" sz="900" dirty="0">
                 <a:solidFill>
-                  <a:srgbClr val="FFFFFF"/>
-                </a:solidFill>
-                <a:latin typeface="Arial" pitchFamily="34" charset="0"/>
-                <a:ea typeface="Arial" pitchFamily="34" charset="-122"/>
-                <a:cs typeface="Arial" pitchFamily="34" charset="-120"/>
-              </a:rPr>
-              <a:t>Номер с балконом верхнего яруса</a:t>
+                  <a:srgbClr val="111111"/>
+                </a:solidFill>
+                <a:latin typeface="Arial" pitchFamily="34" charset="0"/>
+                <a:ea typeface="Arial" pitchFamily="34" charset="-122"/>
+                <a:cs typeface="Arial" pitchFamily="34" charset="-120"/>
+              </a:rPr>
+              <a:t>Зал первого этажа с выходом в сад</a:t>
             </a:r>
             <a:endParaRPr lang="en-US" sz="900" dirty="0"/>
           </a:p>
@@ -13047,7 +13851,7 @@
       </p:grpSpPr>
       <p:pic>
         <p:nvPicPr>
-          <p:cNvPr id="2" name="Image 0" descr="/tmp/claude-0/-home-user-most/9fc1ec31-3c64-5a82-aadb-ddb23fff6e53/scratchpad/assets/terrace.jpg">    </p:cNvPr>
+          <p:cNvPr id="2" name="Image 0" descr="/tmp/claude-0/-home-user-most/9fc1ec31-3c64-5a82-aadb-ddb23fff6e53/scratchpad/assets/room.jpg">    </p:cNvPr>
           <p:cNvPicPr>
             <a:picLocks noChangeAspect="1"/>
           </p:cNvPicPr>
@@ -13095,13 +13899,13 @@
             <a:r>
               <a:rPr lang="en-US" sz="950" b="1" spc="60" kern="0" dirty="0">
                 <a:solidFill>
-                  <a:srgbClr val="111111"/>
-                </a:solidFill>
-                <a:latin typeface="Arial" pitchFamily="34" charset="0"/>
-                <a:ea typeface="Arial" pitchFamily="34" charset="-122"/>
-                <a:cs typeface="Arial" pitchFamily="34" charset="-120"/>
-              </a:rPr>
-              <a:t>ОБЩЕСТВЕННЫЕ ПРОСТРАНСТВА</a:t>
+                  <a:srgbClr val="FFFFFF"/>
+                </a:solidFill>
+                <a:latin typeface="Arial" pitchFamily="34" charset="0"/>
+                <a:ea typeface="Arial" pitchFamily="34" charset="-122"/>
+                <a:cs typeface="Arial" pitchFamily="34" charset="-120"/>
+              </a:rPr>
+              <a:t>НОМЕРНОЙ ФОНД</a:t>
             </a:r>
             <a:endParaRPr lang="en-US" sz="950" dirty="0"/>
           </a:p>
@@ -13134,13 +13938,13 @@
             <a:r>
               <a:rPr lang="en-US" sz="900" dirty="0">
                 <a:solidFill>
-                  <a:srgbClr val="111111"/>
-                </a:solidFill>
-                <a:latin typeface="Arial" pitchFamily="34" charset="0"/>
-                <a:ea typeface="Arial" pitchFamily="34" charset="-122"/>
-                <a:cs typeface="Arial" pitchFamily="34" charset="-120"/>
-              </a:rPr>
-              <a:t>Терраса верхнего яруса</a:t>
+                  <a:srgbClr val="FFFFFF"/>
+                </a:solidFill>
+                <a:latin typeface="Arial" pitchFamily="34" charset="0"/>
+                <a:ea typeface="Arial" pitchFamily="34" charset="-122"/>
+                <a:cs typeface="Arial" pitchFamily="34" charset="-120"/>
+              </a:rPr>
+              <a:t>Номер с балконом верхнего яруса</a:t>
             </a:r>
             <a:endParaRPr lang="en-US" sz="900" dirty="0"/>
           </a:p>
@@ -13236,7 +14040,7 @@
             <a:r>
               <a:rPr lang="en-US" sz="800" dirty="0">
                 <a:solidFill>
-                  <a:srgbClr val="FFFFFF"/>
+                  <a:srgbClr val="111111"/>
                 </a:solidFill>
                 <a:latin typeface="Arial" pitchFamily="34" charset="0"/>
                 <a:ea typeface="Arial" pitchFamily="34" charset="-122"/>
@@ -13259,13 +14063,6 @@
 <file path=ppt/slides/slide9.xml><?xml version="1.0" encoding="utf-8"?>
 <p:sld xmlns:a="http://schemas.openxmlformats.org/drawingml/2006/main" xmlns:r="http://schemas.openxmlformats.org/officeDocument/2006/relationships" xmlns:p="http://schemas.openxmlformats.org/presentationml/2006/main">
   <p:cSld name="Slide 9">
-    <p:bg>
-      <p:bgPr>
-        <a:solidFill>
-          <a:srgbClr val="FFFFFF"/>
-        </a:solidFill>
-      </p:bgPr>
-    </p:bg>
     <p:spTree>
       <p:nvGrpSpPr>
         <p:cNvPr id="1" name=""/>
@@ -13280,383 +14077,9 @@
           <a:chExt cx="0" cy="0"/>
         </a:xfrm>
       </p:grpSpPr>
-      <p:sp>
-        <p:nvSpPr>
-          <p:cNvPr id="2" name="Text 0"/>
-          <p:cNvSpPr txBox="1"/>
-          <p:nvPr/>
-        </p:nvSpPr>
-        <p:spPr>
-          <a:xfrm>
-            <a:off x="219456" y="164592"/>
-            <a:ext cx="6400800" cy="219456"/>
-          </a:xfrm>
-          <a:prstGeom prst="rect">
-            <a:avLst/>
-          </a:prstGeom>
-          <a:noFill/>
-          <a:ln/>
-        </p:spPr>
-        <p:txBody>
-          <a:bodyPr wrap="square" lIns="0" tIns="0" rIns="0" bIns="0" rtlCol="0" anchor="ctr"/>
-          <a:lstStyle/>
-          <a:p>
-            <a:pPr indent="0" marL="0">
-              <a:buNone/>
-            </a:pPr>
-            <a:r>
-              <a:rPr lang="en-US" sz="950" b="1" spc="60" kern="0" dirty="0">
-                <a:solidFill>
-                  <a:srgbClr val="111111"/>
-                </a:solidFill>
-                <a:latin typeface="Arial" pitchFamily="34" charset="0"/>
-                <a:ea typeface="Arial" pitchFamily="34" charset="-122"/>
-                <a:cs typeface="Arial" pitchFamily="34" charset="-120"/>
-              </a:rPr>
-              <a:t>АРХИТЕКТУРА</a:t>
-            </a:r>
-            <a:endParaRPr lang="en-US" sz="950" dirty="0"/>
-          </a:p>
-        </p:txBody>
-      </p:sp>
-      <p:sp>
-        <p:nvSpPr>
-          <p:cNvPr id="3" name="Text 1"/>
-          <p:cNvSpPr txBox="1"/>
-          <p:nvPr/>
-        </p:nvSpPr>
-        <p:spPr>
-          <a:xfrm>
-            <a:off x="219456" y="374904"/>
-            <a:ext cx="6400800" cy="201168"/>
-          </a:xfrm>
-          <a:prstGeom prst="rect">
-            <a:avLst/>
-          </a:prstGeom>
-          <a:noFill/>
-          <a:ln/>
-        </p:spPr>
-        <p:txBody>
-          <a:bodyPr wrap="square" lIns="0" tIns="0" rIns="0" bIns="0" rtlCol="0" anchor="ctr"/>
-          <a:lstStyle/>
-          <a:p>
-            <a:pPr indent="0" marL="0">
-              <a:buNone/>
-            </a:pPr>
-            <a:r>
-              <a:rPr lang="en-US" sz="900" dirty="0">
-                <a:solidFill>
-                  <a:srgbClr val="111111"/>
-                </a:solidFill>
-                <a:latin typeface="Arial" pitchFamily="34" charset="0"/>
-                <a:ea typeface="Arial" pitchFamily="34" charset="-122"/>
-                <a:cs typeface="Arial" pitchFamily="34" charset="-120"/>
-              </a:rPr>
-              <a:t>Генезис формы</a:t>
-            </a:r>
-            <a:endParaRPr lang="en-US" sz="900" dirty="0"/>
-          </a:p>
-        </p:txBody>
-      </p:sp>
-      <p:sp>
-        <p:nvSpPr>
-          <p:cNvPr id="4" name="Text 2"/>
-          <p:cNvSpPr txBox="1"/>
-          <p:nvPr/>
-        </p:nvSpPr>
-        <p:spPr>
-          <a:xfrm>
-            <a:off x="5571439" y="164592"/>
-            <a:ext cx="6400800" cy="219456"/>
-          </a:xfrm>
-          <a:prstGeom prst="rect">
-            <a:avLst/>
-          </a:prstGeom>
-          <a:noFill/>
-          <a:ln/>
-        </p:spPr>
-        <p:txBody>
-          <a:bodyPr wrap="square" lIns="0" tIns="0" rIns="0" bIns="0" rtlCol="0" anchor="ctr"/>
-          <a:lstStyle/>
-          <a:p>
-            <a:pPr algn="r" indent="0" marL="0">
-              <a:buNone/>
-            </a:pPr>
-            <a:r>
-              <a:rPr lang="en-US" sz="950" spc="60" kern="0" dirty="0">
-                <a:solidFill>
-                  <a:srgbClr val="FF4D23"/>
-                </a:solidFill>
-                <a:latin typeface="Arial" pitchFamily="34" charset="0"/>
-                <a:ea typeface="Arial" pitchFamily="34" charset="-122"/>
-                <a:cs typeface="Arial" pitchFamily="34" charset="-120"/>
-              </a:rPr>
-              <a:t>КОНЦЕПЦИЯ</a:t>
-            </a:r>
-            <a:endParaRPr lang="en-US" sz="950" dirty="0"/>
-          </a:p>
-        </p:txBody>
-      </p:sp>
-      <p:sp>
-        <p:nvSpPr>
-          <p:cNvPr id="5" name="Text 3"/>
-          <p:cNvSpPr txBox="1"/>
-          <p:nvPr/>
-        </p:nvSpPr>
-        <p:spPr>
-          <a:xfrm>
-            <a:off x="502920" y="960120"/>
-            <a:ext cx="3794760" cy="256032"/>
-          </a:xfrm>
-          <a:prstGeom prst="rect">
-            <a:avLst/>
-          </a:prstGeom>
-          <a:noFill/>
-          <a:ln/>
-        </p:spPr>
-        <p:txBody>
-          <a:bodyPr wrap="square" lIns="0" tIns="0" rIns="0" bIns="0" rtlCol="0" anchor="ctr"/>
-          <a:lstStyle/>
-          <a:p>
-            <a:pPr indent="0" marL="0">
-              <a:buNone/>
-            </a:pPr>
-            <a:r>
-              <a:rPr lang="en-US" sz="1300" b="1" spc="30" kern="0" dirty="0">
-                <a:solidFill>
-                  <a:srgbClr val="FF4D23"/>
-                </a:solidFill>
-                <a:latin typeface="Arial" pitchFamily="34" charset="0"/>
-                <a:ea typeface="Arial" pitchFamily="34" charset="-122"/>
-                <a:cs typeface="Arial" pitchFamily="34" charset="-120"/>
-              </a:rPr>
-              <a:t>ФОРМА ОТ СИЛУЭТА ГОР</a:t>
-            </a:r>
-            <a:endParaRPr lang="en-US" sz="1300" dirty="0"/>
-          </a:p>
-        </p:txBody>
-      </p:sp>
-      <p:sp>
-        <p:nvSpPr>
-          <p:cNvPr id="6" name="Text 4"/>
-          <p:cNvSpPr txBox="1"/>
-          <p:nvPr/>
-        </p:nvSpPr>
-        <p:spPr>
-          <a:xfrm>
-            <a:off x="502920" y="1325880"/>
-            <a:ext cx="3794760" cy="1828800"/>
-          </a:xfrm>
-          <a:prstGeom prst="rect">
-            <a:avLst/>
-          </a:prstGeom>
-          <a:noFill/>
-          <a:ln/>
-        </p:spPr>
-        <p:txBody>
-          <a:bodyPr wrap="square" lIns="0" tIns="0" rIns="0" bIns="0" rtlCol="0" anchor="t"/>
-          <a:lstStyle/>
-          <a:p>
-            <a:pPr indent="0" marL="0">
-              <a:lnSpc>
-                <a:spcPts val="1500"/>
-              </a:lnSpc>
-              <a:buNone/>
-            </a:pPr>
-            <a:r>
-              <a:rPr lang="en-US" sz="1050" dirty="0">
-                <a:solidFill>
-                  <a:srgbClr val="333333"/>
-                </a:solidFill>
-                <a:latin typeface="Arial" pitchFamily="34" charset="0"/>
-                <a:ea typeface="Arial" pitchFamily="34" charset="-122"/>
-                <a:cs typeface="Arial" pitchFamily="34" charset="-120"/>
-              </a:rPr>
-              <a:t>Исходная линия проекта — панорама Заилийского Алатау, которая открывается с участка. Ломаная гряда последовательно сглаживается до плавных горизонталей и переходит в ленты перекрытий: здание читается как продолжение ландшафта, а не как объект, поставленный перед ним.</a:t>
-            </a:r>
-            <a:endParaRPr lang="en-US" sz="1050" dirty="0"/>
-          </a:p>
-        </p:txBody>
-      </p:sp>
-      <p:sp>
-        <p:nvSpPr>
-          <p:cNvPr id="7" name="Shape 5"/>
-          <p:cNvSpPr/>
-          <p:nvPr/>
-        </p:nvSpPr>
-        <p:spPr>
-          <a:xfrm>
-            <a:off x="502920" y="3246120"/>
-            <a:ext cx="3794760" cy="7315"/>
-          </a:xfrm>
-          <a:prstGeom prst="rect">
-            <a:avLst/>
-          </a:prstGeom>
-          <a:solidFill>
-            <a:srgbClr val="DCDCDC"/>
-          </a:solidFill>
-          <a:ln w="12700">
-            <a:solidFill>
-              <a:srgbClr val="DCDCDC"/>
-            </a:solidFill>
-            <a:prstDash val="solid"/>
-          </a:ln>
-        </p:spPr>
-      </p:sp>
-      <p:sp>
-        <p:nvSpPr>
-          <p:cNvPr id="8" name="Text 6"/>
-          <p:cNvSpPr txBox="1"/>
-          <p:nvPr/>
-        </p:nvSpPr>
-        <p:spPr>
-          <a:xfrm>
-            <a:off x="502920" y="3429000"/>
-            <a:ext cx="3794760" cy="2377440"/>
-          </a:xfrm>
-          <a:prstGeom prst="rect">
-            <a:avLst/>
-          </a:prstGeom>
-          <a:noFill/>
-          <a:ln/>
-        </p:spPr>
-        <p:txBody>
-          <a:bodyPr wrap="square" lIns="0" tIns="0" rIns="0" bIns="0" rtlCol="0" anchor="t"/>
-          <a:lstStyle/>
-          <a:p>
-            <a:pPr indent="0" marL="0">
-              <a:lnSpc>
-                <a:spcPts val="1500"/>
-              </a:lnSpc>
-              <a:spcAft>
-                <a:spcPts val="900"/>
-              </a:spcAft>
-              <a:buNone/>
-            </a:pPr>
-            <a:r>
-              <a:rPr lang="en-US" sz="1050" dirty="0">
-                <a:solidFill>
-                  <a:srgbClr val="FF4D23"/>
-                </a:solidFill>
-                <a:latin typeface="Arial" pitchFamily="34" charset="0"/>
-                <a:ea typeface="Arial" pitchFamily="34" charset="-122"/>
-                <a:cs typeface="Arial" pitchFamily="34" charset="-120"/>
-              </a:rPr>
-              <a:t>– </a:t>
-            </a:r>
-            <a:pPr indent="0" marL="0">
-              <a:lnSpc>
-                <a:spcPts val="1500"/>
-              </a:lnSpc>
-              <a:spcAft>
-                <a:spcPts val="900"/>
-              </a:spcAft>
-              <a:buNone/>
-            </a:pPr>
-            <a:r>
-              <a:rPr lang="en-US" sz="1050" dirty="0">
-                <a:solidFill>
-                  <a:srgbClr val="333333"/>
-                </a:solidFill>
-                <a:latin typeface="Arial" pitchFamily="34" charset="0"/>
-                <a:ea typeface="Arial" pitchFamily="34" charset="-122"/>
-                <a:cs typeface="Arial" pitchFamily="34" charset="-120"/>
-              </a:rPr>
-              <a:t>Три шага абстракции: линия хребта — сглаженный контур — ленты перекрытий.</a:t>
-            </a:r>
-            <a:endParaRPr lang="en-US" sz="1050" dirty="0"/>
-          </a:p>
-          <a:p>
-            <a:pPr indent="0" marL="0">
-              <a:lnSpc>
-                <a:spcPts val="1500"/>
-              </a:lnSpc>
-              <a:spcAft>
-                <a:spcPts val="900"/>
-              </a:spcAft>
-              <a:buNone/>
-            </a:pPr>
-            <a:r>
-              <a:rPr lang="en-US" sz="1050" dirty="0">
-                <a:solidFill>
-                  <a:srgbClr val="FF4D23"/>
-                </a:solidFill>
-                <a:latin typeface="Arial" pitchFamily="34" charset="0"/>
-                <a:ea typeface="Arial" pitchFamily="34" charset="-122"/>
-                <a:cs typeface="Arial" pitchFamily="34" charset="-120"/>
-              </a:rPr>
-              <a:t>– </a:t>
-            </a:r>
-            <a:pPr indent="0" marL="0">
-              <a:lnSpc>
-                <a:spcPts val="1500"/>
-              </a:lnSpc>
-              <a:spcAft>
-                <a:spcPts val="900"/>
-              </a:spcAft>
-              <a:buNone/>
-            </a:pPr>
-            <a:r>
-              <a:rPr lang="en-US" sz="1050" dirty="0">
-                <a:solidFill>
-                  <a:srgbClr val="333333"/>
-                </a:solidFill>
-                <a:latin typeface="Arial" pitchFamily="34" charset="0"/>
-                <a:ea typeface="Arial" pitchFamily="34" charset="-122"/>
-                <a:cs typeface="Arial" pitchFamily="34" charset="-120"/>
-              </a:rPr>
-              <a:t>Переменная высота лент повторяет ритм гряды: объём нарастает к центру и опадает к краям.</a:t>
-            </a:r>
-            <a:endParaRPr lang="en-US" sz="1050" dirty="0"/>
-          </a:p>
-          <a:p>
-            <a:pPr indent="0" marL="0">
-              <a:lnSpc>
-                <a:spcPts val="1500"/>
-              </a:lnSpc>
-              <a:spcAft>
-                <a:spcPts val="900"/>
-              </a:spcAft>
-              <a:buNone/>
-            </a:pPr>
-            <a:r>
-              <a:rPr lang="en-US" sz="1050" dirty="0">
-                <a:solidFill>
-                  <a:srgbClr val="FF4D23"/>
-                </a:solidFill>
-                <a:latin typeface="Arial" pitchFamily="34" charset="0"/>
-                <a:ea typeface="Arial" pitchFamily="34" charset="-122"/>
-                <a:cs typeface="Arial" pitchFamily="34" charset="-120"/>
-              </a:rPr>
-              <a:t>– </a:t>
-            </a:r>
-            <a:pPr indent="0" marL="0">
-              <a:lnSpc>
-                <a:spcPts val="1500"/>
-              </a:lnSpc>
-              <a:spcAft>
-                <a:spcPts val="900"/>
-              </a:spcAft>
-              <a:buNone/>
-            </a:pPr>
-            <a:r>
-              <a:rPr lang="en-US" sz="1050" dirty="0">
-                <a:solidFill>
-                  <a:srgbClr val="333333"/>
-                </a:solidFill>
-                <a:latin typeface="Arial" pitchFamily="34" charset="0"/>
-                <a:ea typeface="Arial" pitchFamily="34" charset="-122"/>
-                <a:cs typeface="Arial" pitchFamily="34" charset="-120"/>
-              </a:rPr>
-              <a:t>Пять ярусов держат горизонталь и не конкурируют с панорамой.</a:t>
-            </a:r>
-            <a:endParaRPr lang="en-US" sz="1050" dirty="0"/>
-          </a:p>
-        </p:txBody>
-      </p:sp>
       <p:pic>
         <p:nvPicPr>
-          <p:cNvPr id="9" name="Image 0" descr="/tmp/claude-0/-home-user-most/9fc1ec31-3c64-5a82-aadb-ddb23fff6e53/scratchpad/assets/genesis.jpg">    </p:cNvPr>
+          <p:cNvPr id="2" name="Image 0" descr="/tmp/claude-0/-home-user-most/9fc1ec31-3c64-5a82-aadb-ddb23fff6e53/scratchpad/assets/terrace.jpg">    </p:cNvPr>
           <p:cNvPicPr>
             <a:picLocks noChangeAspect="1"/>
           </p:cNvPicPr>
@@ -13664,14 +14087,13 @@
         </p:nvPicPr>
         <p:blipFill>
           <a:blip r:embed="rId1"/>
-          <a:stretch>
-            <a:fillRect/>
-          </a:stretch>
+          <a:srcRect l="0" r="0" t="0" b="0"/>
+          <a:stretch/>
         </p:blipFill>
         <p:spPr>
           <a:xfrm>
-            <a:off x="4709160" y="960120"/>
-            <a:ext cx="6949440" cy="4636008"/>
+            <a:off x="0" y="0"/>
+            <a:ext cx="12191695" cy="6858000"/>
           </a:xfrm>
           <a:prstGeom prst="rect">
             <a:avLst/>
@@ -13680,14 +14102,14 @@
       </p:pic>
       <p:sp>
         <p:nvSpPr>
-          <p:cNvPr id="10" name="Text 7"/>
-          <p:cNvSpPr txBox="1"/>
-          <p:nvPr/>
-        </p:nvSpPr>
-        <p:spPr>
-          <a:xfrm>
-            <a:off x="4709160" y="5669280"/>
-            <a:ext cx="6949440" cy="219456"/>
+          <p:cNvPr id="3" name="Text 0"/>
+          <p:cNvSpPr txBox="1"/>
+          <p:nvPr/>
+        </p:nvSpPr>
+        <p:spPr>
+          <a:xfrm>
+            <a:off x="219456" y="164592"/>
+            <a:ext cx="6400800" cy="219456"/>
           </a:xfrm>
           <a:prstGeom prst="rect">
             <a:avLst/>
@@ -13703,23 +14125,101 @@
               <a:buNone/>
             </a:pPr>
             <a:r>
-              <a:rPr lang="en-US" sz="800" dirty="0">
-                <a:solidFill>
-                  <a:srgbClr val="8A8A8A"/>
-                </a:solidFill>
-                <a:latin typeface="Arial" pitchFamily="34" charset="0"/>
-                <a:ea typeface="Arial" pitchFamily="34" charset="-122"/>
-                <a:cs typeface="Arial" pitchFamily="34" charset="-120"/>
-              </a:rPr>
-              <a:t>Генезис формы: от силуэта Заилийского Алатау к лентам перекрытий.</a:t>
-            </a:r>
-            <a:endParaRPr lang="en-US" sz="800" dirty="0"/>
+              <a:rPr lang="en-US" sz="950" b="1" spc="60" kern="0" dirty="0">
+                <a:solidFill>
+                  <a:srgbClr val="111111"/>
+                </a:solidFill>
+                <a:latin typeface="Arial" pitchFamily="34" charset="0"/>
+                <a:ea typeface="Arial" pitchFamily="34" charset="-122"/>
+                <a:cs typeface="Arial" pitchFamily="34" charset="-120"/>
+              </a:rPr>
+              <a:t>ОБЩЕСТВЕННЫЕ ПРОСТРАНСТВА</a:t>
+            </a:r>
+            <a:endParaRPr lang="en-US" sz="950" dirty="0"/>
+          </a:p>
+        </p:txBody>
+      </p:sp>
+      <p:sp>
+        <p:nvSpPr>
+          <p:cNvPr id="4" name="Text 1"/>
+          <p:cNvSpPr txBox="1"/>
+          <p:nvPr/>
+        </p:nvSpPr>
+        <p:spPr>
+          <a:xfrm>
+            <a:off x="219456" y="374904"/>
+            <a:ext cx="6400800" cy="201168"/>
+          </a:xfrm>
+          <a:prstGeom prst="rect">
+            <a:avLst/>
+          </a:prstGeom>
+          <a:noFill/>
+          <a:ln/>
+        </p:spPr>
+        <p:txBody>
+          <a:bodyPr wrap="square" lIns="0" tIns="0" rIns="0" bIns="0" rtlCol="0" anchor="ctr"/>
+          <a:lstStyle/>
+          <a:p>
+            <a:pPr indent="0" marL="0">
+              <a:buNone/>
+            </a:pPr>
+            <a:r>
+              <a:rPr lang="en-US" sz="900" dirty="0">
+                <a:solidFill>
+                  <a:srgbClr val="111111"/>
+                </a:solidFill>
+                <a:latin typeface="Arial" pitchFamily="34" charset="0"/>
+                <a:ea typeface="Arial" pitchFamily="34" charset="-122"/>
+                <a:cs typeface="Arial" pitchFamily="34" charset="-120"/>
+              </a:rPr>
+              <a:t>Терраса верхнего яруса</a:t>
+            </a:r>
+            <a:endParaRPr lang="en-US" sz="900" dirty="0"/>
+          </a:p>
+        </p:txBody>
+      </p:sp>
+      <p:sp>
+        <p:nvSpPr>
+          <p:cNvPr id="5" name="Text 2"/>
+          <p:cNvSpPr txBox="1"/>
+          <p:nvPr/>
+        </p:nvSpPr>
+        <p:spPr>
+          <a:xfrm>
+            <a:off x="5571439" y="164592"/>
+            <a:ext cx="6400800" cy="219456"/>
+          </a:xfrm>
+          <a:prstGeom prst="rect">
+            <a:avLst/>
+          </a:prstGeom>
+          <a:noFill/>
+          <a:ln/>
+        </p:spPr>
+        <p:txBody>
+          <a:bodyPr wrap="square" lIns="0" tIns="0" rIns="0" bIns="0" rtlCol="0" anchor="ctr"/>
+          <a:lstStyle/>
+          <a:p>
+            <a:pPr algn="r" indent="0" marL="0">
+              <a:buNone/>
+            </a:pPr>
+            <a:r>
+              <a:rPr lang="en-US" sz="950" spc="60" kern="0" dirty="0">
+                <a:solidFill>
+                  <a:srgbClr val="FF4D23"/>
+                </a:solidFill>
+                <a:latin typeface="Arial" pitchFamily="34" charset="0"/>
+                <a:ea typeface="Arial" pitchFamily="34" charset="-122"/>
+                <a:cs typeface="Arial" pitchFamily="34" charset="-120"/>
+              </a:rPr>
+              <a:t>ВИЗУАЛИЗАЦИИ</a:t>
+            </a:r>
+            <a:endParaRPr lang="en-US" sz="950" dirty="0"/>
           </a:p>
         </p:txBody>
       </p:sp>
       <p:pic>
         <p:nvPicPr>
-          <p:cNvPr id="11" name="Image 1" descr="/tmp/claude-0/-home-user-most/9fc1ec31-3c64-5a82-aadb-ddb23fff6e53/scratchpad/assets/logo_most.png">    </p:cNvPr>
+          <p:cNvPr id="6" name="Image 1" descr="/tmp/claude-0/-home-user-most/9fc1ec31-3c64-5a82-aadb-ddb23fff6e53/scratchpad/assets/logo_most.png">    </p:cNvPr>
           <p:cNvPicPr>
             <a:picLocks noChangeAspect="1"/>
           </p:cNvPicPr>
@@ -13743,7 +14243,7 @@
       </p:pic>
       <p:sp>
         <p:nvSpPr>
-          <p:cNvPr id="12" name="Text 8"/>
+          <p:cNvPr id="7" name="Text 3"/>
           <p:cNvSpPr txBox="1"/>
           <p:nvPr/>
         </p:nvSpPr>
@@ -13768,7 +14268,7 @@
             <a:r>
               <a:rPr lang="en-US" sz="800" dirty="0">
                 <a:solidFill>
-                  <a:srgbClr val="8A8A8A"/>
+                  <a:srgbClr val="FFFFFF"/>
                 </a:solidFill>
                 <a:latin typeface="Arial" pitchFamily="34" charset="0"/>
                 <a:ea typeface="Arial" pitchFamily="34" charset="-122"/>
